--- a/modules/module-01-industrial-demand-generation/delivery-pack/slide-decks/exports/lesson-01-industrial-demand-generation-foundations.pptx
+++ b/modules/module-01-industrial-demand-generation/delivery-pack/slide-decks/exports/lesson-01-industrial-demand-generation-foundations.pptx
@@ -2,27 +2,27 @@
 <file path=ppt/presentation.xml><?xml version="1.0" encoding="utf-8"?>
 <p:presentation xmlns:p="http://schemas.openxmlformats.org/presentationml/2006/main">
   <p:sldMasterIdLst>
-    <p:sldMasterId xmlns:r="http://schemas.openxmlformats.org/officeDocument/2006/relationships" id="2147483648" r:id="Rdfe1a359f3b4485b"/>
+    <p:sldMasterId xmlns:r="http://schemas.openxmlformats.org/officeDocument/2006/relationships" id="2147483648" r:id="R7442e6e0075c498a"/>
   </p:sldMasterIdLst>
   <p:notesMasterIdLst>
-    <p:notesMasterId xmlns:r="http://schemas.openxmlformats.org/officeDocument/2006/relationships" r:id="Rbdde7f55384a45c8"/>
+    <p:notesMasterId xmlns:r="http://schemas.openxmlformats.org/officeDocument/2006/relationships" r:id="R049e3de1d76b4b45"/>
   </p:notesMasterIdLst>
   <p:sldIdLst>
-    <p:sldId xmlns:r="http://schemas.openxmlformats.org/officeDocument/2006/relationships" id="256" r:id="R3bca7832cd414444"/>
-    <p:sldId xmlns:r="http://schemas.openxmlformats.org/officeDocument/2006/relationships" id="257" r:id="Rea305b65f0a145a4"/>
-    <p:sldId xmlns:r="http://schemas.openxmlformats.org/officeDocument/2006/relationships" id="258" r:id="R2fec4689e5c745cb"/>
-    <p:sldId xmlns:r="http://schemas.openxmlformats.org/officeDocument/2006/relationships" id="259" r:id="Ref91e01cc82e4064"/>
-    <p:sldId xmlns:r="http://schemas.openxmlformats.org/officeDocument/2006/relationships" id="260" r:id="R66e7e25836954e66"/>
-    <p:sldId xmlns:r="http://schemas.openxmlformats.org/officeDocument/2006/relationships" id="261" r:id="Rc652d076bb2747e3"/>
-    <p:sldId xmlns:r="http://schemas.openxmlformats.org/officeDocument/2006/relationships" id="262" r:id="R35b8fc49b5f94398"/>
-    <p:sldId xmlns:r="http://schemas.openxmlformats.org/officeDocument/2006/relationships" id="263" r:id="Rf91ad936d3a743cf"/>
-    <p:sldId xmlns:r="http://schemas.openxmlformats.org/officeDocument/2006/relationships" id="264" r:id="R967345feb2ca450e"/>
-    <p:sldId xmlns:r="http://schemas.openxmlformats.org/officeDocument/2006/relationships" id="265" r:id="Ra01f4688547c437c"/>
-    <p:sldId xmlns:r="http://schemas.openxmlformats.org/officeDocument/2006/relationships" id="266" r:id="Rf8e9593302404bf1"/>
-    <p:sldId xmlns:r="http://schemas.openxmlformats.org/officeDocument/2006/relationships" id="267" r:id="R6150d1ce98894df4"/>
-    <p:sldId xmlns:r="http://schemas.openxmlformats.org/officeDocument/2006/relationships" id="268" r:id="R533d548bf1d241ec"/>
-    <p:sldId xmlns:r="http://schemas.openxmlformats.org/officeDocument/2006/relationships" id="269" r:id="Rbc4a987b845b425b"/>
-    <p:sldId xmlns:r="http://schemas.openxmlformats.org/officeDocument/2006/relationships" id="270" r:id="Ra5e260242b154b6e"/>
+    <p:sldId xmlns:r="http://schemas.openxmlformats.org/officeDocument/2006/relationships" id="256" r:id="Rd09fb774993e4b26"/>
+    <p:sldId xmlns:r="http://schemas.openxmlformats.org/officeDocument/2006/relationships" id="257" r:id="R3626876743304701"/>
+    <p:sldId xmlns:r="http://schemas.openxmlformats.org/officeDocument/2006/relationships" id="258" r:id="R4eb8aa9aa19543f8"/>
+    <p:sldId xmlns:r="http://schemas.openxmlformats.org/officeDocument/2006/relationships" id="259" r:id="R4770e1944e834301"/>
+    <p:sldId xmlns:r="http://schemas.openxmlformats.org/officeDocument/2006/relationships" id="260" r:id="R791436807b914a6c"/>
+    <p:sldId xmlns:r="http://schemas.openxmlformats.org/officeDocument/2006/relationships" id="261" r:id="R8809aac55e8f4627"/>
+    <p:sldId xmlns:r="http://schemas.openxmlformats.org/officeDocument/2006/relationships" id="262" r:id="Rd61d5da74a70451a"/>
+    <p:sldId xmlns:r="http://schemas.openxmlformats.org/officeDocument/2006/relationships" id="263" r:id="R2dd4571160cd4fa0"/>
+    <p:sldId xmlns:r="http://schemas.openxmlformats.org/officeDocument/2006/relationships" id="264" r:id="R0a7654b643a14eb1"/>
+    <p:sldId xmlns:r="http://schemas.openxmlformats.org/officeDocument/2006/relationships" id="265" r:id="Rbc2269261fcd4b3b"/>
+    <p:sldId xmlns:r="http://schemas.openxmlformats.org/officeDocument/2006/relationships" id="266" r:id="R87b6935c966b4d97"/>
+    <p:sldId xmlns:r="http://schemas.openxmlformats.org/officeDocument/2006/relationships" id="267" r:id="R281b885b74b04ff1"/>
+    <p:sldId xmlns:r="http://schemas.openxmlformats.org/officeDocument/2006/relationships" id="268" r:id="R70882e71b51549d4"/>
+    <p:sldId xmlns:r="http://schemas.openxmlformats.org/officeDocument/2006/relationships" id="269" r:id="Ra3b9f0fcb468471b"/>
+    <p:sldId xmlns:r="http://schemas.openxmlformats.org/officeDocument/2006/relationships" id="270" r:id="R395a303a98774832"/>
   </p:sldIdLst>
   <p:sldSz cx="12192000" cy="6858000"/>
   <p:notesSz cx="6858000" cy="9144000"/>
@@ -1493,7 +1493,7 @@
   </p:cSld>
   <p:clrMap bg1="lt1" tx1="dk1" bg2="lt2" tx2="dk2" accent1="accent1" accent2="accent2" accent3="accent3" accent4="accent4" accent5="accent5" accent6="accent6" hlink="hlink" folHlink="folHlink"/>
   <p:sldLayoutIdLst>
-    <p:sldLayoutId xmlns:r="http://schemas.openxmlformats.org/officeDocument/2006/relationships" id="2147483649" r:id="Rfbd828a5fe674338"/>
+    <p:sldLayoutId xmlns:r="http://schemas.openxmlformats.org/officeDocument/2006/relationships" id="2147483649" r:id="R6980ce699b1a4fa1"/>
   </p:sldLayoutIdLst>
   <p:txStyles>
     <p:titleStyle>
@@ -1792,7 +1792,7 @@
           <p:cNvPr id="1" name="">
             <a:extLst xmlns:a="http://schemas.openxmlformats.org/drawingml/2006/main">
               <a:ext uri="{FF2B5EF4-FFF2-40B4-BE49-F238E27FC236}">
-                <a16:creationId xmlns:a16="http://schemas.microsoft.com/office/drawing/2014/main" id="{6376D487-2734-4D3D-BDE0-A13449442647}"/>
+                <a16:creationId xmlns:a16="http://schemas.microsoft.com/office/drawing/2014/main" id="{206C33F0-F7AF-4CC0-891F-E6278CB4787E}"/>
               </a:ext>
             </a:extLst>
           </p:cNvPr>
@@ -1827,7 +1827,7 @@
           <p:cNvPr id="2" name="">
             <a:extLst xmlns:a="http://schemas.openxmlformats.org/drawingml/2006/main">
               <a:ext uri="{FF2B5EF4-FFF2-40B4-BE49-F238E27FC236}">
-                <a16:creationId xmlns:a16="http://schemas.microsoft.com/office/drawing/2014/main" id="{9FB22765-7BA8-43F5-95A1-BC8D9750C31C}"/>
+                <a16:creationId xmlns:a16="http://schemas.microsoft.com/office/drawing/2014/main" id="{BB69C71D-B844-45A7-919F-CA080F3B359B}"/>
               </a:ext>
             </a:extLst>
           </p:cNvPr>
@@ -1862,7 +1862,7 @@
           <p:cNvPr id="3" name="">
             <a:extLst xmlns:a="http://schemas.openxmlformats.org/drawingml/2006/main">
               <a:ext uri="{FF2B5EF4-FFF2-40B4-BE49-F238E27FC236}">
-                <a16:creationId xmlns:a16="http://schemas.microsoft.com/office/drawing/2014/main" id="{385FDBAC-1D21-40D3-980D-53531BC164FF}"/>
+                <a16:creationId xmlns:a16="http://schemas.microsoft.com/office/drawing/2014/main" id="{16B9F907-861E-486B-A86D-B44083EF997D}"/>
               </a:ext>
             </a:extLst>
           </p:cNvPr>
@@ -1897,7 +1897,7 @@
           <p:cNvPr id="4" name="kicker-01-marker">
             <a:extLst xmlns:a="http://schemas.openxmlformats.org/drawingml/2006/main">
               <a:ext uri="{FF2B5EF4-FFF2-40B4-BE49-F238E27FC236}">
-                <a16:creationId xmlns:a16="http://schemas.microsoft.com/office/drawing/2014/main" id="{A855DD6A-D72F-444C-81A3-74BCA0D512B8}"/>
+                <a16:creationId xmlns:a16="http://schemas.microsoft.com/office/drawing/2014/main" id="{A7703AD0-0575-4E96-9110-C1266CE9B07C}"/>
               </a:ext>
             </a:extLst>
           </p:cNvPr>
@@ -1932,7 +1932,7 @@
           <p:cNvPr id="5" name="kicker-01-label">
             <a:extLst xmlns:a="http://schemas.openxmlformats.org/drawingml/2006/main">
               <a:ext uri="{FF2B5EF4-FFF2-40B4-BE49-F238E27FC236}">
-                <a16:creationId xmlns:a16="http://schemas.microsoft.com/office/drawing/2014/main" id="{A347D9DB-F146-4C72-81E6-1AE66C14F1A4}"/>
+                <a16:creationId xmlns:a16="http://schemas.microsoft.com/office/drawing/2014/main" id="{E3BF4619-7FE1-4E22-BDE5-8DB27A2B5466}"/>
               </a:ext>
             </a:extLst>
           </p:cNvPr>
@@ -1996,7 +1996,7 @@
           <p:cNvPr id="6" name="">
             <a:extLst xmlns:a="http://schemas.openxmlformats.org/drawingml/2006/main">
               <a:ext uri="{FF2B5EF4-FFF2-40B4-BE49-F238E27FC236}">
-                <a16:creationId xmlns:a16="http://schemas.microsoft.com/office/drawing/2014/main" id="{3712D241-BCC9-4C7C-9F11-6375E8D1A3EA}"/>
+                <a16:creationId xmlns:a16="http://schemas.microsoft.com/office/drawing/2014/main" id="{E9DA3073-86A4-4B28-9E59-76FF392E779E}"/>
               </a:ext>
             </a:extLst>
           </p:cNvPr>
@@ -2060,7 +2060,7 @@
           <p:cNvPr id="7" name="">
             <a:extLst xmlns:a="http://schemas.openxmlformats.org/drawingml/2006/main">
               <a:ext uri="{FF2B5EF4-FFF2-40B4-BE49-F238E27FC236}">
-                <a16:creationId xmlns:a16="http://schemas.microsoft.com/office/drawing/2014/main" id="{BC815B8A-E365-49F3-B09F-B8B0EFD909BC}"/>
+                <a16:creationId xmlns:a16="http://schemas.microsoft.com/office/drawing/2014/main" id="{85FE7412-F496-4696-B6EE-73A15C35ADE8}"/>
               </a:ext>
             </a:extLst>
           </p:cNvPr>
@@ -2124,7 +2124,7 @@
           <p:cNvPr id="8" name="">
             <a:extLst xmlns:a="http://schemas.openxmlformats.org/drawingml/2006/main">
               <a:ext uri="{FF2B5EF4-FFF2-40B4-BE49-F238E27FC236}">
-                <a16:creationId xmlns:a16="http://schemas.microsoft.com/office/drawing/2014/main" id="{7B408C97-9C28-49CA-97F6-499080AE3688}"/>
+                <a16:creationId xmlns:a16="http://schemas.microsoft.com/office/drawing/2014/main" id="{3BB8595E-41EB-434D-B944-6FA693F74924}"/>
               </a:ext>
             </a:extLst>
           </p:cNvPr>
@@ -2157,7 +2157,7 @@
           <p:cNvPr id="9" name="">
             <a:extLst xmlns:a="http://schemas.openxmlformats.org/drawingml/2006/main">
               <a:ext uri="{FF2B5EF4-FFF2-40B4-BE49-F238E27FC236}">
-                <a16:creationId xmlns:a16="http://schemas.microsoft.com/office/drawing/2014/main" id="{8A9E5075-966F-4165-B72D-A21A38E3733E}"/>
+                <a16:creationId xmlns:a16="http://schemas.microsoft.com/office/drawing/2014/main" id="{DF7BACD8-1ECF-4AEA-A40F-273EAB6DAB2D}"/>
               </a:ext>
             </a:extLst>
           </p:cNvPr>
@@ -2221,7 +2221,7 @@
           <p:cNvPr id="10" name="">
             <a:extLst xmlns:a="http://schemas.openxmlformats.org/drawingml/2006/main">
               <a:ext uri="{FF2B5EF4-FFF2-40B4-BE49-F238E27FC236}">
-                <a16:creationId xmlns:a16="http://schemas.microsoft.com/office/drawing/2014/main" id="{7B2EE9B2-3244-469A-8758-D78A0F4FE5CB}"/>
+                <a16:creationId xmlns:a16="http://schemas.microsoft.com/office/drawing/2014/main" id="{506799D4-925B-4A8E-9B68-413CF3D65612}"/>
               </a:ext>
             </a:extLst>
           </p:cNvPr>
@@ -2254,7 +2254,7 @@
           <p:cNvPr id="11" name="">
             <a:extLst xmlns:a="http://schemas.openxmlformats.org/drawingml/2006/main">
               <a:ext uri="{FF2B5EF4-FFF2-40B4-BE49-F238E27FC236}">
-                <a16:creationId xmlns:a16="http://schemas.microsoft.com/office/drawing/2014/main" id="{2A9B3BC5-B947-4AF4-B219-599994631033}"/>
+                <a16:creationId xmlns:a16="http://schemas.microsoft.com/office/drawing/2014/main" id="{973922AA-A523-4C03-9B0F-3F12722E6319}"/>
               </a:ext>
             </a:extLst>
           </p:cNvPr>
@@ -2318,7 +2318,7 @@
           <p:cNvPr id="12" name="">
             <a:extLst xmlns:a="http://schemas.openxmlformats.org/drawingml/2006/main">
               <a:ext uri="{FF2B5EF4-FFF2-40B4-BE49-F238E27FC236}">
-                <a16:creationId xmlns:a16="http://schemas.microsoft.com/office/drawing/2014/main" id="{9CB09A72-CA6C-43EA-8498-135363B5C4A2}"/>
+                <a16:creationId xmlns:a16="http://schemas.microsoft.com/office/drawing/2014/main" id="{6362B72F-B7B6-47F6-A7CA-CB523446D950}"/>
               </a:ext>
             </a:extLst>
           </p:cNvPr>
@@ -2351,7 +2351,7 @@
           <p:cNvPr id="13" name="">
             <a:extLst xmlns:a="http://schemas.openxmlformats.org/drawingml/2006/main">
               <a:ext uri="{FF2B5EF4-FFF2-40B4-BE49-F238E27FC236}">
-                <a16:creationId xmlns:a16="http://schemas.microsoft.com/office/drawing/2014/main" id="{B6E3FA44-E229-41C1-A127-A0667D2DA59B}"/>
+                <a16:creationId xmlns:a16="http://schemas.microsoft.com/office/drawing/2014/main" id="{76314CE3-8513-4274-9102-C363BCB8EB61}"/>
               </a:ext>
             </a:extLst>
           </p:cNvPr>
@@ -2415,7 +2415,7 @@
           <p:cNvPr id="14" name="">
             <a:extLst xmlns:a="http://schemas.openxmlformats.org/drawingml/2006/main">
               <a:ext uri="{FF2B5EF4-FFF2-40B4-BE49-F238E27FC236}">
-                <a16:creationId xmlns:a16="http://schemas.microsoft.com/office/drawing/2014/main" id="{2267C7D1-B037-4BFB-A739-7A2F56377C46}"/>
+                <a16:creationId xmlns:a16="http://schemas.microsoft.com/office/drawing/2014/main" id="{BE5CD074-0E6A-4E05-A498-3D830FD077BD}"/>
               </a:ext>
             </a:extLst>
           </p:cNvPr>
@@ -2448,7 +2448,7 @@
           <p:cNvPr id="15" name="">
             <a:extLst xmlns:a="http://schemas.openxmlformats.org/drawingml/2006/main">
               <a:ext uri="{FF2B5EF4-FFF2-40B4-BE49-F238E27FC236}">
-                <a16:creationId xmlns:a16="http://schemas.microsoft.com/office/drawing/2014/main" id="{466C46C1-DC3A-44E3-8CB7-790A55F9F646}"/>
+                <a16:creationId xmlns:a16="http://schemas.microsoft.com/office/drawing/2014/main" id="{913AA352-E24B-423E-AC5B-2361C43CBBF6}"/>
               </a:ext>
             </a:extLst>
           </p:cNvPr>
@@ -2483,7 +2483,7 @@
           <p:cNvPr id="16" name="">
             <a:extLst xmlns:a="http://schemas.openxmlformats.org/drawingml/2006/main">
               <a:ext uri="{FF2B5EF4-FFF2-40B4-BE49-F238E27FC236}">
-                <a16:creationId xmlns:a16="http://schemas.microsoft.com/office/drawing/2014/main" id="{43DB79B3-182C-4F6B-ABFB-85D4ADD89EA6}"/>
+                <a16:creationId xmlns:a16="http://schemas.microsoft.com/office/drawing/2014/main" id="{A482E35D-FDB2-42E7-99BF-F4107EA95800}"/>
               </a:ext>
             </a:extLst>
           </p:cNvPr>
@@ -2547,7 +2547,7 @@
           <p:cNvPr id="17" name="">
             <a:extLst xmlns:a="http://schemas.openxmlformats.org/drawingml/2006/main">
               <a:ext uri="{FF2B5EF4-FFF2-40B4-BE49-F238E27FC236}">
-                <a16:creationId xmlns:a16="http://schemas.microsoft.com/office/drawing/2014/main" id="{426F09F3-5737-4508-8C45-613DF2F1D650}"/>
+                <a16:creationId xmlns:a16="http://schemas.microsoft.com/office/drawing/2014/main" id="{7224F722-77AA-4124-819D-6FCB83E30657}"/>
               </a:ext>
             </a:extLst>
           </p:cNvPr>
@@ -2611,7 +2611,7 @@
           <p:cNvPr id="18" name="">
             <a:extLst xmlns:a="http://schemas.openxmlformats.org/drawingml/2006/main">
               <a:ext uri="{FF2B5EF4-FFF2-40B4-BE49-F238E27FC236}">
-                <a16:creationId xmlns:a16="http://schemas.microsoft.com/office/drawing/2014/main" id="{F4E8269C-AF82-4315-B2AB-57CBDA346AF7}"/>
+                <a16:creationId xmlns:a16="http://schemas.microsoft.com/office/drawing/2014/main" id="{A6F30598-9D43-47A4-A6C5-55381D001BA1}"/>
               </a:ext>
             </a:extLst>
           </p:cNvPr>
@@ -2646,7 +2646,7 @@
           <p:cNvPr id="19" name="">
             <a:extLst xmlns:a="http://schemas.openxmlformats.org/drawingml/2006/main">
               <a:ext uri="{FF2B5EF4-FFF2-40B4-BE49-F238E27FC236}">
-                <a16:creationId xmlns:a16="http://schemas.microsoft.com/office/drawing/2014/main" id="{775BA811-2A15-4535-B80A-80371E79E57E}"/>
+                <a16:creationId xmlns:a16="http://schemas.microsoft.com/office/drawing/2014/main" id="{0CF3E4FB-F8A4-488A-B718-0EE61D50A089}"/>
               </a:ext>
             </a:extLst>
           </p:cNvPr>
@@ -2710,7 +2710,7 @@
           <p:cNvPr id="20" name="">
             <a:extLst xmlns:a="http://schemas.openxmlformats.org/drawingml/2006/main">
               <a:ext uri="{FF2B5EF4-FFF2-40B4-BE49-F238E27FC236}">
-                <a16:creationId xmlns:a16="http://schemas.microsoft.com/office/drawing/2014/main" id="{7B686F34-E217-4AF6-9754-D4A412BA4164}"/>
+                <a16:creationId xmlns:a16="http://schemas.microsoft.com/office/drawing/2014/main" id="{7DF489D8-8C11-40A7-B7A8-A7EA26322170}"/>
               </a:ext>
             </a:extLst>
           </p:cNvPr>
@@ -2764,7 +2764,7 @@
                 <a:ea typeface="Aptos"/>
                 <a:cs typeface="Aptos"/>
               </a:rPr>
-              <a:t>Teach the operating decision, run the diagnostic, then force a usable artifact. The slide is a prompt, not the handout.</a:t>
+              <a:t>Teach the operating decision, run the diagnostic, then force a usable artifact. The slide is a teaching cue, not the handout.</a:t>
             </a:r>
           </a:p>
         </p:txBody>
@@ -2774,7 +2774,7 @@
           <p:cNvPr id="21" name="">
             <a:extLst xmlns:a="http://schemas.openxmlformats.org/drawingml/2006/main">
               <a:ext uri="{FF2B5EF4-FFF2-40B4-BE49-F238E27FC236}">
-                <a16:creationId xmlns:a16="http://schemas.microsoft.com/office/drawing/2014/main" id="{F4CB7588-5861-4E81-9413-8DCF9E2B7C0A}"/>
+                <a16:creationId xmlns:a16="http://schemas.microsoft.com/office/drawing/2014/main" id="{524F0ED4-D032-4391-BF25-FD9920A760D8}"/>
               </a:ext>
             </a:extLst>
           </p:cNvPr>
@@ -2809,7 +2809,7 @@
           <p:cNvPr id="22" name="">
             <a:extLst xmlns:a="http://schemas.openxmlformats.org/drawingml/2006/main">
               <a:ext uri="{FF2B5EF4-FFF2-40B4-BE49-F238E27FC236}">
-                <a16:creationId xmlns:a16="http://schemas.microsoft.com/office/drawing/2014/main" id="{4D909A1E-CBC3-4B7B-8469-5CBCEBBCFE46}"/>
+                <a16:creationId xmlns:a16="http://schemas.microsoft.com/office/drawing/2014/main" id="{30641985-9243-4707-877E-91D86A043AC8}"/>
               </a:ext>
             </a:extLst>
           </p:cNvPr>
@@ -2873,7 +2873,7 @@
           <p:cNvPr id="23" name="">
             <a:extLst xmlns:a="http://schemas.openxmlformats.org/drawingml/2006/main">
               <a:ext uri="{FF2B5EF4-FFF2-40B4-BE49-F238E27FC236}">
-                <a16:creationId xmlns:a16="http://schemas.microsoft.com/office/drawing/2014/main" id="{662FA923-EB3D-465E-8400-B62EEF99B3D9}"/>
+                <a16:creationId xmlns:a16="http://schemas.microsoft.com/office/drawing/2014/main" id="{61216955-D0D8-4B67-B7CE-8B266911144D}"/>
               </a:ext>
             </a:extLst>
           </p:cNvPr>
@@ -2937,7 +2937,7 @@
           <p:cNvPr id="24" name="">
             <a:extLst xmlns:a="http://schemas.openxmlformats.org/drawingml/2006/main">
               <a:ext uri="{FF2B5EF4-FFF2-40B4-BE49-F238E27FC236}">
-                <a16:creationId xmlns:a16="http://schemas.microsoft.com/office/drawing/2014/main" id="{6BCB3D8D-0BCC-4662-828C-896052A8A0EC}"/>
+                <a16:creationId xmlns:a16="http://schemas.microsoft.com/office/drawing/2014/main" id="{81C29B91-9BFD-4917-AF64-CEA7C5D9C5AB}"/>
               </a:ext>
             </a:extLst>
           </p:cNvPr>
@@ -2972,7 +2972,7 @@
           <p:cNvPr id="25" name="">
             <a:extLst xmlns:a="http://schemas.openxmlformats.org/drawingml/2006/main">
               <a:ext uri="{FF2B5EF4-FFF2-40B4-BE49-F238E27FC236}">
-                <a16:creationId xmlns:a16="http://schemas.microsoft.com/office/drawing/2014/main" id="{9C94E035-03BC-4133-B312-CEB8104DB970}"/>
+                <a16:creationId xmlns:a16="http://schemas.microsoft.com/office/drawing/2014/main" id="{408882A0-BB52-4102-80BA-171E7E3ED9A4}"/>
               </a:ext>
             </a:extLst>
           </p:cNvPr>
@@ -3036,7 +3036,7 @@
           <p:cNvPr id="26" name="">
             <a:extLst xmlns:a="http://schemas.openxmlformats.org/drawingml/2006/main">
               <a:ext uri="{FF2B5EF4-FFF2-40B4-BE49-F238E27FC236}">
-                <a16:creationId xmlns:a16="http://schemas.microsoft.com/office/drawing/2014/main" id="{9699E245-5904-49D2-B008-427D8310488C}"/>
+                <a16:creationId xmlns:a16="http://schemas.microsoft.com/office/drawing/2014/main" id="{3593CFC5-42D6-4311-9354-B8E913E3CE45}"/>
               </a:ext>
             </a:extLst>
           </p:cNvPr>
@@ -3100,7 +3100,7 @@
           <p:cNvPr id="27" name="">
             <a:extLst xmlns:a="http://schemas.openxmlformats.org/drawingml/2006/main">
               <a:ext uri="{FF2B5EF4-FFF2-40B4-BE49-F238E27FC236}">
-                <a16:creationId xmlns:a16="http://schemas.microsoft.com/office/drawing/2014/main" id="{EFD9662B-D2BC-498D-B98D-70B7FDD16234}"/>
+                <a16:creationId xmlns:a16="http://schemas.microsoft.com/office/drawing/2014/main" id="{A9D3913D-9498-43C2-B4C3-8140D7F300E5}"/>
               </a:ext>
             </a:extLst>
           </p:cNvPr>
@@ -3162,7 +3162,7 @@
     </p:spTree>
     <p:extLst>
       <p:ext uri="{BB962C8B-B14F-4D97-AF65-F5344CB8AC3E}">
-        <p14:creationId xmlns:p14="http://schemas.microsoft.com/office/powerpoint/2010/main" val="592028701"/>
+        <p14:creationId xmlns:p14="http://schemas.microsoft.com/office/powerpoint/2010/main" val="1645424627"/>
       </p:ext>
     </p:extLst>
   </p:cSld>
@@ -3186,7 +3186,7 @@
           <p:cNvPr id="1" name="">
             <a:extLst xmlns:a="http://schemas.openxmlformats.org/drawingml/2006/main">
               <a:ext uri="{FF2B5EF4-FFF2-40B4-BE49-F238E27FC236}">
-                <a16:creationId xmlns:a16="http://schemas.microsoft.com/office/drawing/2014/main" id="{8963EF42-D8D4-439D-A4D1-D3561B61D935}"/>
+                <a16:creationId xmlns:a16="http://schemas.microsoft.com/office/drawing/2014/main" id="{AB71FBB7-8594-491C-9D4B-72BFC607134B}"/>
               </a:ext>
             </a:extLst>
           </p:cNvPr>
@@ -3221,7 +3221,7 @@
           <p:cNvPr id="2" name="">
             <a:extLst xmlns:a="http://schemas.openxmlformats.org/drawingml/2006/main">
               <a:ext uri="{FF2B5EF4-FFF2-40B4-BE49-F238E27FC236}">
-                <a16:creationId xmlns:a16="http://schemas.microsoft.com/office/drawing/2014/main" id="{AC253C04-95EF-4696-8EC4-72883DD46587}"/>
+                <a16:creationId xmlns:a16="http://schemas.microsoft.com/office/drawing/2014/main" id="{8BD01D30-0A18-4F7A-A0CE-13863BEB76C4}"/>
               </a:ext>
             </a:extLst>
           </p:cNvPr>
@@ -3256,7 +3256,7 @@
           <p:cNvPr id="3" name="">
             <a:extLst xmlns:a="http://schemas.openxmlformats.org/drawingml/2006/main">
               <a:ext uri="{FF2B5EF4-FFF2-40B4-BE49-F238E27FC236}">
-                <a16:creationId xmlns:a16="http://schemas.microsoft.com/office/drawing/2014/main" id="{23B7F5BB-C650-4B78-8992-4B59CA37FAEF}"/>
+                <a16:creationId xmlns:a16="http://schemas.microsoft.com/office/drawing/2014/main" id="{EB185292-0CEC-4A23-8DDA-0B4E96D4AF99}"/>
               </a:ext>
             </a:extLst>
           </p:cNvPr>
@@ -3291,7 +3291,7 @@
           <p:cNvPr id="4" name="kicker-01-marker">
             <a:extLst xmlns:a="http://schemas.openxmlformats.org/drawingml/2006/main">
               <a:ext uri="{FF2B5EF4-FFF2-40B4-BE49-F238E27FC236}">
-                <a16:creationId xmlns:a16="http://schemas.microsoft.com/office/drawing/2014/main" id="{26824954-DFCE-430A-80B0-DAD9EA015E2D}"/>
+                <a16:creationId xmlns:a16="http://schemas.microsoft.com/office/drawing/2014/main" id="{5800650B-D6D2-4CF1-84C1-0F5415570FB9}"/>
               </a:ext>
             </a:extLst>
           </p:cNvPr>
@@ -3326,7 +3326,7 @@
           <p:cNvPr id="5" name="kicker-01-label">
             <a:extLst xmlns:a="http://schemas.openxmlformats.org/drawingml/2006/main">
               <a:ext uri="{FF2B5EF4-FFF2-40B4-BE49-F238E27FC236}">
-                <a16:creationId xmlns:a16="http://schemas.microsoft.com/office/drawing/2014/main" id="{68B48D2B-DDDE-492E-84BB-4A982DE7E077}"/>
+                <a16:creationId xmlns:a16="http://schemas.microsoft.com/office/drawing/2014/main" id="{E61060B3-EEC8-4E5E-819B-CAE8516882DA}"/>
               </a:ext>
             </a:extLst>
           </p:cNvPr>
@@ -3380,7 +3380,7 @@
                 <a:ea typeface="Aptos"/>
                 <a:cs typeface="Aptos"/>
               </a:rPr>
-              <a:t>MODULE 1 / LESSON 01 / AI-ASSISTED EXERCISE</a:t>
+              <a:t>MODULE 1 / LESSON 01 / STRUCTURED DRAFTING DRILL</a:t>
             </a:r>
           </a:p>
         </p:txBody>
@@ -3390,7 +3390,7 @@
           <p:cNvPr id="6" name="">
             <a:extLst xmlns:a="http://schemas.openxmlformats.org/drawingml/2006/main">
               <a:ext uri="{FF2B5EF4-FFF2-40B4-BE49-F238E27FC236}">
-                <a16:creationId xmlns:a16="http://schemas.microsoft.com/office/drawing/2014/main" id="{BBE170CC-337C-468A-B6C0-3F1197681BF6}"/>
+                <a16:creationId xmlns:a16="http://schemas.microsoft.com/office/drawing/2014/main" id="{DA41C5C8-C005-48A9-85D0-B54A0BA134C4}"/>
               </a:ext>
             </a:extLst>
           </p:cNvPr>
@@ -3444,7 +3444,7 @@
                 <a:ea typeface="Aptos Display"/>
                 <a:cs typeface="Aptos Display"/>
               </a:rPr>
-              <a:t>Use AI to structure the attempt, then make humans responsible for judgment.</a:t>
+              <a:t>Structure the first draft before the room critiques it.</a:t>
             </a:r>
           </a:p>
         </p:txBody>
@@ -3454,7 +3454,7 @@
           <p:cNvPr id="7" name="">
             <a:extLst xmlns:a="http://schemas.openxmlformats.org/drawingml/2006/main">
               <a:ext uri="{FF2B5EF4-FFF2-40B4-BE49-F238E27FC236}">
-                <a16:creationId xmlns:a16="http://schemas.microsoft.com/office/drawing/2014/main" id="{03D96780-2B98-4B69-B95A-8E47A06BE7A8}"/>
+                <a16:creationId xmlns:a16="http://schemas.microsoft.com/office/drawing/2014/main" id="{5876BAB4-87C9-4A72-87F9-28CD8BF2A460}"/>
               </a:ext>
             </a:extLst>
           </p:cNvPr>
@@ -3508,7 +3508,7 @@
                 <a:ea typeface="Aptos"/>
                 <a:cs typeface="Aptos"/>
               </a:rPr>
-              <a:t>The prompt is constrained by source, assumptions, output standard, and human validation.</a:t>
+              <a:t>The brief is constrained by source evidence, assumptions, output standard, and validation.</a:t>
             </a:r>
           </a:p>
         </p:txBody>
@@ -3518,7 +3518,7 @@
           <p:cNvPr id="8" name="">
             <a:extLst xmlns:a="http://schemas.openxmlformats.org/drawingml/2006/main">
               <a:ext uri="{FF2B5EF4-FFF2-40B4-BE49-F238E27FC236}">
-                <a16:creationId xmlns:a16="http://schemas.microsoft.com/office/drawing/2014/main" id="{0398E9BB-534D-4C72-839D-41264E263A1B}"/>
+                <a16:creationId xmlns:a16="http://schemas.microsoft.com/office/drawing/2014/main" id="{F8669202-E92F-494B-BF81-10B7683FC7FE}"/>
               </a:ext>
             </a:extLst>
           </p:cNvPr>
@@ -3553,7 +3553,7 @@
           <p:cNvPr id="9" name="">
             <a:extLst xmlns:a="http://schemas.openxmlformats.org/drawingml/2006/main">
               <a:ext uri="{FF2B5EF4-FFF2-40B4-BE49-F238E27FC236}">
-                <a16:creationId xmlns:a16="http://schemas.microsoft.com/office/drawing/2014/main" id="{269D5AE6-E7D1-4BDB-ACD4-4FD5B5DF7FE3}"/>
+                <a16:creationId xmlns:a16="http://schemas.microsoft.com/office/drawing/2014/main" id="{16E397A0-DF33-4F9D-B04A-F8736D097C72}"/>
               </a:ext>
             </a:extLst>
           </p:cNvPr>
@@ -3617,7 +3617,7 @@
           <p:cNvPr id="10" name="">
             <a:extLst xmlns:a="http://schemas.openxmlformats.org/drawingml/2006/main">
               <a:ext uri="{FF2B5EF4-FFF2-40B4-BE49-F238E27FC236}">
-                <a16:creationId xmlns:a16="http://schemas.microsoft.com/office/drawing/2014/main" id="{35CEE696-388A-442D-BBC4-CE05B7600DB0}"/>
+                <a16:creationId xmlns:a16="http://schemas.microsoft.com/office/drawing/2014/main" id="{7581D6C9-BB37-4AB6-80A8-BC361F4FA3F9}"/>
               </a:ext>
             </a:extLst>
           </p:cNvPr>
@@ -3681,7 +3681,7 @@
           <p:cNvPr id="11" name="">
             <a:extLst xmlns:a="http://schemas.openxmlformats.org/drawingml/2006/main">
               <a:ext uri="{FF2B5EF4-FFF2-40B4-BE49-F238E27FC236}">
-                <a16:creationId xmlns:a16="http://schemas.microsoft.com/office/drawing/2014/main" id="{FDE34EC3-4763-48B7-83AB-1565A3555688}"/>
+                <a16:creationId xmlns:a16="http://schemas.microsoft.com/office/drawing/2014/main" id="{3F5057C0-2974-4B98-9675-413B90F7E2EB}"/>
               </a:ext>
             </a:extLst>
           </p:cNvPr>
@@ -3745,19 +3745,19 @@
           <p:cNvPr id="12" name="">
             <a:extLst xmlns:a="http://schemas.openxmlformats.org/drawingml/2006/main">
               <a:ext uri="{FF2B5EF4-FFF2-40B4-BE49-F238E27FC236}">
-                <a16:creationId xmlns:a16="http://schemas.microsoft.com/office/drawing/2014/main" id="{F51C8A63-2760-40AB-948C-DBB3F17F1A6A}"/>
-              </a:ext>
-            </a:extLst>
-          </p:cNvPr>
-          <p:cNvSpPr>
-            <a:spLocks xmlns:a="http://schemas.openxmlformats.org/drawingml/2006/main" noGrp="1"/>
-          </p:cNvSpPr>
-          <p:nvPr/>
-        </p:nvSpPr>
-        <p:spPr>
-          <a:xfrm xmlns:a="http://schemas.openxmlformats.org/drawingml/2006/main">
-            <a:off x="228600" y="1809750"/>
-            <a:ext cx="11963400" cy="4591050"/>
+                <a16:creationId xmlns:a16="http://schemas.microsoft.com/office/drawing/2014/main" id="{203E8B3E-E6E8-4CA8-B3F8-9B05636FD530}"/>
+              </a:ext>
+            </a:extLst>
+          </p:cNvPr>
+          <p:cNvSpPr>
+            <a:spLocks xmlns:a="http://schemas.openxmlformats.org/drawingml/2006/main" noGrp="1"/>
+          </p:cNvSpPr>
+          <p:nvPr/>
+        </p:nvSpPr>
+        <p:spPr>
+          <a:xfrm xmlns:a="http://schemas.openxmlformats.org/drawingml/2006/main">
+            <a:off x="0" y="1809750"/>
+            <a:ext cx="12192000" cy="4591050"/>
           </a:xfrm>
           <a:prstGeom xmlns:a="http://schemas.openxmlformats.org/drawingml/2006/main" prst="rect">
             <a:avLst/>
@@ -3765,11 +3765,9 @@
           <a:solidFill xmlns:a="http://schemas.openxmlformats.org/drawingml/2006/main">
             <a:srgbClr val="F5F6F2"/>
           </a:solidFill>
-          <a:ln xmlns:a="http://schemas.openxmlformats.org/drawingml/2006/main" w="0">
-            <a:solidFill>
-              <a:srgbClr val="000000">
-                <a:alpha val="0"/>
-              </a:srgbClr>
+          <a:ln xmlns:a="http://schemas.openxmlformats.org/drawingml/2006/main" w="9525">
+            <a:solidFill>
+              <a:srgbClr val="F5F6F2"/>
             </a:solidFill>
             <a:prstDash val="solid"/>
           </a:ln>
@@ -3780,29 +3778,29 @@
           <p:cNvPr id="13" name="">
             <a:extLst xmlns:a="http://schemas.openxmlformats.org/drawingml/2006/main">
               <a:ext uri="{FF2B5EF4-FFF2-40B4-BE49-F238E27FC236}">
-                <a16:creationId xmlns:a16="http://schemas.microsoft.com/office/drawing/2014/main" id="{853C2192-2EDA-4FCF-9092-F14F8549FFEC}"/>
-              </a:ext>
-            </a:extLst>
-          </p:cNvPr>
-          <p:cNvSpPr>
-            <a:spLocks xmlns:a="http://schemas.openxmlformats.org/drawingml/2006/main" noGrp="1"/>
-          </p:cNvSpPr>
-          <p:nvPr/>
-        </p:nvSpPr>
-        <p:spPr>
-          <a:xfrm xmlns:a="http://schemas.openxmlformats.org/drawingml/2006/main">
-            <a:off x="228600" y="1809750"/>
-            <a:ext cx="6096000" cy="4591050"/>
-          </a:xfrm>
-          <a:prstGeom xmlns:a="http://schemas.openxmlformats.org/drawingml/2006/main" prst="rect">
-            <a:avLst/>
-          </a:prstGeom>
-          <a:solidFill xmlns:a="http://schemas.openxmlformats.org/drawingml/2006/main">
-            <a:srgbClr val="12232B"/>
+                <a16:creationId xmlns:a16="http://schemas.microsoft.com/office/drawing/2014/main" id="{5D7496F7-46A2-41C8-A16B-8E84420CB6E3}"/>
+              </a:ext>
+            </a:extLst>
+          </p:cNvPr>
+          <p:cNvSpPr>
+            <a:spLocks xmlns:a="http://schemas.openxmlformats.org/drawingml/2006/main" noGrp="1"/>
+          </p:cNvSpPr>
+          <p:nvPr/>
+        </p:nvSpPr>
+        <p:spPr>
+          <a:xfrm xmlns:a="http://schemas.openxmlformats.org/drawingml/2006/main">
+            <a:off x="514350" y="2038350"/>
+            <a:ext cx="5619750" cy="3181350"/>
+          </a:xfrm>
+          <a:prstGeom xmlns:a="http://schemas.openxmlformats.org/drawingml/2006/main" prst="rect">
+            <a:avLst/>
+          </a:prstGeom>
+          <a:solidFill xmlns:a="http://schemas.openxmlformats.org/drawingml/2006/main">
+            <a:srgbClr val="FFFFFF"/>
           </a:solidFill>
           <a:ln xmlns:a="http://schemas.openxmlformats.org/drawingml/2006/main" w="9525">
             <a:solidFill>
-              <a:srgbClr val="12232B"/>
+              <a:srgbClr val="D9DDD6"/>
             </a:solidFill>
             <a:prstDash val="solid"/>
           </a:ln>
@@ -3813,25 +3811,25 @@
           <p:cNvPr id="14" name="">
             <a:extLst xmlns:a="http://schemas.openxmlformats.org/drawingml/2006/main">
               <a:ext uri="{FF2B5EF4-FFF2-40B4-BE49-F238E27FC236}">
-                <a16:creationId xmlns:a16="http://schemas.microsoft.com/office/drawing/2014/main" id="{18471629-07FB-48A1-AF7B-9208DD8B2353}"/>
-              </a:ext>
-            </a:extLst>
-          </p:cNvPr>
-          <p:cNvSpPr>
-            <a:spLocks xmlns:a="http://schemas.openxmlformats.org/drawingml/2006/main" noGrp="1"/>
-          </p:cNvSpPr>
-          <p:nvPr/>
-        </p:nvSpPr>
-        <p:spPr>
-          <a:xfrm xmlns:a="http://schemas.openxmlformats.org/drawingml/2006/main">
-            <a:off x="609600" y="2266950"/>
+                <a16:creationId xmlns:a16="http://schemas.microsoft.com/office/drawing/2014/main" id="{F854493E-377E-49C2-90E1-D7FDA1B9195E}"/>
+              </a:ext>
+            </a:extLst>
+          </p:cNvPr>
+          <p:cNvSpPr>
+            <a:spLocks xmlns:a="http://schemas.openxmlformats.org/drawingml/2006/main" noGrp="1"/>
+          </p:cNvSpPr>
+          <p:nvPr/>
+        </p:nvSpPr>
+        <p:spPr>
+          <a:xfrm xmlns:a="http://schemas.openxmlformats.org/drawingml/2006/main">
+            <a:off x="819150" y="2419350"/>
             <a:ext cx="266700" cy="19050"/>
           </a:xfrm>
           <a:prstGeom xmlns:a="http://schemas.openxmlformats.org/drawingml/2006/main" prst="rect">
             <a:avLst/>
           </a:prstGeom>
           <a:solidFill xmlns:a="http://schemas.openxmlformats.org/drawingml/2006/main">
-            <a:srgbClr val="B7953B"/>
+            <a:srgbClr val="A85D2A"/>
           </a:solidFill>
           <a:ln xmlns:a="http://schemas.openxmlformats.org/drawingml/2006/main" w="0">
             <a:solidFill>
@@ -3848,18 +3846,18 @@
           <p:cNvPr id="15" name="">
             <a:extLst xmlns:a="http://schemas.openxmlformats.org/drawingml/2006/main">
               <a:ext uri="{FF2B5EF4-FFF2-40B4-BE49-F238E27FC236}">
-                <a16:creationId xmlns:a16="http://schemas.microsoft.com/office/drawing/2014/main" id="{CD95EB33-4465-4C20-B468-DDE5C1000334}"/>
-              </a:ext>
-            </a:extLst>
-          </p:cNvPr>
-          <p:cNvSpPr>
-            <a:spLocks xmlns:a="http://schemas.openxmlformats.org/drawingml/2006/main" noGrp="1"/>
-          </p:cNvSpPr>
-          <p:nvPr/>
-        </p:nvSpPr>
-        <p:spPr>
-          <a:xfrm xmlns:a="http://schemas.openxmlformats.org/drawingml/2006/main">
-            <a:off x="971550" y="2190750"/>
+                <a16:creationId xmlns:a16="http://schemas.microsoft.com/office/drawing/2014/main" id="{FD2F9276-4B22-43AA-89C0-02E2B2E823CF}"/>
+              </a:ext>
+            </a:extLst>
+          </p:cNvPr>
+          <p:cNvSpPr>
+            <a:spLocks xmlns:a="http://schemas.openxmlformats.org/drawingml/2006/main" noGrp="1"/>
+          </p:cNvSpPr>
+          <p:nvPr/>
+        </p:nvSpPr>
+        <p:spPr>
+          <a:xfrm xmlns:a="http://schemas.openxmlformats.org/drawingml/2006/main">
+            <a:off x="1181100" y="2343150"/>
             <a:ext cx="2476500" cy="171450"/>
           </a:xfrm>
           <a:prstGeom xmlns:a="http://schemas.openxmlformats.org/drawingml/2006/main" prst="rect">
@@ -3902,7 +3900,7 @@
                 <a:ea typeface="Aptos"/>
                 <a:cs typeface="Aptos"/>
               </a:rPr>
-              <a:t>PROMPT TO GIVE AI</a:t>
+              <a:t>DRAFTING BRIEF</a:t>
             </a:r>
           </a:p>
         </p:txBody>
@@ -3912,19 +3910,19 @@
           <p:cNvPr id="16" name="">
             <a:extLst xmlns:a="http://schemas.openxmlformats.org/drawingml/2006/main">
               <a:ext uri="{FF2B5EF4-FFF2-40B4-BE49-F238E27FC236}">
-                <a16:creationId xmlns:a16="http://schemas.microsoft.com/office/drawing/2014/main" id="{129B7E89-529C-44F1-A141-06CB1CA182F9}"/>
-              </a:ext>
-            </a:extLst>
-          </p:cNvPr>
-          <p:cNvSpPr>
-            <a:spLocks xmlns:a="http://schemas.openxmlformats.org/drawingml/2006/main" noGrp="1"/>
-          </p:cNvSpPr>
-          <p:nvPr/>
-        </p:nvSpPr>
-        <p:spPr>
-          <a:xfrm xmlns:a="http://schemas.openxmlformats.org/drawingml/2006/main">
-            <a:off x="609600" y="2647950"/>
-            <a:ext cx="5048250" cy="2190750"/>
+                <a16:creationId xmlns:a16="http://schemas.microsoft.com/office/drawing/2014/main" id="{D1A0FDCD-1B94-425B-99F8-DEF28315136E}"/>
+              </a:ext>
+            </a:extLst>
+          </p:cNvPr>
+          <p:cNvSpPr>
+            <a:spLocks xmlns:a="http://schemas.openxmlformats.org/drawingml/2006/main" noGrp="1"/>
+          </p:cNvSpPr>
+          <p:nvPr/>
+        </p:nvSpPr>
+        <p:spPr>
+          <a:xfrm xmlns:a="http://schemas.openxmlformats.org/drawingml/2006/main">
+            <a:off x="819150" y="2762250"/>
+            <a:ext cx="4610100" cy="1752600"/>
           </a:xfrm>
           <a:prstGeom xmlns:a="http://schemas.openxmlformats.org/drawingml/2006/main" prst="rect">
             <a:avLst/>
@@ -3948,9 +3946,240 @@
           <a:lstStyle xmlns:a="http://schemas.openxmlformats.org/drawingml/2006/main"/>
           <a:p xmlns:a="http://schemas.openxmlformats.org/drawingml/2006/main">
             <a:pPr algn="l">
+              <a:defRPr sz="1200" b="0">
+                <a:solidFill>
+                  <a:srgbClr val="172026"/>
+                </a:solidFill>
+                <a:latin typeface="Aptos"/>
+                <a:ea typeface="Aptos"/>
+                <a:cs typeface="Aptos"/>
+              </a:defRPr>
+            </a:pPr>
+            <a:r>
+              <a:rPr sz="1200" b="0">
+                <a:solidFill>
+                  <a:srgbClr val="172026"/>
+                </a:solidFill>
+                <a:latin typeface="Aptos"/>
+                <a:ea typeface="Aptos"/>
+                <a:cs typeface="Aptos"/>
+              </a:rPr>
+              <a:t>Using the selected category, current assets, current channels, sales feedback, and CRM fields, classify the current demand motion as demand creation, demand capture, lead collection, or mixed. Identify the weakest operating layer, one practical repair that can start within two weeks, one account-level signal to track, and the validation questions that require sales, RevOps, SME, or...</a:t>
+            </a:r>
+          </a:p>
+        </p:txBody>
+      </p:sp>
+      <p:sp>
+        <p:nvSpPr>
+          <p:cNvPr id="17" name="">
+            <a:extLst xmlns:a="http://schemas.openxmlformats.org/drawingml/2006/main">
+              <a:ext uri="{FF2B5EF4-FFF2-40B4-BE49-F238E27FC236}">
+                <a16:creationId xmlns:a16="http://schemas.microsoft.com/office/drawing/2014/main" id="{18297BA1-0E31-4199-AA47-7A3D81AC127A}"/>
+              </a:ext>
+            </a:extLst>
+          </p:cNvPr>
+          <p:cNvSpPr>
+            <a:spLocks xmlns:a="http://schemas.openxmlformats.org/drawingml/2006/main" noGrp="1"/>
+          </p:cNvSpPr>
+          <p:nvPr/>
+        </p:nvSpPr>
+        <p:spPr>
+          <a:xfrm xmlns:a="http://schemas.openxmlformats.org/drawingml/2006/main">
+            <a:off x="6496050" y="2038350"/>
+            <a:ext cx="4933950" cy="3181350"/>
+          </a:xfrm>
+          <a:prstGeom xmlns:a="http://schemas.openxmlformats.org/drawingml/2006/main" prst="rect">
+            <a:avLst/>
+          </a:prstGeom>
+          <a:solidFill xmlns:a="http://schemas.openxmlformats.org/drawingml/2006/main">
+            <a:srgbClr val="F9FAF7"/>
+          </a:solidFill>
+          <a:ln xmlns:a="http://schemas.openxmlformats.org/drawingml/2006/main" w="9525">
+            <a:solidFill>
+              <a:srgbClr val="D9DDD6"/>
+            </a:solidFill>
+            <a:prstDash val="solid"/>
+          </a:ln>
+        </p:spPr>
+      </p:sp>
+      <p:sp>
+        <p:nvSpPr>
+          <p:cNvPr id="18" name="">
+            <a:extLst xmlns:a="http://schemas.openxmlformats.org/drawingml/2006/main">
+              <a:ext uri="{FF2B5EF4-FFF2-40B4-BE49-F238E27FC236}">
+                <a16:creationId xmlns:a16="http://schemas.microsoft.com/office/drawing/2014/main" id="{770B57E7-3C2B-4763-BC93-F2E82AEA5B8B}"/>
+              </a:ext>
+            </a:extLst>
+          </p:cNvPr>
+          <p:cNvSpPr>
+            <a:spLocks xmlns:a="http://schemas.openxmlformats.org/drawingml/2006/main" noGrp="1"/>
+          </p:cNvSpPr>
+          <p:nvPr/>
+        </p:nvSpPr>
+        <p:spPr>
+          <a:xfrm xmlns:a="http://schemas.openxmlformats.org/drawingml/2006/main">
+            <a:off x="6819900" y="2419350"/>
+            <a:ext cx="266700" cy="19050"/>
+          </a:xfrm>
+          <a:prstGeom xmlns:a="http://schemas.openxmlformats.org/drawingml/2006/main" prst="rect">
+            <a:avLst/>
+          </a:prstGeom>
+          <a:solidFill xmlns:a="http://schemas.openxmlformats.org/drawingml/2006/main">
+            <a:srgbClr val="1D6072"/>
+          </a:solidFill>
+          <a:ln xmlns:a="http://schemas.openxmlformats.org/drawingml/2006/main" w="0">
+            <a:solidFill>
+              <a:srgbClr val="000000">
+                <a:alpha val="0"/>
+              </a:srgbClr>
+            </a:solidFill>
+            <a:prstDash val="solid"/>
+          </a:ln>
+        </p:spPr>
+      </p:sp>
+      <p:sp>
+        <p:nvSpPr>
+          <p:cNvPr id="19" name="">
+            <a:extLst xmlns:a="http://schemas.openxmlformats.org/drawingml/2006/main">
+              <a:ext uri="{FF2B5EF4-FFF2-40B4-BE49-F238E27FC236}">
+                <a16:creationId xmlns:a16="http://schemas.microsoft.com/office/drawing/2014/main" id="{F84CE20C-E658-4693-9664-99AFAE70D16D}"/>
+              </a:ext>
+            </a:extLst>
+          </p:cNvPr>
+          <p:cNvSpPr>
+            <a:spLocks xmlns:a="http://schemas.openxmlformats.org/drawingml/2006/main" noGrp="1"/>
+          </p:cNvSpPr>
+          <p:nvPr/>
+        </p:nvSpPr>
+        <p:spPr>
+          <a:xfrm xmlns:a="http://schemas.openxmlformats.org/drawingml/2006/main">
+            <a:off x="7181850" y="2343150"/>
+            <a:ext cx="2476500" cy="171450"/>
+          </a:xfrm>
+          <a:prstGeom xmlns:a="http://schemas.openxmlformats.org/drawingml/2006/main" prst="rect">
+            <a:avLst/>
+          </a:prstGeom>
+          <a:solidFill xmlns:a="http://schemas.openxmlformats.org/drawingml/2006/main">
+            <a:srgbClr val="000000">
+              <a:alpha val="0"/>
+            </a:srgbClr>
+          </a:solidFill>
+          <a:ln xmlns:a="http://schemas.openxmlformats.org/drawingml/2006/main" w="0">
+            <a:solidFill>
+              <a:srgbClr val="000000">
+                <a:alpha val="0"/>
+              </a:srgbClr>
+            </a:solidFill>
+            <a:prstDash val="solid"/>
+          </a:ln>
+        </p:spPr>
+        <p:txBody>
+          <a:bodyPr xmlns:a="http://schemas.openxmlformats.org/drawingml/2006/main" lIns="0" tIns="0" rIns="0" bIns="0" anchor="t"/>
+          <a:lstStyle xmlns:a="http://schemas.openxmlformats.org/drawingml/2006/main"/>
+          <a:p xmlns:a="http://schemas.openxmlformats.org/drawingml/2006/main">
+            <a:pPr algn="l">
+              <a:defRPr sz="750" b="1">
+                <a:solidFill>
+                  <a:srgbClr val="59646A"/>
+                </a:solidFill>
+                <a:latin typeface="Aptos"/>
+                <a:ea typeface="Aptos"/>
+                <a:cs typeface="Aptos"/>
+              </a:defRPr>
+            </a:pPr>
+            <a:r>
+              <a:rPr sz="750" b="1">
+                <a:solidFill>
+                  <a:srgbClr val="59646A"/>
+                </a:solidFill>
+                <a:latin typeface="Aptos"/>
+                <a:ea typeface="Aptos"/>
+                <a:cs typeface="Aptos"/>
+              </a:rPr>
+              <a:t>REQUIRED OUTPUT STANDARD</a:t>
+            </a:r>
+          </a:p>
+        </p:txBody>
+      </p:sp>
+      <p:sp>
+        <p:nvSpPr>
+          <p:cNvPr id="20" name="">
+            <a:extLst xmlns:a="http://schemas.openxmlformats.org/drawingml/2006/main">
+              <a:ext uri="{FF2B5EF4-FFF2-40B4-BE49-F238E27FC236}">
+                <a16:creationId xmlns:a16="http://schemas.microsoft.com/office/drawing/2014/main" id="{790E0C20-E0EE-4672-8F11-45DBECEC81E8}"/>
+              </a:ext>
+            </a:extLst>
+          </p:cNvPr>
+          <p:cNvSpPr>
+            <a:spLocks xmlns:a="http://schemas.openxmlformats.org/drawingml/2006/main" noGrp="1"/>
+          </p:cNvSpPr>
+          <p:nvPr/>
+        </p:nvSpPr>
+        <p:spPr>
+          <a:xfrm xmlns:a="http://schemas.openxmlformats.org/drawingml/2006/main">
+            <a:off x="6819900" y="2847975"/>
+            <a:ext cx="57150" cy="57150"/>
+          </a:xfrm>
+          <a:prstGeom xmlns:a="http://schemas.openxmlformats.org/drawingml/2006/main" prst="rect">
+            <a:avLst/>
+          </a:prstGeom>
+          <a:solidFill xmlns:a="http://schemas.openxmlformats.org/drawingml/2006/main">
+            <a:srgbClr val="1D6072"/>
+          </a:solidFill>
+          <a:ln xmlns:a="http://schemas.openxmlformats.org/drawingml/2006/main" w="0">
+            <a:solidFill>
+              <a:srgbClr val="000000">
+                <a:alpha val="0"/>
+              </a:srgbClr>
+            </a:solidFill>
+            <a:prstDash val="solid"/>
+          </a:ln>
+        </p:spPr>
+      </p:sp>
+      <p:sp>
+        <p:nvSpPr>
+          <p:cNvPr id="21" name="">
+            <a:extLst xmlns:a="http://schemas.openxmlformats.org/drawingml/2006/main">
+              <a:ext uri="{FF2B5EF4-FFF2-40B4-BE49-F238E27FC236}">
+                <a16:creationId xmlns:a16="http://schemas.microsoft.com/office/drawing/2014/main" id="{B401B871-13DE-46AA-84CB-BE633442C40D}"/>
+              </a:ext>
+            </a:extLst>
+          </p:cNvPr>
+          <p:cNvSpPr>
+            <a:spLocks xmlns:a="http://schemas.openxmlformats.org/drawingml/2006/main" noGrp="1"/>
+          </p:cNvSpPr>
+          <p:nvPr/>
+        </p:nvSpPr>
+        <p:spPr>
+          <a:xfrm xmlns:a="http://schemas.openxmlformats.org/drawingml/2006/main">
+            <a:off x="6991350" y="2781300"/>
+            <a:ext cx="3619500" cy="438150"/>
+          </a:xfrm>
+          <a:prstGeom xmlns:a="http://schemas.openxmlformats.org/drawingml/2006/main" prst="rect">
+            <a:avLst/>
+          </a:prstGeom>
+          <a:solidFill xmlns:a="http://schemas.openxmlformats.org/drawingml/2006/main">
+            <a:srgbClr val="000000">
+              <a:alpha val="0"/>
+            </a:srgbClr>
+          </a:solidFill>
+          <a:ln xmlns:a="http://schemas.openxmlformats.org/drawingml/2006/main" w="0">
+            <a:solidFill>
+              <a:srgbClr val="000000">
+                <a:alpha val="0"/>
+              </a:srgbClr>
+            </a:solidFill>
+            <a:prstDash val="solid"/>
+          </a:ln>
+        </p:spPr>
+        <p:txBody>
+          <a:bodyPr xmlns:a="http://schemas.openxmlformats.org/drawingml/2006/main" lIns="0" tIns="0" rIns="0" bIns="0" anchor="t"/>
+          <a:lstStyle xmlns:a="http://schemas.openxmlformats.org/drawingml/2006/main"/>
+          <a:p xmlns:a="http://schemas.openxmlformats.org/drawingml/2006/main">
+            <a:pPr algn="l">
               <a:defRPr sz="1125" b="0">
                 <a:solidFill>
-                  <a:srgbClr val="FFFFFF"/>
+                  <a:srgbClr val="172026"/>
                 </a:solidFill>
                 <a:latin typeface="Aptos"/>
                 <a:ea typeface="Aptos"/>
@@ -3960,68 +4189,35 @@
             <a:r>
               <a:rPr sz="1125" b="0">
                 <a:solidFill>
-                  <a:srgbClr val="FFFFFF"/>
+                  <a:srgbClr val="172026"/>
                 </a:solidFill>
                 <a:latin typeface="Aptos"/>
                 <a:ea typeface="Aptos"/>
                 <a:cs typeface="Aptos"/>
               </a:rPr>
-              <a:t>Given the selected category, current assets, current channels, sales feedback, and CRM fields, classify the current demand motion as demand creation, demand capture, lead collection, or mixed. Identify the weakest operating layer, one practical repair that can start within two weeks, one account-level signal to track, and the human questions that require sales, RevOps, SME, or leadership input.</a:t>
+              <a:t>Names the missing layer</a:t>
             </a:r>
           </a:p>
         </p:txBody>
       </p:sp>
       <p:sp>
         <p:nvSpPr>
-          <p:cNvPr id="17" name="">
-            <a:extLst xmlns:a="http://schemas.openxmlformats.org/drawingml/2006/main">
-              <a:ext uri="{FF2B5EF4-FFF2-40B4-BE49-F238E27FC236}">
-                <a16:creationId xmlns:a16="http://schemas.microsoft.com/office/drawing/2014/main" id="{68C8917C-C1BF-41D9-ADB9-43AE213836DA}"/>
-              </a:ext>
-            </a:extLst>
-          </p:cNvPr>
-          <p:cNvSpPr>
-            <a:spLocks xmlns:a="http://schemas.openxmlformats.org/drawingml/2006/main" noGrp="1"/>
-          </p:cNvSpPr>
-          <p:nvPr/>
-        </p:nvSpPr>
-        <p:spPr>
-          <a:xfrm xmlns:a="http://schemas.openxmlformats.org/drawingml/2006/main">
-            <a:off x="6324600" y="1809750"/>
-            <a:ext cx="5867400" cy="4591050"/>
-          </a:xfrm>
-          <a:prstGeom xmlns:a="http://schemas.openxmlformats.org/drawingml/2006/main" prst="rect">
-            <a:avLst/>
-          </a:prstGeom>
-          <a:solidFill xmlns:a="http://schemas.openxmlformats.org/drawingml/2006/main">
-            <a:srgbClr val="FFFFFF"/>
-          </a:solidFill>
-          <a:ln xmlns:a="http://schemas.openxmlformats.org/drawingml/2006/main" w="9525">
-            <a:solidFill>
-              <a:srgbClr val="D9DDD6"/>
-            </a:solidFill>
-            <a:prstDash val="solid"/>
-          </a:ln>
-        </p:spPr>
-      </p:sp>
-      <p:sp>
-        <p:nvSpPr>
-          <p:cNvPr id="18" name="">
-            <a:extLst xmlns:a="http://schemas.openxmlformats.org/drawingml/2006/main">
-              <a:ext uri="{FF2B5EF4-FFF2-40B4-BE49-F238E27FC236}">
-                <a16:creationId xmlns:a16="http://schemas.microsoft.com/office/drawing/2014/main" id="{3009E0C3-AD66-467B-9421-BE815055FD11}"/>
-              </a:ext>
-            </a:extLst>
-          </p:cNvPr>
-          <p:cNvSpPr>
-            <a:spLocks xmlns:a="http://schemas.openxmlformats.org/drawingml/2006/main" noGrp="1"/>
-          </p:cNvSpPr>
-          <p:nvPr/>
-        </p:nvSpPr>
-        <p:spPr>
-          <a:xfrm xmlns:a="http://schemas.openxmlformats.org/drawingml/2006/main">
-            <a:off x="6705600" y="2266950"/>
-            <a:ext cx="266700" cy="19050"/>
+          <p:cNvPr id="22" name="">
+            <a:extLst xmlns:a="http://schemas.openxmlformats.org/drawingml/2006/main">
+              <a:ext uri="{FF2B5EF4-FFF2-40B4-BE49-F238E27FC236}">
+                <a16:creationId xmlns:a16="http://schemas.microsoft.com/office/drawing/2014/main" id="{4A11353D-50C0-4006-B1C3-4101E8BDEAC5}"/>
+              </a:ext>
+            </a:extLst>
+          </p:cNvPr>
+          <p:cNvSpPr>
+            <a:spLocks xmlns:a="http://schemas.openxmlformats.org/drawingml/2006/main" noGrp="1"/>
+          </p:cNvSpPr>
+          <p:nvPr/>
+        </p:nvSpPr>
+        <p:spPr>
+          <a:xfrm xmlns:a="http://schemas.openxmlformats.org/drawingml/2006/main">
+            <a:off x="6819900" y="3324225"/>
+            <a:ext cx="57150" cy="57150"/>
           </a:xfrm>
           <a:prstGeom xmlns:a="http://schemas.openxmlformats.org/drawingml/2006/main" prst="rect">
             <a:avLst/>
@@ -4041,22 +4237,22 @@
       </p:sp>
       <p:sp>
         <p:nvSpPr>
-          <p:cNvPr id="19" name="">
-            <a:extLst xmlns:a="http://schemas.openxmlformats.org/drawingml/2006/main">
-              <a:ext uri="{FF2B5EF4-FFF2-40B4-BE49-F238E27FC236}">
-                <a16:creationId xmlns:a16="http://schemas.microsoft.com/office/drawing/2014/main" id="{6FD83545-DA48-4739-ACD2-DE6B57DCCB1E}"/>
-              </a:ext>
-            </a:extLst>
-          </p:cNvPr>
-          <p:cNvSpPr>
-            <a:spLocks xmlns:a="http://schemas.openxmlformats.org/drawingml/2006/main" noGrp="1"/>
-          </p:cNvSpPr>
-          <p:nvPr/>
-        </p:nvSpPr>
-        <p:spPr>
-          <a:xfrm xmlns:a="http://schemas.openxmlformats.org/drawingml/2006/main">
-            <a:off x="7067550" y="2190750"/>
-            <a:ext cx="2476500" cy="171450"/>
+          <p:cNvPr id="23" name="">
+            <a:extLst xmlns:a="http://schemas.openxmlformats.org/drawingml/2006/main">
+              <a:ext uri="{FF2B5EF4-FFF2-40B4-BE49-F238E27FC236}">
+                <a16:creationId xmlns:a16="http://schemas.microsoft.com/office/drawing/2014/main" id="{467E219F-D726-4E7F-9EA2-27D303908CE1}"/>
+              </a:ext>
+            </a:extLst>
+          </p:cNvPr>
+          <p:cNvSpPr>
+            <a:spLocks xmlns:a="http://schemas.openxmlformats.org/drawingml/2006/main" noGrp="1"/>
+          </p:cNvSpPr>
+          <p:nvPr/>
+        </p:nvSpPr>
+        <p:spPr>
+          <a:xfrm xmlns:a="http://schemas.openxmlformats.org/drawingml/2006/main">
+            <a:off x="6991350" y="3257550"/>
+            <a:ext cx="3619500" cy="438150"/>
           </a:xfrm>
           <a:prstGeom xmlns:a="http://schemas.openxmlformats.org/drawingml/2006/main" prst="rect">
             <a:avLst/>
@@ -4077,6 +4273,635 @@
         </p:spPr>
         <p:txBody>
           <a:bodyPr xmlns:a="http://schemas.openxmlformats.org/drawingml/2006/main" lIns="0" tIns="0" rIns="0" bIns="0" anchor="t"/>
+          <a:lstStyle xmlns:a="http://schemas.openxmlformats.org/drawingml/2006/main"/>
+          <a:p xmlns:a="http://schemas.openxmlformats.org/drawingml/2006/main">
+            <a:pPr algn="l">
+              <a:defRPr sz="1125" b="0">
+                <a:solidFill>
+                  <a:srgbClr val="172026"/>
+                </a:solidFill>
+                <a:latin typeface="Aptos"/>
+                <a:ea typeface="Aptos"/>
+                <a:cs typeface="Aptos"/>
+              </a:defRPr>
+            </a:pPr>
+            <a:r>
+              <a:rPr sz="1125" b="0">
+                <a:solidFill>
+                  <a:srgbClr val="172026"/>
+                </a:solidFill>
+                <a:latin typeface="Aptos"/>
+                <a:ea typeface="Aptos"/>
+                <a:cs typeface="Aptos"/>
+              </a:rPr>
+              <a:t>Explains the anti-pattern and commercial risk</a:t>
+            </a:r>
+          </a:p>
+        </p:txBody>
+      </p:sp>
+      <p:sp>
+        <p:nvSpPr>
+          <p:cNvPr id="24" name="">
+            <a:extLst xmlns:a="http://schemas.openxmlformats.org/drawingml/2006/main">
+              <a:ext uri="{FF2B5EF4-FFF2-40B4-BE49-F238E27FC236}">
+                <a16:creationId xmlns:a16="http://schemas.microsoft.com/office/drawing/2014/main" id="{C149FF12-78D7-4214-8468-9F88EEFD9D3A}"/>
+              </a:ext>
+            </a:extLst>
+          </p:cNvPr>
+          <p:cNvSpPr>
+            <a:spLocks xmlns:a="http://schemas.openxmlformats.org/drawingml/2006/main" noGrp="1"/>
+          </p:cNvSpPr>
+          <p:nvPr/>
+        </p:nvSpPr>
+        <p:spPr>
+          <a:xfrm xmlns:a="http://schemas.openxmlformats.org/drawingml/2006/main">
+            <a:off x="6819900" y="3800475"/>
+            <a:ext cx="57150" cy="57150"/>
+          </a:xfrm>
+          <a:prstGeom xmlns:a="http://schemas.openxmlformats.org/drawingml/2006/main" prst="rect">
+            <a:avLst/>
+          </a:prstGeom>
+          <a:solidFill xmlns:a="http://schemas.openxmlformats.org/drawingml/2006/main">
+            <a:srgbClr val="1D6072"/>
+          </a:solidFill>
+          <a:ln xmlns:a="http://schemas.openxmlformats.org/drawingml/2006/main" w="0">
+            <a:solidFill>
+              <a:srgbClr val="000000">
+                <a:alpha val="0"/>
+              </a:srgbClr>
+            </a:solidFill>
+            <a:prstDash val="solid"/>
+          </a:ln>
+        </p:spPr>
+      </p:sp>
+      <p:sp>
+        <p:nvSpPr>
+          <p:cNvPr id="25" name="">
+            <a:extLst xmlns:a="http://schemas.openxmlformats.org/drawingml/2006/main">
+              <a:ext uri="{FF2B5EF4-FFF2-40B4-BE49-F238E27FC236}">
+                <a16:creationId xmlns:a16="http://schemas.microsoft.com/office/drawing/2014/main" id="{7A215159-1100-4C4A-8BF8-983245B4B96F}"/>
+              </a:ext>
+            </a:extLst>
+          </p:cNvPr>
+          <p:cNvSpPr>
+            <a:spLocks xmlns:a="http://schemas.openxmlformats.org/drawingml/2006/main" noGrp="1"/>
+          </p:cNvSpPr>
+          <p:nvPr/>
+        </p:nvSpPr>
+        <p:spPr>
+          <a:xfrm xmlns:a="http://schemas.openxmlformats.org/drawingml/2006/main">
+            <a:off x="6991350" y="3733800"/>
+            <a:ext cx="3619500" cy="438150"/>
+          </a:xfrm>
+          <a:prstGeom xmlns:a="http://schemas.openxmlformats.org/drawingml/2006/main" prst="rect">
+            <a:avLst/>
+          </a:prstGeom>
+          <a:solidFill xmlns:a="http://schemas.openxmlformats.org/drawingml/2006/main">
+            <a:srgbClr val="000000">
+              <a:alpha val="0"/>
+            </a:srgbClr>
+          </a:solidFill>
+          <a:ln xmlns:a="http://schemas.openxmlformats.org/drawingml/2006/main" w="0">
+            <a:solidFill>
+              <a:srgbClr val="000000">
+                <a:alpha val="0"/>
+              </a:srgbClr>
+            </a:solidFill>
+            <a:prstDash val="solid"/>
+          </a:ln>
+        </p:spPr>
+        <p:txBody>
+          <a:bodyPr xmlns:a="http://schemas.openxmlformats.org/drawingml/2006/main" lIns="0" tIns="0" rIns="0" bIns="0" anchor="t"/>
+          <a:lstStyle xmlns:a="http://schemas.openxmlformats.org/drawingml/2006/main"/>
+          <a:p xmlns:a="http://schemas.openxmlformats.org/drawingml/2006/main">
+            <a:pPr algn="l">
+              <a:defRPr sz="1125" b="0">
+                <a:solidFill>
+                  <a:srgbClr val="172026"/>
+                </a:solidFill>
+                <a:latin typeface="Aptos"/>
+                <a:ea typeface="Aptos"/>
+                <a:cs typeface="Aptos"/>
+              </a:defRPr>
+            </a:pPr>
+            <a:r>
+              <a:rPr sz="1125" b="0">
+                <a:solidFill>
+                  <a:srgbClr val="172026"/>
+                </a:solidFill>
+                <a:latin typeface="Aptos"/>
+                <a:ea typeface="Aptos"/>
+                <a:cs typeface="Aptos"/>
+              </a:rPr>
+              <a:t>Defines signal, owner, and cadence</a:t>
+            </a:r>
+          </a:p>
+        </p:txBody>
+      </p:sp>
+      <p:sp>
+        <p:nvSpPr>
+          <p:cNvPr id="26" name="">
+            <a:extLst xmlns:a="http://schemas.openxmlformats.org/drawingml/2006/main">
+              <a:ext uri="{FF2B5EF4-FFF2-40B4-BE49-F238E27FC236}">
+                <a16:creationId xmlns:a16="http://schemas.microsoft.com/office/drawing/2014/main" id="{9731B3B7-FEB5-41CA-87C2-3C277324B978}"/>
+              </a:ext>
+            </a:extLst>
+          </p:cNvPr>
+          <p:cNvSpPr>
+            <a:spLocks xmlns:a="http://schemas.openxmlformats.org/drawingml/2006/main" noGrp="1"/>
+          </p:cNvSpPr>
+          <p:nvPr/>
+        </p:nvSpPr>
+        <p:spPr>
+          <a:xfrm xmlns:a="http://schemas.openxmlformats.org/drawingml/2006/main">
+            <a:off x="6819900" y="4276725"/>
+            <a:ext cx="57150" cy="57150"/>
+          </a:xfrm>
+          <a:prstGeom xmlns:a="http://schemas.openxmlformats.org/drawingml/2006/main" prst="rect">
+            <a:avLst/>
+          </a:prstGeom>
+          <a:solidFill xmlns:a="http://schemas.openxmlformats.org/drawingml/2006/main">
+            <a:srgbClr val="1D6072"/>
+          </a:solidFill>
+          <a:ln xmlns:a="http://schemas.openxmlformats.org/drawingml/2006/main" w="0">
+            <a:solidFill>
+              <a:srgbClr val="000000">
+                <a:alpha val="0"/>
+              </a:srgbClr>
+            </a:solidFill>
+            <a:prstDash val="solid"/>
+          </a:ln>
+        </p:spPr>
+      </p:sp>
+      <p:sp>
+        <p:nvSpPr>
+          <p:cNvPr id="27" name="">
+            <a:extLst xmlns:a="http://schemas.openxmlformats.org/drawingml/2006/main">
+              <a:ext uri="{FF2B5EF4-FFF2-40B4-BE49-F238E27FC236}">
+                <a16:creationId xmlns:a16="http://schemas.microsoft.com/office/drawing/2014/main" id="{01D329C2-5BC6-464B-B432-AC1FC0FBEF04}"/>
+              </a:ext>
+            </a:extLst>
+          </p:cNvPr>
+          <p:cNvSpPr>
+            <a:spLocks xmlns:a="http://schemas.openxmlformats.org/drawingml/2006/main" noGrp="1"/>
+          </p:cNvSpPr>
+          <p:nvPr/>
+        </p:nvSpPr>
+        <p:spPr>
+          <a:xfrm xmlns:a="http://schemas.openxmlformats.org/drawingml/2006/main">
+            <a:off x="6991350" y="4210050"/>
+            <a:ext cx="3619500" cy="438150"/>
+          </a:xfrm>
+          <a:prstGeom xmlns:a="http://schemas.openxmlformats.org/drawingml/2006/main" prst="rect">
+            <a:avLst/>
+          </a:prstGeom>
+          <a:solidFill xmlns:a="http://schemas.openxmlformats.org/drawingml/2006/main">
+            <a:srgbClr val="000000">
+              <a:alpha val="0"/>
+            </a:srgbClr>
+          </a:solidFill>
+          <a:ln xmlns:a="http://schemas.openxmlformats.org/drawingml/2006/main" w="0">
+            <a:solidFill>
+              <a:srgbClr val="000000">
+                <a:alpha val="0"/>
+              </a:srgbClr>
+            </a:solidFill>
+            <a:prstDash val="solid"/>
+          </a:ln>
+        </p:spPr>
+        <p:txBody>
+          <a:bodyPr xmlns:a="http://schemas.openxmlformats.org/drawingml/2006/main" lIns="0" tIns="0" rIns="0" bIns="0" anchor="t"/>
+          <a:lstStyle xmlns:a="http://schemas.openxmlformats.org/drawingml/2006/main"/>
+          <a:p xmlns:a="http://schemas.openxmlformats.org/drawingml/2006/main">
+            <a:pPr algn="l">
+              <a:defRPr sz="1125" b="0">
+                <a:solidFill>
+                  <a:srgbClr val="172026"/>
+                </a:solidFill>
+                <a:latin typeface="Aptos"/>
+                <a:ea typeface="Aptos"/>
+                <a:cs typeface="Aptos"/>
+              </a:defRPr>
+            </a:pPr>
+            <a:r>
+              <a:rPr sz="1125" b="0">
+                <a:solidFill>
+                  <a:srgbClr val="172026"/>
+                </a:solidFill>
+                <a:latin typeface="Aptos"/>
+                <a:ea typeface="Aptos"/>
+                <a:cs typeface="Aptos"/>
+              </a:rPr>
+              <a:t>Lists field-validation questions</a:t>
+            </a:r>
+          </a:p>
+        </p:txBody>
+      </p:sp>
+      <p:sp>
+        <p:nvSpPr>
+          <p:cNvPr id="28" name="">
+            <a:extLst xmlns:a="http://schemas.openxmlformats.org/drawingml/2006/main">
+              <a:ext uri="{FF2B5EF4-FFF2-40B4-BE49-F238E27FC236}">
+                <a16:creationId xmlns:a16="http://schemas.microsoft.com/office/drawing/2014/main" id="{65D967C5-7170-4949-A339-7707057309A5}"/>
+              </a:ext>
+            </a:extLst>
+          </p:cNvPr>
+          <p:cNvSpPr>
+            <a:spLocks xmlns:a="http://schemas.openxmlformats.org/drawingml/2006/main" noGrp="1"/>
+          </p:cNvSpPr>
+          <p:nvPr/>
+        </p:nvSpPr>
+        <p:spPr>
+          <a:xfrm xmlns:a="http://schemas.openxmlformats.org/drawingml/2006/main">
+            <a:off x="514350" y="6438900"/>
+            <a:ext cx="10915650" cy="9525"/>
+          </a:xfrm>
+          <a:prstGeom xmlns:a="http://schemas.openxmlformats.org/drawingml/2006/main" prst="rect">
+            <a:avLst/>
+          </a:prstGeom>
+          <a:solidFill xmlns:a="http://schemas.openxmlformats.org/drawingml/2006/main">
+            <a:srgbClr val="D9DDD6"/>
+          </a:solidFill>
+          <a:ln xmlns:a="http://schemas.openxmlformats.org/drawingml/2006/main" w="0">
+            <a:solidFill>
+              <a:srgbClr val="000000">
+                <a:alpha val="0"/>
+              </a:srgbClr>
+            </a:solidFill>
+            <a:prstDash val="solid"/>
+          </a:ln>
+        </p:spPr>
+      </p:sp>
+      <p:sp>
+        <p:nvSpPr>
+          <p:cNvPr id="29" name="">
+            <a:extLst xmlns:a="http://schemas.openxmlformats.org/drawingml/2006/main">
+              <a:ext uri="{FF2B5EF4-FFF2-40B4-BE49-F238E27FC236}">
+                <a16:creationId xmlns:a16="http://schemas.microsoft.com/office/drawing/2014/main" id="{8E54B0F3-26CC-4DA1-BE55-6065D38B6431}"/>
+              </a:ext>
+            </a:extLst>
+          </p:cNvPr>
+          <p:cNvSpPr>
+            <a:spLocks xmlns:a="http://schemas.openxmlformats.org/drawingml/2006/main" noGrp="1"/>
+          </p:cNvSpPr>
+          <p:nvPr/>
+        </p:nvSpPr>
+        <p:spPr>
+          <a:xfrm xmlns:a="http://schemas.openxmlformats.org/drawingml/2006/main">
+            <a:off x="514350" y="6553200"/>
+            <a:ext cx="5905500" cy="171450"/>
+          </a:xfrm>
+          <a:prstGeom xmlns:a="http://schemas.openxmlformats.org/drawingml/2006/main" prst="rect">
+            <a:avLst/>
+          </a:prstGeom>
+          <a:solidFill xmlns:a="http://schemas.openxmlformats.org/drawingml/2006/main">
+            <a:srgbClr val="000000">
+              <a:alpha val="0"/>
+            </a:srgbClr>
+          </a:solidFill>
+          <a:ln xmlns:a="http://schemas.openxmlformats.org/drawingml/2006/main" w="0">
+            <a:solidFill>
+              <a:srgbClr val="000000">
+                <a:alpha val="0"/>
+              </a:srgbClr>
+            </a:solidFill>
+            <a:prstDash val="solid"/>
+          </a:ln>
+        </p:spPr>
+        <p:txBody>
+          <a:bodyPr xmlns:a="http://schemas.openxmlformats.org/drawingml/2006/main" lIns="0" tIns="0" rIns="0" bIns="0" anchor="t"/>
+          <a:lstStyle xmlns:a="http://schemas.openxmlformats.org/drawingml/2006/main"/>
+          <a:p xmlns:a="http://schemas.openxmlformats.org/drawingml/2006/main">
+            <a:pPr algn="l">
+              <a:defRPr sz="675" b="0">
+                <a:solidFill>
+                  <a:srgbClr val="59646A"/>
+                </a:solidFill>
+                <a:latin typeface="Aptos"/>
+                <a:ea typeface="Aptos"/>
+                <a:cs typeface="Aptos"/>
+              </a:defRPr>
+            </a:pPr>
+            <a:r>
+              <a:rPr sz="675" b="0">
+                <a:solidFill>
+                  <a:srgbClr val="59646A"/>
+                </a:solidFill>
+                <a:latin typeface="Aptos"/>
+                <a:ea typeface="Aptos"/>
+                <a:cs typeface="Aptos"/>
+              </a:rPr>
+              <a:t>Lesson 01 - Industrial Demand Generation Foundations</a:t>
+            </a:r>
+          </a:p>
+        </p:txBody>
+      </p:sp>
+      <p:sp>
+        <p:nvSpPr>
+          <p:cNvPr id="30" name="">
+            <a:extLst xmlns:a="http://schemas.openxmlformats.org/drawingml/2006/main">
+              <a:ext uri="{FF2B5EF4-FFF2-40B4-BE49-F238E27FC236}">
+                <a16:creationId xmlns:a16="http://schemas.microsoft.com/office/drawing/2014/main" id="{9FDB20ED-2B36-43BF-8877-C692176EED32}"/>
+              </a:ext>
+            </a:extLst>
+          </p:cNvPr>
+          <p:cNvSpPr>
+            <a:spLocks xmlns:a="http://schemas.openxmlformats.org/drawingml/2006/main" noGrp="1"/>
+          </p:cNvSpPr>
+          <p:nvPr/>
+        </p:nvSpPr>
+        <p:spPr>
+          <a:xfrm xmlns:a="http://schemas.openxmlformats.org/drawingml/2006/main">
+            <a:off x="5334000" y="6553200"/>
+            <a:ext cx="4095750" cy="171450"/>
+          </a:xfrm>
+          <a:prstGeom xmlns:a="http://schemas.openxmlformats.org/drawingml/2006/main" prst="rect">
+            <a:avLst/>
+          </a:prstGeom>
+          <a:solidFill xmlns:a="http://schemas.openxmlformats.org/drawingml/2006/main">
+            <a:srgbClr val="000000">
+              <a:alpha val="0"/>
+            </a:srgbClr>
+          </a:solidFill>
+          <a:ln xmlns:a="http://schemas.openxmlformats.org/drawingml/2006/main" w="0">
+            <a:solidFill>
+              <a:srgbClr val="000000">
+                <a:alpha val="0"/>
+              </a:srgbClr>
+            </a:solidFill>
+            <a:prstDash val="solid"/>
+          </a:ln>
+        </p:spPr>
+        <p:txBody>
+          <a:bodyPr xmlns:a="http://schemas.openxmlformats.org/drawingml/2006/main" lIns="0" tIns="0" rIns="0" bIns="0" anchor="t"/>
+          <a:lstStyle xmlns:a="http://schemas.openxmlformats.org/drawingml/2006/main"/>
+          <a:p xmlns:a="http://schemas.openxmlformats.org/drawingml/2006/main">
+            <a:pPr algn="r">
+              <a:defRPr sz="600" b="0">
+                <a:solidFill>
+                  <a:srgbClr val="59646A"/>
+                </a:solidFill>
+                <a:latin typeface="Aptos"/>
+                <a:ea typeface="Aptos"/>
+                <a:cs typeface="Aptos"/>
+              </a:defRPr>
+            </a:pPr>
+            <a:r>
+              <a:rPr sz="600" b="0">
+                <a:solidFill>
+                  <a:srgbClr val="59646A"/>
+                </a:solidFill>
+                <a:latin typeface="Aptos"/>
+                <a:ea typeface="Aptos"/>
+                <a:cs typeface="Aptos"/>
+              </a:rPr>
+              <a:t>Source: modules/module-01-industrial-demand-generation/lessons/01-industrial-demand-generation-foundations.md @ 9e28222</a:t>
+            </a:r>
+          </a:p>
+        </p:txBody>
+      </p:sp>
+      <p:sp>
+        <p:nvSpPr>
+          <p:cNvPr id="31" name="">
+            <a:extLst xmlns:a="http://schemas.openxmlformats.org/drawingml/2006/main">
+              <a:ext uri="{FF2B5EF4-FFF2-40B4-BE49-F238E27FC236}">
+                <a16:creationId xmlns:a16="http://schemas.microsoft.com/office/drawing/2014/main" id="{64911ABC-E91C-40ED-AC4B-0CDF930260AA}"/>
+              </a:ext>
+            </a:extLst>
+          </p:cNvPr>
+          <p:cNvSpPr>
+            <a:spLocks xmlns:a="http://schemas.openxmlformats.org/drawingml/2006/main" noGrp="1"/>
+          </p:cNvSpPr>
+          <p:nvPr/>
+        </p:nvSpPr>
+        <p:spPr>
+          <a:xfrm xmlns:a="http://schemas.openxmlformats.org/drawingml/2006/main">
+            <a:off x="10668000" y="6553200"/>
+            <a:ext cx="762000" cy="171450"/>
+          </a:xfrm>
+          <a:prstGeom xmlns:a="http://schemas.openxmlformats.org/drawingml/2006/main" prst="rect">
+            <a:avLst/>
+          </a:prstGeom>
+          <a:solidFill xmlns:a="http://schemas.openxmlformats.org/drawingml/2006/main">
+            <a:srgbClr val="000000">
+              <a:alpha val="0"/>
+            </a:srgbClr>
+          </a:solidFill>
+          <a:ln xmlns:a="http://schemas.openxmlformats.org/drawingml/2006/main" w="0">
+            <a:solidFill>
+              <a:srgbClr val="000000">
+                <a:alpha val="0"/>
+              </a:srgbClr>
+            </a:solidFill>
+            <a:prstDash val="solid"/>
+          </a:ln>
+        </p:spPr>
+        <p:txBody>
+          <a:bodyPr xmlns:a="http://schemas.openxmlformats.org/drawingml/2006/main" lIns="0" tIns="0" rIns="0" bIns="0" anchor="t"/>
+          <a:lstStyle xmlns:a="http://schemas.openxmlformats.org/drawingml/2006/main"/>
+          <a:p xmlns:a="http://schemas.openxmlformats.org/drawingml/2006/main">
+            <a:pPr algn="r">
+              <a:defRPr sz="675" b="0">
+                <a:solidFill>
+                  <a:srgbClr val="59646A"/>
+                </a:solidFill>
+                <a:latin typeface="Aptos"/>
+                <a:ea typeface="Aptos"/>
+                <a:cs typeface="Aptos"/>
+              </a:defRPr>
+            </a:pPr>
+            <a:r>
+              <a:rPr sz="675" b="0">
+                <a:solidFill>
+                  <a:srgbClr val="59646A"/>
+                </a:solidFill>
+                <a:latin typeface="Aptos"/>
+                <a:ea typeface="Aptos"/>
+                <a:cs typeface="Aptos"/>
+              </a:rPr>
+              <a:t>10/15</a:t>
+            </a:r>
+          </a:p>
+        </p:txBody>
+      </p:sp>
+      <p:sp>
+        <p:nvSpPr>
+          <p:cNvPr id="32" name="">
+            <a:extLst xmlns:a="http://schemas.openxmlformats.org/drawingml/2006/main">
+              <a:ext uri="{FF2B5EF4-FFF2-40B4-BE49-F238E27FC236}">
+                <a16:creationId xmlns:a16="http://schemas.microsoft.com/office/drawing/2014/main" id="{033681A8-440E-484C-9EF0-6E40BEED9A5E}"/>
+              </a:ext>
+            </a:extLst>
+          </p:cNvPr>
+          <p:cNvSpPr>
+            <a:spLocks xmlns:a="http://schemas.openxmlformats.org/drawingml/2006/main" noGrp="1"/>
+          </p:cNvSpPr>
+          <p:nvPr/>
+        </p:nvSpPr>
+        <p:spPr>
+          <a:xfrm xmlns:a="http://schemas.openxmlformats.org/drawingml/2006/main">
+            <a:off x="0" y="0"/>
+            <a:ext cx="12192000" cy="1809750"/>
+          </a:xfrm>
+          <a:prstGeom xmlns:a="http://schemas.openxmlformats.org/drawingml/2006/main" prst="rect">
+            <a:avLst/>
+          </a:prstGeom>
+          <a:solidFill xmlns:a="http://schemas.openxmlformats.org/drawingml/2006/main">
+            <a:srgbClr val="F5F6F2"/>
+          </a:solidFill>
+          <a:ln xmlns:a="http://schemas.openxmlformats.org/drawingml/2006/main" w="0">
+            <a:solidFill>
+              <a:srgbClr val="000000">
+                <a:alpha val="0"/>
+              </a:srgbClr>
+            </a:solidFill>
+            <a:prstDash val="solid"/>
+          </a:ln>
+        </p:spPr>
+      </p:sp>
+      <p:sp>
+        <p:nvSpPr>
+          <p:cNvPr id="33" name="">
+            <a:extLst xmlns:a="http://schemas.openxmlformats.org/drawingml/2006/main">
+              <a:ext uri="{FF2B5EF4-FFF2-40B4-BE49-F238E27FC236}">
+                <a16:creationId xmlns:a16="http://schemas.microsoft.com/office/drawing/2014/main" id="{E64081A7-AA92-40BD-A234-4A2622792C1C}"/>
+              </a:ext>
+            </a:extLst>
+          </p:cNvPr>
+          <p:cNvSpPr>
+            <a:spLocks xmlns:a="http://schemas.openxmlformats.org/drawingml/2006/main" noGrp="1"/>
+          </p:cNvSpPr>
+          <p:nvPr/>
+        </p:nvSpPr>
+        <p:spPr>
+          <a:xfrm xmlns:a="http://schemas.openxmlformats.org/drawingml/2006/main">
+            <a:off x="0" y="0"/>
+            <a:ext cx="171450" cy="1809750"/>
+          </a:xfrm>
+          <a:prstGeom xmlns:a="http://schemas.openxmlformats.org/drawingml/2006/main" prst="rect">
+            <a:avLst/>
+          </a:prstGeom>
+          <a:solidFill xmlns:a="http://schemas.openxmlformats.org/drawingml/2006/main">
+            <a:srgbClr val="12232B"/>
+          </a:solidFill>
+          <a:ln xmlns:a="http://schemas.openxmlformats.org/drawingml/2006/main" w="0">
+            <a:solidFill>
+              <a:srgbClr val="000000">
+                <a:alpha val="0"/>
+              </a:srgbClr>
+            </a:solidFill>
+            <a:prstDash val="solid"/>
+          </a:ln>
+        </p:spPr>
+      </p:sp>
+      <p:sp>
+        <p:nvSpPr>
+          <p:cNvPr id="34" name="">
+            <a:extLst xmlns:a="http://schemas.openxmlformats.org/drawingml/2006/main">
+              <a:ext uri="{FF2B5EF4-FFF2-40B4-BE49-F238E27FC236}">
+                <a16:creationId xmlns:a16="http://schemas.microsoft.com/office/drawing/2014/main" id="{359957B6-C6EC-426B-9418-8324BBF3D9A1}"/>
+              </a:ext>
+            </a:extLst>
+          </p:cNvPr>
+          <p:cNvSpPr>
+            <a:spLocks xmlns:a="http://schemas.openxmlformats.org/drawingml/2006/main" noGrp="1"/>
+          </p:cNvSpPr>
+          <p:nvPr/>
+        </p:nvSpPr>
+        <p:spPr>
+          <a:xfrm xmlns:a="http://schemas.openxmlformats.org/drawingml/2006/main">
+            <a:off x="171450" y="0"/>
+            <a:ext cx="57150" cy="1809750"/>
+          </a:xfrm>
+          <a:prstGeom xmlns:a="http://schemas.openxmlformats.org/drawingml/2006/main" prst="rect">
+            <a:avLst/>
+          </a:prstGeom>
+          <a:solidFill xmlns:a="http://schemas.openxmlformats.org/drawingml/2006/main">
+            <a:srgbClr val="A85D2A"/>
+          </a:solidFill>
+          <a:ln xmlns:a="http://schemas.openxmlformats.org/drawingml/2006/main" w="0">
+            <a:solidFill>
+              <a:srgbClr val="000000">
+                <a:alpha val="0"/>
+              </a:srgbClr>
+            </a:solidFill>
+            <a:prstDash val="solid"/>
+          </a:ln>
+        </p:spPr>
+      </p:sp>
+      <p:sp>
+        <p:nvSpPr>
+          <p:cNvPr id="35" name="kicker-01-marker">
+            <a:extLst xmlns:a="http://schemas.openxmlformats.org/drawingml/2006/main">
+              <a:ext uri="{FF2B5EF4-FFF2-40B4-BE49-F238E27FC236}">
+                <a16:creationId xmlns:a16="http://schemas.microsoft.com/office/drawing/2014/main" id="{5DA21211-851E-4AEE-B55B-E7D6621F31B8}"/>
+              </a:ext>
+            </a:extLst>
+          </p:cNvPr>
+          <p:cNvSpPr>
+            <a:spLocks xmlns:a="http://schemas.openxmlformats.org/drawingml/2006/main" noGrp="1"/>
+          </p:cNvSpPr>
+          <p:nvPr/>
+        </p:nvSpPr>
+        <p:spPr>
+          <a:xfrm xmlns:a="http://schemas.openxmlformats.org/drawingml/2006/main">
+            <a:off x="514350" y="390525"/>
+            <a:ext cx="76200" cy="76200"/>
+          </a:xfrm>
+          <a:prstGeom xmlns:a="http://schemas.openxmlformats.org/drawingml/2006/main" prst="rect">
+            <a:avLst/>
+          </a:prstGeom>
+          <a:solidFill xmlns:a="http://schemas.openxmlformats.org/drawingml/2006/main">
+            <a:srgbClr val="A85D2A"/>
+          </a:solidFill>
+          <a:ln xmlns:a="http://schemas.openxmlformats.org/drawingml/2006/main" w="0">
+            <a:solidFill>
+              <a:srgbClr val="000000">
+                <a:alpha val="0"/>
+              </a:srgbClr>
+            </a:solidFill>
+            <a:prstDash val="solid"/>
+          </a:ln>
+        </p:spPr>
+      </p:sp>
+      <p:sp>
+        <p:nvSpPr>
+          <p:cNvPr id="36" name="kicker-01-label">
+            <a:extLst xmlns:a="http://schemas.openxmlformats.org/drawingml/2006/main">
+              <a:ext uri="{FF2B5EF4-FFF2-40B4-BE49-F238E27FC236}">
+                <a16:creationId xmlns:a16="http://schemas.microsoft.com/office/drawing/2014/main" id="{C8675454-F5BD-4221-ACC2-91EB4CE9A7D5}"/>
+              </a:ext>
+            </a:extLst>
+          </p:cNvPr>
+          <p:cNvSpPr>
+            <a:spLocks xmlns:a="http://schemas.openxmlformats.org/drawingml/2006/main" noGrp="1"/>
+          </p:cNvSpPr>
+          <p:nvPr/>
+        </p:nvSpPr>
+        <p:spPr>
+          <a:xfrm xmlns:a="http://schemas.openxmlformats.org/drawingml/2006/main">
+            <a:off x="685800" y="323850"/>
+            <a:ext cx="7524750" cy="228600"/>
+          </a:xfrm>
+          <a:prstGeom xmlns:a="http://schemas.openxmlformats.org/drawingml/2006/main" prst="rect">
+            <a:avLst/>
+          </a:prstGeom>
+          <a:solidFill xmlns:a="http://schemas.openxmlformats.org/drawingml/2006/main">
+            <a:srgbClr val="000000">
+              <a:alpha val="0"/>
+            </a:srgbClr>
+          </a:solidFill>
+          <a:ln xmlns:a="http://schemas.openxmlformats.org/drawingml/2006/main" w="0">
+            <a:solidFill>
+              <a:srgbClr val="000000">
+                <a:alpha val="0"/>
+              </a:srgbClr>
+            </a:solidFill>
+            <a:prstDash val="solid"/>
+          </a:ln>
+        </p:spPr>
+        <p:txBody>
+          <a:bodyPr xmlns:a="http://schemas.openxmlformats.org/drawingml/2006/main" lIns="0" tIns="0" rIns="0" bIns="0" anchor="ctr"/>
           <a:lstStyle xmlns:a="http://schemas.openxmlformats.org/drawingml/2006/main"/>
           <a:p xmlns:a="http://schemas.openxmlformats.org/drawingml/2006/main">
             <a:pPr algn="l">
@@ -4098,844 +4923,17 @@
                 <a:ea typeface="Aptos"/>
                 <a:cs typeface="Aptos"/>
               </a:rPr>
-              <a:t>REQUIRED OUTPUT STANDARD</a:t>
+              <a:t>MODULE 1 / LESSON 01 / STRUCTURED DRAFTING DRILL</a:t>
             </a:r>
           </a:p>
         </p:txBody>
       </p:sp>
       <p:sp>
         <p:nvSpPr>
-          <p:cNvPr id="20" name="">
-            <a:extLst xmlns:a="http://schemas.openxmlformats.org/drawingml/2006/main">
-              <a:ext uri="{FF2B5EF4-FFF2-40B4-BE49-F238E27FC236}">
-                <a16:creationId xmlns:a16="http://schemas.microsoft.com/office/drawing/2014/main" id="{DE56D64D-4E36-40CA-83E4-7029405BEE79}"/>
-              </a:ext>
-            </a:extLst>
-          </p:cNvPr>
-          <p:cNvSpPr>
-            <a:spLocks xmlns:a="http://schemas.openxmlformats.org/drawingml/2006/main" noGrp="1"/>
-          </p:cNvSpPr>
-          <p:nvPr/>
-        </p:nvSpPr>
-        <p:spPr>
-          <a:xfrm xmlns:a="http://schemas.openxmlformats.org/drawingml/2006/main">
-            <a:off x="6705600" y="2714625"/>
-            <a:ext cx="57150" cy="57150"/>
-          </a:xfrm>
-          <a:prstGeom xmlns:a="http://schemas.openxmlformats.org/drawingml/2006/main" prst="rect">
-            <a:avLst/>
-          </a:prstGeom>
-          <a:solidFill xmlns:a="http://schemas.openxmlformats.org/drawingml/2006/main">
-            <a:srgbClr val="1D6072"/>
-          </a:solidFill>
-          <a:ln xmlns:a="http://schemas.openxmlformats.org/drawingml/2006/main" w="0">
-            <a:solidFill>
-              <a:srgbClr val="000000">
-                <a:alpha val="0"/>
-              </a:srgbClr>
-            </a:solidFill>
-            <a:prstDash val="solid"/>
-          </a:ln>
-        </p:spPr>
-      </p:sp>
-      <p:sp>
-        <p:nvSpPr>
-          <p:cNvPr id="21" name="">
-            <a:extLst xmlns:a="http://schemas.openxmlformats.org/drawingml/2006/main">
-              <a:ext uri="{FF2B5EF4-FFF2-40B4-BE49-F238E27FC236}">
-                <a16:creationId xmlns:a16="http://schemas.microsoft.com/office/drawing/2014/main" id="{0931D362-00D7-4591-ACA8-C3EF3521E295}"/>
-              </a:ext>
-            </a:extLst>
-          </p:cNvPr>
-          <p:cNvSpPr>
-            <a:spLocks xmlns:a="http://schemas.openxmlformats.org/drawingml/2006/main" noGrp="1"/>
-          </p:cNvSpPr>
-          <p:nvPr/>
-        </p:nvSpPr>
-        <p:spPr>
-          <a:xfrm xmlns:a="http://schemas.openxmlformats.org/drawingml/2006/main">
-            <a:off x="6877050" y="2647950"/>
-            <a:ext cx="4210050" cy="438150"/>
-          </a:xfrm>
-          <a:prstGeom xmlns:a="http://schemas.openxmlformats.org/drawingml/2006/main" prst="rect">
-            <a:avLst/>
-          </a:prstGeom>
-          <a:solidFill xmlns:a="http://schemas.openxmlformats.org/drawingml/2006/main">
-            <a:srgbClr val="000000">
-              <a:alpha val="0"/>
-            </a:srgbClr>
-          </a:solidFill>
-          <a:ln xmlns:a="http://schemas.openxmlformats.org/drawingml/2006/main" w="0">
-            <a:solidFill>
-              <a:srgbClr val="000000">
-                <a:alpha val="0"/>
-              </a:srgbClr>
-            </a:solidFill>
-            <a:prstDash val="solid"/>
-          </a:ln>
-        </p:spPr>
-        <p:txBody>
-          <a:bodyPr xmlns:a="http://schemas.openxmlformats.org/drawingml/2006/main" lIns="0" tIns="0" rIns="0" bIns="0" anchor="t"/>
-          <a:lstStyle xmlns:a="http://schemas.openxmlformats.org/drawingml/2006/main"/>
-          <a:p xmlns:a="http://schemas.openxmlformats.org/drawingml/2006/main">
-            <a:pPr algn="l">
-              <a:defRPr sz="1125" b="0">
-                <a:solidFill>
-                  <a:srgbClr val="172026"/>
-                </a:solidFill>
-                <a:latin typeface="Aptos"/>
-                <a:ea typeface="Aptos"/>
-                <a:cs typeface="Aptos"/>
-              </a:defRPr>
-            </a:pPr>
-            <a:r>
-              <a:rPr sz="1125" b="0">
-                <a:solidFill>
-                  <a:srgbClr val="172026"/>
-                </a:solidFill>
-                <a:latin typeface="Aptos"/>
-                <a:ea typeface="Aptos"/>
-                <a:cs typeface="Aptos"/>
-              </a:rPr>
-              <a:t>Names the missing layer</a:t>
-            </a:r>
-          </a:p>
-        </p:txBody>
-      </p:sp>
-      <p:sp>
-        <p:nvSpPr>
-          <p:cNvPr id="22" name="">
-            <a:extLst xmlns:a="http://schemas.openxmlformats.org/drawingml/2006/main">
-              <a:ext uri="{FF2B5EF4-FFF2-40B4-BE49-F238E27FC236}">
-                <a16:creationId xmlns:a16="http://schemas.microsoft.com/office/drawing/2014/main" id="{6E1DB188-6920-4477-96B8-2D7604617848}"/>
-              </a:ext>
-            </a:extLst>
-          </p:cNvPr>
-          <p:cNvSpPr>
-            <a:spLocks xmlns:a="http://schemas.openxmlformats.org/drawingml/2006/main" noGrp="1"/>
-          </p:cNvSpPr>
-          <p:nvPr/>
-        </p:nvSpPr>
-        <p:spPr>
-          <a:xfrm xmlns:a="http://schemas.openxmlformats.org/drawingml/2006/main">
-            <a:off x="6705600" y="3190875"/>
-            <a:ext cx="57150" cy="57150"/>
-          </a:xfrm>
-          <a:prstGeom xmlns:a="http://schemas.openxmlformats.org/drawingml/2006/main" prst="rect">
-            <a:avLst/>
-          </a:prstGeom>
-          <a:solidFill xmlns:a="http://schemas.openxmlformats.org/drawingml/2006/main">
-            <a:srgbClr val="1D6072"/>
-          </a:solidFill>
-          <a:ln xmlns:a="http://schemas.openxmlformats.org/drawingml/2006/main" w="0">
-            <a:solidFill>
-              <a:srgbClr val="000000">
-                <a:alpha val="0"/>
-              </a:srgbClr>
-            </a:solidFill>
-            <a:prstDash val="solid"/>
-          </a:ln>
-        </p:spPr>
-      </p:sp>
-      <p:sp>
-        <p:nvSpPr>
-          <p:cNvPr id="23" name="">
-            <a:extLst xmlns:a="http://schemas.openxmlformats.org/drawingml/2006/main">
-              <a:ext uri="{FF2B5EF4-FFF2-40B4-BE49-F238E27FC236}">
-                <a16:creationId xmlns:a16="http://schemas.microsoft.com/office/drawing/2014/main" id="{6EEC66A5-453F-43C1-909D-17DFDC5BB703}"/>
-              </a:ext>
-            </a:extLst>
-          </p:cNvPr>
-          <p:cNvSpPr>
-            <a:spLocks xmlns:a="http://schemas.openxmlformats.org/drawingml/2006/main" noGrp="1"/>
-          </p:cNvSpPr>
-          <p:nvPr/>
-        </p:nvSpPr>
-        <p:spPr>
-          <a:xfrm xmlns:a="http://schemas.openxmlformats.org/drawingml/2006/main">
-            <a:off x="6877050" y="3124200"/>
-            <a:ext cx="4210050" cy="438150"/>
-          </a:xfrm>
-          <a:prstGeom xmlns:a="http://schemas.openxmlformats.org/drawingml/2006/main" prst="rect">
-            <a:avLst/>
-          </a:prstGeom>
-          <a:solidFill xmlns:a="http://schemas.openxmlformats.org/drawingml/2006/main">
-            <a:srgbClr val="000000">
-              <a:alpha val="0"/>
-            </a:srgbClr>
-          </a:solidFill>
-          <a:ln xmlns:a="http://schemas.openxmlformats.org/drawingml/2006/main" w="0">
-            <a:solidFill>
-              <a:srgbClr val="000000">
-                <a:alpha val="0"/>
-              </a:srgbClr>
-            </a:solidFill>
-            <a:prstDash val="solid"/>
-          </a:ln>
-        </p:spPr>
-        <p:txBody>
-          <a:bodyPr xmlns:a="http://schemas.openxmlformats.org/drawingml/2006/main" lIns="0" tIns="0" rIns="0" bIns="0" anchor="t"/>
-          <a:lstStyle xmlns:a="http://schemas.openxmlformats.org/drawingml/2006/main"/>
-          <a:p xmlns:a="http://schemas.openxmlformats.org/drawingml/2006/main">
-            <a:pPr algn="l">
-              <a:defRPr sz="1125" b="0">
-                <a:solidFill>
-                  <a:srgbClr val="172026"/>
-                </a:solidFill>
-                <a:latin typeface="Aptos"/>
-                <a:ea typeface="Aptos"/>
-                <a:cs typeface="Aptos"/>
-              </a:defRPr>
-            </a:pPr>
-            <a:r>
-              <a:rPr sz="1125" b="0">
-                <a:solidFill>
-                  <a:srgbClr val="172026"/>
-                </a:solidFill>
-                <a:latin typeface="Aptos"/>
-                <a:ea typeface="Aptos"/>
-                <a:cs typeface="Aptos"/>
-              </a:rPr>
-              <a:t>Explains the anti-pattern and commercial risk</a:t>
-            </a:r>
-          </a:p>
-        </p:txBody>
-      </p:sp>
-      <p:sp>
-        <p:nvSpPr>
-          <p:cNvPr id="24" name="">
-            <a:extLst xmlns:a="http://schemas.openxmlformats.org/drawingml/2006/main">
-              <a:ext uri="{FF2B5EF4-FFF2-40B4-BE49-F238E27FC236}">
-                <a16:creationId xmlns:a16="http://schemas.microsoft.com/office/drawing/2014/main" id="{4836736B-6BE4-4041-AED1-F7BE5D2A13C2}"/>
-              </a:ext>
-            </a:extLst>
-          </p:cNvPr>
-          <p:cNvSpPr>
-            <a:spLocks xmlns:a="http://schemas.openxmlformats.org/drawingml/2006/main" noGrp="1"/>
-          </p:cNvSpPr>
-          <p:nvPr/>
-        </p:nvSpPr>
-        <p:spPr>
-          <a:xfrm xmlns:a="http://schemas.openxmlformats.org/drawingml/2006/main">
-            <a:off x="6705600" y="3667125"/>
-            <a:ext cx="57150" cy="57150"/>
-          </a:xfrm>
-          <a:prstGeom xmlns:a="http://schemas.openxmlformats.org/drawingml/2006/main" prst="rect">
-            <a:avLst/>
-          </a:prstGeom>
-          <a:solidFill xmlns:a="http://schemas.openxmlformats.org/drawingml/2006/main">
-            <a:srgbClr val="1D6072"/>
-          </a:solidFill>
-          <a:ln xmlns:a="http://schemas.openxmlformats.org/drawingml/2006/main" w="0">
-            <a:solidFill>
-              <a:srgbClr val="000000">
-                <a:alpha val="0"/>
-              </a:srgbClr>
-            </a:solidFill>
-            <a:prstDash val="solid"/>
-          </a:ln>
-        </p:spPr>
-      </p:sp>
-      <p:sp>
-        <p:nvSpPr>
-          <p:cNvPr id="25" name="">
-            <a:extLst xmlns:a="http://schemas.openxmlformats.org/drawingml/2006/main">
-              <a:ext uri="{FF2B5EF4-FFF2-40B4-BE49-F238E27FC236}">
-                <a16:creationId xmlns:a16="http://schemas.microsoft.com/office/drawing/2014/main" id="{1F0F4206-F995-4B15-8EC7-0B07D11F2EA2}"/>
-              </a:ext>
-            </a:extLst>
-          </p:cNvPr>
-          <p:cNvSpPr>
-            <a:spLocks xmlns:a="http://schemas.openxmlformats.org/drawingml/2006/main" noGrp="1"/>
-          </p:cNvSpPr>
-          <p:nvPr/>
-        </p:nvSpPr>
-        <p:spPr>
-          <a:xfrm xmlns:a="http://schemas.openxmlformats.org/drawingml/2006/main">
-            <a:off x="6877050" y="3600450"/>
-            <a:ext cx="4210050" cy="438150"/>
-          </a:xfrm>
-          <a:prstGeom xmlns:a="http://schemas.openxmlformats.org/drawingml/2006/main" prst="rect">
-            <a:avLst/>
-          </a:prstGeom>
-          <a:solidFill xmlns:a="http://schemas.openxmlformats.org/drawingml/2006/main">
-            <a:srgbClr val="000000">
-              <a:alpha val="0"/>
-            </a:srgbClr>
-          </a:solidFill>
-          <a:ln xmlns:a="http://schemas.openxmlformats.org/drawingml/2006/main" w="0">
-            <a:solidFill>
-              <a:srgbClr val="000000">
-                <a:alpha val="0"/>
-              </a:srgbClr>
-            </a:solidFill>
-            <a:prstDash val="solid"/>
-          </a:ln>
-        </p:spPr>
-        <p:txBody>
-          <a:bodyPr xmlns:a="http://schemas.openxmlformats.org/drawingml/2006/main" lIns="0" tIns="0" rIns="0" bIns="0" anchor="t"/>
-          <a:lstStyle xmlns:a="http://schemas.openxmlformats.org/drawingml/2006/main"/>
-          <a:p xmlns:a="http://schemas.openxmlformats.org/drawingml/2006/main">
-            <a:pPr algn="l">
-              <a:defRPr sz="1125" b="0">
-                <a:solidFill>
-                  <a:srgbClr val="172026"/>
-                </a:solidFill>
-                <a:latin typeface="Aptos"/>
-                <a:ea typeface="Aptos"/>
-                <a:cs typeface="Aptos"/>
-              </a:defRPr>
-            </a:pPr>
-            <a:r>
-              <a:rPr sz="1125" b="0">
-                <a:solidFill>
-                  <a:srgbClr val="172026"/>
-                </a:solidFill>
-                <a:latin typeface="Aptos"/>
-                <a:ea typeface="Aptos"/>
-                <a:cs typeface="Aptos"/>
-              </a:rPr>
-              <a:t>Defines signal, owner, and cadence</a:t>
-            </a:r>
-          </a:p>
-        </p:txBody>
-      </p:sp>
-      <p:sp>
-        <p:nvSpPr>
-          <p:cNvPr id="26" name="">
-            <a:extLst xmlns:a="http://schemas.openxmlformats.org/drawingml/2006/main">
-              <a:ext uri="{FF2B5EF4-FFF2-40B4-BE49-F238E27FC236}">
-                <a16:creationId xmlns:a16="http://schemas.microsoft.com/office/drawing/2014/main" id="{BB953982-F09F-47D0-870F-ECBB1F80AA68}"/>
-              </a:ext>
-            </a:extLst>
-          </p:cNvPr>
-          <p:cNvSpPr>
-            <a:spLocks xmlns:a="http://schemas.openxmlformats.org/drawingml/2006/main" noGrp="1"/>
-          </p:cNvSpPr>
-          <p:nvPr/>
-        </p:nvSpPr>
-        <p:spPr>
-          <a:xfrm xmlns:a="http://schemas.openxmlformats.org/drawingml/2006/main">
-            <a:off x="6705600" y="4143375"/>
-            <a:ext cx="57150" cy="57150"/>
-          </a:xfrm>
-          <a:prstGeom xmlns:a="http://schemas.openxmlformats.org/drawingml/2006/main" prst="rect">
-            <a:avLst/>
-          </a:prstGeom>
-          <a:solidFill xmlns:a="http://schemas.openxmlformats.org/drawingml/2006/main">
-            <a:srgbClr val="1D6072"/>
-          </a:solidFill>
-          <a:ln xmlns:a="http://schemas.openxmlformats.org/drawingml/2006/main" w="0">
-            <a:solidFill>
-              <a:srgbClr val="000000">
-                <a:alpha val="0"/>
-              </a:srgbClr>
-            </a:solidFill>
-            <a:prstDash val="solid"/>
-          </a:ln>
-        </p:spPr>
-      </p:sp>
-      <p:sp>
-        <p:nvSpPr>
-          <p:cNvPr id="27" name="">
-            <a:extLst xmlns:a="http://schemas.openxmlformats.org/drawingml/2006/main">
-              <a:ext uri="{FF2B5EF4-FFF2-40B4-BE49-F238E27FC236}">
-                <a16:creationId xmlns:a16="http://schemas.microsoft.com/office/drawing/2014/main" id="{3F139242-1529-43F1-9298-DE14CBC0CF5B}"/>
-              </a:ext>
-            </a:extLst>
-          </p:cNvPr>
-          <p:cNvSpPr>
-            <a:spLocks xmlns:a="http://schemas.openxmlformats.org/drawingml/2006/main" noGrp="1"/>
-          </p:cNvSpPr>
-          <p:nvPr/>
-        </p:nvSpPr>
-        <p:spPr>
-          <a:xfrm xmlns:a="http://schemas.openxmlformats.org/drawingml/2006/main">
-            <a:off x="6877050" y="4076700"/>
-            <a:ext cx="4210050" cy="438150"/>
-          </a:xfrm>
-          <a:prstGeom xmlns:a="http://schemas.openxmlformats.org/drawingml/2006/main" prst="rect">
-            <a:avLst/>
-          </a:prstGeom>
-          <a:solidFill xmlns:a="http://schemas.openxmlformats.org/drawingml/2006/main">
-            <a:srgbClr val="000000">
-              <a:alpha val="0"/>
-            </a:srgbClr>
-          </a:solidFill>
-          <a:ln xmlns:a="http://schemas.openxmlformats.org/drawingml/2006/main" w="0">
-            <a:solidFill>
-              <a:srgbClr val="000000">
-                <a:alpha val="0"/>
-              </a:srgbClr>
-            </a:solidFill>
-            <a:prstDash val="solid"/>
-          </a:ln>
-        </p:spPr>
-        <p:txBody>
-          <a:bodyPr xmlns:a="http://schemas.openxmlformats.org/drawingml/2006/main" lIns="0" tIns="0" rIns="0" bIns="0" anchor="t"/>
-          <a:lstStyle xmlns:a="http://schemas.openxmlformats.org/drawingml/2006/main"/>
-          <a:p xmlns:a="http://schemas.openxmlformats.org/drawingml/2006/main">
-            <a:pPr algn="l">
-              <a:defRPr sz="1125" b="0">
-                <a:solidFill>
-                  <a:srgbClr val="172026"/>
-                </a:solidFill>
-                <a:latin typeface="Aptos"/>
-                <a:ea typeface="Aptos"/>
-                <a:cs typeface="Aptos"/>
-              </a:defRPr>
-            </a:pPr>
-            <a:r>
-              <a:rPr sz="1125" b="0">
-                <a:solidFill>
-                  <a:srgbClr val="172026"/>
-                </a:solidFill>
-                <a:latin typeface="Aptos"/>
-                <a:ea typeface="Aptos"/>
-                <a:cs typeface="Aptos"/>
-              </a:rPr>
-              <a:t>Lists human validation questions</a:t>
-            </a:r>
-          </a:p>
-        </p:txBody>
-      </p:sp>
-      <p:sp>
-        <p:nvSpPr>
-          <p:cNvPr id="28" name="">
-            <a:extLst xmlns:a="http://schemas.openxmlformats.org/drawingml/2006/main">
-              <a:ext uri="{FF2B5EF4-FFF2-40B4-BE49-F238E27FC236}">
-                <a16:creationId xmlns:a16="http://schemas.microsoft.com/office/drawing/2014/main" id="{D0B9A621-718F-444E-BD55-71240F975B4F}"/>
-              </a:ext>
-            </a:extLst>
-          </p:cNvPr>
-          <p:cNvSpPr>
-            <a:spLocks xmlns:a="http://schemas.openxmlformats.org/drawingml/2006/main" noGrp="1"/>
-          </p:cNvSpPr>
-          <p:nvPr/>
-        </p:nvSpPr>
-        <p:spPr>
-          <a:xfrm xmlns:a="http://schemas.openxmlformats.org/drawingml/2006/main">
-            <a:off x="514350" y="6438900"/>
-            <a:ext cx="10915650" cy="9525"/>
-          </a:xfrm>
-          <a:prstGeom xmlns:a="http://schemas.openxmlformats.org/drawingml/2006/main" prst="rect">
-            <a:avLst/>
-          </a:prstGeom>
-          <a:solidFill xmlns:a="http://schemas.openxmlformats.org/drawingml/2006/main">
-            <a:srgbClr val="D9DDD6"/>
-          </a:solidFill>
-          <a:ln xmlns:a="http://schemas.openxmlformats.org/drawingml/2006/main" w="0">
-            <a:solidFill>
-              <a:srgbClr val="000000">
-                <a:alpha val="0"/>
-              </a:srgbClr>
-            </a:solidFill>
-            <a:prstDash val="solid"/>
-          </a:ln>
-        </p:spPr>
-      </p:sp>
-      <p:sp>
-        <p:nvSpPr>
-          <p:cNvPr id="29" name="">
-            <a:extLst xmlns:a="http://schemas.openxmlformats.org/drawingml/2006/main">
-              <a:ext uri="{FF2B5EF4-FFF2-40B4-BE49-F238E27FC236}">
-                <a16:creationId xmlns:a16="http://schemas.microsoft.com/office/drawing/2014/main" id="{F61BBC5E-A8E9-43E2-916F-DF3602C4F2D8}"/>
-              </a:ext>
-            </a:extLst>
-          </p:cNvPr>
-          <p:cNvSpPr>
-            <a:spLocks xmlns:a="http://schemas.openxmlformats.org/drawingml/2006/main" noGrp="1"/>
-          </p:cNvSpPr>
-          <p:nvPr/>
-        </p:nvSpPr>
-        <p:spPr>
-          <a:xfrm xmlns:a="http://schemas.openxmlformats.org/drawingml/2006/main">
-            <a:off x="514350" y="6553200"/>
-            <a:ext cx="5905500" cy="171450"/>
-          </a:xfrm>
-          <a:prstGeom xmlns:a="http://schemas.openxmlformats.org/drawingml/2006/main" prst="rect">
-            <a:avLst/>
-          </a:prstGeom>
-          <a:solidFill xmlns:a="http://schemas.openxmlformats.org/drawingml/2006/main">
-            <a:srgbClr val="000000">
-              <a:alpha val="0"/>
-            </a:srgbClr>
-          </a:solidFill>
-          <a:ln xmlns:a="http://schemas.openxmlformats.org/drawingml/2006/main" w="0">
-            <a:solidFill>
-              <a:srgbClr val="000000">
-                <a:alpha val="0"/>
-              </a:srgbClr>
-            </a:solidFill>
-            <a:prstDash val="solid"/>
-          </a:ln>
-        </p:spPr>
-        <p:txBody>
-          <a:bodyPr xmlns:a="http://schemas.openxmlformats.org/drawingml/2006/main" lIns="0" tIns="0" rIns="0" bIns="0" anchor="t"/>
-          <a:lstStyle xmlns:a="http://schemas.openxmlformats.org/drawingml/2006/main"/>
-          <a:p xmlns:a="http://schemas.openxmlformats.org/drawingml/2006/main">
-            <a:pPr algn="l">
-              <a:defRPr sz="675" b="0">
-                <a:solidFill>
-                  <a:srgbClr val="59646A"/>
-                </a:solidFill>
-                <a:latin typeface="Aptos"/>
-                <a:ea typeface="Aptos"/>
-                <a:cs typeface="Aptos"/>
-              </a:defRPr>
-            </a:pPr>
-            <a:r>
-              <a:rPr sz="675" b="0">
-                <a:solidFill>
-                  <a:srgbClr val="59646A"/>
-                </a:solidFill>
-                <a:latin typeface="Aptos"/>
-                <a:ea typeface="Aptos"/>
-                <a:cs typeface="Aptos"/>
-              </a:rPr>
-              <a:t>Lesson 01 - Industrial Demand Generation Foundations</a:t>
-            </a:r>
-          </a:p>
-        </p:txBody>
-      </p:sp>
-      <p:sp>
-        <p:nvSpPr>
-          <p:cNvPr id="30" name="">
-            <a:extLst xmlns:a="http://schemas.openxmlformats.org/drawingml/2006/main">
-              <a:ext uri="{FF2B5EF4-FFF2-40B4-BE49-F238E27FC236}">
-                <a16:creationId xmlns:a16="http://schemas.microsoft.com/office/drawing/2014/main" id="{92384B0F-B88F-4C92-AFD4-84338FC3726B}"/>
-              </a:ext>
-            </a:extLst>
-          </p:cNvPr>
-          <p:cNvSpPr>
-            <a:spLocks xmlns:a="http://schemas.openxmlformats.org/drawingml/2006/main" noGrp="1"/>
-          </p:cNvSpPr>
-          <p:nvPr/>
-        </p:nvSpPr>
-        <p:spPr>
-          <a:xfrm xmlns:a="http://schemas.openxmlformats.org/drawingml/2006/main">
-            <a:off x="5334000" y="6553200"/>
-            <a:ext cx="4095750" cy="171450"/>
-          </a:xfrm>
-          <a:prstGeom xmlns:a="http://schemas.openxmlformats.org/drawingml/2006/main" prst="rect">
-            <a:avLst/>
-          </a:prstGeom>
-          <a:solidFill xmlns:a="http://schemas.openxmlformats.org/drawingml/2006/main">
-            <a:srgbClr val="000000">
-              <a:alpha val="0"/>
-            </a:srgbClr>
-          </a:solidFill>
-          <a:ln xmlns:a="http://schemas.openxmlformats.org/drawingml/2006/main" w="0">
-            <a:solidFill>
-              <a:srgbClr val="000000">
-                <a:alpha val="0"/>
-              </a:srgbClr>
-            </a:solidFill>
-            <a:prstDash val="solid"/>
-          </a:ln>
-        </p:spPr>
-        <p:txBody>
-          <a:bodyPr xmlns:a="http://schemas.openxmlformats.org/drawingml/2006/main" lIns="0" tIns="0" rIns="0" bIns="0" anchor="t"/>
-          <a:lstStyle xmlns:a="http://schemas.openxmlformats.org/drawingml/2006/main"/>
-          <a:p xmlns:a="http://schemas.openxmlformats.org/drawingml/2006/main">
-            <a:pPr algn="r">
-              <a:defRPr sz="600" b="0">
-                <a:solidFill>
-                  <a:srgbClr val="59646A"/>
-                </a:solidFill>
-                <a:latin typeface="Aptos"/>
-                <a:ea typeface="Aptos"/>
-                <a:cs typeface="Aptos"/>
-              </a:defRPr>
-            </a:pPr>
-            <a:r>
-              <a:rPr sz="600" b="0">
-                <a:solidFill>
-                  <a:srgbClr val="59646A"/>
-                </a:solidFill>
-                <a:latin typeface="Aptos"/>
-                <a:ea typeface="Aptos"/>
-                <a:cs typeface="Aptos"/>
-              </a:rPr>
-              <a:t>Source: modules/module-01-industrial-demand-generation/lessons/01-industrial-demand-generation-foundations.md @ 9e28222</a:t>
-            </a:r>
-          </a:p>
-        </p:txBody>
-      </p:sp>
-      <p:sp>
-        <p:nvSpPr>
-          <p:cNvPr id="31" name="">
-            <a:extLst xmlns:a="http://schemas.openxmlformats.org/drawingml/2006/main">
-              <a:ext uri="{FF2B5EF4-FFF2-40B4-BE49-F238E27FC236}">
-                <a16:creationId xmlns:a16="http://schemas.microsoft.com/office/drawing/2014/main" id="{C3027DCF-E17D-482A-ACCB-71A3E944BDC3}"/>
-              </a:ext>
-            </a:extLst>
-          </p:cNvPr>
-          <p:cNvSpPr>
-            <a:spLocks xmlns:a="http://schemas.openxmlformats.org/drawingml/2006/main" noGrp="1"/>
-          </p:cNvSpPr>
-          <p:nvPr/>
-        </p:nvSpPr>
-        <p:spPr>
-          <a:xfrm xmlns:a="http://schemas.openxmlformats.org/drawingml/2006/main">
-            <a:off x="10668000" y="6553200"/>
-            <a:ext cx="762000" cy="171450"/>
-          </a:xfrm>
-          <a:prstGeom xmlns:a="http://schemas.openxmlformats.org/drawingml/2006/main" prst="rect">
-            <a:avLst/>
-          </a:prstGeom>
-          <a:solidFill xmlns:a="http://schemas.openxmlformats.org/drawingml/2006/main">
-            <a:srgbClr val="000000">
-              <a:alpha val="0"/>
-            </a:srgbClr>
-          </a:solidFill>
-          <a:ln xmlns:a="http://schemas.openxmlformats.org/drawingml/2006/main" w="0">
-            <a:solidFill>
-              <a:srgbClr val="000000">
-                <a:alpha val="0"/>
-              </a:srgbClr>
-            </a:solidFill>
-            <a:prstDash val="solid"/>
-          </a:ln>
-        </p:spPr>
-        <p:txBody>
-          <a:bodyPr xmlns:a="http://schemas.openxmlformats.org/drawingml/2006/main" lIns="0" tIns="0" rIns="0" bIns="0" anchor="t"/>
-          <a:lstStyle xmlns:a="http://schemas.openxmlformats.org/drawingml/2006/main"/>
-          <a:p xmlns:a="http://schemas.openxmlformats.org/drawingml/2006/main">
-            <a:pPr algn="r">
-              <a:defRPr sz="675" b="0">
-                <a:solidFill>
-                  <a:srgbClr val="59646A"/>
-                </a:solidFill>
-                <a:latin typeface="Aptos"/>
-                <a:ea typeface="Aptos"/>
-                <a:cs typeface="Aptos"/>
-              </a:defRPr>
-            </a:pPr>
-            <a:r>
-              <a:rPr sz="675" b="0">
-                <a:solidFill>
-                  <a:srgbClr val="59646A"/>
-                </a:solidFill>
-                <a:latin typeface="Aptos"/>
-                <a:ea typeface="Aptos"/>
-                <a:cs typeface="Aptos"/>
-              </a:rPr>
-              <a:t>10/15</a:t>
-            </a:r>
-          </a:p>
-        </p:txBody>
-      </p:sp>
-      <p:sp>
-        <p:nvSpPr>
-          <p:cNvPr id="32" name="">
-            <a:extLst xmlns:a="http://schemas.openxmlformats.org/drawingml/2006/main">
-              <a:ext uri="{FF2B5EF4-FFF2-40B4-BE49-F238E27FC236}">
-                <a16:creationId xmlns:a16="http://schemas.microsoft.com/office/drawing/2014/main" id="{B813E07D-DE35-46C1-8A69-F99E7C88AF18}"/>
-              </a:ext>
-            </a:extLst>
-          </p:cNvPr>
-          <p:cNvSpPr>
-            <a:spLocks xmlns:a="http://schemas.openxmlformats.org/drawingml/2006/main" noGrp="1"/>
-          </p:cNvSpPr>
-          <p:nvPr/>
-        </p:nvSpPr>
-        <p:spPr>
-          <a:xfrm xmlns:a="http://schemas.openxmlformats.org/drawingml/2006/main">
-            <a:off x="0" y="0"/>
-            <a:ext cx="12192000" cy="1809750"/>
-          </a:xfrm>
-          <a:prstGeom xmlns:a="http://schemas.openxmlformats.org/drawingml/2006/main" prst="rect">
-            <a:avLst/>
-          </a:prstGeom>
-          <a:solidFill xmlns:a="http://schemas.openxmlformats.org/drawingml/2006/main">
-            <a:srgbClr val="F5F6F2"/>
-          </a:solidFill>
-          <a:ln xmlns:a="http://schemas.openxmlformats.org/drawingml/2006/main" w="0">
-            <a:solidFill>
-              <a:srgbClr val="000000">
-                <a:alpha val="0"/>
-              </a:srgbClr>
-            </a:solidFill>
-            <a:prstDash val="solid"/>
-          </a:ln>
-        </p:spPr>
-      </p:sp>
-      <p:sp>
-        <p:nvSpPr>
-          <p:cNvPr id="33" name="">
-            <a:extLst xmlns:a="http://schemas.openxmlformats.org/drawingml/2006/main">
-              <a:ext uri="{FF2B5EF4-FFF2-40B4-BE49-F238E27FC236}">
-                <a16:creationId xmlns:a16="http://schemas.microsoft.com/office/drawing/2014/main" id="{A66CBB84-69EC-4B56-9440-6F0113EDE849}"/>
-              </a:ext>
-            </a:extLst>
-          </p:cNvPr>
-          <p:cNvSpPr>
-            <a:spLocks xmlns:a="http://schemas.openxmlformats.org/drawingml/2006/main" noGrp="1"/>
-          </p:cNvSpPr>
-          <p:nvPr/>
-        </p:nvSpPr>
-        <p:spPr>
-          <a:xfrm xmlns:a="http://schemas.openxmlformats.org/drawingml/2006/main">
-            <a:off x="0" y="0"/>
-            <a:ext cx="171450" cy="1809750"/>
-          </a:xfrm>
-          <a:prstGeom xmlns:a="http://schemas.openxmlformats.org/drawingml/2006/main" prst="rect">
-            <a:avLst/>
-          </a:prstGeom>
-          <a:solidFill xmlns:a="http://schemas.openxmlformats.org/drawingml/2006/main">
-            <a:srgbClr val="12232B"/>
-          </a:solidFill>
-          <a:ln xmlns:a="http://schemas.openxmlformats.org/drawingml/2006/main" w="0">
-            <a:solidFill>
-              <a:srgbClr val="000000">
-                <a:alpha val="0"/>
-              </a:srgbClr>
-            </a:solidFill>
-            <a:prstDash val="solid"/>
-          </a:ln>
-        </p:spPr>
-      </p:sp>
-      <p:sp>
-        <p:nvSpPr>
-          <p:cNvPr id="34" name="">
-            <a:extLst xmlns:a="http://schemas.openxmlformats.org/drawingml/2006/main">
-              <a:ext uri="{FF2B5EF4-FFF2-40B4-BE49-F238E27FC236}">
-                <a16:creationId xmlns:a16="http://schemas.microsoft.com/office/drawing/2014/main" id="{6B854A24-06EB-4FFD-BC9D-A265D24A7CAC}"/>
-              </a:ext>
-            </a:extLst>
-          </p:cNvPr>
-          <p:cNvSpPr>
-            <a:spLocks xmlns:a="http://schemas.openxmlformats.org/drawingml/2006/main" noGrp="1"/>
-          </p:cNvSpPr>
-          <p:nvPr/>
-        </p:nvSpPr>
-        <p:spPr>
-          <a:xfrm xmlns:a="http://schemas.openxmlformats.org/drawingml/2006/main">
-            <a:off x="171450" y="0"/>
-            <a:ext cx="57150" cy="1809750"/>
-          </a:xfrm>
-          <a:prstGeom xmlns:a="http://schemas.openxmlformats.org/drawingml/2006/main" prst="rect">
-            <a:avLst/>
-          </a:prstGeom>
-          <a:solidFill xmlns:a="http://schemas.openxmlformats.org/drawingml/2006/main">
-            <a:srgbClr val="A85D2A"/>
-          </a:solidFill>
-          <a:ln xmlns:a="http://schemas.openxmlformats.org/drawingml/2006/main" w="0">
-            <a:solidFill>
-              <a:srgbClr val="000000">
-                <a:alpha val="0"/>
-              </a:srgbClr>
-            </a:solidFill>
-            <a:prstDash val="solid"/>
-          </a:ln>
-        </p:spPr>
-      </p:sp>
-      <p:sp>
-        <p:nvSpPr>
-          <p:cNvPr id="35" name="kicker-01-marker">
-            <a:extLst xmlns:a="http://schemas.openxmlformats.org/drawingml/2006/main">
-              <a:ext uri="{FF2B5EF4-FFF2-40B4-BE49-F238E27FC236}">
-                <a16:creationId xmlns:a16="http://schemas.microsoft.com/office/drawing/2014/main" id="{53456B4C-C2E7-4F49-B4B5-A7BA5B42231C}"/>
-              </a:ext>
-            </a:extLst>
-          </p:cNvPr>
-          <p:cNvSpPr>
-            <a:spLocks xmlns:a="http://schemas.openxmlformats.org/drawingml/2006/main" noGrp="1"/>
-          </p:cNvSpPr>
-          <p:nvPr/>
-        </p:nvSpPr>
-        <p:spPr>
-          <a:xfrm xmlns:a="http://schemas.openxmlformats.org/drawingml/2006/main">
-            <a:off x="514350" y="390525"/>
-            <a:ext cx="76200" cy="76200"/>
-          </a:xfrm>
-          <a:prstGeom xmlns:a="http://schemas.openxmlformats.org/drawingml/2006/main" prst="rect">
-            <a:avLst/>
-          </a:prstGeom>
-          <a:solidFill xmlns:a="http://schemas.openxmlformats.org/drawingml/2006/main">
-            <a:srgbClr val="A85D2A"/>
-          </a:solidFill>
-          <a:ln xmlns:a="http://schemas.openxmlformats.org/drawingml/2006/main" w="0">
-            <a:solidFill>
-              <a:srgbClr val="000000">
-                <a:alpha val="0"/>
-              </a:srgbClr>
-            </a:solidFill>
-            <a:prstDash val="solid"/>
-          </a:ln>
-        </p:spPr>
-      </p:sp>
-      <p:sp>
-        <p:nvSpPr>
-          <p:cNvPr id="36" name="kicker-01-label">
-            <a:extLst xmlns:a="http://schemas.openxmlformats.org/drawingml/2006/main">
-              <a:ext uri="{FF2B5EF4-FFF2-40B4-BE49-F238E27FC236}">
-                <a16:creationId xmlns:a16="http://schemas.microsoft.com/office/drawing/2014/main" id="{86E98E6D-27A6-49BE-BBBD-2A790FD2D372}"/>
-              </a:ext>
-            </a:extLst>
-          </p:cNvPr>
-          <p:cNvSpPr>
-            <a:spLocks xmlns:a="http://schemas.openxmlformats.org/drawingml/2006/main" noGrp="1"/>
-          </p:cNvSpPr>
-          <p:nvPr/>
-        </p:nvSpPr>
-        <p:spPr>
-          <a:xfrm xmlns:a="http://schemas.openxmlformats.org/drawingml/2006/main">
-            <a:off x="685800" y="323850"/>
-            <a:ext cx="7524750" cy="228600"/>
-          </a:xfrm>
-          <a:prstGeom xmlns:a="http://schemas.openxmlformats.org/drawingml/2006/main" prst="rect">
-            <a:avLst/>
-          </a:prstGeom>
-          <a:solidFill xmlns:a="http://schemas.openxmlformats.org/drawingml/2006/main">
-            <a:srgbClr val="000000">
-              <a:alpha val="0"/>
-            </a:srgbClr>
-          </a:solidFill>
-          <a:ln xmlns:a="http://schemas.openxmlformats.org/drawingml/2006/main" w="0">
-            <a:solidFill>
-              <a:srgbClr val="000000">
-                <a:alpha val="0"/>
-              </a:srgbClr>
-            </a:solidFill>
-            <a:prstDash val="solid"/>
-          </a:ln>
-        </p:spPr>
-        <p:txBody>
-          <a:bodyPr xmlns:a="http://schemas.openxmlformats.org/drawingml/2006/main" lIns="0" tIns="0" rIns="0" bIns="0" anchor="ctr"/>
-          <a:lstStyle xmlns:a="http://schemas.openxmlformats.org/drawingml/2006/main"/>
-          <a:p xmlns:a="http://schemas.openxmlformats.org/drawingml/2006/main">
-            <a:pPr algn="l">
-              <a:defRPr sz="750" b="1">
-                <a:solidFill>
-                  <a:srgbClr val="59646A"/>
-                </a:solidFill>
-                <a:latin typeface="Aptos"/>
-                <a:ea typeface="Aptos"/>
-                <a:cs typeface="Aptos"/>
-              </a:defRPr>
-            </a:pPr>
-            <a:r>
-              <a:rPr sz="750" b="1">
-                <a:solidFill>
-                  <a:srgbClr val="59646A"/>
-                </a:solidFill>
-                <a:latin typeface="Aptos"/>
-                <a:ea typeface="Aptos"/>
-                <a:cs typeface="Aptos"/>
-              </a:rPr>
-              <a:t>MODULE 1 / LESSON 01 / AI-ASSISTED EXERCISE</a:t>
-            </a:r>
-          </a:p>
-        </p:txBody>
-      </p:sp>
-      <p:sp>
-        <p:nvSpPr>
           <p:cNvPr id="37" name="">
             <a:extLst xmlns:a="http://schemas.openxmlformats.org/drawingml/2006/main">
               <a:ext uri="{FF2B5EF4-FFF2-40B4-BE49-F238E27FC236}">
-                <a16:creationId xmlns:a16="http://schemas.microsoft.com/office/drawing/2014/main" id="{EDF2A2B1-1CE9-49AB-B024-F8D4D50C8FD9}"/>
+                <a16:creationId xmlns:a16="http://schemas.microsoft.com/office/drawing/2014/main" id="{84865C7F-03F7-413E-A47D-039A9C97E0A8}"/>
               </a:ext>
             </a:extLst>
           </p:cNvPr>
@@ -4989,7 +4987,7 @@
                 <a:ea typeface="Aptos Display"/>
                 <a:cs typeface="Aptos Display"/>
               </a:rPr>
-              <a:t>Use AI to structure the attempt, then make humans responsible for judgment.</a:t>
+              <a:t>Structure the first draft before the room critiques it.</a:t>
             </a:r>
           </a:p>
         </p:txBody>
@@ -4999,7 +4997,7 @@
           <p:cNvPr id="38" name="">
             <a:extLst xmlns:a="http://schemas.openxmlformats.org/drawingml/2006/main">
               <a:ext uri="{FF2B5EF4-FFF2-40B4-BE49-F238E27FC236}">
-                <a16:creationId xmlns:a16="http://schemas.microsoft.com/office/drawing/2014/main" id="{F75F2307-AAEE-4EB4-A58C-28EDD95E1D91}"/>
+                <a16:creationId xmlns:a16="http://schemas.microsoft.com/office/drawing/2014/main" id="{53923497-AA7B-45E2-8F99-6E52BA789167}"/>
               </a:ext>
             </a:extLst>
           </p:cNvPr>
@@ -5053,7 +5051,7 @@
                 <a:ea typeface="Aptos"/>
                 <a:cs typeface="Aptos"/>
               </a:rPr>
-              <a:t>The prompt is constrained by source, assumptions, output standard, and human validation.</a:t>
+              <a:t>The brief is constrained by source evidence, assumptions, output standard, and validation.</a:t>
             </a:r>
           </a:p>
         </p:txBody>
@@ -5063,7 +5061,7 @@
           <p:cNvPr id="39" name="">
             <a:extLst xmlns:a="http://schemas.openxmlformats.org/drawingml/2006/main">
               <a:ext uri="{FF2B5EF4-FFF2-40B4-BE49-F238E27FC236}">
-                <a16:creationId xmlns:a16="http://schemas.microsoft.com/office/drawing/2014/main" id="{B75EC8E9-0148-4CD0-9542-8541C7876C2E}"/>
+                <a16:creationId xmlns:a16="http://schemas.microsoft.com/office/drawing/2014/main" id="{18559875-A5BB-4210-AC2E-231B8C557D21}"/>
               </a:ext>
             </a:extLst>
           </p:cNvPr>
@@ -5098,7 +5096,7 @@
           <p:cNvPr id="40" name="">
             <a:extLst xmlns:a="http://schemas.openxmlformats.org/drawingml/2006/main">
               <a:ext uri="{FF2B5EF4-FFF2-40B4-BE49-F238E27FC236}">
-                <a16:creationId xmlns:a16="http://schemas.microsoft.com/office/drawing/2014/main" id="{C45809E5-BFDC-436A-A636-94CBAAC97EAB}"/>
+                <a16:creationId xmlns:a16="http://schemas.microsoft.com/office/drawing/2014/main" id="{7EC606B9-B403-4B11-BD59-7FBB465CF66C}"/>
               </a:ext>
             </a:extLst>
           </p:cNvPr>
@@ -5133,7 +5131,7 @@
           <p:cNvPr id="41" name="">
             <a:extLst xmlns:a="http://schemas.openxmlformats.org/drawingml/2006/main">
               <a:ext uri="{FF2B5EF4-FFF2-40B4-BE49-F238E27FC236}">
-                <a16:creationId xmlns:a16="http://schemas.microsoft.com/office/drawing/2014/main" id="{DC7F23CD-B6FB-4F3F-BD3E-CCE60A59F860}"/>
+                <a16:creationId xmlns:a16="http://schemas.microsoft.com/office/drawing/2014/main" id="{86B6873F-1806-428E-8FEF-108B86CF7DC5}"/>
               </a:ext>
             </a:extLst>
           </p:cNvPr>
@@ -5168,7 +5166,7 @@
           <p:cNvPr id="42" name="">
             <a:extLst xmlns:a="http://schemas.openxmlformats.org/drawingml/2006/main">
               <a:ext uri="{FF2B5EF4-FFF2-40B4-BE49-F238E27FC236}">
-                <a16:creationId xmlns:a16="http://schemas.microsoft.com/office/drawing/2014/main" id="{D2EADEF0-281D-4A50-8FFF-815D7492A91C}"/>
+                <a16:creationId xmlns:a16="http://schemas.microsoft.com/office/drawing/2014/main" id="{447B2B48-5FA0-4D99-80AF-CF5B1EEB3171}"/>
               </a:ext>
             </a:extLst>
           </p:cNvPr>
@@ -5203,7 +5201,7 @@
           <p:cNvPr id="43" name="">
             <a:extLst xmlns:a="http://schemas.openxmlformats.org/drawingml/2006/main">
               <a:ext uri="{FF2B5EF4-FFF2-40B4-BE49-F238E27FC236}">
-                <a16:creationId xmlns:a16="http://schemas.microsoft.com/office/drawing/2014/main" id="{DCF34D98-4967-46FE-B9CC-BABEAE2A5948}"/>
+                <a16:creationId xmlns:a16="http://schemas.microsoft.com/office/drawing/2014/main" id="{66775613-69CA-4DEF-BE77-B9D9EE413558}"/>
               </a:ext>
             </a:extLst>
           </p:cNvPr>
@@ -5267,7 +5265,7 @@
           <p:cNvPr id="44" name="">
             <a:extLst xmlns:a="http://schemas.openxmlformats.org/drawingml/2006/main">
               <a:ext uri="{FF2B5EF4-FFF2-40B4-BE49-F238E27FC236}">
-                <a16:creationId xmlns:a16="http://schemas.microsoft.com/office/drawing/2014/main" id="{18D76B17-890A-4806-88A4-450C06F23021}"/>
+                <a16:creationId xmlns:a16="http://schemas.microsoft.com/office/drawing/2014/main" id="{ED2DD5BE-7948-4ADA-94EE-B0D18E947F57}"/>
               </a:ext>
             </a:extLst>
           </p:cNvPr>
@@ -5331,7 +5329,7 @@
           <p:cNvPr id="45" name="">
             <a:extLst xmlns:a="http://schemas.openxmlformats.org/drawingml/2006/main">
               <a:ext uri="{FF2B5EF4-FFF2-40B4-BE49-F238E27FC236}">
-                <a16:creationId xmlns:a16="http://schemas.microsoft.com/office/drawing/2014/main" id="{6CC70333-067F-43C9-AC18-CDF1201F1BE1}"/>
+                <a16:creationId xmlns:a16="http://schemas.microsoft.com/office/drawing/2014/main" id="{63E41736-4622-4B1B-8745-DA979E2F986E}"/>
               </a:ext>
             </a:extLst>
           </p:cNvPr>
@@ -5393,7 +5391,7 @@
     </p:spTree>
     <p:extLst>
       <p:ext uri="{BB962C8B-B14F-4D97-AF65-F5344CB8AC3E}">
-        <p14:creationId xmlns:p14="http://schemas.microsoft.com/office/powerpoint/2010/main" val="481025899"/>
+        <p14:creationId xmlns:p14="http://schemas.microsoft.com/office/powerpoint/2010/main" val="2005172397"/>
       </p:ext>
     </p:extLst>
   </p:cSld>
@@ -5417,7 +5415,7 @@
           <p:cNvPr id="1" name="">
             <a:extLst xmlns:a="http://schemas.openxmlformats.org/drawingml/2006/main">
               <a:ext uri="{FF2B5EF4-FFF2-40B4-BE49-F238E27FC236}">
-                <a16:creationId xmlns:a16="http://schemas.microsoft.com/office/drawing/2014/main" id="{022B40E4-35F7-4678-AE31-C12D43298C48}"/>
+                <a16:creationId xmlns:a16="http://schemas.microsoft.com/office/drawing/2014/main" id="{F64BCF20-61A0-43A2-B3BB-B284D91C4B68}"/>
               </a:ext>
             </a:extLst>
           </p:cNvPr>
@@ -5452,7 +5450,7 @@
           <p:cNvPr id="2" name="">
             <a:extLst xmlns:a="http://schemas.openxmlformats.org/drawingml/2006/main">
               <a:ext uri="{FF2B5EF4-FFF2-40B4-BE49-F238E27FC236}">
-                <a16:creationId xmlns:a16="http://schemas.microsoft.com/office/drawing/2014/main" id="{7C0D0F6B-2D09-4451-A728-F883F43FB7F1}"/>
+                <a16:creationId xmlns:a16="http://schemas.microsoft.com/office/drawing/2014/main" id="{3FAA58C9-1548-429E-B808-3A6664512D29}"/>
               </a:ext>
             </a:extLst>
           </p:cNvPr>
@@ -5487,7 +5485,7 @@
           <p:cNvPr id="3" name="">
             <a:extLst xmlns:a="http://schemas.openxmlformats.org/drawingml/2006/main">
               <a:ext uri="{FF2B5EF4-FFF2-40B4-BE49-F238E27FC236}">
-                <a16:creationId xmlns:a16="http://schemas.microsoft.com/office/drawing/2014/main" id="{135B7CF5-2BB0-4BFD-B99E-EBA0045A7150}"/>
+                <a16:creationId xmlns:a16="http://schemas.microsoft.com/office/drawing/2014/main" id="{7A320F1C-2063-4BE1-8641-66FCCE2D4016}"/>
               </a:ext>
             </a:extLst>
           </p:cNvPr>
@@ -5522,7 +5520,7 @@
           <p:cNvPr id="4" name="kicker-01-marker">
             <a:extLst xmlns:a="http://schemas.openxmlformats.org/drawingml/2006/main">
               <a:ext uri="{FF2B5EF4-FFF2-40B4-BE49-F238E27FC236}">
-                <a16:creationId xmlns:a16="http://schemas.microsoft.com/office/drawing/2014/main" id="{CB9FDC5B-DE93-4569-9D0B-4AEEDAB48B29}"/>
+                <a16:creationId xmlns:a16="http://schemas.microsoft.com/office/drawing/2014/main" id="{952BDB9A-F727-4887-BE9D-E17AD184D1A5}"/>
               </a:ext>
             </a:extLst>
           </p:cNvPr>
@@ -5557,7 +5555,7 @@
           <p:cNvPr id="5" name="kicker-01-label">
             <a:extLst xmlns:a="http://schemas.openxmlformats.org/drawingml/2006/main">
               <a:ext uri="{FF2B5EF4-FFF2-40B4-BE49-F238E27FC236}">
-                <a16:creationId xmlns:a16="http://schemas.microsoft.com/office/drawing/2014/main" id="{46DD4FA3-E89B-4C5E-B64B-54D54BC84439}"/>
+                <a16:creationId xmlns:a16="http://schemas.microsoft.com/office/drawing/2014/main" id="{EEC559C5-5F9F-47AF-8AFF-CFB7E4110D16}"/>
               </a:ext>
             </a:extLst>
           </p:cNvPr>
@@ -5611,7 +5609,7 @@
                 <a:ea typeface="Aptos"/>
                 <a:cs typeface="Aptos"/>
               </a:rPr>
-              <a:t>MODULE 1 / LESSON 01 / HUMAN CORRECTION</a:t>
+              <a:t>MODULE 1 / LESSON 01 / QUALITY CONTROL</a:t>
             </a:r>
           </a:p>
         </p:txBody>
@@ -5621,7 +5619,7 @@
           <p:cNvPr id="6" name="">
             <a:extLst xmlns:a="http://schemas.openxmlformats.org/drawingml/2006/main">
               <a:ext uri="{FF2B5EF4-FFF2-40B4-BE49-F238E27FC236}">
-                <a16:creationId xmlns:a16="http://schemas.microsoft.com/office/drawing/2014/main" id="{7E6C1708-C2DE-4EA4-8BFF-67F54C78BEFC}"/>
+                <a16:creationId xmlns:a16="http://schemas.microsoft.com/office/drawing/2014/main" id="{BED2FDA2-725E-4A83-BAD8-6E8CE8626D89}"/>
               </a:ext>
             </a:extLst>
           </p:cNvPr>
@@ -5675,7 +5673,7 @@
                 <a:ea typeface="Aptos Display"/>
                 <a:cs typeface="Aptos Display"/>
               </a:rPr>
-              <a:t>AI can draft structure. Humans must repair industrial reality.</a:t>
+              <a:t>Reject weak artifacts before they become operating practice.</a:t>
             </a:r>
           </a:p>
         </p:txBody>
@@ -5685,7 +5683,7 @@
           <p:cNvPr id="7" name="">
             <a:extLst xmlns:a="http://schemas.openxmlformats.org/drawingml/2006/main">
               <a:ext uri="{FF2B5EF4-FFF2-40B4-BE49-F238E27FC236}">
-                <a16:creationId xmlns:a16="http://schemas.microsoft.com/office/drawing/2014/main" id="{7BF12C0F-03DE-47A4-8CCE-B292FD081C6B}"/>
+                <a16:creationId xmlns:a16="http://schemas.microsoft.com/office/drawing/2014/main" id="{9D0A1D9C-BD46-4FC3-BF4D-0AE8706C2381}"/>
               </a:ext>
             </a:extLst>
           </p:cNvPr>
@@ -5749,7 +5747,7 @@
           <p:cNvPr id="8" name="">
             <a:extLst xmlns:a="http://schemas.openxmlformats.org/drawingml/2006/main">
               <a:ext uri="{FF2B5EF4-FFF2-40B4-BE49-F238E27FC236}">
-                <a16:creationId xmlns:a16="http://schemas.microsoft.com/office/drawing/2014/main" id="{986A6B2F-45AE-4F59-88B3-5D58359F5188}"/>
+                <a16:creationId xmlns:a16="http://schemas.microsoft.com/office/drawing/2014/main" id="{2FAEE163-A2DB-46F4-AFCF-CD634E1D6822}"/>
               </a:ext>
             </a:extLst>
           </p:cNvPr>
@@ -5784,7 +5782,7 @@
           <p:cNvPr id="9" name="">
             <a:extLst xmlns:a="http://schemas.openxmlformats.org/drawingml/2006/main">
               <a:ext uri="{FF2B5EF4-FFF2-40B4-BE49-F238E27FC236}">
-                <a16:creationId xmlns:a16="http://schemas.microsoft.com/office/drawing/2014/main" id="{3EF7ADFB-E3BE-4F06-9D1B-3ECD325C0D29}"/>
+                <a16:creationId xmlns:a16="http://schemas.microsoft.com/office/drawing/2014/main" id="{59F3705C-D887-493B-9883-7ABC6AEEB881}"/>
               </a:ext>
             </a:extLst>
           </p:cNvPr>
@@ -5848,7 +5846,7 @@
           <p:cNvPr id="10" name="">
             <a:extLst xmlns:a="http://schemas.openxmlformats.org/drawingml/2006/main">
               <a:ext uri="{FF2B5EF4-FFF2-40B4-BE49-F238E27FC236}">
-                <a16:creationId xmlns:a16="http://schemas.microsoft.com/office/drawing/2014/main" id="{8C46FD2F-0ECD-4B67-A817-9B1CE2656EE3}"/>
+                <a16:creationId xmlns:a16="http://schemas.microsoft.com/office/drawing/2014/main" id="{3C0BEF60-4A78-49DB-8A44-E4C24F5390EE}"/>
               </a:ext>
             </a:extLst>
           </p:cNvPr>
@@ -5912,7 +5910,7 @@
           <p:cNvPr id="11" name="">
             <a:extLst xmlns:a="http://schemas.openxmlformats.org/drawingml/2006/main">
               <a:ext uri="{FF2B5EF4-FFF2-40B4-BE49-F238E27FC236}">
-                <a16:creationId xmlns:a16="http://schemas.microsoft.com/office/drawing/2014/main" id="{3488396F-2BF0-4F9D-B2BD-BC6FA955C8CE}"/>
+                <a16:creationId xmlns:a16="http://schemas.microsoft.com/office/drawing/2014/main" id="{BA293122-EB7C-4C46-A14C-44A37D2C1330}"/>
               </a:ext>
             </a:extLst>
           </p:cNvPr>
@@ -5976,7 +5974,7 @@
           <p:cNvPr id="12" name="">
             <a:extLst xmlns:a="http://schemas.openxmlformats.org/drawingml/2006/main">
               <a:ext uri="{FF2B5EF4-FFF2-40B4-BE49-F238E27FC236}">
-                <a16:creationId xmlns:a16="http://schemas.microsoft.com/office/drawing/2014/main" id="{2CF909D6-C76A-41C1-92D6-2E3A2D5A2FBA}"/>
+                <a16:creationId xmlns:a16="http://schemas.microsoft.com/office/drawing/2014/main" id="{CBF92434-EEA4-4FD1-B1E5-0C88A0F24540}"/>
               </a:ext>
             </a:extLst>
           </p:cNvPr>
@@ -6011,7 +6009,7 @@
           <p:cNvPr id="13" name="">
             <a:extLst xmlns:a="http://schemas.openxmlformats.org/drawingml/2006/main">
               <a:ext uri="{FF2B5EF4-FFF2-40B4-BE49-F238E27FC236}">
-                <a16:creationId xmlns:a16="http://schemas.microsoft.com/office/drawing/2014/main" id="{84304669-7F4B-4959-910E-CF7E961DF9E5}"/>
+                <a16:creationId xmlns:a16="http://schemas.microsoft.com/office/drawing/2014/main" id="{D657B198-982D-48CA-989B-F889D3F3FA6B}"/>
               </a:ext>
             </a:extLst>
           </p:cNvPr>
@@ -6044,7 +6042,7 @@
           <p:cNvPr id="14" name="">
             <a:extLst xmlns:a="http://schemas.openxmlformats.org/drawingml/2006/main">
               <a:ext uri="{FF2B5EF4-FFF2-40B4-BE49-F238E27FC236}">
-                <a16:creationId xmlns:a16="http://schemas.microsoft.com/office/drawing/2014/main" id="{C4E9CA8F-7F09-4D05-870B-A9150069021E}"/>
+                <a16:creationId xmlns:a16="http://schemas.microsoft.com/office/drawing/2014/main" id="{B7FE6062-4756-42E9-8B8C-FA1F0C06E2D1}"/>
               </a:ext>
             </a:extLst>
           </p:cNvPr>
@@ -6079,7 +6077,7 @@
           <p:cNvPr id="15" name="">
             <a:extLst xmlns:a="http://schemas.openxmlformats.org/drawingml/2006/main">
               <a:ext uri="{FF2B5EF4-FFF2-40B4-BE49-F238E27FC236}">
-                <a16:creationId xmlns:a16="http://schemas.microsoft.com/office/drawing/2014/main" id="{672B00E4-225A-4AD5-8975-36D1A72026C6}"/>
+                <a16:creationId xmlns:a16="http://schemas.microsoft.com/office/drawing/2014/main" id="{4D30A3AC-D185-464F-A962-E62657EF9628}"/>
               </a:ext>
             </a:extLst>
           </p:cNvPr>
@@ -6133,7 +6131,7 @@
                 <a:ea typeface="Aptos"/>
                 <a:cs typeface="Aptos"/>
               </a:rPr>
-              <a:t>REJECT OR REPAIR WHEN AI OUTPUT...</a:t>
+              <a:t>REJECT OR REPAIR WHEN THE ARTIFACT...</a:t>
             </a:r>
           </a:p>
         </p:txBody>
@@ -6143,7 +6141,7 @@
           <p:cNvPr id="16" name="">
             <a:extLst xmlns:a="http://schemas.openxmlformats.org/drawingml/2006/main">
               <a:ext uri="{FF2B5EF4-FFF2-40B4-BE49-F238E27FC236}">
-                <a16:creationId xmlns:a16="http://schemas.microsoft.com/office/drawing/2014/main" id="{C9C9E626-3B0E-4B48-8C87-D489FC1EE63C}"/>
+                <a16:creationId xmlns:a16="http://schemas.microsoft.com/office/drawing/2014/main" id="{F04EAAE8-0631-4F64-8843-EA3E78684649}"/>
               </a:ext>
             </a:extLst>
           </p:cNvPr>
@@ -6178,7 +6176,7 @@
           <p:cNvPr id="17" name="">
             <a:extLst xmlns:a="http://schemas.openxmlformats.org/drawingml/2006/main">
               <a:ext uri="{FF2B5EF4-FFF2-40B4-BE49-F238E27FC236}">
-                <a16:creationId xmlns:a16="http://schemas.microsoft.com/office/drawing/2014/main" id="{CAC419E4-501D-4515-92D3-B64ADE6366BC}"/>
+                <a16:creationId xmlns:a16="http://schemas.microsoft.com/office/drawing/2014/main" id="{AA129BFF-0BEC-4F6A-9669-667EA68D53DF}"/>
               </a:ext>
             </a:extLst>
           </p:cNvPr>
@@ -6242,7 +6240,7 @@
           <p:cNvPr id="18" name="">
             <a:extLst xmlns:a="http://schemas.openxmlformats.org/drawingml/2006/main">
               <a:ext uri="{FF2B5EF4-FFF2-40B4-BE49-F238E27FC236}">
-                <a16:creationId xmlns:a16="http://schemas.microsoft.com/office/drawing/2014/main" id="{D02F44CE-EF0D-4ED1-8F69-B5B5B2A84770}"/>
+                <a16:creationId xmlns:a16="http://schemas.microsoft.com/office/drawing/2014/main" id="{6EF45456-89C6-4503-A586-FEB23945C3E3}"/>
               </a:ext>
             </a:extLst>
           </p:cNvPr>
@@ -6277,7 +6275,7 @@
           <p:cNvPr id="19" name="">
             <a:extLst xmlns:a="http://schemas.openxmlformats.org/drawingml/2006/main">
               <a:ext uri="{FF2B5EF4-FFF2-40B4-BE49-F238E27FC236}">
-                <a16:creationId xmlns:a16="http://schemas.microsoft.com/office/drawing/2014/main" id="{00258D1D-D77D-4286-AA96-C6493BECA7D3}"/>
+                <a16:creationId xmlns:a16="http://schemas.microsoft.com/office/drawing/2014/main" id="{A89E67DB-83EC-41F6-8656-86FA37443FC1}"/>
               </a:ext>
             </a:extLst>
           </p:cNvPr>
@@ -6341,7 +6339,7 @@
           <p:cNvPr id="20" name="">
             <a:extLst xmlns:a="http://schemas.openxmlformats.org/drawingml/2006/main">
               <a:ext uri="{FF2B5EF4-FFF2-40B4-BE49-F238E27FC236}">
-                <a16:creationId xmlns:a16="http://schemas.microsoft.com/office/drawing/2014/main" id="{C8127DFA-85AF-4BAC-90C1-BAF10F8F5585}"/>
+                <a16:creationId xmlns:a16="http://schemas.microsoft.com/office/drawing/2014/main" id="{D087BD03-21F1-4D21-A3F6-C2BA70479663}"/>
               </a:ext>
             </a:extLst>
           </p:cNvPr>
@@ -6376,7 +6374,7 @@
           <p:cNvPr id="21" name="">
             <a:extLst xmlns:a="http://schemas.openxmlformats.org/drawingml/2006/main">
               <a:ext uri="{FF2B5EF4-FFF2-40B4-BE49-F238E27FC236}">
-                <a16:creationId xmlns:a16="http://schemas.microsoft.com/office/drawing/2014/main" id="{96989755-7A8A-4E2C-AE10-EEC6EF3C6DEE}"/>
+                <a16:creationId xmlns:a16="http://schemas.microsoft.com/office/drawing/2014/main" id="{37671472-AE44-4C54-852D-68D9846C41FC}"/>
               </a:ext>
             </a:extLst>
           </p:cNvPr>
@@ -6440,7 +6438,7 @@
           <p:cNvPr id="22" name="">
             <a:extLst xmlns:a="http://schemas.openxmlformats.org/drawingml/2006/main">
               <a:ext uri="{FF2B5EF4-FFF2-40B4-BE49-F238E27FC236}">
-                <a16:creationId xmlns:a16="http://schemas.microsoft.com/office/drawing/2014/main" id="{C1985BDA-B50F-4BAC-A4EC-AB86065311A7}"/>
+                <a16:creationId xmlns:a16="http://schemas.microsoft.com/office/drawing/2014/main" id="{B2D2FDA3-F829-4191-8C57-9A76040F339F}"/>
               </a:ext>
             </a:extLst>
           </p:cNvPr>
@@ -6475,7 +6473,7 @@
           <p:cNvPr id="23" name="">
             <a:extLst xmlns:a="http://schemas.openxmlformats.org/drawingml/2006/main">
               <a:ext uri="{FF2B5EF4-FFF2-40B4-BE49-F238E27FC236}">
-                <a16:creationId xmlns:a16="http://schemas.microsoft.com/office/drawing/2014/main" id="{F25BE204-177B-46C0-8D6E-31D2EE047E24}"/>
+                <a16:creationId xmlns:a16="http://schemas.microsoft.com/office/drawing/2014/main" id="{29C43157-D823-445B-9E8E-80D3A5D2E0FC}"/>
               </a:ext>
             </a:extLst>
           </p:cNvPr>
@@ -6539,7 +6537,7 @@
           <p:cNvPr id="24" name="">
             <a:extLst xmlns:a="http://schemas.openxmlformats.org/drawingml/2006/main">
               <a:ext uri="{FF2B5EF4-FFF2-40B4-BE49-F238E27FC236}">
-                <a16:creationId xmlns:a16="http://schemas.microsoft.com/office/drawing/2014/main" id="{A59BC9A8-6DA1-40D2-99BD-97A3A78A338F}"/>
+                <a16:creationId xmlns:a16="http://schemas.microsoft.com/office/drawing/2014/main" id="{358E4D8D-B4CE-4931-93CA-3B0E516C7A48}"/>
               </a:ext>
             </a:extLst>
           </p:cNvPr>
@@ -6574,7 +6572,7 @@
           <p:cNvPr id="25" name="">
             <a:extLst xmlns:a="http://schemas.openxmlformats.org/drawingml/2006/main">
               <a:ext uri="{FF2B5EF4-FFF2-40B4-BE49-F238E27FC236}">
-                <a16:creationId xmlns:a16="http://schemas.microsoft.com/office/drawing/2014/main" id="{1DA1CA7D-B99B-489B-904C-0938F2015A14}"/>
+                <a16:creationId xmlns:a16="http://schemas.microsoft.com/office/drawing/2014/main" id="{8EB17B27-7EE7-46B3-80B3-8E9E546F312E}"/>
               </a:ext>
             </a:extLst>
           </p:cNvPr>
@@ -6638,7 +6636,7 @@
           <p:cNvPr id="26" name="">
             <a:extLst xmlns:a="http://schemas.openxmlformats.org/drawingml/2006/main">
               <a:ext uri="{FF2B5EF4-FFF2-40B4-BE49-F238E27FC236}">
-                <a16:creationId xmlns:a16="http://schemas.microsoft.com/office/drawing/2014/main" id="{9ECAA1A3-99E7-4E57-9011-96E7521DD2C1}"/>
+                <a16:creationId xmlns:a16="http://schemas.microsoft.com/office/drawing/2014/main" id="{16145D2B-D6A9-4521-9945-C2DBCCF183B2}"/>
               </a:ext>
             </a:extLst>
           </p:cNvPr>
@@ -6671,7 +6669,7 @@
           <p:cNvPr id="27" name="">
             <a:extLst xmlns:a="http://schemas.openxmlformats.org/drawingml/2006/main">
               <a:ext uri="{FF2B5EF4-FFF2-40B4-BE49-F238E27FC236}">
-                <a16:creationId xmlns:a16="http://schemas.microsoft.com/office/drawing/2014/main" id="{A131DF41-B1CC-46C4-8A18-B83942E19942}"/>
+                <a16:creationId xmlns:a16="http://schemas.microsoft.com/office/drawing/2014/main" id="{5B5B24E7-9F34-4F22-9C0A-676EE1BB2E86}"/>
               </a:ext>
             </a:extLst>
           </p:cNvPr>
@@ -6706,7 +6704,7 @@
           <p:cNvPr id="28" name="">
             <a:extLst xmlns:a="http://schemas.openxmlformats.org/drawingml/2006/main">
               <a:ext uri="{FF2B5EF4-FFF2-40B4-BE49-F238E27FC236}">
-                <a16:creationId xmlns:a16="http://schemas.microsoft.com/office/drawing/2014/main" id="{DEA17D8E-F6E7-4BB0-A77A-38AF4995D16C}"/>
+                <a16:creationId xmlns:a16="http://schemas.microsoft.com/office/drawing/2014/main" id="{4B3CE8A1-7DCC-4B03-BBE9-825E5B5731DD}"/>
               </a:ext>
             </a:extLst>
           </p:cNvPr>
@@ -6770,7 +6768,7 @@
           <p:cNvPr id="29" name="">
             <a:extLst xmlns:a="http://schemas.openxmlformats.org/drawingml/2006/main">
               <a:ext uri="{FF2B5EF4-FFF2-40B4-BE49-F238E27FC236}">
-                <a16:creationId xmlns:a16="http://schemas.microsoft.com/office/drawing/2014/main" id="{7A1D5616-C3F9-46DC-BBB6-CFE763816D29}"/>
+                <a16:creationId xmlns:a16="http://schemas.microsoft.com/office/drawing/2014/main" id="{D3F14ED6-23F1-47DD-B94A-235F019950E2}"/>
               </a:ext>
             </a:extLst>
           </p:cNvPr>
@@ -6834,7 +6832,7 @@
           <p:cNvPr id="30" name="">
             <a:extLst xmlns:a="http://schemas.openxmlformats.org/drawingml/2006/main">
               <a:ext uri="{FF2B5EF4-FFF2-40B4-BE49-F238E27FC236}">
-                <a16:creationId xmlns:a16="http://schemas.microsoft.com/office/drawing/2014/main" id="{9DC05C62-FA30-4AD8-A329-788CECEA4F4C}"/>
+                <a16:creationId xmlns:a16="http://schemas.microsoft.com/office/drawing/2014/main" id="{25FED1C2-6F26-480D-AEBD-0963D10C0A19}"/>
               </a:ext>
             </a:extLst>
           </p:cNvPr>
@@ -6867,7 +6865,7 @@
           <p:cNvPr id="31" name="">
             <a:extLst xmlns:a="http://schemas.openxmlformats.org/drawingml/2006/main">
               <a:ext uri="{FF2B5EF4-FFF2-40B4-BE49-F238E27FC236}">
-                <a16:creationId xmlns:a16="http://schemas.microsoft.com/office/drawing/2014/main" id="{C282F936-C214-48C1-A42D-55486EA8FDB2}"/>
+                <a16:creationId xmlns:a16="http://schemas.microsoft.com/office/drawing/2014/main" id="{83E0B41B-0EB8-49D5-9AC7-FB6AE4E3E902}"/>
               </a:ext>
             </a:extLst>
           </p:cNvPr>
@@ -6931,7 +6929,7 @@
           <p:cNvPr id="32" name="">
             <a:extLst xmlns:a="http://schemas.openxmlformats.org/drawingml/2006/main">
               <a:ext uri="{FF2B5EF4-FFF2-40B4-BE49-F238E27FC236}">
-                <a16:creationId xmlns:a16="http://schemas.microsoft.com/office/drawing/2014/main" id="{F1ED6E01-A0AA-4BDB-AB37-C17CE9EF7F06}"/>
+                <a16:creationId xmlns:a16="http://schemas.microsoft.com/office/drawing/2014/main" id="{62985B99-6CB7-469F-BAAA-A3CF1C3AC0E1}"/>
               </a:ext>
             </a:extLst>
           </p:cNvPr>
@@ -6985,7 +6983,7 @@
                 <a:ea typeface="Aptos"/>
                 <a:cs typeface="Aptos"/>
               </a:rPr>
-              <a:t>Ask what the AI is guessing.</a:t>
+              <a:t>Ask what the artifact assumes.</a:t>
             </a:r>
           </a:p>
         </p:txBody>
@@ -6995,7 +6993,7 @@
           <p:cNvPr id="33" name="">
             <a:extLst xmlns:a="http://schemas.openxmlformats.org/drawingml/2006/main">
               <a:ext uri="{FF2B5EF4-FFF2-40B4-BE49-F238E27FC236}">
-                <a16:creationId xmlns:a16="http://schemas.microsoft.com/office/drawing/2014/main" id="{BBACA6CD-30D3-479D-8519-5D00B509C858}"/>
+                <a16:creationId xmlns:a16="http://schemas.microsoft.com/office/drawing/2014/main" id="{E1423AAE-B795-401E-ADF5-968F4A78870C}"/>
               </a:ext>
             </a:extLst>
           </p:cNvPr>
@@ -7030,7 +7028,7 @@
           <p:cNvPr id="34" name="">
             <a:extLst xmlns:a="http://schemas.openxmlformats.org/drawingml/2006/main">
               <a:ext uri="{FF2B5EF4-FFF2-40B4-BE49-F238E27FC236}">
-                <a16:creationId xmlns:a16="http://schemas.microsoft.com/office/drawing/2014/main" id="{ADDAE12D-E775-4462-A55F-5F9316BA9B1A}"/>
+                <a16:creationId xmlns:a16="http://schemas.microsoft.com/office/drawing/2014/main" id="{342A8BF1-61EF-4082-9F50-1F7B7733CAAC}"/>
               </a:ext>
             </a:extLst>
           </p:cNvPr>
@@ -7094,7 +7092,7 @@
           <p:cNvPr id="35" name="">
             <a:extLst xmlns:a="http://schemas.openxmlformats.org/drawingml/2006/main">
               <a:ext uri="{FF2B5EF4-FFF2-40B4-BE49-F238E27FC236}">
-                <a16:creationId xmlns:a16="http://schemas.microsoft.com/office/drawing/2014/main" id="{B6F90343-2289-43CA-888E-9A22FFD2478B}"/>
+                <a16:creationId xmlns:a16="http://schemas.microsoft.com/office/drawing/2014/main" id="{0D9C92EC-D2D9-4615-8C50-621770E292A5}"/>
               </a:ext>
             </a:extLst>
           </p:cNvPr>
@@ -7158,7 +7156,7 @@
           <p:cNvPr id="36" name="">
             <a:extLst xmlns:a="http://schemas.openxmlformats.org/drawingml/2006/main">
               <a:ext uri="{FF2B5EF4-FFF2-40B4-BE49-F238E27FC236}">
-                <a16:creationId xmlns:a16="http://schemas.microsoft.com/office/drawing/2014/main" id="{4965D2D3-E395-4293-B202-E9C65CE0D113}"/>
+                <a16:creationId xmlns:a16="http://schemas.microsoft.com/office/drawing/2014/main" id="{EB1DD4F3-FE02-47DD-8C3B-A94A52C8C1F8}"/>
               </a:ext>
             </a:extLst>
           </p:cNvPr>
@@ -7222,7 +7220,7 @@
           <p:cNvPr id="37" name="">
             <a:extLst xmlns:a="http://schemas.openxmlformats.org/drawingml/2006/main">
               <a:ext uri="{FF2B5EF4-FFF2-40B4-BE49-F238E27FC236}">
-                <a16:creationId xmlns:a16="http://schemas.microsoft.com/office/drawing/2014/main" id="{3E562D75-1409-4557-8071-36DB81882022}"/>
+                <a16:creationId xmlns:a16="http://schemas.microsoft.com/office/drawing/2014/main" id="{53923D15-CB45-49B9-8B8D-E5C006C42F8F}"/>
               </a:ext>
             </a:extLst>
           </p:cNvPr>
@@ -7257,7 +7255,7 @@
           <p:cNvPr id="38" name="">
             <a:extLst xmlns:a="http://schemas.openxmlformats.org/drawingml/2006/main">
               <a:ext uri="{FF2B5EF4-FFF2-40B4-BE49-F238E27FC236}">
-                <a16:creationId xmlns:a16="http://schemas.microsoft.com/office/drawing/2014/main" id="{CD99049B-49E8-4455-B6FB-F720CC06C277}"/>
+                <a16:creationId xmlns:a16="http://schemas.microsoft.com/office/drawing/2014/main" id="{31CE17C1-4F0D-489B-8AA8-7E003BA166F8}"/>
               </a:ext>
             </a:extLst>
           </p:cNvPr>
@@ -7292,7 +7290,7 @@
           <p:cNvPr id="39" name="">
             <a:extLst xmlns:a="http://schemas.openxmlformats.org/drawingml/2006/main">
               <a:ext uri="{FF2B5EF4-FFF2-40B4-BE49-F238E27FC236}">
-                <a16:creationId xmlns:a16="http://schemas.microsoft.com/office/drawing/2014/main" id="{18A71805-2977-4648-95AC-8B2B781FBCCF}"/>
+                <a16:creationId xmlns:a16="http://schemas.microsoft.com/office/drawing/2014/main" id="{AA10F2CD-CBC1-4AA1-9665-4A853BD219F9}"/>
               </a:ext>
             </a:extLst>
           </p:cNvPr>
@@ -7327,7 +7325,7 @@
           <p:cNvPr id="40" name="kicker-01-marker">
             <a:extLst xmlns:a="http://schemas.openxmlformats.org/drawingml/2006/main">
               <a:ext uri="{FF2B5EF4-FFF2-40B4-BE49-F238E27FC236}">
-                <a16:creationId xmlns:a16="http://schemas.microsoft.com/office/drawing/2014/main" id="{1E7DB7D3-E133-4EB7-9169-10BB88E6549B}"/>
+                <a16:creationId xmlns:a16="http://schemas.microsoft.com/office/drawing/2014/main" id="{3952DF5D-5187-43C1-974F-AB3209D10B47}"/>
               </a:ext>
             </a:extLst>
           </p:cNvPr>
@@ -7362,7 +7360,7 @@
           <p:cNvPr id="41" name="kicker-01-label">
             <a:extLst xmlns:a="http://schemas.openxmlformats.org/drawingml/2006/main">
               <a:ext uri="{FF2B5EF4-FFF2-40B4-BE49-F238E27FC236}">
-                <a16:creationId xmlns:a16="http://schemas.microsoft.com/office/drawing/2014/main" id="{F1BBA2CD-6D46-4737-9E18-BF49E8B332F2}"/>
+                <a16:creationId xmlns:a16="http://schemas.microsoft.com/office/drawing/2014/main" id="{0C5F0AAF-8F41-4FB1-81C2-673C43C1C611}"/>
               </a:ext>
             </a:extLst>
           </p:cNvPr>
@@ -7416,7 +7414,7 @@
                 <a:ea typeface="Aptos"/>
                 <a:cs typeface="Aptos"/>
               </a:rPr>
-              <a:t>MODULE 1 / LESSON 01 / HUMAN CORRECTION</a:t>
+              <a:t>MODULE 1 / LESSON 01 / QUALITY CONTROL</a:t>
             </a:r>
           </a:p>
         </p:txBody>
@@ -7426,7 +7424,7 @@
           <p:cNvPr id="42" name="">
             <a:extLst xmlns:a="http://schemas.openxmlformats.org/drawingml/2006/main">
               <a:ext uri="{FF2B5EF4-FFF2-40B4-BE49-F238E27FC236}">
-                <a16:creationId xmlns:a16="http://schemas.microsoft.com/office/drawing/2014/main" id="{83EB5D1C-4352-46D1-8E28-7A72192463F3}"/>
+                <a16:creationId xmlns:a16="http://schemas.microsoft.com/office/drawing/2014/main" id="{FE07DB9F-B643-4741-8B4E-6BEA4D6027E6}"/>
               </a:ext>
             </a:extLst>
           </p:cNvPr>
@@ -7480,7 +7478,7 @@
                 <a:ea typeface="Aptos Display"/>
                 <a:cs typeface="Aptos Display"/>
               </a:rPr>
-              <a:t>AI can draft structure. Humans must repair industrial reality.</a:t>
+              <a:t>Reject weak artifacts before they become operating practice.</a:t>
             </a:r>
           </a:p>
         </p:txBody>
@@ -7490,7 +7488,7 @@
           <p:cNvPr id="43" name="">
             <a:extLst xmlns:a="http://schemas.openxmlformats.org/drawingml/2006/main">
               <a:ext uri="{FF2B5EF4-FFF2-40B4-BE49-F238E27FC236}">
-                <a16:creationId xmlns:a16="http://schemas.microsoft.com/office/drawing/2014/main" id="{145E876A-A3E3-4FD0-A14A-D989E52B90AF}"/>
+                <a16:creationId xmlns:a16="http://schemas.microsoft.com/office/drawing/2014/main" id="{3C9F7E6F-58BE-49A9-9919-A7F2BAFA2381}"/>
               </a:ext>
             </a:extLst>
           </p:cNvPr>
@@ -7554,7 +7552,7 @@
           <p:cNvPr id="44" name="">
             <a:extLst xmlns:a="http://schemas.openxmlformats.org/drawingml/2006/main">
               <a:ext uri="{FF2B5EF4-FFF2-40B4-BE49-F238E27FC236}">
-                <a16:creationId xmlns:a16="http://schemas.microsoft.com/office/drawing/2014/main" id="{79A3A245-B4F5-418C-8ED3-C72F69D96D1C}"/>
+                <a16:creationId xmlns:a16="http://schemas.microsoft.com/office/drawing/2014/main" id="{5CC98B5B-FE18-4A11-8003-1369BEF1DBE1}"/>
               </a:ext>
             </a:extLst>
           </p:cNvPr>
@@ -7589,7 +7587,7 @@
           <p:cNvPr id="45" name="">
             <a:extLst xmlns:a="http://schemas.openxmlformats.org/drawingml/2006/main">
               <a:ext uri="{FF2B5EF4-FFF2-40B4-BE49-F238E27FC236}">
-                <a16:creationId xmlns:a16="http://schemas.microsoft.com/office/drawing/2014/main" id="{07ED2268-F3F4-4151-9FF2-2934A45AFDE2}"/>
+                <a16:creationId xmlns:a16="http://schemas.microsoft.com/office/drawing/2014/main" id="{8ED16432-7933-4B3F-92EC-E72BB7E41E43}"/>
               </a:ext>
             </a:extLst>
           </p:cNvPr>
@@ -7624,7 +7622,7 @@
           <p:cNvPr id="46" name="">
             <a:extLst xmlns:a="http://schemas.openxmlformats.org/drawingml/2006/main">
               <a:ext uri="{FF2B5EF4-FFF2-40B4-BE49-F238E27FC236}">
-                <a16:creationId xmlns:a16="http://schemas.microsoft.com/office/drawing/2014/main" id="{ECDD1127-A89A-419F-AB3B-2D79267E5241}"/>
+                <a16:creationId xmlns:a16="http://schemas.microsoft.com/office/drawing/2014/main" id="{E73ED7BD-7DE3-4BCA-B581-C765BDAB166C}"/>
               </a:ext>
             </a:extLst>
           </p:cNvPr>
@@ -7659,7 +7657,7 @@
           <p:cNvPr id="47" name="">
             <a:extLst xmlns:a="http://schemas.openxmlformats.org/drawingml/2006/main">
               <a:ext uri="{FF2B5EF4-FFF2-40B4-BE49-F238E27FC236}">
-                <a16:creationId xmlns:a16="http://schemas.microsoft.com/office/drawing/2014/main" id="{E377EE4A-AE1F-4389-BF0A-A162596D9DE6}"/>
+                <a16:creationId xmlns:a16="http://schemas.microsoft.com/office/drawing/2014/main" id="{AFC912C7-7082-447A-964B-E3A9DC2C1AB8}"/>
               </a:ext>
             </a:extLst>
           </p:cNvPr>
@@ -7694,7 +7692,7 @@
           <p:cNvPr id="48" name="">
             <a:extLst xmlns:a="http://schemas.openxmlformats.org/drawingml/2006/main">
               <a:ext uri="{FF2B5EF4-FFF2-40B4-BE49-F238E27FC236}">
-                <a16:creationId xmlns:a16="http://schemas.microsoft.com/office/drawing/2014/main" id="{9798A95A-A8A4-4CF9-9C57-D4BE5D6FD650}"/>
+                <a16:creationId xmlns:a16="http://schemas.microsoft.com/office/drawing/2014/main" id="{4196209E-0DC1-469C-B968-26B39636A2AD}"/>
               </a:ext>
             </a:extLst>
           </p:cNvPr>
@@ -7758,7 +7756,7 @@
           <p:cNvPr id="49" name="">
             <a:extLst xmlns:a="http://schemas.openxmlformats.org/drawingml/2006/main">
               <a:ext uri="{FF2B5EF4-FFF2-40B4-BE49-F238E27FC236}">
-                <a16:creationId xmlns:a16="http://schemas.microsoft.com/office/drawing/2014/main" id="{3DBE90F9-2DD4-4CF2-8875-38063FAFE65E}"/>
+                <a16:creationId xmlns:a16="http://schemas.microsoft.com/office/drawing/2014/main" id="{B49489AA-194A-4FF2-979F-0FA4DFDBA877}"/>
               </a:ext>
             </a:extLst>
           </p:cNvPr>
@@ -7822,7 +7820,7 @@
           <p:cNvPr id="50" name="">
             <a:extLst xmlns:a="http://schemas.openxmlformats.org/drawingml/2006/main">
               <a:ext uri="{FF2B5EF4-FFF2-40B4-BE49-F238E27FC236}">
-                <a16:creationId xmlns:a16="http://schemas.microsoft.com/office/drawing/2014/main" id="{8C5E948A-1E46-40E9-98EA-4AD91A45C2F5}"/>
+                <a16:creationId xmlns:a16="http://schemas.microsoft.com/office/drawing/2014/main" id="{C1A9AF55-C405-49BE-9810-3AF70CED2956}"/>
               </a:ext>
             </a:extLst>
           </p:cNvPr>
@@ -7884,7 +7882,7 @@
     </p:spTree>
     <p:extLst>
       <p:ext uri="{BB962C8B-B14F-4D97-AF65-F5344CB8AC3E}">
-        <p14:creationId xmlns:p14="http://schemas.microsoft.com/office/powerpoint/2010/main" val="241108613"/>
+        <p14:creationId xmlns:p14="http://schemas.microsoft.com/office/powerpoint/2010/main" val="420737226"/>
       </p:ext>
     </p:extLst>
   </p:cSld>
@@ -7908,7 +7906,7 @@
           <p:cNvPr id="1" name="">
             <a:extLst xmlns:a="http://schemas.openxmlformats.org/drawingml/2006/main">
               <a:ext uri="{FF2B5EF4-FFF2-40B4-BE49-F238E27FC236}">
-                <a16:creationId xmlns:a16="http://schemas.microsoft.com/office/drawing/2014/main" id="{76962084-8720-47C9-A0A7-BB79020A8A0A}"/>
+                <a16:creationId xmlns:a16="http://schemas.microsoft.com/office/drawing/2014/main" id="{4103682C-37B2-4486-9CDF-D5437FEAD689}"/>
               </a:ext>
             </a:extLst>
           </p:cNvPr>
@@ -7943,7 +7941,7 @@
           <p:cNvPr id="2" name="">
             <a:extLst xmlns:a="http://schemas.openxmlformats.org/drawingml/2006/main">
               <a:ext uri="{FF2B5EF4-FFF2-40B4-BE49-F238E27FC236}">
-                <a16:creationId xmlns:a16="http://schemas.microsoft.com/office/drawing/2014/main" id="{35C78918-1D03-4A92-9FED-098804A20834}"/>
+                <a16:creationId xmlns:a16="http://schemas.microsoft.com/office/drawing/2014/main" id="{2A1DA43F-E965-4759-B03A-F873561DFA68}"/>
               </a:ext>
             </a:extLst>
           </p:cNvPr>
@@ -7978,7 +7976,7 @@
           <p:cNvPr id="3" name="">
             <a:extLst xmlns:a="http://schemas.openxmlformats.org/drawingml/2006/main">
               <a:ext uri="{FF2B5EF4-FFF2-40B4-BE49-F238E27FC236}">
-                <a16:creationId xmlns:a16="http://schemas.microsoft.com/office/drawing/2014/main" id="{03DE5A24-3089-43A9-B161-0503D8111AA4}"/>
+                <a16:creationId xmlns:a16="http://schemas.microsoft.com/office/drawing/2014/main" id="{9E992E29-F8A3-4D2E-BDB0-2D3B2E51AAD6}"/>
               </a:ext>
             </a:extLst>
           </p:cNvPr>
@@ -8013,7 +8011,7 @@
           <p:cNvPr id="4" name="kicker-01-marker">
             <a:extLst xmlns:a="http://schemas.openxmlformats.org/drawingml/2006/main">
               <a:ext uri="{FF2B5EF4-FFF2-40B4-BE49-F238E27FC236}">
-                <a16:creationId xmlns:a16="http://schemas.microsoft.com/office/drawing/2014/main" id="{B11523E6-BB02-4615-A88A-9BDC61F51B9D}"/>
+                <a16:creationId xmlns:a16="http://schemas.microsoft.com/office/drawing/2014/main" id="{6C561E5F-4D64-42AF-9E99-B13D2C9B41FF}"/>
               </a:ext>
             </a:extLst>
           </p:cNvPr>
@@ -8048,7 +8046,7 @@
           <p:cNvPr id="5" name="kicker-01-label">
             <a:extLst xmlns:a="http://schemas.openxmlformats.org/drawingml/2006/main">
               <a:ext uri="{FF2B5EF4-FFF2-40B4-BE49-F238E27FC236}">
-                <a16:creationId xmlns:a16="http://schemas.microsoft.com/office/drawing/2014/main" id="{3493129F-1634-4D55-8E35-FE14F48D6234}"/>
+                <a16:creationId xmlns:a16="http://schemas.microsoft.com/office/drawing/2014/main" id="{CD7BC3E1-C027-4666-93C6-90635EB29564}"/>
               </a:ext>
             </a:extLst>
           </p:cNvPr>
@@ -8112,7 +8110,7 @@
           <p:cNvPr id="6" name="">
             <a:extLst xmlns:a="http://schemas.openxmlformats.org/drawingml/2006/main">
               <a:ext uri="{FF2B5EF4-FFF2-40B4-BE49-F238E27FC236}">
-                <a16:creationId xmlns:a16="http://schemas.microsoft.com/office/drawing/2014/main" id="{555C651B-4576-4C4D-836F-21173920FE01}"/>
+                <a16:creationId xmlns:a16="http://schemas.microsoft.com/office/drawing/2014/main" id="{B05F5122-FA3C-4A29-8034-10DA68B066A3}"/>
               </a:ext>
             </a:extLst>
           </p:cNvPr>
@@ -8176,7 +8174,7 @@
           <p:cNvPr id="7" name="">
             <a:extLst xmlns:a="http://schemas.openxmlformats.org/drawingml/2006/main">
               <a:ext uri="{FF2B5EF4-FFF2-40B4-BE49-F238E27FC236}">
-                <a16:creationId xmlns:a16="http://schemas.microsoft.com/office/drawing/2014/main" id="{E08387C4-4A1A-4236-BBDD-9DB7EBCB5E05}"/>
+                <a16:creationId xmlns:a16="http://schemas.microsoft.com/office/drawing/2014/main" id="{89DAD586-8A68-4234-8553-C1B7302610C0}"/>
               </a:ext>
             </a:extLst>
           </p:cNvPr>
@@ -8240,7 +8238,7 @@
           <p:cNvPr id="8" name="">
             <a:extLst xmlns:a="http://schemas.openxmlformats.org/drawingml/2006/main">
               <a:ext uri="{FF2B5EF4-FFF2-40B4-BE49-F238E27FC236}">
-                <a16:creationId xmlns:a16="http://schemas.microsoft.com/office/drawing/2014/main" id="{0D8D3BA0-CC58-4715-8DE7-EF4399423276}"/>
+                <a16:creationId xmlns:a16="http://schemas.microsoft.com/office/drawing/2014/main" id="{DDB82A27-86B8-46D1-9BD5-FCEAF7B7D893}"/>
               </a:ext>
             </a:extLst>
           </p:cNvPr>
@@ -8275,7 +8273,7 @@
           <p:cNvPr id="9" name="">
             <a:extLst xmlns:a="http://schemas.openxmlformats.org/drawingml/2006/main">
               <a:ext uri="{FF2B5EF4-FFF2-40B4-BE49-F238E27FC236}">
-                <a16:creationId xmlns:a16="http://schemas.microsoft.com/office/drawing/2014/main" id="{CFC3C75B-9840-4602-8D85-061D5566C8B9}"/>
+                <a16:creationId xmlns:a16="http://schemas.microsoft.com/office/drawing/2014/main" id="{356CADEE-069A-48EC-8C8A-11BDBFAE7675}"/>
               </a:ext>
             </a:extLst>
           </p:cNvPr>
@@ -8339,7 +8337,7 @@
           <p:cNvPr id="10" name="">
             <a:extLst xmlns:a="http://schemas.openxmlformats.org/drawingml/2006/main">
               <a:ext uri="{FF2B5EF4-FFF2-40B4-BE49-F238E27FC236}">
-                <a16:creationId xmlns:a16="http://schemas.microsoft.com/office/drawing/2014/main" id="{C9B3E463-D357-481B-8C65-426A6E120B43}"/>
+                <a16:creationId xmlns:a16="http://schemas.microsoft.com/office/drawing/2014/main" id="{5DEE5AA7-F970-4A58-8BDE-E1A3D28F5A63}"/>
               </a:ext>
             </a:extLst>
           </p:cNvPr>
@@ -8403,7 +8401,7 @@
           <p:cNvPr id="11" name="">
             <a:extLst xmlns:a="http://schemas.openxmlformats.org/drawingml/2006/main">
               <a:ext uri="{FF2B5EF4-FFF2-40B4-BE49-F238E27FC236}">
-                <a16:creationId xmlns:a16="http://schemas.microsoft.com/office/drawing/2014/main" id="{3702A5BE-7BA5-45FB-BBE0-3D2D3562A81D}"/>
+                <a16:creationId xmlns:a16="http://schemas.microsoft.com/office/drawing/2014/main" id="{9897BC38-CA1C-40DB-8D68-2345D9BA4CB9}"/>
               </a:ext>
             </a:extLst>
           </p:cNvPr>
@@ -8467,7 +8465,7 @@
           <p:cNvPr id="12" name="">
             <a:extLst xmlns:a="http://schemas.openxmlformats.org/drawingml/2006/main">
               <a:ext uri="{FF2B5EF4-FFF2-40B4-BE49-F238E27FC236}">
-                <a16:creationId xmlns:a16="http://schemas.microsoft.com/office/drawing/2014/main" id="{6640A6C8-3F72-45BE-B6BF-31DA45484881}"/>
+                <a16:creationId xmlns:a16="http://schemas.microsoft.com/office/drawing/2014/main" id="{98B969A8-620A-4050-8C9C-EA9E25F3A9F5}"/>
               </a:ext>
             </a:extLst>
           </p:cNvPr>
@@ -8500,7 +8498,7 @@
           <p:cNvPr id="13" name="">
             <a:extLst xmlns:a="http://schemas.openxmlformats.org/drawingml/2006/main">
               <a:ext uri="{FF2B5EF4-FFF2-40B4-BE49-F238E27FC236}">
-                <a16:creationId xmlns:a16="http://schemas.microsoft.com/office/drawing/2014/main" id="{643A30CA-1A2F-471A-A99E-2A849F7D5F21}"/>
+                <a16:creationId xmlns:a16="http://schemas.microsoft.com/office/drawing/2014/main" id="{F3BA6930-8092-4D72-B801-56761E99F92E}"/>
               </a:ext>
             </a:extLst>
           </p:cNvPr>
@@ -8535,7 +8533,7 @@
           <p:cNvPr id="14" name="">
             <a:extLst xmlns:a="http://schemas.openxmlformats.org/drawingml/2006/main">
               <a:ext uri="{FF2B5EF4-FFF2-40B4-BE49-F238E27FC236}">
-                <a16:creationId xmlns:a16="http://schemas.microsoft.com/office/drawing/2014/main" id="{A9705DBF-3091-4D36-83C3-4084A5D0B12C}"/>
+                <a16:creationId xmlns:a16="http://schemas.microsoft.com/office/drawing/2014/main" id="{49DB44CA-BD37-4309-BB25-3C822D86BDA2}"/>
               </a:ext>
             </a:extLst>
           </p:cNvPr>
@@ -8599,7 +8597,7 @@
           <p:cNvPr id="15" name="">
             <a:extLst xmlns:a="http://schemas.openxmlformats.org/drawingml/2006/main">
               <a:ext uri="{FF2B5EF4-FFF2-40B4-BE49-F238E27FC236}">
-                <a16:creationId xmlns:a16="http://schemas.microsoft.com/office/drawing/2014/main" id="{9BB4959D-DD07-4DC4-8B0B-6DBBE9D55188}"/>
+                <a16:creationId xmlns:a16="http://schemas.microsoft.com/office/drawing/2014/main" id="{1AD58CB2-AF9D-4F84-BB9C-F630AD30516D}"/>
               </a:ext>
             </a:extLst>
           </p:cNvPr>
@@ -8632,7 +8630,7 @@
           <p:cNvPr id="16" name="">
             <a:extLst xmlns:a="http://schemas.openxmlformats.org/drawingml/2006/main">
               <a:ext uri="{FF2B5EF4-FFF2-40B4-BE49-F238E27FC236}">
-                <a16:creationId xmlns:a16="http://schemas.microsoft.com/office/drawing/2014/main" id="{233668BC-E77F-4867-A6F6-504FDF0BA9AA}"/>
+                <a16:creationId xmlns:a16="http://schemas.microsoft.com/office/drawing/2014/main" id="{C12E76CB-C676-4194-8C7D-A4B445852F66}"/>
               </a:ext>
             </a:extLst>
           </p:cNvPr>
@@ -8667,7 +8665,7 @@
           <p:cNvPr id="17" name="">
             <a:extLst xmlns:a="http://schemas.openxmlformats.org/drawingml/2006/main">
               <a:ext uri="{FF2B5EF4-FFF2-40B4-BE49-F238E27FC236}">
-                <a16:creationId xmlns:a16="http://schemas.microsoft.com/office/drawing/2014/main" id="{3ED46D52-8C39-4663-BA62-CA4840803173}"/>
+                <a16:creationId xmlns:a16="http://schemas.microsoft.com/office/drawing/2014/main" id="{0E87495D-7824-44BB-A2B3-9136EB09B963}"/>
               </a:ext>
             </a:extLst>
           </p:cNvPr>
@@ -8731,7 +8729,7 @@
           <p:cNvPr id="18" name="">
             <a:extLst xmlns:a="http://schemas.openxmlformats.org/drawingml/2006/main">
               <a:ext uri="{FF2B5EF4-FFF2-40B4-BE49-F238E27FC236}">
-                <a16:creationId xmlns:a16="http://schemas.microsoft.com/office/drawing/2014/main" id="{CD375EB8-7ACF-4E9C-908A-54E3E2510811}"/>
+                <a16:creationId xmlns:a16="http://schemas.microsoft.com/office/drawing/2014/main" id="{F069C0AE-A580-494E-8DF2-F8139CA6744B}"/>
               </a:ext>
             </a:extLst>
           </p:cNvPr>
@@ -8764,7 +8762,7 @@
           <p:cNvPr id="19" name="">
             <a:extLst xmlns:a="http://schemas.openxmlformats.org/drawingml/2006/main">
               <a:ext uri="{FF2B5EF4-FFF2-40B4-BE49-F238E27FC236}">
-                <a16:creationId xmlns:a16="http://schemas.microsoft.com/office/drawing/2014/main" id="{BCFFF83B-1F8F-4584-9762-66F9D3CC8AD8}"/>
+                <a16:creationId xmlns:a16="http://schemas.microsoft.com/office/drawing/2014/main" id="{A2C694E1-BBE0-4B89-915D-712CB6C17BBF}"/>
               </a:ext>
             </a:extLst>
           </p:cNvPr>
@@ -8799,7 +8797,7 @@
           <p:cNvPr id="20" name="">
             <a:extLst xmlns:a="http://schemas.openxmlformats.org/drawingml/2006/main">
               <a:ext uri="{FF2B5EF4-FFF2-40B4-BE49-F238E27FC236}">
-                <a16:creationId xmlns:a16="http://schemas.microsoft.com/office/drawing/2014/main" id="{1313D9AA-744F-4EDE-AD75-8C806467FCDA}"/>
+                <a16:creationId xmlns:a16="http://schemas.microsoft.com/office/drawing/2014/main" id="{CCB15C5F-B533-40BC-8037-F6A8FBF3EE70}"/>
               </a:ext>
             </a:extLst>
           </p:cNvPr>
@@ -8863,7 +8861,7 @@
           <p:cNvPr id="21" name="">
             <a:extLst xmlns:a="http://schemas.openxmlformats.org/drawingml/2006/main">
               <a:ext uri="{FF2B5EF4-FFF2-40B4-BE49-F238E27FC236}">
-                <a16:creationId xmlns:a16="http://schemas.microsoft.com/office/drawing/2014/main" id="{76A1FF73-EBD4-467D-B4E1-1724897A8A64}"/>
+                <a16:creationId xmlns:a16="http://schemas.microsoft.com/office/drawing/2014/main" id="{9B416A6A-ABE4-4C43-A43A-D82BB5B43CD5}"/>
               </a:ext>
             </a:extLst>
           </p:cNvPr>
@@ -8896,7 +8894,7 @@
           <p:cNvPr id="22" name="">
             <a:extLst xmlns:a="http://schemas.openxmlformats.org/drawingml/2006/main">
               <a:ext uri="{FF2B5EF4-FFF2-40B4-BE49-F238E27FC236}">
-                <a16:creationId xmlns:a16="http://schemas.microsoft.com/office/drawing/2014/main" id="{45849FBC-F820-4CE5-B948-09FAA4D48116}"/>
+                <a16:creationId xmlns:a16="http://schemas.microsoft.com/office/drawing/2014/main" id="{2B7EC1E9-6A6B-4D6C-B410-C91984471932}"/>
               </a:ext>
             </a:extLst>
           </p:cNvPr>
@@ -8931,7 +8929,7 @@
           <p:cNvPr id="23" name="">
             <a:extLst xmlns:a="http://schemas.openxmlformats.org/drawingml/2006/main">
               <a:ext uri="{FF2B5EF4-FFF2-40B4-BE49-F238E27FC236}">
-                <a16:creationId xmlns:a16="http://schemas.microsoft.com/office/drawing/2014/main" id="{695FC813-D178-46E8-B939-3B4DDD050453}"/>
+                <a16:creationId xmlns:a16="http://schemas.microsoft.com/office/drawing/2014/main" id="{7D420FBC-37F8-4B9D-9875-2B457767B782}"/>
               </a:ext>
             </a:extLst>
           </p:cNvPr>
@@ -8995,7 +8993,7 @@
           <p:cNvPr id="24" name="">
             <a:extLst xmlns:a="http://schemas.openxmlformats.org/drawingml/2006/main">
               <a:ext uri="{FF2B5EF4-FFF2-40B4-BE49-F238E27FC236}">
-                <a16:creationId xmlns:a16="http://schemas.microsoft.com/office/drawing/2014/main" id="{1024F79A-D3FF-440B-807C-2167A0A99547}"/>
+                <a16:creationId xmlns:a16="http://schemas.microsoft.com/office/drawing/2014/main" id="{06B0C572-F160-4717-9345-4C6790D360D5}"/>
               </a:ext>
             </a:extLst>
           </p:cNvPr>
@@ -9028,7 +9026,7 @@
           <p:cNvPr id="25" name="">
             <a:extLst xmlns:a="http://schemas.openxmlformats.org/drawingml/2006/main">
               <a:ext uri="{FF2B5EF4-FFF2-40B4-BE49-F238E27FC236}">
-                <a16:creationId xmlns:a16="http://schemas.microsoft.com/office/drawing/2014/main" id="{46AF13A1-797A-46DF-A49F-0339A0C9D0B2}"/>
+                <a16:creationId xmlns:a16="http://schemas.microsoft.com/office/drawing/2014/main" id="{83FE4A68-402A-46FD-953D-7B2B62A47EE7}"/>
               </a:ext>
             </a:extLst>
           </p:cNvPr>
@@ -9063,7 +9061,7 @@
           <p:cNvPr id="26" name="">
             <a:extLst xmlns:a="http://schemas.openxmlformats.org/drawingml/2006/main">
               <a:ext uri="{FF2B5EF4-FFF2-40B4-BE49-F238E27FC236}">
-                <a16:creationId xmlns:a16="http://schemas.microsoft.com/office/drawing/2014/main" id="{081E7BB9-11FB-4E30-800C-B47DA7515C64}"/>
+                <a16:creationId xmlns:a16="http://schemas.microsoft.com/office/drawing/2014/main" id="{743E4B77-EE9D-4DF9-A55F-B33E094AE28C}"/>
               </a:ext>
             </a:extLst>
           </p:cNvPr>
@@ -9127,7 +9125,7 @@
           <p:cNvPr id="27" name="">
             <a:extLst xmlns:a="http://schemas.openxmlformats.org/drawingml/2006/main">
               <a:ext uri="{FF2B5EF4-FFF2-40B4-BE49-F238E27FC236}">
-                <a16:creationId xmlns:a16="http://schemas.microsoft.com/office/drawing/2014/main" id="{F0411E7C-D10E-4B35-A203-B81F31D15BE4}"/>
+                <a16:creationId xmlns:a16="http://schemas.microsoft.com/office/drawing/2014/main" id="{767900C0-F5F9-40C8-B663-D87636152352}"/>
               </a:ext>
             </a:extLst>
           </p:cNvPr>
@@ -9160,7 +9158,7 @@
           <p:cNvPr id="28" name="">
             <a:extLst xmlns:a="http://schemas.openxmlformats.org/drawingml/2006/main">
               <a:ext uri="{FF2B5EF4-FFF2-40B4-BE49-F238E27FC236}">
-                <a16:creationId xmlns:a16="http://schemas.microsoft.com/office/drawing/2014/main" id="{99A32E8C-1BA4-4843-B860-3FBB0244DCE3}"/>
+                <a16:creationId xmlns:a16="http://schemas.microsoft.com/office/drawing/2014/main" id="{A2D801AE-444D-48DC-96F4-74E55C498B67}"/>
               </a:ext>
             </a:extLst>
           </p:cNvPr>
@@ -9195,7 +9193,7 @@
           <p:cNvPr id="29" name="">
             <a:extLst xmlns:a="http://schemas.openxmlformats.org/drawingml/2006/main">
               <a:ext uri="{FF2B5EF4-FFF2-40B4-BE49-F238E27FC236}">
-                <a16:creationId xmlns:a16="http://schemas.microsoft.com/office/drawing/2014/main" id="{595816E5-B010-4E1C-A59C-677D3ADB022B}"/>
+                <a16:creationId xmlns:a16="http://schemas.microsoft.com/office/drawing/2014/main" id="{088891B9-45B7-4589-8DF3-DB1E9993FB19}"/>
               </a:ext>
             </a:extLst>
           </p:cNvPr>
@@ -9259,7 +9257,7 @@
           <p:cNvPr id="30" name="">
             <a:extLst xmlns:a="http://schemas.openxmlformats.org/drawingml/2006/main">
               <a:ext uri="{FF2B5EF4-FFF2-40B4-BE49-F238E27FC236}">
-                <a16:creationId xmlns:a16="http://schemas.microsoft.com/office/drawing/2014/main" id="{B4018EEF-BD83-4263-B165-0F133E9D5FBC}"/>
+                <a16:creationId xmlns:a16="http://schemas.microsoft.com/office/drawing/2014/main" id="{05C77378-5678-426A-B8E0-381188FA496B}"/>
               </a:ext>
             </a:extLst>
           </p:cNvPr>
@@ -9292,7 +9290,7 @@
           <p:cNvPr id="31" name="">
             <a:extLst xmlns:a="http://schemas.openxmlformats.org/drawingml/2006/main">
               <a:ext uri="{FF2B5EF4-FFF2-40B4-BE49-F238E27FC236}">
-                <a16:creationId xmlns:a16="http://schemas.microsoft.com/office/drawing/2014/main" id="{23D8DB72-20C2-4E30-9CC1-22537A0ADC21}"/>
+                <a16:creationId xmlns:a16="http://schemas.microsoft.com/office/drawing/2014/main" id="{E402F79B-CE15-4EF4-AAF7-5A82D136DFF1}"/>
               </a:ext>
             </a:extLst>
           </p:cNvPr>
@@ -9356,7 +9354,7 @@
           <p:cNvPr id="32" name="">
             <a:extLst xmlns:a="http://schemas.openxmlformats.org/drawingml/2006/main">
               <a:ext uri="{FF2B5EF4-FFF2-40B4-BE49-F238E27FC236}">
-                <a16:creationId xmlns:a16="http://schemas.microsoft.com/office/drawing/2014/main" id="{71E8A442-DF49-4C36-B649-27E38853E1BD}"/>
+                <a16:creationId xmlns:a16="http://schemas.microsoft.com/office/drawing/2014/main" id="{61B42473-C9CF-45C4-A74F-78B870E39835}"/>
               </a:ext>
             </a:extLst>
           </p:cNvPr>
@@ -9420,7 +9418,7 @@
           <p:cNvPr id="33" name="">
             <a:extLst xmlns:a="http://schemas.openxmlformats.org/drawingml/2006/main">
               <a:ext uri="{FF2B5EF4-FFF2-40B4-BE49-F238E27FC236}">
-                <a16:creationId xmlns:a16="http://schemas.microsoft.com/office/drawing/2014/main" id="{61FE7765-12D1-43FC-9C17-877B1DD7534F}"/>
+                <a16:creationId xmlns:a16="http://schemas.microsoft.com/office/drawing/2014/main" id="{F5E7E788-1329-4ADE-802A-2E7EEF2C9412}"/>
               </a:ext>
             </a:extLst>
           </p:cNvPr>
@@ -9455,7 +9453,7 @@
           <p:cNvPr id="34" name="">
             <a:extLst xmlns:a="http://schemas.openxmlformats.org/drawingml/2006/main">
               <a:ext uri="{FF2B5EF4-FFF2-40B4-BE49-F238E27FC236}">
-                <a16:creationId xmlns:a16="http://schemas.microsoft.com/office/drawing/2014/main" id="{7349E8C3-CF5A-4EC0-A5BC-F60EF4370908}"/>
+                <a16:creationId xmlns:a16="http://schemas.microsoft.com/office/drawing/2014/main" id="{BDA7DA78-81D0-48F4-9AB3-25AA1CEE9AA5}"/>
               </a:ext>
             </a:extLst>
           </p:cNvPr>
@@ -9519,7 +9517,7 @@
           <p:cNvPr id="35" name="">
             <a:extLst xmlns:a="http://schemas.openxmlformats.org/drawingml/2006/main">
               <a:ext uri="{FF2B5EF4-FFF2-40B4-BE49-F238E27FC236}">
-                <a16:creationId xmlns:a16="http://schemas.microsoft.com/office/drawing/2014/main" id="{D2521B93-F7FB-4C4D-824D-BCF32B9793E8}"/>
+                <a16:creationId xmlns:a16="http://schemas.microsoft.com/office/drawing/2014/main" id="{DA941D79-56F5-4484-9B76-ACBB211A92EA}"/>
               </a:ext>
             </a:extLst>
           </p:cNvPr>
@@ -9583,7 +9581,7 @@
           <p:cNvPr id="36" name="">
             <a:extLst xmlns:a="http://schemas.openxmlformats.org/drawingml/2006/main">
               <a:ext uri="{FF2B5EF4-FFF2-40B4-BE49-F238E27FC236}">
-                <a16:creationId xmlns:a16="http://schemas.microsoft.com/office/drawing/2014/main" id="{BE3E77E6-2F05-4D46-8C47-1561078B575D}"/>
+                <a16:creationId xmlns:a16="http://schemas.microsoft.com/office/drawing/2014/main" id="{BA5318FC-9C23-4C10-9428-A4A4061B08C3}"/>
               </a:ext>
             </a:extLst>
           </p:cNvPr>
@@ -9645,7 +9643,7 @@
     </p:spTree>
     <p:extLst>
       <p:ext uri="{BB962C8B-B14F-4D97-AF65-F5344CB8AC3E}">
-        <p14:creationId xmlns:p14="http://schemas.microsoft.com/office/powerpoint/2010/main" val="1671795937"/>
+        <p14:creationId xmlns:p14="http://schemas.microsoft.com/office/powerpoint/2010/main" val="1455506543"/>
       </p:ext>
     </p:extLst>
   </p:cSld>
@@ -9669,7 +9667,7 @@
           <p:cNvPr id="1" name="">
             <a:extLst xmlns:a="http://schemas.openxmlformats.org/drawingml/2006/main">
               <a:ext uri="{FF2B5EF4-FFF2-40B4-BE49-F238E27FC236}">
-                <a16:creationId xmlns:a16="http://schemas.microsoft.com/office/drawing/2014/main" id="{A6D22C1A-8E1D-4A7F-8749-0CF20A331E78}"/>
+                <a16:creationId xmlns:a16="http://schemas.microsoft.com/office/drawing/2014/main" id="{B92941A2-C344-4418-90F7-9B3B16570837}"/>
               </a:ext>
             </a:extLst>
           </p:cNvPr>
@@ -9704,7 +9702,7 @@
           <p:cNvPr id="2" name="">
             <a:extLst xmlns:a="http://schemas.openxmlformats.org/drawingml/2006/main">
               <a:ext uri="{FF2B5EF4-FFF2-40B4-BE49-F238E27FC236}">
-                <a16:creationId xmlns:a16="http://schemas.microsoft.com/office/drawing/2014/main" id="{530162A7-D5D6-4086-80C5-6F56FEC0E56B}"/>
+                <a16:creationId xmlns:a16="http://schemas.microsoft.com/office/drawing/2014/main" id="{81C45A71-458C-4292-8DE1-979988A8531C}"/>
               </a:ext>
             </a:extLst>
           </p:cNvPr>
@@ -9739,7 +9737,7 @@
           <p:cNvPr id="3" name="">
             <a:extLst xmlns:a="http://schemas.openxmlformats.org/drawingml/2006/main">
               <a:ext uri="{FF2B5EF4-FFF2-40B4-BE49-F238E27FC236}">
-                <a16:creationId xmlns:a16="http://schemas.microsoft.com/office/drawing/2014/main" id="{CBEDCA13-DF58-4AA1-9D0B-2F7877EFAAD9}"/>
+                <a16:creationId xmlns:a16="http://schemas.microsoft.com/office/drawing/2014/main" id="{AC70C92E-879D-4478-93DF-86CFEB0F7905}"/>
               </a:ext>
             </a:extLst>
           </p:cNvPr>
@@ -9774,7 +9772,7 @@
           <p:cNvPr id="4" name="kicker-01-marker">
             <a:extLst xmlns:a="http://schemas.openxmlformats.org/drawingml/2006/main">
               <a:ext uri="{FF2B5EF4-FFF2-40B4-BE49-F238E27FC236}">
-                <a16:creationId xmlns:a16="http://schemas.microsoft.com/office/drawing/2014/main" id="{3ED1631E-D6CB-43B5-9BC1-26AB677C2FF5}"/>
+                <a16:creationId xmlns:a16="http://schemas.microsoft.com/office/drawing/2014/main" id="{C865A597-0AB5-4B25-A1EA-6661699748D0}"/>
               </a:ext>
             </a:extLst>
           </p:cNvPr>
@@ -9809,7 +9807,7 @@
           <p:cNvPr id="5" name="kicker-01-label">
             <a:extLst xmlns:a="http://schemas.openxmlformats.org/drawingml/2006/main">
               <a:ext uri="{FF2B5EF4-FFF2-40B4-BE49-F238E27FC236}">
-                <a16:creationId xmlns:a16="http://schemas.microsoft.com/office/drawing/2014/main" id="{A708E9C0-359E-4EC1-8C22-AC2DFBA255E9}"/>
+                <a16:creationId xmlns:a16="http://schemas.microsoft.com/office/drawing/2014/main" id="{54104A1F-03B3-4A25-B2D1-7B62A88A6AEA}"/>
               </a:ext>
             </a:extLst>
           </p:cNvPr>
@@ -9873,7 +9871,7 @@
           <p:cNvPr id="6" name="">
             <a:extLst xmlns:a="http://schemas.openxmlformats.org/drawingml/2006/main">
               <a:ext uri="{FF2B5EF4-FFF2-40B4-BE49-F238E27FC236}">
-                <a16:creationId xmlns:a16="http://schemas.microsoft.com/office/drawing/2014/main" id="{E92D664A-D992-4D7E-B7ED-FC5D454E2057}"/>
+                <a16:creationId xmlns:a16="http://schemas.microsoft.com/office/drawing/2014/main" id="{21BE5782-F228-4DA7-8149-703E23F4BE0B}"/>
               </a:ext>
             </a:extLst>
           </p:cNvPr>
@@ -9937,7 +9935,7 @@
           <p:cNvPr id="7" name="">
             <a:extLst xmlns:a="http://schemas.openxmlformats.org/drawingml/2006/main">
               <a:ext uri="{FF2B5EF4-FFF2-40B4-BE49-F238E27FC236}">
-                <a16:creationId xmlns:a16="http://schemas.microsoft.com/office/drawing/2014/main" id="{DBC168D1-9274-4B2D-BDFD-DD1311E0ECF8}"/>
+                <a16:creationId xmlns:a16="http://schemas.microsoft.com/office/drawing/2014/main" id="{DF23D557-DFC2-4702-834E-5F77E1277214}"/>
               </a:ext>
             </a:extLst>
           </p:cNvPr>
@@ -10001,7 +9999,7 @@
           <p:cNvPr id="8" name="">
             <a:extLst xmlns:a="http://schemas.openxmlformats.org/drawingml/2006/main">
               <a:ext uri="{FF2B5EF4-FFF2-40B4-BE49-F238E27FC236}">
-                <a16:creationId xmlns:a16="http://schemas.microsoft.com/office/drawing/2014/main" id="{A7B9FAED-410B-45BD-B0A7-F492D3881424}"/>
+                <a16:creationId xmlns:a16="http://schemas.microsoft.com/office/drawing/2014/main" id="{EEDD1F7C-DDFB-42E2-BAC9-85750BCC897A}"/>
               </a:ext>
             </a:extLst>
           </p:cNvPr>
@@ -10036,7 +10034,7 @@
           <p:cNvPr id="9" name="">
             <a:extLst xmlns:a="http://schemas.openxmlformats.org/drawingml/2006/main">
               <a:ext uri="{FF2B5EF4-FFF2-40B4-BE49-F238E27FC236}">
-                <a16:creationId xmlns:a16="http://schemas.microsoft.com/office/drawing/2014/main" id="{17920F2F-2B22-4105-9871-68D1ADB91ADD}"/>
+                <a16:creationId xmlns:a16="http://schemas.microsoft.com/office/drawing/2014/main" id="{75D07707-02AE-40B2-AF7E-6C32F45A58DE}"/>
               </a:ext>
             </a:extLst>
           </p:cNvPr>
@@ -10100,7 +10098,7 @@
           <p:cNvPr id="10" name="">
             <a:extLst xmlns:a="http://schemas.openxmlformats.org/drawingml/2006/main">
               <a:ext uri="{FF2B5EF4-FFF2-40B4-BE49-F238E27FC236}">
-                <a16:creationId xmlns:a16="http://schemas.microsoft.com/office/drawing/2014/main" id="{EE5287CC-B344-4784-88E3-C65F16BD6C53}"/>
+                <a16:creationId xmlns:a16="http://schemas.microsoft.com/office/drawing/2014/main" id="{ECD730CA-22E0-44AE-8A4A-1F47C53EEAB3}"/>
               </a:ext>
             </a:extLst>
           </p:cNvPr>
@@ -10164,7 +10162,7 @@
           <p:cNvPr id="11" name="">
             <a:extLst xmlns:a="http://schemas.openxmlformats.org/drawingml/2006/main">
               <a:ext uri="{FF2B5EF4-FFF2-40B4-BE49-F238E27FC236}">
-                <a16:creationId xmlns:a16="http://schemas.microsoft.com/office/drawing/2014/main" id="{FA73CD2A-2D6A-4DD7-B89D-A61F0D012FB6}"/>
+                <a16:creationId xmlns:a16="http://schemas.microsoft.com/office/drawing/2014/main" id="{99113571-F143-4234-B2BD-8EDAD07E5148}"/>
               </a:ext>
             </a:extLst>
           </p:cNvPr>
@@ -10228,7 +10226,7 @@
           <p:cNvPr id="12" name="">
             <a:extLst xmlns:a="http://schemas.openxmlformats.org/drawingml/2006/main">
               <a:ext uri="{FF2B5EF4-FFF2-40B4-BE49-F238E27FC236}">
-                <a16:creationId xmlns:a16="http://schemas.microsoft.com/office/drawing/2014/main" id="{0EF271A8-980B-47ED-AD14-B9BB60D602E6}"/>
+                <a16:creationId xmlns:a16="http://schemas.microsoft.com/office/drawing/2014/main" id="{77121FF8-C7F7-4869-876A-18CDA15A17A3}"/>
               </a:ext>
             </a:extLst>
           </p:cNvPr>
@@ -10263,7 +10261,7 @@
           <p:cNvPr id="13" name="">
             <a:extLst xmlns:a="http://schemas.openxmlformats.org/drawingml/2006/main">
               <a:ext uri="{FF2B5EF4-FFF2-40B4-BE49-F238E27FC236}">
-                <a16:creationId xmlns:a16="http://schemas.microsoft.com/office/drawing/2014/main" id="{970ED490-2A51-488C-A1DA-49C4DB2E6D00}"/>
+                <a16:creationId xmlns:a16="http://schemas.microsoft.com/office/drawing/2014/main" id="{C0E64940-8006-4877-A3EE-53CCE610A3D7}"/>
               </a:ext>
             </a:extLst>
           </p:cNvPr>
@@ -10296,7 +10294,7 @@
           <p:cNvPr id="14" name="">
             <a:extLst xmlns:a="http://schemas.openxmlformats.org/drawingml/2006/main">
               <a:ext uri="{FF2B5EF4-FFF2-40B4-BE49-F238E27FC236}">
-                <a16:creationId xmlns:a16="http://schemas.microsoft.com/office/drawing/2014/main" id="{340E8E0C-0417-40A9-8660-C26EF9273211}"/>
+                <a16:creationId xmlns:a16="http://schemas.microsoft.com/office/drawing/2014/main" id="{DA0B8B4C-BFF5-4286-8271-8D33B4549A04}"/>
               </a:ext>
             </a:extLst>
           </p:cNvPr>
@@ -10329,7 +10327,7 @@
           <p:cNvPr id="15" name="">
             <a:extLst xmlns:a="http://schemas.openxmlformats.org/drawingml/2006/main">
               <a:ext uri="{FF2B5EF4-FFF2-40B4-BE49-F238E27FC236}">
-                <a16:creationId xmlns:a16="http://schemas.microsoft.com/office/drawing/2014/main" id="{2AA04529-32A9-4B10-8955-90EFB9E04E76}"/>
+                <a16:creationId xmlns:a16="http://schemas.microsoft.com/office/drawing/2014/main" id="{180D348E-8407-4E14-8E97-CA0BC6B7B417}"/>
               </a:ext>
             </a:extLst>
           </p:cNvPr>
@@ -10393,7 +10391,7 @@
           <p:cNvPr id="16" name="">
             <a:extLst xmlns:a="http://schemas.openxmlformats.org/drawingml/2006/main">
               <a:ext uri="{FF2B5EF4-FFF2-40B4-BE49-F238E27FC236}">
-                <a16:creationId xmlns:a16="http://schemas.microsoft.com/office/drawing/2014/main" id="{68F0ED15-3D4C-45B3-9542-656626CE478C}"/>
+                <a16:creationId xmlns:a16="http://schemas.microsoft.com/office/drawing/2014/main" id="{B070EA51-A8AE-4152-B3F4-7A6F21D66B2A}"/>
               </a:ext>
             </a:extLst>
           </p:cNvPr>
@@ -10457,7 +10455,7 @@
           <p:cNvPr id="17" name="">
             <a:extLst xmlns:a="http://schemas.openxmlformats.org/drawingml/2006/main">
               <a:ext uri="{FF2B5EF4-FFF2-40B4-BE49-F238E27FC236}">
-                <a16:creationId xmlns:a16="http://schemas.microsoft.com/office/drawing/2014/main" id="{BEF786C1-AD19-4225-83D4-57AFA79C798A}"/>
+                <a16:creationId xmlns:a16="http://schemas.microsoft.com/office/drawing/2014/main" id="{F914849A-CF18-43C5-9397-03E878CA4DEC}"/>
               </a:ext>
             </a:extLst>
           </p:cNvPr>
@@ -10521,7 +10519,7 @@
           <p:cNvPr id="18" name="">
             <a:extLst xmlns:a="http://schemas.openxmlformats.org/drawingml/2006/main">
               <a:ext uri="{FF2B5EF4-FFF2-40B4-BE49-F238E27FC236}">
-                <a16:creationId xmlns:a16="http://schemas.microsoft.com/office/drawing/2014/main" id="{794C242A-6BF5-425C-AD89-FD59FD348D09}"/>
+                <a16:creationId xmlns:a16="http://schemas.microsoft.com/office/drawing/2014/main" id="{8E2891DA-7422-42F4-A13E-EC86516991DA}"/>
               </a:ext>
             </a:extLst>
           </p:cNvPr>
@@ -10556,7 +10554,7 @@
           <p:cNvPr id="19" name="">
             <a:extLst xmlns:a="http://schemas.openxmlformats.org/drawingml/2006/main">
               <a:ext uri="{FF2B5EF4-FFF2-40B4-BE49-F238E27FC236}">
-                <a16:creationId xmlns:a16="http://schemas.microsoft.com/office/drawing/2014/main" id="{CD79E8F4-A8ED-49AF-AA25-D3A0E78C7408}"/>
+                <a16:creationId xmlns:a16="http://schemas.microsoft.com/office/drawing/2014/main" id="{6BF56A64-5A07-4E2B-B488-FDEB9D9E385B}"/>
               </a:ext>
             </a:extLst>
           </p:cNvPr>
@@ -10620,7 +10618,7 @@
           <p:cNvPr id="20" name="">
             <a:extLst xmlns:a="http://schemas.openxmlformats.org/drawingml/2006/main">
               <a:ext uri="{FF2B5EF4-FFF2-40B4-BE49-F238E27FC236}">
-                <a16:creationId xmlns:a16="http://schemas.microsoft.com/office/drawing/2014/main" id="{7DFF2DDB-D869-470E-BBB5-AF3CBD2E8D14}"/>
+                <a16:creationId xmlns:a16="http://schemas.microsoft.com/office/drawing/2014/main" id="{9E5F09E3-FDE5-4DC9-9C73-740CF73FD273}"/>
               </a:ext>
             </a:extLst>
           </p:cNvPr>
@@ -10684,7 +10682,7 @@
           <p:cNvPr id="21" name="">
             <a:extLst xmlns:a="http://schemas.openxmlformats.org/drawingml/2006/main">
               <a:ext uri="{FF2B5EF4-FFF2-40B4-BE49-F238E27FC236}">
-                <a16:creationId xmlns:a16="http://schemas.microsoft.com/office/drawing/2014/main" id="{3FD26EA9-4510-4D14-9020-5F105E1A74A8}"/>
+                <a16:creationId xmlns:a16="http://schemas.microsoft.com/office/drawing/2014/main" id="{A0493BCD-A340-43A0-ADB3-D313BB36CE64}"/>
               </a:ext>
             </a:extLst>
           </p:cNvPr>
@@ -10748,7 +10746,7 @@
           <p:cNvPr id="22" name="">
             <a:extLst xmlns:a="http://schemas.openxmlformats.org/drawingml/2006/main">
               <a:ext uri="{FF2B5EF4-FFF2-40B4-BE49-F238E27FC236}">
-                <a16:creationId xmlns:a16="http://schemas.microsoft.com/office/drawing/2014/main" id="{E5534546-9640-4BD1-8557-6CE20A2F2207}"/>
+                <a16:creationId xmlns:a16="http://schemas.microsoft.com/office/drawing/2014/main" id="{6CFD3AB3-0A41-4200-AA33-F3BBE0DC9F9E}"/>
               </a:ext>
             </a:extLst>
           </p:cNvPr>
@@ -10783,7 +10781,7 @@
           <p:cNvPr id="23" name="">
             <a:extLst xmlns:a="http://schemas.openxmlformats.org/drawingml/2006/main">
               <a:ext uri="{FF2B5EF4-FFF2-40B4-BE49-F238E27FC236}">
-                <a16:creationId xmlns:a16="http://schemas.microsoft.com/office/drawing/2014/main" id="{E8EEE9B0-729C-4DC2-A50E-7A983AB374CF}"/>
+                <a16:creationId xmlns:a16="http://schemas.microsoft.com/office/drawing/2014/main" id="{674AD9A3-82E1-478E-BDA7-364357311EDC}"/>
               </a:ext>
             </a:extLst>
           </p:cNvPr>
@@ -10818,7 +10816,7 @@
           <p:cNvPr id="24" name="">
             <a:extLst xmlns:a="http://schemas.openxmlformats.org/drawingml/2006/main">
               <a:ext uri="{FF2B5EF4-FFF2-40B4-BE49-F238E27FC236}">
-                <a16:creationId xmlns:a16="http://schemas.microsoft.com/office/drawing/2014/main" id="{8EA09DD2-EC53-4914-8D61-C2171AE85F07}"/>
+                <a16:creationId xmlns:a16="http://schemas.microsoft.com/office/drawing/2014/main" id="{04A06C1B-C850-43B8-972F-90351FBCFCB0}"/>
               </a:ext>
             </a:extLst>
           </p:cNvPr>
@@ -10882,7 +10880,7 @@
           <p:cNvPr id="25" name="">
             <a:extLst xmlns:a="http://schemas.openxmlformats.org/drawingml/2006/main">
               <a:ext uri="{FF2B5EF4-FFF2-40B4-BE49-F238E27FC236}">
-                <a16:creationId xmlns:a16="http://schemas.microsoft.com/office/drawing/2014/main" id="{67F1B2D5-CFB9-4BE5-BB68-19234523FB57}"/>
+                <a16:creationId xmlns:a16="http://schemas.microsoft.com/office/drawing/2014/main" id="{D64D67E3-C9CF-4D3A-82EC-B7256DF86EEA}"/>
               </a:ext>
             </a:extLst>
           </p:cNvPr>
@@ -10946,7 +10944,7 @@
           <p:cNvPr id="26" name="">
             <a:extLst xmlns:a="http://schemas.openxmlformats.org/drawingml/2006/main">
               <a:ext uri="{FF2B5EF4-FFF2-40B4-BE49-F238E27FC236}">
-                <a16:creationId xmlns:a16="http://schemas.microsoft.com/office/drawing/2014/main" id="{2B81029A-F6A1-4B32-9C66-0E6D039D771A}"/>
+                <a16:creationId xmlns:a16="http://schemas.microsoft.com/office/drawing/2014/main" id="{416B8D7C-1B8F-483F-9E28-C9CC6DE07165}"/>
               </a:ext>
             </a:extLst>
           </p:cNvPr>
@@ -11010,7 +11008,7 @@
           <p:cNvPr id="27" name="">
             <a:extLst xmlns:a="http://schemas.openxmlformats.org/drawingml/2006/main">
               <a:ext uri="{FF2B5EF4-FFF2-40B4-BE49-F238E27FC236}">
-                <a16:creationId xmlns:a16="http://schemas.microsoft.com/office/drawing/2014/main" id="{89769047-8C7F-4585-8969-EDE00D6006B7}"/>
+                <a16:creationId xmlns:a16="http://schemas.microsoft.com/office/drawing/2014/main" id="{9A4674B7-0390-4F1D-B446-0117978D77D7}"/>
               </a:ext>
             </a:extLst>
           </p:cNvPr>
@@ -11045,7 +11043,7 @@
           <p:cNvPr id="28" name="">
             <a:extLst xmlns:a="http://schemas.openxmlformats.org/drawingml/2006/main">
               <a:ext uri="{FF2B5EF4-FFF2-40B4-BE49-F238E27FC236}">
-                <a16:creationId xmlns:a16="http://schemas.microsoft.com/office/drawing/2014/main" id="{A83ED69C-1A61-45DC-B0B1-1AE1B85DAB53}"/>
+                <a16:creationId xmlns:a16="http://schemas.microsoft.com/office/drawing/2014/main" id="{CA2D96B0-166B-43E4-97F7-1D69CC975C8E}"/>
               </a:ext>
             </a:extLst>
           </p:cNvPr>
@@ -11109,7 +11107,7 @@
           <p:cNvPr id="29" name="">
             <a:extLst xmlns:a="http://schemas.openxmlformats.org/drawingml/2006/main">
               <a:ext uri="{FF2B5EF4-FFF2-40B4-BE49-F238E27FC236}">
-                <a16:creationId xmlns:a16="http://schemas.microsoft.com/office/drawing/2014/main" id="{6CA80578-9957-4805-B38C-305F77E2C6B4}"/>
+                <a16:creationId xmlns:a16="http://schemas.microsoft.com/office/drawing/2014/main" id="{50223348-7827-4207-8120-2B89EF128BCD}"/>
               </a:ext>
             </a:extLst>
           </p:cNvPr>
@@ -11173,7 +11171,7 @@
           <p:cNvPr id="30" name="">
             <a:extLst xmlns:a="http://schemas.openxmlformats.org/drawingml/2006/main">
               <a:ext uri="{FF2B5EF4-FFF2-40B4-BE49-F238E27FC236}">
-                <a16:creationId xmlns:a16="http://schemas.microsoft.com/office/drawing/2014/main" id="{CF5FF524-98A3-429F-A80C-135133BB6BBE}"/>
+                <a16:creationId xmlns:a16="http://schemas.microsoft.com/office/drawing/2014/main" id="{C5A451B6-E508-4B99-ADDB-3226D83B8971}"/>
               </a:ext>
             </a:extLst>
           </p:cNvPr>
@@ -11237,7 +11235,7 @@
           <p:cNvPr id="31" name="">
             <a:extLst xmlns:a="http://schemas.openxmlformats.org/drawingml/2006/main">
               <a:ext uri="{FF2B5EF4-FFF2-40B4-BE49-F238E27FC236}">
-                <a16:creationId xmlns:a16="http://schemas.microsoft.com/office/drawing/2014/main" id="{EFFF86E1-6352-4A40-9458-5F281AD367E8}"/>
+                <a16:creationId xmlns:a16="http://schemas.microsoft.com/office/drawing/2014/main" id="{F77447A8-5AAB-4E5E-80A5-C1AFFDD54B52}"/>
               </a:ext>
             </a:extLst>
           </p:cNvPr>
@@ -11272,7 +11270,7 @@
           <p:cNvPr id="32" name="">
             <a:extLst xmlns:a="http://schemas.openxmlformats.org/drawingml/2006/main">
               <a:ext uri="{FF2B5EF4-FFF2-40B4-BE49-F238E27FC236}">
-                <a16:creationId xmlns:a16="http://schemas.microsoft.com/office/drawing/2014/main" id="{5E262380-2723-4C28-8CC1-99F6EAC1D6FC}"/>
+                <a16:creationId xmlns:a16="http://schemas.microsoft.com/office/drawing/2014/main" id="{EFF52637-E0CF-4FD0-A45E-F74312230C69}"/>
               </a:ext>
             </a:extLst>
           </p:cNvPr>
@@ -11307,7 +11305,7 @@
           <p:cNvPr id="33" name="">
             <a:extLst xmlns:a="http://schemas.openxmlformats.org/drawingml/2006/main">
               <a:ext uri="{FF2B5EF4-FFF2-40B4-BE49-F238E27FC236}">
-                <a16:creationId xmlns:a16="http://schemas.microsoft.com/office/drawing/2014/main" id="{6AD1CAA9-F898-45FC-A05D-7D3F8A3FED41}"/>
+                <a16:creationId xmlns:a16="http://schemas.microsoft.com/office/drawing/2014/main" id="{44106282-3C5C-48F5-9861-88588642D89D}"/>
               </a:ext>
             </a:extLst>
           </p:cNvPr>
@@ -11371,7 +11369,7 @@
           <p:cNvPr id="34" name="">
             <a:extLst xmlns:a="http://schemas.openxmlformats.org/drawingml/2006/main">
               <a:ext uri="{FF2B5EF4-FFF2-40B4-BE49-F238E27FC236}">
-                <a16:creationId xmlns:a16="http://schemas.microsoft.com/office/drawing/2014/main" id="{AB56AFAD-02D3-471A-A791-C009C8BF18E8}"/>
+                <a16:creationId xmlns:a16="http://schemas.microsoft.com/office/drawing/2014/main" id="{7B90B52A-131D-4C62-92AA-C41153F7470D}"/>
               </a:ext>
             </a:extLst>
           </p:cNvPr>
@@ -11435,7 +11433,7 @@
           <p:cNvPr id="35" name="">
             <a:extLst xmlns:a="http://schemas.openxmlformats.org/drawingml/2006/main">
               <a:ext uri="{FF2B5EF4-FFF2-40B4-BE49-F238E27FC236}">
-                <a16:creationId xmlns:a16="http://schemas.microsoft.com/office/drawing/2014/main" id="{93F61560-F471-4C51-9994-A63889200D92}"/>
+                <a16:creationId xmlns:a16="http://schemas.microsoft.com/office/drawing/2014/main" id="{E925073A-4615-4D09-AA6C-76F1968A06EB}"/>
               </a:ext>
             </a:extLst>
           </p:cNvPr>
@@ -11499,7 +11497,7 @@
           <p:cNvPr id="36" name="">
             <a:extLst xmlns:a="http://schemas.openxmlformats.org/drawingml/2006/main">
               <a:ext uri="{FF2B5EF4-FFF2-40B4-BE49-F238E27FC236}">
-                <a16:creationId xmlns:a16="http://schemas.microsoft.com/office/drawing/2014/main" id="{A5664D3F-FD5E-46FB-9417-89D06B45E42E}"/>
+                <a16:creationId xmlns:a16="http://schemas.microsoft.com/office/drawing/2014/main" id="{C2DC5626-8456-4B7A-8236-DBD6BA16D257}"/>
               </a:ext>
             </a:extLst>
           </p:cNvPr>
@@ -11534,7 +11532,7 @@
           <p:cNvPr id="37" name="">
             <a:extLst xmlns:a="http://schemas.openxmlformats.org/drawingml/2006/main">
               <a:ext uri="{FF2B5EF4-FFF2-40B4-BE49-F238E27FC236}">
-                <a16:creationId xmlns:a16="http://schemas.microsoft.com/office/drawing/2014/main" id="{9C368AB1-55BF-4A19-A744-79690EBDA89D}"/>
+                <a16:creationId xmlns:a16="http://schemas.microsoft.com/office/drawing/2014/main" id="{CD02E94B-CD25-465F-BEE1-F1B6EC1F13B9}"/>
               </a:ext>
             </a:extLst>
           </p:cNvPr>
@@ -11598,7 +11596,7 @@
           <p:cNvPr id="38" name="">
             <a:extLst xmlns:a="http://schemas.openxmlformats.org/drawingml/2006/main">
               <a:ext uri="{FF2B5EF4-FFF2-40B4-BE49-F238E27FC236}">
-                <a16:creationId xmlns:a16="http://schemas.microsoft.com/office/drawing/2014/main" id="{F40E0A45-F32C-47AA-877A-8D5F5E9EEF69}"/>
+                <a16:creationId xmlns:a16="http://schemas.microsoft.com/office/drawing/2014/main" id="{87ED1EC2-12C5-46D9-84CC-74470E13B38A}"/>
               </a:ext>
             </a:extLst>
           </p:cNvPr>
@@ -11662,7 +11660,7 @@
           <p:cNvPr id="39" name="">
             <a:extLst xmlns:a="http://schemas.openxmlformats.org/drawingml/2006/main">
               <a:ext uri="{FF2B5EF4-FFF2-40B4-BE49-F238E27FC236}">
-                <a16:creationId xmlns:a16="http://schemas.microsoft.com/office/drawing/2014/main" id="{661BB1CA-49DB-4469-A1C9-5F3DBF1348FD}"/>
+                <a16:creationId xmlns:a16="http://schemas.microsoft.com/office/drawing/2014/main" id="{70E8D330-21EA-4A66-8FD7-16F4C12F9D54}"/>
               </a:ext>
             </a:extLst>
           </p:cNvPr>
@@ -11726,7 +11724,7 @@
           <p:cNvPr id="40" name="">
             <a:extLst xmlns:a="http://schemas.openxmlformats.org/drawingml/2006/main">
               <a:ext uri="{FF2B5EF4-FFF2-40B4-BE49-F238E27FC236}">
-                <a16:creationId xmlns:a16="http://schemas.microsoft.com/office/drawing/2014/main" id="{4D646031-C139-42FF-9D9D-18B08EC263B0}"/>
+                <a16:creationId xmlns:a16="http://schemas.microsoft.com/office/drawing/2014/main" id="{C8CB80A7-C224-4936-8A11-F1B6BB1B4F70}"/>
               </a:ext>
             </a:extLst>
           </p:cNvPr>
@@ -11761,7 +11759,7 @@
           <p:cNvPr id="41" name="">
             <a:extLst xmlns:a="http://schemas.openxmlformats.org/drawingml/2006/main">
               <a:ext uri="{FF2B5EF4-FFF2-40B4-BE49-F238E27FC236}">
-                <a16:creationId xmlns:a16="http://schemas.microsoft.com/office/drawing/2014/main" id="{52951878-E05D-4D95-A449-C3BB34E27963}"/>
+                <a16:creationId xmlns:a16="http://schemas.microsoft.com/office/drawing/2014/main" id="{B699CE32-7F97-47D8-934C-91E611054496}"/>
               </a:ext>
             </a:extLst>
           </p:cNvPr>
@@ -11796,7 +11794,7 @@
           <p:cNvPr id="42" name="">
             <a:extLst xmlns:a="http://schemas.openxmlformats.org/drawingml/2006/main">
               <a:ext uri="{FF2B5EF4-FFF2-40B4-BE49-F238E27FC236}">
-                <a16:creationId xmlns:a16="http://schemas.microsoft.com/office/drawing/2014/main" id="{3D10114F-A96B-4EE3-BB93-8A98602C0391}"/>
+                <a16:creationId xmlns:a16="http://schemas.microsoft.com/office/drawing/2014/main" id="{173B8642-CC2A-4D7A-AF99-B451F06FBA0E}"/>
               </a:ext>
             </a:extLst>
           </p:cNvPr>
@@ -11831,7 +11829,7 @@
           <p:cNvPr id="43" name="kicker-01-marker">
             <a:extLst xmlns:a="http://schemas.openxmlformats.org/drawingml/2006/main">
               <a:ext uri="{FF2B5EF4-FFF2-40B4-BE49-F238E27FC236}">
-                <a16:creationId xmlns:a16="http://schemas.microsoft.com/office/drawing/2014/main" id="{3E9D4A83-2EC2-48A7-B76B-8B8EA1A9D252}"/>
+                <a16:creationId xmlns:a16="http://schemas.microsoft.com/office/drawing/2014/main" id="{CB27D9BE-B385-4376-BC7D-5F7F07FFC186}"/>
               </a:ext>
             </a:extLst>
           </p:cNvPr>
@@ -11866,7 +11864,7 @@
           <p:cNvPr id="44" name="kicker-01-label">
             <a:extLst xmlns:a="http://schemas.openxmlformats.org/drawingml/2006/main">
               <a:ext uri="{FF2B5EF4-FFF2-40B4-BE49-F238E27FC236}">
-                <a16:creationId xmlns:a16="http://schemas.microsoft.com/office/drawing/2014/main" id="{2D72470B-C179-4BB5-BCBD-3F776BC779BA}"/>
+                <a16:creationId xmlns:a16="http://schemas.microsoft.com/office/drawing/2014/main" id="{775F1097-64E1-4380-9FCA-8C20CBF0A421}"/>
               </a:ext>
             </a:extLst>
           </p:cNvPr>
@@ -11930,7 +11928,7 @@
           <p:cNvPr id="45" name="">
             <a:extLst xmlns:a="http://schemas.openxmlformats.org/drawingml/2006/main">
               <a:ext uri="{FF2B5EF4-FFF2-40B4-BE49-F238E27FC236}">
-                <a16:creationId xmlns:a16="http://schemas.microsoft.com/office/drawing/2014/main" id="{B378AD98-1AA0-4820-B61A-2CA4CF058EE0}"/>
+                <a16:creationId xmlns:a16="http://schemas.microsoft.com/office/drawing/2014/main" id="{BD0EB051-9053-42EF-A454-92852DF40BC0}"/>
               </a:ext>
             </a:extLst>
           </p:cNvPr>
@@ -11994,7 +11992,7 @@
           <p:cNvPr id="46" name="">
             <a:extLst xmlns:a="http://schemas.openxmlformats.org/drawingml/2006/main">
               <a:ext uri="{FF2B5EF4-FFF2-40B4-BE49-F238E27FC236}">
-                <a16:creationId xmlns:a16="http://schemas.microsoft.com/office/drawing/2014/main" id="{287E0C76-D22F-4C41-9AC2-4B1FA6E2AABA}"/>
+                <a16:creationId xmlns:a16="http://schemas.microsoft.com/office/drawing/2014/main" id="{D4064A08-2BEE-43FA-8B07-23CC8AD00B9D}"/>
               </a:ext>
             </a:extLst>
           </p:cNvPr>
@@ -12058,7 +12056,7 @@
           <p:cNvPr id="47" name="">
             <a:extLst xmlns:a="http://schemas.openxmlformats.org/drawingml/2006/main">
               <a:ext uri="{FF2B5EF4-FFF2-40B4-BE49-F238E27FC236}">
-                <a16:creationId xmlns:a16="http://schemas.microsoft.com/office/drawing/2014/main" id="{1D9B8BC2-EE64-4FEC-9943-4EDBA1F552D4}"/>
+                <a16:creationId xmlns:a16="http://schemas.microsoft.com/office/drawing/2014/main" id="{C56E54C6-B29A-4A4E-A3F1-C323314AF9A2}"/>
               </a:ext>
             </a:extLst>
           </p:cNvPr>
@@ -12093,7 +12091,7 @@
           <p:cNvPr id="48" name="">
             <a:extLst xmlns:a="http://schemas.openxmlformats.org/drawingml/2006/main">
               <a:ext uri="{FF2B5EF4-FFF2-40B4-BE49-F238E27FC236}">
-                <a16:creationId xmlns:a16="http://schemas.microsoft.com/office/drawing/2014/main" id="{C023104F-6379-469E-B2AA-644FD9FCDA94}"/>
+                <a16:creationId xmlns:a16="http://schemas.microsoft.com/office/drawing/2014/main" id="{81062282-CE60-4131-AB44-5C42AF1869A4}"/>
               </a:ext>
             </a:extLst>
           </p:cNvPr>
@@ -12128,7 +12126,7 @@
           <p:cNvPr id="49" name="">
             <a:extLst xmlns:a="http://schemas.openxmlformats.org/drawingml/2006/main">
               <a:ext uri="{FF2B5EF4-FFF2-40B4-BE49-F238E27FC236}">
-                <a16:creationId xmlns:a16="http://schemas.microsoft.com/office/drawing/2014/main" id="{4D23C15F-48A1-4D93-9484-84D422BBD690}"/>
+                <a16:creationId xmlns:a16="http://schemas.microsoft.com/office/drawing/2014/main" id="{D9EF736F-FE2B-49EF-82B7-8C96DAE04CBA}"/>
               </a:ext>
             </a:extLst>
           </p:cNvPr>
@@ -12163,7 +12161,7 @@
           <p:cNvPr id="50" name="">
             <a:extLst xmlns:a="http://schemas.openxmlformats.org/drawingml/2006/main">
               <a:ext uri="{FF2B5EF4-FFF2-40B4-BE49-F238E27FC236}">
-                <a16:creationId xmlns:a16="http://schemas.microsoft.com/office/drawing/2014/main" id="{5FB3244D-C3D9-4CDA-9E44-C3FD3DAC375D}"/>
+                <a16:creationId xmlns:a16="http://schemas.microsoft.com/office/drawing/2014/main" id="{806BFF1D-2ADE-4D44-952D-C1FAF2A8D039}"/>
               </a:ext>
             </a:extLst>
           </p:cNvPr>
@@ -12198,7 +12196,7 @@
           <p:cNvPr id="51" name="">
             <a:extLst xmlns:a="http://schemas.openxmlformats.org/drawingml/2006/main">
               <a:ext uri="{FF2B5EF4-FFF2-40B4-BE49-F238E27FC236}">
-                <a16:creationId xmlns:a16="http://schemas.microsoft.com/office/drawing/2014/main" id="{DDDD1193-FF5C-433C-819E-5D7EBCF85213}"/>
+                <a16:creationId xmlns:a16="http://schemas.microsoft.com/office/drawing/2014/main" id="{F3697BD2-50B0-448B-9EE2-578CE087EDFF}"/>
               </a:ext>
             </a:extLst>
           </p:cNvPr>
@@ -12262,7 +12260,7 @@
           <p:cNvPr id="52" name="">
             <a:extLst xmlns:a="http://schemas.openxmlformats.org/drawingml/2006/main">
               <a:ext uri="{FF2B5EF4-FFF2-40B4-BE49-F238E27FC236}">
-                <a16:creationId xmlns:a16="http://schemas.microsoft.com/office/drawing/2014/main" id="{9426BFE4-F5FD-4F7B-BFE2-4AC83B13F924}"/>
+                <a16:creationId xmlns:a16="http://schemas.microsoft.com/office/drawing/2014/main" id="{718D1C44-1DE4-415B-AB0D-B8BA6A3F4110}"/>
               </a:ext>
             </a:extLst>
           </p:cNvPr>
@@ -12326,7 +12324,7 @@
           <p:cNvPr id="53" name="">
             <a:extLst xmlns:a="http://schemas.openxmlformats.org/drawingml/2006/main">
               <a:ext uri="{FF2B5EF4-FFF2-40B4-BE49-F238E27FC236}">
-                <a16:creationId xmlns:a16="http://schemas.microsoft.com/office/drawing/2014/main" id="{8980DE08-5D90-48AE-B235-7ABC8F026660}"/>
+                <a16:creationId xmlns:a16="http://schemas.microsoft.com/office/drawing/2014/main" id="{C283C3D1-E7D1-4BE0-9F71-AC0C416E6274}"/>
               </a:ext>
             </a:extLst>
           </p:cNvPr>
@@ -12388,7 +12386,7 @@
     </p:spTree>
     <p:extLst>
       <p:ext uri="{BB962C8B-B14F-4D97-AF65-F5344CB8AC3E}">
-        <p14:creationId xmlns:p14="http://schemas.microsoft.com/office/powerpoint/2010/main" val="1727979285"/>
+        <p14:creationId xmlns:p14="http://schemas.microsoft.com/office/powerpoint/2010/main" val="1800600392"/>
       </p:ext>
     </p:extLst>
   </p:cSld>
@@ -12412,7 +12410,7 @@
           <p:cNvPr id="1" name="">
             <a:extLst xmlns:a="http://schemas.openxmlformats.org/drawingml/2006/main">
               <a:ext uri="{FF2B5EF4-FFF2-40B4-BE49-F238E27FC236}">
-                <a16:creationId xmlns:a16="http://schemas.microsoft.com/office/drawing/2014/main" id="{700A9EAB-AF33-4184-A938-C6C165290F07}"/>
+                <a16:creationId xmlns:a16="http://schemas.microsoft.com/office/drawing/2014/main" id="{6EC81195-7ADC-4163-BD3C-C2C881E9B4EF}"/>
               </a:ext>
             </a:extLst>
           </p:cNvPr>
@@ -12447,7 +12445,7 @@
           <p:cNvPr id="2" name="">
             <a:extLst xmlns:a="http://schemas.openxmlformats.org/drawingml/2006/main">
               <a:ext uri="{FF2B5EF4-FFF2-40B4-BE49-F238E27FC236}">
-                <a16:creationId xmlns:a16="http://schemas.microsoft.com/office/drawing/2014/main" id="{6608A9AB-B65C-4EA6-9D29-75C5A0E86542}"/>
+                <a16:creationId xmlns:a16="http://schemas.microsoft.com/office/drawing/2014/main" id="{DC53343D-AD41-4B02-989C-4C9DF2E54AAB}"/>
               </a:ext>
             </a:extLst>
           </p:cNvPr>
@@ -12482,7 +12480,7 @@
           <p:cNvPr id="3" name="">
             <a:extLst xmlns:a="http://schemas.openxmlformats.org/drawingml/2006/main">
               <a:ext uri="{FF2B5EF4-FFF2-40B4-BE49-F238E27FC236}">
-                <a16:creationId xmlns:a16="http://schemas.microsoft.com/office/drawing/2014/main" id="{51B0EF5C-435F-418D-AA14-3DE632F360DE}"/>
+                <a16:creationId xmlns:a16="http://schemas.microsoft.com/office/drawing/2014/main" id="{4CC2348B-854E-415C-8239-9E6DAA6CB20A}"/>
               </a:ext>
             </a:extLst>
           </p:cNvPr>
@@ -12517,7 +12515,7 @@
           <p:cNvPr id="4" name="kicker-01-marker">
             <a:extLst xmlns:a="http://schemas.openxmlformats.org/drawingml/2006/main">
               <a:ext uri="{FF2B5EF4-FFF2-40B4-BE49-F238E27FC236}">
-                <a16:creationId xmlns:a16="http://schemas.microsoft.com/office/drawing/2014/main" id="{17D056AC-41E3-463B-BA02-336399FB79D6}"/>
+                <a16:creationId xmlns:a16="http://schemas.microsoft.com/office/drawing/2014/main" id="{C0B8D73D-B8EE-41D2-A508-D4D82F152BD5}"/>
               </a:ext>
             </a:extLst>
           </p:cNvPr>
@@ -12552,7 +12550,7 @@
           <p:cNvPr id="5" name="kicker-01-label">
             <a:extLst xmlns:a="http://schemas.openxmlformats.org/drawingml/2006/main">
               <a:ext uri="{FF2B5EF4-FFF2-40B4-BE49-F238E27FC236}">
-                <a16:creationId xmlns:a16="http://schemas.microsoft.com/office/drawing/2014/main" id="{028A93A5-9F28-43A3-B7D5-5747D08A4615}"/>
+                <a16:creationId xmlns:a16="http://schemas.microsoft.com/office/drawing/2014/main" id="{F00A890C-3307-423F-9A18-1A59A88460F1}"/>
               </a:ext>
             </a:extLst>
           </p:cNvPr>
@@ -12616,7 +12614,7 @@
           <p:cNvPr id="6" name="">
             <a:extLst xmlns:a="http://schemas.openxmlformats.org/drawingml/2006/main">
               <a:ext uri="{FF2B5EF4-FFF2-40B4-BE49-F238E27FC236}">
-                <a16:creationId xmlns:a16="http://schemas.microsoft.com/office/drawing/2014/main" id="{F505B064-5C65-4A9B-81EC-DE4B1AB5709F}"/>
+                <a16:creationId xmlns:a16="http://schemas.microsoft.com/office/drawing/2014/main" id="{75976F13-C001-44D3-BB4B-9B7BA2E9D970}"/>
               </a:ext>
             </a:extLst>
           </p:cNvPr>
@@ -12680,7 +12678,7 @@
           <p:cNvPr id="7" name="">
             <a:extLst xmlns:a="http://schemas.openxmlformats.org/drawingml/2006/main">
               <a:ext uri="{FF2B5EF4-FFF2-40B4-BE49-F238E27FC236}">
-                <a16:creationId xmlns:a16="http://schemas.microsoft.com/office/drawing/2014/main" id="{708F7F83-C506-4E43-97BA-2834CB66FA51}"/>
+                <a16:creationId xmlns:a16="http://schemas.microsoft.com/office/drawing/2014/main" id="{30F3824F-9E39-4B5E-A356-9D2FB5C909DD}"/>
               </a:ext>
             </a:extLst>
           </p:cNvPr>
@@ -12744,7 +12742,7 @@
           <p:cNvPr id="8" name="">
             <a:extLst xmlns:a="http://schemas.openxmlformats.org/drawingml/2006/main">
               <a:ext uri="{FF2B5EF4-FFF2-40B4-BE49-F238E27FC236}">
-                <a16:creationId xmlns:a16="http://schemas.microsoft.com/office/drawing/2014/main" id="{420F2DF0-B4A9-4602-96C8-7F38143716ED}"/>
+                <a16:creationId xmlns:a16="http://schemas.microsoft.com/office/drawing/2014/main" id="{F711F8EE-9E71-452F-90A8-39A792B0DE0F}"/>
               </a:ext>
             </a:extLst>
           </p:cNvPr>
@@ -12779,7 +12777,7 @@
           <p:cNvPr id="9" name="">
             <a:extLst xmlns:a="http://schemas.openxmlformats.org/drawingml/2006/main">
               <a:ext uri="{FF2B5EF4-FFF2-40B4-BE49-F238E27FC236}">
-                <a16:creationId xmlns:a16="http://schemas.microsoft.com/office/drawing/2014/main" id="{61B2502A-577E-43EE-933E-5DDDDC8A5DC4}"/>
+                <a16:creationId xmlns:a16="http://schemas.microsoft.com/office/drawing/2014/main" id="{D525261D-533F-42D7-8693-627D115E41AF}"/>
               </a:ext>
             </a:extLst>
           </p:cNvPr>
@@ -12843,7 +12841,7 @@
           <p:cNvPr id="10" name="">
             <a:extLst xmlns:a="http://schemas.openxmlformats.org/drawingml/2006/main">
               <a:ext uri="{FF2B5EF4-FFF2-40B4-BE49-F238E27FC236}">
-                <a16:creationId xmlns:a16="http://schemas.microsoft.com/office/drawing/2014/main" id="{B2E7FD4E-B133-4242-B217-5B7F22D97321}"/>
+                <a16:creationId xmlns:a16="http://schemas.microsoft.com/office/drawing/2014/main" id="{B8F53DDE-FE84-44B7-854D-6E63B9098CAA}"/>
               </a:ext>
             </a:extLst>
           </p:cNvPr>
@@ -12907,7 +12905,7 @@
           <p:cNvPr id="11" name="">
             <a:extLst xmlns:a="http://schemas.openxmlformats.org/drawingml/2006/main">
               <a:ext uri="{FF2B5EF4-FFF2-40B4-BE49-F238E27FC236}">
-                <a16:creationId xmlns:a16="http://schemas.microsoft.com/office/drawing/2014/main" id="{E1D4CD9C-4BD5-4C45-A663-06AF14CA0909}"/>
+                <a16:creationId xmlns:a16="http://schemas.microsoft.com/office/drawing/2014/main" id="{5E1A71AC-08B5-4CC1-9EB5-D5912193507B}"/>
               </a:ext>
             </a:extLst>
           </p:cNvPr>
@@ -12971,7 +12969,7 @@
           <p:cNvPr id="12" name="">
             <a:extLst xmlns:a="http://schemas.openxmlformats.org/drawingml/2006/main">
               <a:ext uri="{FF2B5EF4-FFF2-40B4-BE49-F238E27FC236}">
-                <a16:creationId xmlns:a16="http://schemas.microsoft.com/office/drawing/2014/main" id="{C6EFEFD8-20B7-4EEB-89DF-A8478C31A0AB}"/>
+                <a16:creationId xmlns:a16="http://schemas.microsoft.com/office/drawing/2014/main" id="{F5C57E85-D253-4A45-804D-DCF699854351}"/>
               </a:ext>
             </a:extLst>
           </p:cNvPr>
@@ -13006,7 +13004,7 @@
           <p:cNvPr id="13" name="">
             <a:extLst xmlns:a="http://schemas.openxmlformats.org/drawingml/2006/main">
               <a:ext uri="{FF2B5EF4-FFF2-40B4-BE49-F238E27FC236}">
-                <a16:creationId xmlns:a16="http://schemas.microsoft.com/office/drawing/2014/main" id="{1C8AFCBD-989B-4195-B841-FAABA0D87AAF}"/>
+                <a16:creationId xmlns:a16="http://schemas.microsoft.com/office/drawing/2014/main" id="{6CA4FB84-9836-48C7-8742-9BC0723487BA}"/>
               </a:ext>
             </a:extLst>
           </p:cNvPr>
@@ -13039,7 +13037,7 @@
           <p:cNvPr id="14" name="">
             <a:extLst xmlns:a="http://schemas.openxmlformats.org/drawingml/2006/main">
               <a:ext uri="{FF2B5EF4-FFF2-40B4-BE49-F238E27FC236}">
-                <a16:creationId xmlns:a16="http://schemas.microsoft.com/office/drawing/2014/main" id="{8A0209BA-DCFF-460F-8EC5-EA76FFECA7A1}"/>
+                <a16:creationId xmlns:a16="http://schemas.microsoft.com/office/drawing/2014/main" id="{4A05EFFA-A1F4-4575-95A3-363F605C5C38}"/>
               </a:ext>
             </a:extLst>
           </p:cNvPr>
@@ -13074,7 +13072,7 @@
           <p:cNvPr id="15" name="">
             <a:extLst xmlns:a="http://schemas.openxmlformats.org/drawingml/2006/main">
               <a:ext uri="{FF2B5EF4-FFF2-40B4-BE49-F238E27FC236}">
-                <a16:creationId xmlns:a16="http://schemas.microsoft.com/office/drawing/2014/main" id="{7A7C9B12-6C34-47F1-B1D1-98A251BD203D}"/>
+                <a16:creationId xmlns:a16="http://schemas.microsoft.com/office/drawing/2014/main" id="{9AFD2405-2B32-4D36-9514-AED07F2DDFEC}"/>
               </a:ext>
             </a:extLst>
           </p:cNvPr>
@@ -13138,7 +13136,7 @@
           <p:cNvPr id="16" name="">
             <a:extLst xmlns:a="http://schemas.openxmlformats.org/drawingml/2006/main">
               <a:ext uri="{FF2B5EF4-FFF2-40B4-BE49-F238E27FC236}">
-                <a16:creationId xmlns:a16="http://schemas.microsoft.com/office/drawing/2014/main" id="{B44F6A03-A8D7-46E2-8855-26C1242926DC}"/>
+                <a16:creationId xmlns:a16="http://schemas.microsoft.com/office/drawing/2014/main" id="{D4981EAA-060C-43FB-A843-D558E9275064}"/>
               </a:ext>
             </a:extLst>
           </p:cNvPr>
@@ -13173,7 +13171,7 @@
           <p:cNvPr id="17" name="">
             <a:extLst xmlns:a="http://schemas.openxmlformats.org/drawingml/2006/main">
               <a:ext uri="{FF2B5EF4-FFF2-40B4-BE49-F238E27FC236}">
-                <a16:creationId xmlns:a16="http://schemas.microsoft.com/office/drawing/2014/main" id="{DE47E2D0-4920-4305-BC75-3AA89FAADA75}"/>
+                <a16:creationId xmlns:a16="http://schemas.microsoft.com/office/drawing/2014/main" id="{F1AF32FF-C2DB-4518-A930-3393464B7FD2}"/>
               </a:ext>
             </a:extLst>
           </p:cNvPr>
@@ -13237,7 +13235,7 @@
           <p:cNvPr id="18" name="">
             <a:extLst xmlns:a="http://schemas.openxmlformats.org/drawingml/2006/main">
               <a:ext uri="{FF2B5EF4-FFF2-40B4-BE49-F238E27FC236}">
-                <a16:creationId xmlns:a16="http://schemas.microsoft.com/office/drawing/2014/main" id="{7308CC7E-4261-4F17-B829-F51E823A4EC7}"/>
+                <a16:creationId xmlns:a16="http://schemas.microsoft.com/office/drawing/2014/main" id="{BACCD1B2-DBAC-4E2F-9795-1BF3A5D1D381}"/>
               </a:ext>
             </a:extLst>
           </p:cNvPr>
@@ -13272,7 +13270,7 @@
           <p:cNvPr id="19" name="">
             <a:extLst xmlns:a="http://schemas.openxmlformats.org/drawingml/2006/main">
               <a:ext uri="{FF2B5EF4-FFF2-40B4-BE49-F238E27FC236}">
-                <a16:creationId xmlns:a16="http://schemas.microsoft.com/office/drawing/2014/main" id="{58092A4E-EE05-4AAF-92C2-88934D843B64}"/>
+                <a16:creationId xmlns:a16="http://schemas.microsoft.com/office/drawing/2014/main" id="{791B5CFE-F741-4CCB-815D-9D9B25BBEB7A}"/>
               </a:ext>
             </a:extLst>
           </p:cNvPr>
@@ -13336,7 +13334,7 @@
           <p:cNvPr id="20" name="">
             <a:extLst xmlns:a="http://schemas.openxmlformats.org/drawingml/2006/main">
               <a:ext uri="{FF2B5EF4-FFF2-40B4-BE49-F238E27FC236}">
-                <a16:creationId xmlns:a16="http://schemas.microsoft.com/office/drawing/2014/main" id="{F48B8022-C592-4730-80D3-995EFE0FFC25}"/>
+                <a16:creationId xmlns:a16="http://schemas.microsoft.com/office/drawing/2014/main" id="{F048D036-AF13-48FB-BF77-3053A6801812}"/>
               </a:ext>
             </a:extLst>
           </p:cNvPr>
@@ -13371,7 +13369,7 @@
           <p:cNvPr id="21" name="">
             <a:extLst xmlns:a="http://schemas.openxmlformats.org/drawingml/2006/main">
               <a:ext uri="{FF2B5EF4-FFF2-40B4-BE49-F238E27FC236}">
-                <a16:creationId xmlns:a16="http://schemas.microsoft.com/office/drawing/2014/main" id="{A84B5B41-4CB4-419C-8062-42FFC562D400}"/>
+                <a16:creationId xmlns:a16="http://schemas.microsoft.com/office/drawing/2014/main" id="{B7CE0A08-33FD-487B-9BF2-3950F02A1F16}"/>
               </a:ext>
             </a:extLst>
           </p:cNvPr>
@@ -13435,7 +13433,7 @@
           <p:cNvPr id="22" name="">
             <a:extLst xmlns:a="http://schemas.openxmlformats.org/drawingml/2006/main">
               <a:ext uri="{FF2B5EF4-FFF2-40B4-BE49-F238E27FC236}">
-                <a16:creationId xmlns:a16="http://schemas.microsoft.com/office/drawing/2014/main" id="{E3F7D971-CB75-4F95-8B18-1AD8A56D72FE}"/>
+                <a16:creationId xmlns:a16="http://schemas.microsoft.com/office/drawing/2014/main" id="{AE3F64A9-CDB4-4631-85C2-8D43F536D3A8}"/>
               </a:ext>
             </a:extLst>
           </p:cNvPr>
@@ -13470,7 +13468,7 @@
           <p:cNvPr id="23" name="">
             <a:extLst xmlns:a="http://schemas.openxmlformats.org/drawingml/2006/main">
               <a:ext uri="{FF2B5EF4-FFF2-40B4-BE49-F238E27FC236}">
-                <a16:creationId xmlns:a16="http://schemas.microsoft.com/office/drawing/2014/main" id="{3452ECAC-E21E-4593-958C-9B174AC6F7F8}"/>
+                <a16:creationId xmlns:a16="http://schemas.microsoft.com/office/drawing/2014/main" id="{12F3BEF7-9BAF-4999-A41E-8C1258F122A9}"/>
               </a:ext>
             </a:extLst>
           </p:cNvPr>
@@ -13534,7 +13532,7 @@
           <p:cNvPr id="24" name="">
             <a:extLst xmlns:a="http://schemas.openxmlformats.org/drawingml/2006/main">
               <a:ext uri="{FF2B5EF4-FFF2-40B4-BE49-F238E27FC236}">
-                <a16:creationId xmlns:a16="http://schemas.microsoft.com/office/drawing/2014/main" id="{4B0771B5-C13A-4181-AA58-7ED9DBEE2D80}"/>
+                <a16:creationId xmlns:a16="http://schemas.microsoft.com/office/drawing/2014/main" id="{F0691CD6-6012-43BB-9A36-E58A212E9AF4}"/>
               </a:ext>
             </a:extLst>
           </p:cNvPr>
@@ -13569,7 +13567,7 @@
           <p:cNvPr id="25" name="">
             <a:extLst xmlns:a="http://schemas.openxmlformats.org/drawingml/2006/main">
               <a:ext uri="{FF2B5EF4-FFF2-40B4-BE49-F238E27FC236}">
-                <a16:creationId xmlns:a16="http://schemas.microsoft.com/office/drawing/2014/main" id="{F72B4A05-57F4-4B01-9FB4-5800F879DA08}"/>
+                <a16:creationId xmlns:a16="http://schemas.microsoft.com/office/drawing/2014/main" id="{77648580-B7B7-4F2E-A270-E905A7A797A9}"/>
               </a:ext>
             </a:extLst>
           </p:cNvPr>
@@ -13633,7 +13631,7 @@
           <p:cNvPr id="26" name="">
             <a:extLst xmlns:a="http://schemas.openxmlformats.org/drawingml/2006/main">
               <a:ext uri="{FF2B5EF4-FFF2-40B4-BE49-F238E27FC236}">
-                <a16:creationId xmlns:a16="http://schemas.microsoft.com/office/drawing/2014/main" id="{599BBF31-A946-4B0C-BCF1-939D6EE8CC1D}"/>
+                <a16:creationId xmlns:a16="http://schemas.microsoft.com/office/drawing/2014/main" id="{4CED966E-17CC-42BB-B3C8-7CC7A10B0571}"/>
               </a:ext>
             </a:extLst>
           </p:cNvPr>
@@ -13668,7 +13666,7 @@
           <p:cNvPr id="27" name="">
             <a:extLst xmlns:a="http://schemas.openxmlformats.org/drawingml/2006/main">
               <a:ext uri="{FF2B5EF4-FFF2-40B4-BE49-F238E27FC236}">
-                <a16:creationId xmlns:a16="http://schemas.microsoft.com/office/drawing/2014/main" id="{8E868BE0-EB12-46C6-8A21-C45AC405BDF0}"/>
+                <a16:creationId xmlns:a16="http://schemas.microsoft.com/office/drawing/2014/main" id="{3EB7C461-8BD9-4AEB-8431-8F4AC098EAD4}"/>
               </a:ext>
             </a:extLst>
           </p:cNvPr>
@@ -13732,7 +13730,7 @@
           <p:cNvPr id="28" name="">
             <a:extLst xmlns:a="http://schemas.openxmlformats.org/drawingml/2006/main">
               <a:ext uri="{FF2B5EF4-FFF2-40B4-BE49-F238E27FC236}">
-                <a16:creationId xmlns:a16="http://schemas.microsoft.com/office/drawing/2014/main" id="{C736DAAF-8B07-4136-B1BA-F6D2B97C5E96}"/>
+                <a16:creationId xmlns:a16="http://schemas.microsoft.com/office/drawing/2014/main" id="{8B389C24-8081-44B3-AE07-3587D2B649DE}"/>
               </a:ext>
             </a:extLst>
           </p:cNvPr>
@@ -13767,7 +13765,7 @@
           <p:cNvPr id="29" name="">
             <a:extLst xmlns:a="http://schemas.openxmlformats.org/drawingml/2006/main">
               <a:ext uri="{FF2B5EF4-FFF2-40B4-BE49-F238E27FC236}">
-                <a16:creationId xmlns:a16="http://schemas.microsoft.com/office/drawing/2014/main" id="{68312B7F-6BDB-4E03-8DDD-A81297F5C145}"/>
+                <a16:creationId xmlns:a16="http://schemas.microsoft.com/office/drawing/2014/main" id="{D08DDE8D-4BF8-44BA-B8FE-75A068AA1E85}"/>
               </a:ext>
             </a:extLst>
           </p:cNvPr>
@@ -13831,7 +13829,7 @@
           <p:cNvPr id="30" name="">
             <a:extLst xmlns:a="http://schemas.openxmlformats.org/drawingml/2006/main">
               <a:ext uri="{FF2B5EF4-FFF2-40B4-BE49-F238E27FC236}">
-                <a16:creationId xmlns:a16="http://schemas.microsoft.com/office/drawing/2014/main" id="{775060D7-0F00-4223-9DAC-9D8BC1ABA215}"/>
+                <a16:creationId xmlns:a16="http://schemas.microsoft.com/office/drawing/2014/main" id="{F1092289-5EA4-4ACB-A28E-0BEED8CF90CB}"/>
               </a:ext>
             </a:extLst>
           </p:cNvPr>
@@ -13864,7 +13862,7 @@
           <p:cNvPr id="31" name="">
             <a:extLst xmlns:a="http://schemas.openxmlformats.org/drawingml/2006/main">
               <a:ext uri="{FF2B5EF4-FFF2-40B4-BE49-F238E27FC236}">
-                <a16:creationId xmlns:a16="http://schemas.microsoft.com/office/drawing/2014/main" id="{40A255F8-B31C-457B-B91A-139001BEEA13}"/>
+                <a16:creationId xmlns:a16="http://schemas.microsoft.com/office/drawing/2014/main" id="{B02D5A00-7686-47D5-B600-195AFB1710D8}"/>
               </a:ext>
             </a:extLst>
           </p:cNvPr>
@@ -13899,7 +13897,7 @@
           <p:cNvPr id="32" name="">
             <a:extLst xmlns:a="http://schemas.openxmlformats.org/drawingml/2006/main">
               <a:ext uri="{FF2B5EF4-FFF2-40B4-BE49-F238E27FC236}">
-                <a16:creationId xmlns:a16="http://schemas.microsoft.com/office/drawing/2014/main" id="{98246D2F-CBE1-428F-9FFF-E439BA23C612}"/>
+                <a16:creationId xmlns:a16="http://schemas.microsoft.com/office/drawing/2014/main" id="{DCF88744-B1E9-419A-BDC2-1D21D0A6824A}"/>
               </a:ext>
             </a:extLst>
           </p:cNvPr>
@@ -13963,7 +13961,7 @@
           <p:cNvPr id="33" name="">
             <a:extLst xmlns:a="http://schemas.openxmlformats.org/drawingml/2006/main">
               <a:ext uri="{FF2B5EF4-FFF2-40B4-BE49-F238E27FC236}">
-                <a16:creationId xmlns:a16="http://schemas.microsoft.com/office/drawing/2014/main" id="{BBAF96A5-E9B6-4491-83CB-9657FFFC9036}"/>
+                <a16:creationId xmlns:a16="http://schemas.microsoft.com/office/drawing/2014/main" id="{6877C1F5-6B16-452F-979F-067ED43131C8}"/>
               </a:ext>
             </a:extLst>
           </p:cNvPr>
@@ -14017,7 +14015,7 @@
                 <a:ea typeface="Aptos Display"/>
                 <a:cs typeface="Aptos Display"/>
               </a:rPr>
-              <a:t>The artifact passes only if sales, marketing, RevOps, leadership, and an AI agent could inspect it and know what to do next.</a:t>
+              <a:t>The artifact passes only if sales, marketing, RevOps, and leadership can inspect it and know what to do next.</a:t>
             </a:r>
           </a:p>
         </p:txBody>
@@ -14027,7 +14025,7 @@
           <p:cNvPr id="34" name="">
             <a:extLst xmlns:a="http://schemas.openxmlformats.org/drawingml/2006/main">
               <a:ext uri="{FF2B5EF4-FFF2-40B4-BE49-F238E27FC236}">
-                <a16:creationId xmlns:a16="http://schemas.microsoft.com/office/drawing/2014/main" id="{16784EC1-5A03-4961-887F-E05CA9C87F51}"/>
+                <a16:creationId xmlns:a16="http://schemas.microsoft.com/office/drawing/2014/main" id="{7DF26E92-88F4-40A2-86AD-942A54C3E60D}"/>
               </a:ext>
             </a:extLst>
           </p:cNvPr>
@@ -14091,7 +14089,7 @@
           <p:cNvPr id="35" name="">
             <a:extLst xmlns:a="http://schemas.openxmlformats.org/drawingml/2006/main">
               <a:ext uri="{FF2B5EF4-FFF2-40B4-BE49-F238E27FC236}">
-                <a16:creationId xmlns:a16="http://schemas.microsoft.com/office/drawing/2014/main" id="{7AE7263B-BF72-4EB6-9DD7-1A2B3B1FB3F5}"/>
+                <a16:creationId xmlns:a16="http://schemas.microsoft.com/office/drawing/2014/main" id="{C4286770-914F-43F1-B732-4E633FD658B2}"/>
               </a:ext>
             </a:extLst>
           </p:cNvPr>
@@ -14126,7 +14124,7 @@
           <p:cNvPr id="36" name="">
             <a:extLst xmlns:a="http://schemas.openxmlformats.org/drawingml/2006/main">
               <a:ext uri="{FF2B5EF4-FFF2-40B4-BE49-F238E27FC236}">
-                <a16:creationId xmlns:a16="http://schemas.microsoft.com/office/drawing/2014/main" id="{4A3A25A1-FC8B-47D3-981A-98565AB592A1}"/>
+                <a16:creationId xmlns:a16="http://schemas.microsoft.com/office/drawing/2014/main" id="{9C508F13-53DE-41B4-9269-AF282E569AEB}"/>
               </a:ext>
             </a:extLst>
           </p:cNvPr>
@@ -14190,7 +14188,7 @@
           <p:cNvPr id="37" name="">
             <a:extLst xmlns:a="http://schemas.openxmlformats.org/drawingml/2006/main">
               <a:ext uri="{FF2B5EF4-FFF2-40B4-BE49-F238E27FC236}">
-                <a16:creationId xmlns:a16="http://schemas.microsoft.com/office/drawing/2014/main" id="{FF13E09A-B265-4561-98FC-3140A0B7CF7D}"/>
+                <a16:creationId xmlns:a16="http://schemas.microsoft.com/office/drawing/2014/main" id="{A5FD198F-1C9B-4ABB-8F6E-BA71ACAA7DFB}"/>
               </a:ext>
             </a:extLst>
           </p:cNvPr>
@@ -14254,7 +14252,7 @@
           <p:cNvPr id="38" name="">
             <a:extLst xmlns:a="http://schemas.openxmlformats.org/drawingml/2006/main">
               <a:ext uri="{FF2B5EF4-FFF2-40B4-BE49-F238E27FC236}">
-                <a16:creationId xmlns:a16="http://schemas.microsoft.com/office/drawing/2014/main" id="{54C80F0B-041F-43C3-AD1B-1EFC7B86A61B}"/>
+                <a16:creationId xmlns:a16="http://schemas.microsoft.com/office/drawing/2014/main" id="{37D76D26-1246-431B-9558-E3D3E5101ACA}"/>
               </a:ext>
             </a:extLst>
           </p:cNvPr>
@@ -14318,7 +14316,7 @@
           <p:cNvPr id="39" name="">
             <a:extLst xmlns:a="http://schemas.openxmlformats.org/drawingml/2006/main">
               <a:ext uri="{FF2B5EF4-FFF2-40B4-BE49-F238E27FC236}">
-                <a16:creationId xmlns:a16="http://schemas.microsoft.com/office/drawing/2014/main" id="{388926B1-CF9B-4928-B94E-DB8658498F45}"/>
+                <a16:creationId xmlns:a16="http://schemas.microsoft.com/office/drawing/2014/main" id="{418BFD9A-12EA-4CBC-91DE-1E51D084DF6E}"/>
               </a:ext>
             </a:extLst>
           </p:cNvPr>
@@ -14353,7 +14351,7 @@
           <p:cNvPr id="40" name="">
             <a:extLst xmlns:a="http://schemas.openxmlformats.org/drawingml/2006/main">
               <a:ext uri="{FF2B5EF4-FFF2-40B4-BE49-F238E27FC236}">
-                <a16:creationId xmlns:a16="http://schemas.microsoft.com/office/drawing/2014/main" id="{CBAF8DB1-82A5-4E20-895A-D272215B4E62}"/>
+                <a16:creationId xmlns:a16="http://schemas.microsoft.com/office/drawing/2014/main" id="{BADA673A-FF4F-4CE7-80A0-31AE874E88C3}"/>
               </a:ext>
             </a:extLst>
           </p:cNvPr>
@@ -14388,7 +14386,7 @@
           <p:cNvPr id="41" name="">
             <a:extLst xmlns:a="http://schemas.openxmlformats.org/drawingml/2006/main">
               <a:ext uri="{FF2B5EF4-FFF2-40B4-BE49-F238E27FC236}">
-                <a16:creationId xmlns:a16="http://schemas.microsoft.com/office/drawing/2014/main" id="{26EB856F-0DC5-420E-A696-5404C38AB467}"/>
+                <a16:creationId xmlns:a16="http://schemas.microsoft.com/office/drawing/2014/main" id="{0D8D284A-01A1-4615-8670-F8E9E4EF6B95}"/>
               </a:ext>
             </a:extLst>
           </p:cNvPr>
@@ -14423,7 +14421,7 @@
           <p:cNvPr id="42" name="kicker-01-marker">
             <a:extLst xmlns:a="http://schemas.openxmlformats.org/drawingml/2006/main">
               <a:ext uri="{FF2B5EF4-FFF2-40B4-BE49-F238E27FC236}">
-                <a16:creationId xmlns:a16="http://schemas.microsoft.com/office/drawing/2014/main" id="{389CD643-0495-4809-891D-ECC7B670E9EE}"/>
+                <a16:creationId xmlns:a16="http://schemas.microsoft.com/office/drawing/2014/main" id="{E7B95B0E-31FF-4B8D-A06C-B4620A3C8814}"/>
               </a:ext>
             </a:extLst>
           </p:cNvPr>
@@ -14458,7 +14456,7 @@
           <p:cNvPr id="43" name="kicker-01-label">
             <a:extLst xmlns:a="http://schemas.openxmlformats.org/drawingml/2006/main">
               <a:ext uri="{FF2B5EF4-FFF2-40B4-BE49-F238E27FC236}">
-                <a16:creationId xmlns:a16="http://schemas.microsoft.com/office/drawing/2014/main" id="{573D02AE-94E9-40C6-9D10-EA44C6B15497}"/>
+                <a16:creationId xmlns:a16="http://schemas.microsoft.com/office/drawing/2014/main" id="{173BB232-1237-4604-8489-F580BBE8F6C9}"/>
               </a:ext>
             </a:extLst>
           </p:cNvPr>
@@ -14522,7 +14520,7 @@
           <p:cNvPr id="44" name="">
             <a:extLst xmlns:a="http://schemas.openxmlformats.org/drawingml/2006/main">
               <a:ext uri="{FF2B5EF4-FFF2-40B4-BE49-F238E27FC236}">
-                <a16:creationId xmlns:a16="http://schemas.microsoft.com/office/drawing/2014/main" id="{840877F3-707E-4086-93EC-E0CF69BC949F}"/>
+                <a16:creationId xmlns:a16="http://schemas.microsoft.com/office/drawing/2014/main" id="{5C47999C-F475-4480-976F-2B32B848420F}"/>
               </a:ext>
             </a:extLst>
           </p:cNvPr>
@@ -14586,7 +14584,7 @@
           <p:cNvPr id="45" name="">
             <a:extLst xmlns:a="http://schemas.openxmlformats.org/drawingml/2006/main">
               <a:ext uri="{FF2B5EF4-FFF2-40B4-BE49-F238E27FC236}">
-                <a16:creationId xmlns:a16="http://schemas.microsoft.com/office/drawing/2014/main" id="{8EFE9121-D025-428E-99F9-C87C97C41182}"/>
+                <a16:creationId xmlns:a16="http://schemas.microsoft.com/office/drawing/2014/main" id="{472A2E16-2CC3-4870-BBCD-06DAFB5F225D}"/>
               </a:ext>
             </a:extLst>
           </p:cNvPr>
@@ -14650,7 +14648,7 @@
           <p:cNvPr id="46" name="">
             <a:extLst xmlns:a="http://schemas.openxmlformats.org/drawingml/2006/main">
               <a:ext uri="{FF2B5EF4-FFF2-40B4-BE49-F238E27FC236}">
-                <a16:creationId xmlns:a16="http://schemas.microsoft.com/office/drawing/2014/main" id="{125F2AF0-A036-447F-B2E4-EE91EECDAFF4}"/>
+                <a16:creationId xmlns:a16="http://schemas.microsoft.com/office/drawing/2014/main" id="{0E0D2C0C-2DED-4D7E-897C-E61551CCE96F}"/>
               </a:ext>
             </a:extLst>
           </p:cNvPr>
@@ -14685,7 +14683,7 @@
           <p:cNvPr id="47" name="">
             <a:extLst xmlns:a="http://schemas.openxmlformats.org/drawingml/2006/main">
               <a:ext uri="{FF2B5EF4-FFF2-40B4-BE49-F238E27FC236}">
-                <a16:creationId xmlns:a16="http://schemas.microsoft.com/office/drawing/2014/main" id="{EC87E691-7CA2-4388-852F-41F81E1055FD}"/>
+                <a16:creationId xmlns:a16="http://schemas.microsoft.com/office/drawing/2014/main" id="{0B64D7D4-94F4-449E-9A22-F8D4955F1641}"/>
               </a:ext>
             </a:extLst>
           </p:cNvPr>
@@ -14720,7 +14718,7 @@
           <p:cNvPr id="48" name="">
             <a:extLst xmlns:a="http://schemas.openxmlformats.org/drawingml/2006/main">
               <a:ext uri="{FF2B5EF4-FFF2-40B4-BE49-F238E27FC236}">
-                <a16:creationId xmlns:a16="http://schemas.microsoft.com/office/drawing/2014/main" id="{881B1F7B-4169-478F-B91A-B13BD10FFCCF}"/>
+                <a16:creationId xmlns:a16="http://schemas.microsoft.com/office/drawing/2014/main" id="{1903EF17-03E6-4883-AAF7-2A5EDE45D11A}"/>
               </a:ext>
             </a:extLst>
           </p:cNvPr>
@@ -14755,7 +14753,7 @@
           <p:cNvPr id="49" name="">
             <a:extLst xmlns:a="http://schemas.openxmlformats.org/drawingml/2006/main">
               <a:ext uri="{FF2B5EF4-FFF2-40B4-BE49-F238E27FC236}">
-                <a16:creationId xmlns:a16="http://schemas.microsoft.com/office/drawing/2014/main" id="{BDFBA0B1-B3C0-4605-A06C-BB1D68FA12AE}"/>
+                <a16:creationId xmlns:a16="http://schemas.microsoft.com/office/drawing/2014/main" id="{BAF2209C-F086-4C14-BC0F-C3AEEC949233}"/>
               </a:ext>
             </a:extLst>
           </p:cNvPr>
@@ -14790,7 +14788,7 @@
           <p:cNvPr id="50" name="">
             <a:extLst xmlns:a="http://schemas.openxmlformats.org/drawingml/2006/main">
               <a:ext uri="{FF2B5EF4-FFF2-40B4-BE49-F238E27FC236}">
-                <a16:creationId xmlns:a16="http://schemas.microsoft.com/office/drawing/2014/main" id="{387A25D7-CBDA-4E28-ADF2-62349789C28E}"/>
+                <a16:creationId xmlns:a16="http://schemas.microsoft.com/office/drawing/2014/main" id="{F9B1AFC1-BD12-44B2-86EF-A02F02B78EC8}"/>
               </a:ext>
             </a:extLst>
           </p:cNvPr>
@@ -14854,7 +14852,7 @@
           <p:cNvPr id="51" name="">
             <a:extLst xmlns:a="http://schemas.openxmlformats.org/drawingml/2006/main">
               <a:ext uri="{FF2B5EF4-FFF2-40B4-BE49-F238E27FC236}">
-                <a16:creationId xmlns:a16="http://schemas.microsoft.com/office/drawing/2014/main" id="{2AE291B1-5502-4590-8F31-E98CFD85B0EF}"/>
+                <a16:creationId xmlns:a16="http://schemas.microsoft.com/office/drawing/2014/main" id="{0963412F-3649-431D-99B4-3F2827C1468C}"/>
               </a:ext>
             </a:extLst>
           </p:cNvPr>
@@ -14918,7 +14916,7 @@
           <p:cNvPr id="52" name="">
             <a:extLst xmlns:a="http://schemas.openxmlformats.org/drawingml/2006/main">
               <a:ext uri="{FF2B5EF4-FFF2-40B4-BE49-F238E27FC236}">
-                <a16:creationId xmlns:a16="http://schemas.microsoft.com/office/drawing/2014/main" id="{14A33537-47D1-43CB-B833-B7770D29C2D1}"/>
+                <a16:creationId xmlns:a16="http://schemas.microsoft.com/office/drawing/2014/main" id="{B9EB5CC4-1245-40D8-84DE-C236FCE17196}"/>
               </a:ext>
             </a:extLst>
           </p:cNvPr>
@@ -14980,7 +14978,7 @@
     </p:spTree>
     <p:extLst>
       <p:ext uri="{BB962C8B-B14F-4D97-AF65-F5344CB8AC3E}">
-        <p14:creationId xmlns:p14="http://schemas.microsoft.com/office/powerpoint/2010/main" val="829963623"/>
+        <p14:creationId xmlns:p14="http://schemas.microsoft.com/office/powerpoint/2010/main" val="41340799"/>
       </p:ext>
     </p:extLst>
   </p:cSld>
@@ -15004,7 +15002,7 @@
           <p:cNvPr id="1" name="">
             <a:extLst xmlns:a="http://schemas.openxmlformats.org/drawingml/2006/main">
               <a:ext uri="{FF2B5EF4-FFF2-40B4-BE49-F238E27FC236}">
-                <a16:creationId xmlns:a16="http://schemas.microsoft.com/office/drawing/2014/main" id="{720818BE-6B2D-495A-A22E-3C0B11877C77}"/>
+                <a16:creationId xmlns:a16="http://schemas.microsoft.com/office/drawing/2014/main" id="{423E7215-48D1-4D02-9D4D-60F5BCC756C5}"/>
               </a:ext>
             </a:extLst>
           </p:cNvPr>
@@ -15039,7 +15037,7 @@
           <p:cNvPr id="2" name="">
             <a:extLst xmlns:a="http://schemas.openxmlformats.org/drawingml/2006/main">
               <a:ext uri="{FF2B5EF4-FFF2-40B4-BE49-F238E27FC236}">
-                <a16:creationId xmlns:a16="http://schemas.microsoft.com/office/drawing/2014/main" id="{8AE79EE5-6EEB-46D7-B49D-DF91BE277262}"/>
+                <a16:creationId xmlns:a16="http://schemas.microsoft.com/office/drawing/2014/main" id="{A9FCCEA1-4643-4FB5-823A-59AB57C644EE}"/>
               </a:ext>
             </a:extLst>
           </p:cNvPr>
@@ -15074,7 +15072,7 @@
           <p:cNvPr id="3" name="">
             <a:extLst xmlns:a="http://schemas.openxmlformats.org/drawingml/2006/main">
               <a:ext uri="{FF2B5EF4-FFF2-40B4-BE49-F238E27FC236}">
-                <a16:creationId xmlns:a16="http://schemas.microsoft.com/office/drawing/2014/main" id="{CE57556C-A752-4B8A-A131-BF1DE3EAB3D4}"/>
+                <a16:creationId xmlns:a16="http://schemas.microsoft.com/office/drawing/2014/main" id="{8D90FCB5-F731-4F9A-8A94-8F732F5E6F0B}"/>
               </a:ext>
             </a:extLst>
           </p:cNvPr>
@@ -15109,7 +15107,7 @@
           <p:cNvPr id="4" name="kicker-01-marker">
             <a:extLst xmlns:a="http://schemas.openxmlformats.org/drawingml/2006/main">
               <a:ext uri="{FF2B5EF4-FFF2-40B4-BE49-F238E27FC236}">
-                <a16:creationId xmlns:a16="http://schemas.microsoft.com/office/drawing/2014/main" id="{792D2A6A-5694-4363-A1C8-57A86D416748}"/>
+                <a16:creationId xmlns:a16="http://schemas.microsoft.com/office/drawing/2014/main" id="{493EFEAE-17A2-418A-88F1-FF712F5026F7}"/>
               </a:ext>
             </a:extLst>
           </p:cNvPr>
@@ -15144,7 +15142,7 @@
           <p:cNvPr id="5" name="kicker-01-label">
             <a:extLst xmlns:a="http://schemas.openxmlformats.org/drawingml/2006/main">
               <a:ext uri="{FF2B5EF4-FFF2-40B4-BE49-F238E27FC236}">
-                <a16:creationId xmlns:a16="http://schemas.microsoft.com/office/drawing/2014/main" id="{C8D7311B-6F49-450A-AF7B-E0893BB203F3}"/>
+                <a16:creationId xmlns:a16="http://schemas.microsoft.com/office/drawing/2014/main" id="{B0C7500A-138B-40EE-A1FB-27E83F2232E2}"/>
               </a:ext>
             </a:extLst>
           </p:cNvPr>
@@ -15208,7 +15206,7 @@
           <p:cNvPr id="6" name="">
             <a:extLst xmlns:a="http://schemas.openxmlformats.org/drawingml/2006/main">
               <a:ext uri="{FF2B5EF4-FFF2-40B4-BE49-F238E27FC236}">
-                <a16:creationId xmlns:a16="http://schemas.microsoft.com/office/drawing/2014/main" id="{97C54FD2-0B4C-421B-8692-CA85DE739B3C}"/>
+                <a16:creationId xmlns:a16="http://schemas.microsoft.com/office/drawing/2014/main" id="{DAF158AD-965E-49E0-9E09-C8F26BB8CC56}"/>
               </a:ext>
             </a:extLst>
           </p:cNvPr>
@@ -15272,7 +15270,7 @@
           <p:cNvPr id="7" name="">
             <a:extLst xmlns:a="http://schemas.openxmlformats.org/drawingml/2006/main">
               <a:ext uri="{FF2B5EF4-FFF2-40B4-BE49-F238E27FC236}">
-                <a16:creationId xmlns:a16="http://schemas.microsoft.com/office/drawing/2014/main" id="{36BAF68B-FB80-4DFE-ABE8-54E696CA0CD9}"/>
+                <a16:creationId xmlns:a16="http://schemas.microsoft.com/office/drawing/2014/main" id="{66250B29-A76D-4755-B5EE-9300ED042715}"/>
               </a:ext>
             </a:extLst>
           </p:cNvPr>
@@ -15305,7 +15303,7 @@
           <p:cNvPr id="8" name="">
             <a:extLst xmlns:a="http://schemas.openxmlformats.org/drawingml/2006/main">
               <a:ext uri="{FF2B5EF4-FFF2-40B4-BE49-F238E27FC236}">
-                <a16:creationId xmlns:a16="http://schemas.microsoft.com/office/drawing/2014/main" id="{4B8C3FC6-79E6-4E69-8C15-71BBC055AC46}"/>
+                <a16:creationId xmlns:a16="http://schemas.microsoft.com/office/drawing/2014/main" id="{F27C00B2-8F11-4ADB-A28E-A87C2F4BFBFE}"/>
               </a:ext>
             </a:extLst>
           </p:cNvPr>
@@ -15340,7 +15338,7 @@
           <p:cNvPr id="9" name="">
             <a:extLst xmlns:a="http://schemas.openxmlformats.org/drawingml/2006/main">
               <a:ext uri="{FF2B5EF4-FFF2-40B4-BE49-F238E27FC236}">
-                <a16:creationId xmlns:a16="http://schemas.microsoft.com/office/drawing/2014/main" id="{35D11091-660C-409E-9896-FD21C2538232}"/>
+                <a16:creationId xmlns:a16="http://schemas.microsoft.com/office/drawing/2014/main" id="{11D04090-60EA-44CD-A06B-9EBE664448CE}"/>
               </a:ext>
             </a:extLst>
           </p:cNvPr>
@@ -15404,7 +15402,7 @@
           <p:cNvPr id="10" name="">
             <a:extLst xmlns:a="http://schemas.openxmlformats.org/drawingml/2006/main">
               <a:ext uri="{FF2B5EF4-FFF2-40B4-BE49-F238E27FC236}">
-                <a16:creationId xmlns:a16="http://schemas.microsoft.com/office/drawing/2014/main" id="{7B0FC23F-BA32-48AE-AED6-A444A7DA108D}"/>
+                <a16:creationId xmlns:a16="http://schemas.microsoft.com/office/drawing/2014/main" id="{6E7CE3B2-2ED4-472A-8DF8-C34EB21E3503}"/>
               </a:ext>
             </a:extLst>
           </p:cNvPr>
@@ -15468,7 +15466,7 @@
           <p:cNvPr id="11" name="">
             <a:extLst xmlns:a="http://schemas.openxmlformats.org/drawingml/2006/main">
               <a:ext uri="{FF2B5EF4-FFF2-40B4-BE49-F238E27FC236}">
-                <a16:creationId xmlns:a16="http://schemas.microsoft.com/office/drawing/2014/main" id="{6D46307C-F0A9-4CF6-8B53-8ED87BCC3B8B}"/>
+                <a16:creationId xmlns:a16="http://schemas.microsoft.com/office/drawing/2014/main" id="{E4C08CDD-A46F-4540-806D-0E18BDD23AF4}"/>
               </a:ext>
             </a:extLst>
           </p:cNvPr>
@@ -15501,7 +15499,7 @@
           <p:cNvPr id="12" name="">
             <a:extLst xmlns:a="http://schemas.openxmlformats.org/drawingml/2006/main">
               <a:ext uri="{FF2B5EF4-FFF2-40B4-BE49-F238E27FC236}">
-                <a16:creationId xmlns:a16="http://schemas.microsoft.com/office/drawing/2014/main" id="{73FCC7F9-A69A-48DF-991D-72342F86244F}"/>
+                <a16:creationId xmlns:a16="http://schemas.microsoft.com/office/drawing/2014/main" id="{69572C98-46ED-47C4-949A-B3569A08FF75}"/>
               </a:ext>
             </a:extLst>
           </p:cNvPr>
@@ -15536,7 +15534,7 @@
           <p:cNvPr id="13" name="">
             <a:extLst xmlns:a="http://schemas.openxmlformats.org/drawingml/2006/main">
               <a:ext uri="{FF2B5EF4-FFF2-40B4-BE49-F238E27FC236}">
-                <a16:creationId xmlns:a16="http://schemas.microsoft.com/office/drawing/2014/main" id="{9FD892F2-3672-44A7-816F-2F6433A08657}"/>
+                <a16:creationId xmlns:a16="http://schemas.microsoft.com/office/drawing/2014/main" id="{E587A792-7BFC-462C-A221-7E122B816F7F}"/>
               </a:ext>
             </a:extLst>
           </p:cNvPr>
@@ -15600,7 +15598,7 @@
           <p:cNvPr id="14" name="">
             <a:extLst xmlns:a="http://schemas.openxmlformats.org/drawingml/2006/main">
               <a:ext uri="{FF2B5EF4-FFF2-40B4-BE49-F238E27FC236}">
-                <a16:creationId xmlns:a16="http://schemas.microsoft.com/office/drawing/2014/main" id="{0601B7E8-6635-437B-85F0-BC5751FA55A0}"/>
+                <a16:creationId xmlns:a16="http://schemas.microsoft.com/office/drawing/2014/main" id="{8DE205CE-4D93-4449-8577-F46DC0B32184}"/>
               </a:ext>
             </a:extLst>
           </p:cNvPr>
@@ -15664,7 +15662,7 @@
           <p:cNvPr id="15" name="">
             <a:extLst xmlns:a="http://schemas.openxmlformats.org/drawingml/2006/main">
               <a:ext uri="{FF2B5EF4-FFF2-40B4-BE49-F238E27FC236}">
-                <a16:creationId xmlns:a16="http://schemas.microsoft.com/office/drawing/2014/main" id="{86FD7245-9A9E-49D2-A0E3-5AA29E9639A2}"/>
+                <a16:creationId xmlns:a16="http://schemas.microsoft.com/office/drawing/2014/main" id="{7EB3F802-0EA0-4A9D-9D6B-48E15A03EF00}"/>
               </a:ext>
             </a:extLst>
           </p:cNvPr>
@@ -15697,7 +15695,7 @@
           <p:cNvPr id="16" name="">
             <a:extLst xmlns:a="http://schemas.openxmlformats.org/drawingml/2006/main">
               <a:ext uri="{FF2B5EF4-FFF2-40B4-BE49-F238E27FC236}">
-                <a16:creationId xmlns:a16="http://schemas.microsoft.com/office/drawing/2014/main" id="{E00C988D-470E-488C-9E76-E8A4194D2C89}"/>
+                <a16:creationId xmlns:a16="http://schemas.microsoft.com/office/drawing/2014/main" id="{93CF713B-AF56-436D-A778-A516D47D6020}"/>
               </a:ext>
             </a:extLst>
           </p:cNvPr>
@@ -15751,7 +15749,7 @@
                 <a:ea typeface="Aptos"/>
                 <a:cs typeface="Aptos"/>
               </a:rPr>
-              <a:t>Recurring instructor check: sales impact / signal / RevOps field / buyer content / AI risk / industrial failure mode</a:t>
+              <a:t>Recurring instructor check: sales impact / signal / RevOps field / buyer content / review risk / industrial failure mode</a:t>
             </a:r>
           </a:p>
         </p:txBody>
@@ -15761,7 +15759,7 @@
           <p:cNvPr id="17" name="">
             <a:extLst xmlns:a="http://schemas.openxmlformats.org/drawingml/2006/main">
               <a:ext uri="{FF2B5EF4-FFF2-40B4-BE49-F238E27FC236}">
-                <a16:creationId xmlns:a16="http://schemas.microsoft.com/office/drawing/2014/main" id="{B4E99394-C6C9-4C5C-8565-728072F3E695}"/>
+                <a16:creationId xmlns:a16="http://schemas.microsoft.com/office/drawing/2014/main" id="{397CF4DA-2DC9-46B8-8981-D21D7000487A}"/>
               </a:ext>
             </a:extLst>
           </p:cNvPr>
@@ -15796,7 +15794,7 @@
           <p:cNvPr id="18" name="">
             <a:extLst xmlns:a="http://schemas.openxmlformats.org/drawingml/2006/main">
               <a:ext uri="{FF2B5EF4-FFF2-40B4-BE49-F238E27FC236}">
-                <a16:creationId xmlns:a16="http://schemas.microsoft.com/office/drawing/2014/main" id="{B3CD0281-4344-4FB6-A0B1-322DA48B02CE}"/>
+                <a16:creationId xmlns:a16="http://schemas.microsoft.com/office/drawing/2014/main" id="{BE40AF11-C6E7-464D-B919-A1CA1BE400C7}"/>
               </a:ext>
             </a:extLst>
           </p:cNvPr>
@@ -15860,7 +15858,7 @@
           <p:cNvPr id="19" name="">
             <a:extLst xmlns:a="http://schemas.openxmlformats.org/drawingml/2006/main">
               <a:ext uri="{FF2B5EF4-FFF2-40B4-BE49-F238E27FC236}">
-                <a16:creationId xmlns:a16="http://schemas.microsoft.com/office/drawing/2014/main" id="{5A029386-6AC7-459B-A256-B7A10515F779}"/>
+                <a16:creationId xmlns:a16="http://schemas.microsoft.com/office/drawing/2014/main" id="{B4455F33-96CD-4E60-864F-05962B0F6EF6}"/>
               </a:ext>
             </a:extLst>
           </p:cNvPr>
@@ -15924,7 +15922,7 @@
           <p:cNvPr id="20" name="">
             <a:extLst xmlns:a="http://schemas.openxmlformats.org/drawingml/2006/main">
               <a:ext uri="{FF2B5EF4-FFF2-40B4-BE49-F238E27FC236}">
-                <a16:creationId xmlns:a16="http://schemas.microsoft.com/office/drawing/2014/main" id="{1AF5687D-EDFA-4478-8B8D-E154048D5422}"/>
+                <a16:creationId xmlns:a16="http://schemas.microsoft.com/office/drawing/2014/main" id="{C9934814-4A8E-433C-953B-3FA8BDDB8201}"/>
               </a:ext>
             </a:extLst>
           </p:cNvPr>
@@ -15986,7 +15984,7 @@
     </p:spTree>
     <p:extLst>
       <p:ext uri="{BB962C8B-B14F-4D97-AF65-F5344CB8AC3E}">
-        <p14:creationId xmlns:p14="http://schemas.microsoft.com/office/powerpoint/2010/main" val="691310077"/>
+        <p14:creationId xmlns:p14="http://schemas.microsoft.com/office/powerpoint/2010/main" val="193394373"/>
       </p:ext>
     </p:extLst>
   </p:cSld>
@@ -16010,7 +16008,7 @@
           <p:cNvPr id="1" name="">
             <a:extLst xmlns:a="http://schemas.openxmlformats.org/drawingml/2006/main">
               <a:ext uri="{FF2B5EF4-FFF2-40B4-BE49-F238E27FC236}">
-                <a16:creationId xmlns:a16="http://schemas.microsoft.com/office/drawing/2014/main" id="{3369F0DA-0B27-4E76-8A54-8C6022E94135}"/>
+                <a16:creationId xmlns:a16="http://schemas.microsoft.com/office/drawing/2014/main" id="{447AE4B2-1E9A-4EAD-A990-E44CF6111F07}"/>
               </a:ext>
             </a:extLst>
           </p:cNvPr>
@@ -16045,7 +16043,7 @@
           <p:cNvPr id="2" name="">
             <a:extLst xmlns:a="http://schemas.openxmlformats.org/drawingml/2006/main">
               <a:ext uri="{FF2B5EF4-FFF2-40B4-BE49-F238E27FC236}">
-                <a16:creationId xmlns:a16="http://schemas.microsoft.com/office/drawing/2014/main" id="{059C23AD-4D86-4B85-963B-7C52964BE10D}"/>
+                <a16:creationId xmlns:a16="http://schemas.microsoft.com/office/drawing/2014/main" id="{680CE5C5-3F47-4999-9C40-3B2041FF7E14}"/>
               </a:ext>
             </a:extLst>
           </p:cNvPr>
@@ -16080,7 +16078,7 @@
           <p:cNvPr id="3" name="">
             <a:extLst xmlns:a="http://schemas.openxmlformats.org/drawingml/2006/main">
               <a:ext uri="{FF2B5EF4-FFF2-40B4-BE49-F238E27FC236}">
-                <a16:creationId xmlns:a16="http://schemas.microsoft.com/office/drawing/2014/main" id="{5D635637-3CF1-4875-ACE8-C156CC8364D4}"/>
+                <a16:creationId xmlns:a16="http://schemas.microsoft.com/office/drawing/2014/main" id="{F14472F9-87DF-4C41-B5A6-644A292BDA19}"/>
               </a:ext>
             </a:extLst>
           </p:cNvPr>
@@ -16115,7 +16113,7 @@
           <p:cNvPr id="4" name="kicker-01-marker">
             <a:extLst xmlns:a="http://schemas.openxmlformats.org/drawingml/2006/main">
               <a:ext uri="{FF2B5EF4-FFF2-40B4-BE49-F238E27FC236}">
-                <a16:creationId xmlns:a16="http://schemas.microsoft.com/office/drawing/2014/main" id="{7BBBBB48-8A42-488A-B8A5-7632E4EAA8CA}"/>
+                <a16:creationId xmlns:a16="http://schemas.microsoft.com/office/drawing/2014/main" id="{CA0E721A-8EA5-45F8-92EA-AB4B00D08B24}"/>
               </a:ext>
             </a:extLst>
           </p:cNvPr>
@@ -16150,7 +16148,7 @@
           <p:cNvPr id="5" name="kicker-01-label">
             <a:extLst xmlns:a="http://schemas.openxmlformats.org/drawingml/2006/main">
               <a:ext uri="{FF2B5EF4-FFF2-40B4-BE49-F238E27FC236}">
-                <a16:creationId xmlns:a16="http://schemas.microsoft.com/office/drawing/2014/main" id="{F561DB76-778E-4ED4-A075-9C290B192B0B}"/>
+                <a16:creationId xmlns:a16="http://schemas.microsoft.com/office/drawing/2014/main" id="{83B83856-7AC1-4FCB-9FA1-7F9C22F10141}"/>
               </a:ext>
             </a:extLst>
           </p:cNvPr>
@@ -16214,7 +16212,7 @@
           <p:cNvPr id="6" name="">
             <a:extLst xmlns:a="http://schemas.openxmlformats.org/drawingml/2006/main">
               <a:ext uri="{FF2B5EF4-FFF2-40B4-BE49-F238E27FC236}">
-                <a16:creationId xmlns:a16="http://schemas.microsoft.com/office/drawing/2014/main" id="{44310260-C6DD-421B-939D-9065E81D74B0}"/>
+                <a16:creationId xmlns:a16="http://schemas.microsoft.com/office/drawing/2014/main" id="{D2413539-6F40-4B8D-B019-A815BB1CC7C7}"/>
               </a:ext>
             </a:extLst>
           </p:cNvPr>
@@ -16278,7 +16276,7 @@
           <p:cNvPr id="7" name="">
             <a:extLst xmlns:a="http://schemas.openxmlformats.org/drawingml/2006/main">
               <a:ext uri="{FF2B5EF4-FFF2-40B4-BE49-F238E27FC236}">
-                <a16:creationId xmlns:a16="http://schemas.microsoft.com/office/drawing/2014/main" id="{33BC5589-5F4D-4507-AE87-987EBF588E76}"/>
+                <a16:creationId xmlns:a16="http://schemas.microsoft.com/office/drawing/2014/main" id="{A1A3450A-5D08-4EE6-A10E-EB293534BAF1}"/>
               </a:ext>
             </a:extLst>
           </p:cNvPr>
@@ -16342,7 +16340,7 @@
           <p:cNvPr id="8" name="">
             <a:extLst xmlns:a="http://schemas.openxmlformats.org/drawingml/2006/main">
               <a:ext uri="{FF2B5EF4-FFF2-40B4-BE49-F238E27FC236}">
-                <a16:creationId xmlns:a16="http://schemas.microsoft.com/office/drawing/2014/main" id="{C6F1C73C-99F9-46D6-B59A-5BA2E2B81388}"/>
+                <a16:creationId xmlns:a16="http://schemas.microsoft.com/office/drawing/2014/main" id="{BC89C966-EA5A-4F37-AE14-C3E46ED5795B}"/>
               </a:ext>
             </a:extLst>
           </p:cNvPr>
@@ -16377,7 +16375,7 @@
           <p:cNvPr id="9" name="">
             <a:extLst xmlns:a="http://schemas.openxmlformats.org/drawingml/2006/main">
               <a:ext uri="{FF2B5EF4-FFF2-40B4-BE49-F238E27FC236}">
-                <a16:creationId xmlns:a16="http://schemas.microsoft.com/office/drawing/2014/main" id="{9E1C4A85-1ED2-461F-B8DE-18BF95E5D1FA}"/>
+                <a16:creationId xmlns:a16="http://schemas.microsoft.com/office/drawing/2014/main" id="{36CA543C-099B-4A02-8459-F61FBE07C510}"/>
               </a:ext>
             </a:extLst>
           </p:cNvPr>
@@ -16441,7 +16439,7 @@
           <p:cNvPr id="10" name="">
             <a:extLst xmlns:a="http://schemas.openxmlformats.org/drawingml/2006/main">
               <a:ext uri="{FF2B5EF4-FFF2-40B4-BE49-F238E27FC236}">
-                <a16:creationId xmlns:a16="http://schemas.microsoft.com/office/drawing/2014/main" id="{022EA821-FC0D-46B8-A67B-266CE3D362D4}"/>
+                <a16:creationId xmlns:a16="http://schemas.microsoft.com/office/drawing/2014/main" id="{513761DE-4075-48A6-AD53-75E144A412CC}"/>
               </a:ext>
             </a:extLst>
           </p:cNvPr>
@@ -16505,7 +16503,7 @@
           <p:cNvPr id="11" name="">
             <a:extLst xmlns:a="http://schemas.openxmlformats.org/drawingml/2006/main">
               <a:ext uri="{FF2B5EF4-FFF2-40B4-BE49-F238E27FC236}">
-                <a16:creationId xmlns:a16="http://schemas.microsoft.com/office/drawing/2014/main" id="{BD5A4803-DD19-4088-BCB1-188D30129D43}"/>
+                <a16:creationId xmlns:a16="http://schemas.microsoft.com/office/drawing/2014/main" id="{F3DFB373-8C21-4901-81BD-BFAF7C5F2FDD}"/>
               </a:ext>
             </a:extLst>
           </p:cNvPr>
@@ -16569,7 +16567,7 @@
           <p:cNvPr id="12" name="">
             <a:extLst xmlns:a="http://schemas.openxmlformats.org/drawingml/2006/main">
               <a:ext uri="{FF2B5EF4-FFF2-40B4-BE49-F238E27FC236}">
-                <a16:creationId xmlns:a16="http://schemas.microsoft.com/office/drawing/2014/main" id="{BA996D80-23EA-445D-B148-F8EA1775A8F3}"/>
+                <a16:creationId xmlns:a16="http://schemas.microsoft.com/office/drawing/2014/main" id="{04B2D0A7-BA39-436D-AF72-6BEA224919AC}"/>
               </a:ext>
             </a:extLst>
           </p:cNvPr>
@@ -16602,7 +16600,7 @@
           <p:cNvPr id="13" name="">
             <a:extLst xmlns:a="http://schemas.openxmlformats.org/drawingml/2006/main">
               <a:ext uri="{FF2B5EF4-FFF2-40B4-BE49-F238E27FC236}">
-                <a16:creationId xmlns:a16="http://schemas.microsoft.com/office/drawing/2014/main" id="{FB976744-ACC7-42AE-8D13-1B8772711DE1}"/>
+                <a16:creationId xmlns:a16="http://schemas.microsoft.com/office/drawing/2014/main" id="{0D2FB683-892B-434D-BD5F-B00BF122B4FC}"/>
               </a:ext>
             </a:extLst>
           </p:cNvPr>
@@ -16666,7 +16664,7 @@
           <p:cNvPr id="14" name="">
             <a:extLst xmlns:a="http://schemas.openxmlformats.org/drawingml/2006/main">
               <a:ext uri="{FF2B5EF4-FFF2-40B4-BE49-F238E27FC236}">
-                <a16:creationId xmlns:a16="http://schemas.microsoft.com/office/drawing/2014/main" id="{BBB327DF-64D5-469D-9047-B8626958E460}"/>
+                <a16:creationId xmlns:a16="http://schemas.microsoft.com/office/drawing/2014/main" id="{A295305B-4104-46D6-9B8F-3ACD649A66E7}"/>
               </a:ext>
             </a:extLst>
           </p:cNvPr>
@@ -16701,7 +16699,7 @@
           <p:cNvPr id="15" name="">
             <a:extLst xmlns:a="http://schemas.openxmlformats.org/drawingml/2006/main">
               <a:ext uri="{FF2B5EF4-FFF2-40B4-BE49-F238E27FC236}">
-                <a16:creationId xmlns:a16="http://schemas.microsoft.com/office/drawing/2014/main" id="{38BEA0E7-CB1E-4920-AFA5-BF86D1D0BF74}"/>
+                <a16:creationId xmlns:a16="http://schemas.microsoft.com/office/drawing/2014/main" id="{384259AE-2A5C-4033-9A85-7C089AE6DDB5}"/>
               </a:ext>
             </a:extLst>
           </p:cNvPr>
@@ -16765,7 +16763,7 @@
           <p:cNvPr id="16" name="">
             <a:extLst xmlns:a="http://schemas.openxmlformats.org/drawingml/2006/main">
               <a:ext uri="{FF2B5EF4-FFF2-40B4-BE49-F238E27FC236}">
-                <a16:creationId xmlns:a16="http://schemas.microsoft.com/office/drawing/2014/main" id="{6B5A8567-C46E-4D99-96CA-D07B6BCDD4A3}"/>
+                <a16:creationId xmlns:a16="http://schemas.microsoft.com/office/drawing/2014/main" id="{F87F4C47-890B-4DDF-9FF8-86B216CF80CB}"/>
               </a:ext>
             </a:extLst>
           </p:cNvPr>
@@ -16798,7 +16796,7 @@
           <p:cNvPr id="17" name="">
             <a:extLst xmlns:a="http://schemas.openxmlformats.org/drawingml/2006/main">
               <a:ext uri="{FF2B5EF4-FFF2-40B4-BE49-F238E27FC236}">
-                <a16:creationId xmlns:a16="http://schemas.microsoft.com/office/drawing/2014/main" id="{CDD580BD-232A-4E8F-BBEB-BED2CDBB4B01}"/>
+                <a16:creationId xmlns:a16="http://schemas.microsoft.com/office/drawing/2014/main" id="{6EDC226C-3EA9-455F-B9F6-21D064420DCB}"/>
               </a:ext>
             </a:extLst>
           </p:cNvPr>
@@ -16833,7 +16831,7 @@
           <p:cNvPr id="18" name="">
             <a:extLst xmlns:a="http://schemas.openxmlformats.org/drawingml/2006/main">
               <a:ext uri="{FF2B5EF4-FFF2-40B4-BE49-F238E27FC236}">
-                <a16:creationId xmlns:a16="http://schemas.microsoft.com/office/drawing/2014/main" id="{B9842B02-E587-4412-B450-982A5DB6527D}"/>
+                <a16:creationId xmlns:a16="http://schemas.microsoft.com/office/drawing/2014/main" id="{093CCBD8-8D01-4536-B40C-83A6E27FD93D}"/>
               </a:ext>
             </a:extLst>
           </p:cNvPr>
@@ -16897,7 +16895,7 @@
           <p:cNvPr id="19" name="">
             <a:extLst xmlns:a="http://schemas.openxmlformats.org/drawingml/2006/main">
               <a:ext uri="{FF2B5EF4-FFF2-40B4-BE49-F238E27FC236}">
-                <a16:creationId xmlns:a16="http://schemas.microsoft.com/office/drawing/2014/main" id="{F1AB97EE-6725-403D-8389-80007147D000}"/>
+                <a16:creationId xmlns:a16="http://schemas.microsoft.com/office/drawing/2014/main" id="{3B2AA460-5FE4-43DC-9531-A388ED3076C8}"/>
               </a:ext>
             </a:extLst>
           </p:cNvPr>
@@ -16932,7 +16930,7 @@
           <p:cNvPr id="20" name="">
             <a:extLst xmlns:a="http://schemas.openxmlformats.org/drawingml/2006/main">
               <a:ext uri="{FF2B5EF4-FFF2-40B4-BE49-F238E27FC236}">
-                <a16:creationId xmlns:a16="http://schemas.microsoft.com/office/drawing/2014/main" id="{5EC777EF-5DBF-4316-8217-A802EEF4EB20}"/>
+                <a16:creationId xmlns:a16="http://schemas.microsoft.com/office/drawing/2014/main" id="{ADD1DFC6-F25D-4946-AC46-EF756904E6A8}"/>
               </a:ext>
             </a:extLst>
           </p:cNvPr>
@@ -16996,7 +16994,7 @@
           <p:cNvPr id="21" name="">
             <a:extLst xmlns:a="http://schemas.openxmlformats.org/drawingml/2006/main">
               <a:ext uri="{FF2B5EF4-FFF2-40B4-BE49-F238E27FC236}">
-                <a16:creationId xmlns:a16="http://schemas.microsoft.com/office/drawing/2014/main" id="{19AA687E-FB38-45E9-8615-A5EE3E2D7453}"/>
+                <a16:creationId xmlns:a16="http://schemas.microsoft.com/office/drawing/2014/main" id="{6FB84740-99F7-457D-B36E-D562BCE56382}"/>
               </a:ext>
             </a:extLst>
           </p:cNvPr>
@@ -17031,7 +17029,7 @@
           <p:cNvPr id="22" name="">
             <a:extLst xmlns:a="http://schemas.openxmlformats.org/drawingml/2006/main">
               <a:ext uri="{FF2B5EF4-FFF2-40B4-BE49-F238E27FC236}">
-                <a16:creationId xmlns:a16="http://schemas.microsoft.com/office/drawing/2014/main" id="{F2A0A1B3-2642-41B4-9189-8B6B5C5B30EB}"/>
+                <a16:creationId xmlns:a16="http://schemas.microsoft.com/office/drawing/2014/main" id="{DDCCDF25-6806-4B0D-ABDF-7D57400C461B}"/>
               </a:ext>
             </a:extLst>
           </p:cNvPr>
@@ -17095,7 +17093,7 @@
           <p:cNvPr id="23" name="">
             <a:extLst xmlns:a="http://schemas.openxmlformats.org/drawingml/2006/main">
               <a:ext uri="{FF2B5EF4-FFF2-40B4-BE49-F238E27FC236}">
-                <a16:creationId xmlns:a16="http://schemas.microsoft.com/office/drawing/2014/main" id="{C79F0CD6-5B45-42D5-ACDC-72714FA3549D}"/>
+                <a16:creationId xmlns:a16="http://schemas.microsoft.com/office/drawing/2014/main" id="{AF9B3D1C-B865-4798-8DFF-C1CCE80CCE3D}"/>
               </a:ext>
             </a:extLst>
           </p:cNvPr>
@@ -17130,7 +17128,7 @@
           <p:cNvPr id="24" name="">
             <a:extLst xmlns:a="http://schemas.openxmlformats.org/drawingml/2006/main">
               <a:ext uri="{FF2B5EF4-FFF2-40B4-BE49-F238E27FC236}">
-                <a16:creationId xmlns:a16="http://schemas.microsoft.com/office/drawing/2014/main" id="{74AEE1B2-5A37-4384-B269-A042E513CDB0}"/>
+                <a16:creationId xmlns:a16="http://schemas.microsoft.com/office/drawing/2014/main" id="{D1551EF1-1EF5-4193-BE77-0EC237B913D9}"/>
               </a:ext>
             </a:extLst>
           </p:cNvPr>
@@ -17184,7 +17182,7 @@
                 <a:ea typeface="Aptos"/>
                 <a:cs typeface="Aptos"/>
               </a:rPr>
-              <a:t>Keep AI useful but subordinate to human correction.</a:t>
+              <a:t>Keep first drafts subordinate to human correction.</a:t>
             </a:r>
           </a:p>
         </p:txBody>
@@ -17194,7 +17192,7 @@
           <p:cNvPr id="25" name="">
             <a:extLst xmlns:a="http://schemas.openxmlformats.org/drawingml/2006/main">
               <a:ext uri="{FF2B5EF4-FFF2-40B4-BE49-F238E27FC236}">
-                <a16:creationId xmlns:a16="http://schemas.microsoft.com/office/drawing/2014/main" id="{9F61503C-7288-4374-A3B6-6CAD65C7EC9A}"/>
+                <a16:creationId xmlns:a16="http://schemas.microsoft.com/office/drawing/2014/main" id="{11A65E25-5129-4D3E-A43A-DD70DBB2E352}"/>
               </a:ext>
             </a:extLst>
           </p:cNvPr>
@@ -17229,7 +17227,7 @@
           <p:cNvPr id="26" name="">
             <a:extLst xmlns:a="http://schemas.openxmlformats.org/drawingml/2006/main">
               <a:ext uri="{FF2B5EF4-FFF2-40B4-BE49-F238E27FC236}">
-                <a16:creationId xmlns:a16="http://schemas.microsoft.com/office/drawing/2014/main" id="{ECAA4970-85D7-44F8-9814-F7B49AB3EDF3}"/>
+                <a16:creationId xmlns:a16="http://schemas.microsoft.com/office/drawing/2014/main" id="{8317067D-94E2-42B1-8AE5-21F452B5183D}"/>
               </a:ext>
             </a:extLst>
           </p:cNvPr>
@@ -17293,7 +17291,7 @@
           <p:cNvPr id="27" name="">
             <a:extLst xmlns:a="http://schemas.openxmlformats.org/drawingml/2006/main">
               <a:ext uri="{FF2B5EF4-FFF2-40B4-BE49-F238E27FC236}">
-                <a16:creationId xmlns:a16="http://schemas.microsoft.com/office/drawing/2014/main" id="{C9FA8B60-47E7-495D-8C17-4B567B30B424}"/>
+                <a16:creationId xmlns:a16="http://schemas.microsoft.com/office/drawing/2014/main" id="{E6C7FB36-4BFA-4D6B-9F0D-8D11695D0041}"/>
               </a:ext>
             </a:extLst>
           </p:cNvPr>
@@ -17328,7 +17326,7 @@
           <p:cNvPr id="28" name="">
             <a:extLst xmlns:a="http://schemas.openxmlformats.org/drawingml/2006/main">
               <a:ext uri="{FF2B5EF4-FFF2-40B4-BE49-F238E27FC236}">
-                <a16:creationId xmlns:a16="http://schemas.microsoft.com/office/drawing/2014/main" id="{227C1C17-0CC3-4692-A3D7-85E1949AA24D}"/>
+                <a16:creationId xmlns:a16="http://schemas.microsoft.com/office/drawing/2014/main" id="{8DCDD607-5E89-4F3B-8FD3-F51A07A3AAD3}"/>
               </a:ext>
             </a:extLst>
           </p:cNvPr>
@@ -17392,7 +17390,7 @@
           <p:cNvPr id="29" name="">
             <a:extLst xmlns:a="http://schemas.openxmlformats.org/drawingml/2006/main">
               <a:ext uri="{FF2B5EF4-FFF2-40B4-BE49-F238E27FC236}">
-                <a16:creationId xmlns:a16="http://schemas.microsoft.com/office/drawing/2014/main" id="{D5E544EF-03B7-43E0-B191-7017DF09355E}"/>
+                <a16:creationId xmlns:a16="http://schemas.microsoft.com/office/drawing/2014/main" id="{9CA98A56-D26F-440F-9C0E-52A77C0F969D}"/>
               </a:ext>
             </a:extLst>
           </p:cNvPr>
@@ -17456,7 +17454,7 @@
           <p:cNvPr id="30" name="">
             <a:extLst xmlns:a="http://schemas.openxmlformats.org/drawingml/2006/main">
               <a:ext uri="{FF2B5EF4-FFF2-40B4-BE49-F238E27FC236}">
-                <a16:creationId xmlns:a16="http://schemas.microsoft.com/office/drawing/2014/main" id="{D2D98D46-7F4F-4A49-A29E-2F0347260FA0}"/>
+                <a16:creationId xmlns:a16="http://schemas.microsoft.com/office/drawing/2014/main" id="{7631A916-773D-49ED-A420-DDA8F4190E0D}"/>
               </a:ext>
             </a:extLst>
           </p:cNvPr>
@@ -17518,7 +17516,7 @@
     </p:spTree>
     <p:extLst>
       <p:ext uri="{BB962C8B-B14F-4D97-AF65-F5344CB8AC3E}">
-        <p14:creationId xmlns:p14="http://schemas.microsoft.com/office/powerpoint/2010/main" val="1827559620"/>
+        <p14:creationId xmlns:p14="http://schemas.microsoft.com/office/powerpoint/2010/main" val="1408969616"/>
       </p:ext>
     </p:extLst>
   </p:cSld>
@@ -17542,7 +17540,7 @@
           <p:cNvPr id="1" name="">
             <a:extLst xmlns:a="http://schemas.openxmlformats.org/drawingml/2006/main">
               <a:ext uri="{FF2B5EF4-FFF2-40B4-BE49-F238E27FC236}">
-                <a16:creationId xmlns:a16="http://schemas.microsoft.com/office/drawing/2014/main" id="{81CEBFD1-0BB7-4916-8411-14EB1A59CF6C}"/>
+                <a16:creationId xmlns:a16="http://schemas.microsoft.com/office/drawing/2014/main" id="{E2041FCC-0913-4C39-A878-745A0885D71E}"/>
               </a:ext>
             </a:extLst>
           </p:cNvPr>
@@ -17577,7 +17575,7 @@
           <p:cNvPr id="2" name="">
             <a:extLst xmlns:a="http://schemas.openxmlformats.org/drawingml/2006/main">
               <a:ext uri="{FF2B5EF4-FFF2-40B4-BE49-F238E27FC236}">
-                <a16:creationId xmlns:a16="http://schemas.microsoft.com/office/drawing/2014/main" id="{A8991E05-32E7-4502-8748-70824BAF2F2F}"/>
+                <a16:creationId xmlns:a16="http://schemas.microsoft.com/office/drawing/2014/main" id="{753B254C-2E7E-422C-BC6F-DC16659DF020}"/>
               </a:ext>
             </a:extLst>
           </p:cNvPr>
@@ -17612,7 +17610,7 @@
           <p:cNvPr id="3" name="">
             <a:extLst xmlns:a="http://schemas.openxmlformats.org/drawingml/2006/main">
               <a:ext uri="{FF2B5EF4-FFF2-40B4-BE49-F238E27FC236}">
-                <a16:creationId xmlns:a16="http://schemas.microsoft.com/office/drawing/2014/main" id="{16AC1A33-023E-41AA-ADD3-DBCFE3010585}"/>
+                <a16:creationId xmlns:a16="http://schemas.microsoft.com/office/drawing/2014/main" id="{331804B6-A527-4360-8B20-3EC9B3BD3795}"/>
               </a:ext>
             </a:extLst>
           </p:cNvPr>
@@ -17647,7 +17645,7 @@
           <p:cNvPr id="4" name="kicker-01-marker">
             <a:extLst xmlns:a="http://schemas.openxmlformats.org/drawingml/2006/main">
               <a:ext uri="{FF2B5EF4-FFF2-40B4-BE49-F238E27FC236}">
-                <a16:creationId xmlns:a16="http://schemas.microsoft.com/office/drawing/2014/main" id="{A7F55134-124C-40D4-8494-459075EC1A33}"/>
+                <a16:creationId xmlns:a16="http://schemas.microsoft.com/office/drawing/2014/main" id="{8733FA4C-1F61-4BD5-A18A-DFFD4D625A80}"/>
               </a:ext>
             </a:extLst>
           </p:cNvPr>
@@ -17682,7 +17680,7 @@
           <p:cNvPr id="5" name="kicker-01-label">
             <a:extLst xmlns:a="http://schemas.openxmlformats.org/drawingml/2006/main">
               <a:ext uri="{FF2B5EF4-FFF2-40B4-BE49-F238E27FC236}">
-                <a16:creationId xmlns:a16="http://schemas.microsoft.com/office/drawing/2014/main" id="{AD22FFF9-921D-4014-9445-5211CF495D03}"/>
+                <a16:creationId xmlns:a16="http://schemas.microsoft.com/office/drawing/2014/main" id="{1FAB6612-16B3-4290-AB01-A6514E48B7AE}"/>
               </a:ext>
             </a:extLst>
           </p:cNvPr>
@@ -17746,7 +17744,7 @@
           <p:cNvPr id="6" name="">
             <a:extLst xmlns:a="http://schemas.openxmlformats.org/drawingml/2006/main">
               <a:ext uri="{FF2B5EF4-FFF2-40B4-BE49-F238E27FC236}">
-                <a16:creationId xmlns:a16="http://schemas.microsoft.com/office/drawing/2014/main" id="{32660B47-A44E-4510-9D09-406389433053}"/>
+                <a16:creationId xmlns:a16="http://schemas.microsoft.com/office/drawing/2014/main" id="{48C77DA5-C049-4792-AE4D-44492F1A35F3}"/>
               </a:ext>
             </a:extLst>
           </p:cNvPr>
@@ -17810,7 +17808,7 @@
           <p:cNvPr id="7" name="">
             <a:extLst xmlns:a="http://schemas.openxmlformats.org/drawingml/2006/main">
               <a:ext uri="{FF2B5EF4-FFF2-40B4-BE49-F238E27FC236}">
-                <a16:creationId xmlns:a16="http://schemas.microsoft.com/office/drawing/2014/main" id="{710D13CD-0ADF-4C72-82E2-F17541383299}"/>
+                <a16:creationId xmlns:a16="http://schemas.microsoft.com/office/drawing/2014/main" id="{4AE571BC-9294-436E-98BB-30514E0A1A6F}"/>
               </a:ext>
             </a:extLst>
           </p:cNvPr>
@@ -17874,7 +17872,7 @@
           <p:cNvPr id="8" name="">
             <a:extLst xmlns:a="http://schemas.openxmlformats.org/drawingml/2006/main">
               <a:ext uri="{FF2B5EF4-FFF2-40B4-BE49-F238E27FC236}">
-                <a16:creationId xmlns:a16="http://schemas.microsoft.com/office/drawing/2014/main" id="{DB414B6B-383A-4A84-AC72-F2B60BA26D36}"/>
+                <a16:creationId xmlns:a16="http://schemas.microsoft.com/office/drawing/2014/main" id="{CC58CBE7-3640-4536-9882-0454E28A544F}"/>
               </a:ext>
             </a:extLst>
           </p:cNvPr>
@@ -17909,7 +17907,7 @@
           <p:cNvPr id="9" name="">
             <a:extLst xmlns:a="http://schemas.openxmlformats.org/drawingml/2006/main">
               <a:ext uri="{FF2B5EF4-FFF2-40B4-BE49-F238E27FC236}">
-                <a16:creationId xmlns:a16="http://schemas.microsoft.com/office/drawing/2014/main" id="{E434670C-D435-4711-8063-56B7F6454E72}"/>
+                <a16:creationId xmlns:a16="http://schemas.microsoft.com/office/drawing/2014/main" id="{1452B746-31A0-4306-B1C9-638F29A426AC}"/>
               </a:ext>
             </a:extLst>
           </p:cNvPr>
@@ -17973,7 +17971,7 @@
           <p:cNvPr id="10" name="">
             <a:extLst xmlns:a="http://schemas.openxmlformats.org/drawingml/2006/main">
               <a:ext uri="{FF2B5EF4-FFF2-40B4-BE49-F238E27FC236}">
-                <a16:creationId xmlns:a16="http://schemas.microsoft.com/office/drawing/2014/main" id="{11C21FBA-1E79-4F43-A270-DF95F55BAC8A}"/>
+                <a16:creationId xmlns:a16="http://schemas.microsoft.com/office/drawing/2014/main" id="{2ADBD252-01F9-46D4-90FC-9154A525CCB1}"/>
               </a:ext>
             </a:extLst>
           </p:cNvPr>
@@ -18037,7 +18035,7 @@
           <p:cNvPr id="11" name="">
             <a:extLst xmlns:a="http://schemas.openxmlformats.org/drawingml/2006/main">
               <a:ext uri="{FF2B5EF4-FFF2-40B4-BE49-F238E27FC236}">
-                <a16:creationId xmlns:a16="http://schemas.microsoft.com/office/drawing/2014/main" id="{478861FB-ACEF-4BFB-854B-EDE58C62DD16}"/>
+                <a16:creationId xmlns:a16="http://schemas.microsoft.com/office/drawing/2014/main" id="{F939B246-7FBC-48E3-85CE-D49F464F95DA}"/>
               </a:ext>
             </a:extLst>
           </p:cNvPr>
@@ -18101,7 +18099,7 @@
           <p:cNvPr id="12" name="">
             <a:extLst xmlns:a="http://schemas.openxmlformats.org/drawingml/2006/main">
               <a:ext uri="{FF2B5EF4-FFF2-40B4-BE49-F238E27FC236}">
-                <a16:creationId xmlns:a16="http://schemas.microsoft.com/office/drawing/2014/main" id="{BFDE0B04-AB07-45E6-9BB9-57BF89C05B67}"/>
+                <a16:creationId xmlns:a16="http://schemas.microsoft.com/office/drawing/2014/main" id="{1D4C56DA-D0FC-4004-9AE9-2862B858319A}"/>
               </a:ext>
             </a:extLst>
           </p:cNvPr>
@@ -18134,7 +18132,7 @@
           <p:cNvPr id="13" name="">
             <a:extLst xmlns:a="http://schemas.openxmlformats.org/drawingml/2006/main">
               <a:ext uri="{FF2B5EF4-FFF2-40B4-BE49-F238E27FC236}">
-                <a16:creationId xmlns:a16="http://schemas.microsoft.com/office/drawing/2014/main" id="{F70317EC-7F2E-4BE4-9EC2-8B9137EBD4A9}"/>
+                <a16:creationId xmlns:a16="http://schemas.microsoft.com/office/drawing/2014/main" id="{DD6C36C2-4D70-442A-A08E-0E72164AB299}"/>
               </a:ext>
             </a:extLst>
           </p:cNvPr>
@@ -18169,7 +18167,7 @@
           <p:cNvPr id="14" name="">
             <a:extLst xmlns:a="http://schemas.openxmlformats.org/drawingml/2006/main">
               <a:ext uri="{FF2B5EF4-FFF2-40B4-BE49-F238E27FC236}">
-                <a16:creationId xmlns:a16="http://schemas.microsoft.com/office/drawing/2014/main" id="{9BD9AB4D-E81A-4F6D-A206-FDFE6722E137}"/>
+                <a16:creationId xmlns:a16="http://schemas.microsoft.com/office/drawing/2014/main" id="{F41CFB26-BB55-4346-9521-A72A5D97BB0F}"/>
               </a:ext>
             </a:extLst>
           </p:cNvPr>
@@ -18233,7 +18231,7 @@
           <p:cNvPr id="15" name="">
             <a:extLst xmlns:a="http://schemas.openxmlformats.org/drawingml/2006/main">
               <a:ext uri="{FF2B5EF4-FFF2-40B4-BE49-F238E27FC236}">
-                <a16:creationId xmlns:a16="http://schemas.microsoft.com/office/drawing/2014/main" id="{F97D3E07-1D2E-4FF1-AEED-298AC08EF560}"/>
+                <a16:creationId xmlns:a16="http://schemas.microsoft.com/office/drawing/2014/main" id="{15EFB4D0-4684-4295-9EE5-88DA4C04FA4B}"/>
               </a:ext>
             </a:extLst>
           </p:cNvPr>
@@ -18268,7 +18266,7 @@
           <p:cNvPr id="16" name="">
             <a:extLst xmlns:a="http://schemas.openxmlformats.org/drawingml/2006/main">
               <a:ext uri="{FF2B5EF4-FFF2-40B4-BE49-F238E27FC236}">
-                <a16:creationId xmlns:a16="http://schemas.microsoft.com/office/drawing/2014/main" id="{7954CDEF-1864-470A-BE96-2760875CEC22}"/>
+                <a16:creationId xmlns:a16="http://schemas.microsoft.com/office/drawing/2014/main" id="{48E3A353-6308-44D4-B612-0ADA9AE57345}"/>
               </a:ext>
             </a:extLst>
           </p:cNvPr>
@@ -18332,7 +18330,7 @@
           <p:cNvPr id="17" name="">
             <a:extLst xmlns:a="http://schemas.openxmlformats.org/drawingml/2006/main">
               <a:ext uri="{FF2B5EF4-FFF2-40B4-BE49-F238E27FC236}">
-                <a16:creationId xmlns:a16="http://schemas.microsoft.com/office/drawing/2014/main" id="{4E8A4EE5-E6FA-45C2-B33B-C2CE09328D2A}"/>
+                <a16:creationId xmlns:a16="http://schemas.microsoft.com/office/drawing/2014/main" id="{F74395D3-4E42-4157-8A73-023C6BEBDE00}"/>
               </a:ext>
             </a:extLst>
           </p:cNvPr>
@@ -18367,7 +18365,7 @@
           <p:cNvPr id="18" name="">
             <a:extLst xmlns:a="http://schemas.openxmlformats.org/drawingml/2006/main">
               <a:ext uri="{FF2B5EF4-FFF2-40B4-BE49-F238E27FC236}">
-                <a16:creationId xmlns:a16="http://schemas.microsoft.com/office/drawing/2014/main" id="{8422D4A8-51C3-46DE-8B4A-CD6119F3D3AC}"/>
+                <a16:creationId xmlns:a16="http://schemas.microsoft.com/office/drawing/2014/main" id="{957F4315-1791-41B2-8550-33466229D117}"/>
               </a:ext>
             </a:extLst>
           </p:cNvPr>
@@ -18431,7 +18429,7 @@
           <p:cNvPr id="19" name="">
             <a:extLst xmlns:a="http://schemas.openxmlformats.org/drawingml/2006/main">
               <a:ext uri="{FF2B5EF4-FFF2-40B4-BE49-F238E27FC236}">
-                <a16:creationId xmlns:a16="http://schemas.microsoft.com/office/drawing/2014/main" id="{200B7103-F1FF-4A2C-8A39-35BF1D5C4775}"/>
+                <a16:creationId xmlns:a16="http://schemas.microsoft.com/office/drawing/2014/main" id="{19B4B5DC-8192-42DC-8C71-3C6F8646623E}"/>
               </a:ext>
             </a:extLst>
           </p:cNvPr>
@@ -18466,7 +18464,7 @@
           <p:cNvPr id="20" name="">
             <a:extLst xmlns:a="http://schemas.openxmlformats.org/drawingml/2006/main">
               <a:ext uri="{FF2B5EF4-FFF2-40B4-BE49-F238E27FC236}">
-                <a16:creationId xmlns:a16="http://schemas.microsoft.com/office/drawing/2014/main" id="{598E36FE-554C-44D5-B838-EAB20A8FCFFF}"/>
+                <a16:creationId xmlns:a16="http://schemas.microsoft.com/office/drawing/2014/main" id="{788161A3-43E8-48ED-A521-8D3996532F0B}"/>
               </a:ext>
             </a:extLst>
           </p:cNvPr>
@@ -18530,7 +18528,7 @@
           <p:cNvPr id="21" name="">
             <a:extLst xmlns:a="http://schemas.openxmlformats.org/drawingml/2006/main">
               <a:ext uri="{FF2B5EF4-FFF2-40B4-BE49-F238E27FC236}">
-                <a16:creationId xmlns:a16="http://schemas.microsoft.com/office/drawing/2014/main" id="{08B49948-4AC7-4183-A874-17A64DBB26A7}"/>
+                <a16:creationId xmlns:a16="http://schemas.microsoft.com/office/drawing/2014/main" id="{01A9D86E-7F3F-458B-A586-31D9F402EA92}"/>
               </a:ext>
             </a:extLst>
           </p:cNvPr>
@@ -18565,7 +18563,7 @@
           <p:cNvPr id="22" name="">
             <a:extLst xmlns:a="http://schemas.openxmlformats.org/drawingml/2006/main">
               <a:ext uri="{FF2B5EF4-FFF2-40B4-BE49-F238E27FC236}">
-                <a16:creationId xmlns:a16="http://schemas.microsoft.com/office/drawing/2014/main" id="{024EEB78-3A5E-49E2-B020-7620BB487306}"/>
+                <a16:creationId xmlns:a16="http://schemas.microsoft.com/office/drawing/2014/main" id="{A9831E64-C5FE-4182-A088-BF5590449A05}"/>
               </a:ext>
             </a:extLst>
           </p:cNvPr>
@@ -18629,7 +18627,7 @@
           <p:cNvPr id="23" name="">
             <a:extLst xmlns:a="http://schemas.openxmlformats.org/drawingml/2006/main">
               <a:ext uri="{FF2B5EF4-FFF2-40B4-BE49-F238E27FC236}">
-                <a16:creationId xmlns:a16="http://schemas.microsoft.com/office/drawing/2014/main" id="{A740AE43-0DFE-4CA2-A6EA-92173C05678A}"/>
+                <a16:creationId xmlns:a16="http://schemas.microsoft.com/office/drawing/2014/main" id="{882B17FA-60D9-4691-99AB-A4924F135BBD}"/>
               </a:ext>
             </a:extLst>
           </p:cNvPr>
@@ -18662,7 +18660,7 @@
           <p:cNvPr id="24" name="">
             <a:extLst xmlns:a="http://schemas.openxmlformats.org/drawingml/2006/main">
               <a:ext uri="{FF2B5EF4-FFF2-40B4-BE49-F238E27FC236}">
-                <a16:creationId xmlns:a16="http://schemas.microsoft.com/office/drawing/2014/main" id="{3AB97DC9-2111-4D85-939A-2587B5874184}"/>
+                <a16:creationId xmlns:a16="http://schemas.microsoft.com/office/drawing/2014/main" id="{BAD40B5C-FC1A-4D00-B340-625C1D585F5A}"/>
               </a:ext>
             </a:extLst>
           </p:cNvPr>
@@ -18697,7 +18695,7 @@
           <p:cNvPr id="25" name="">
             <a:extLst xmlns:a="http://schemas.openxmlformats.org/drawingml/2006/main">
               <a:ext uri="{FF2B5EF4-FFF2-40B4-BE49-F238E27FC236}">
-                <a16:creationId xmlns:a16="http://schemas.microsoft.com/office/drawing/2014/main" id="{E2550428-A7ED-4E2B-8AF7-958F1CECD7BD}"/>
+                <a16:creationId xmlns:a16="http://schemas.microsoft.com/office/drawing/2014/main" id="{6D50CFFD-931B-4E3B-9FE6-810FC2FA6CCB}"/>
               </a:ext>
             </a:extLst>
           </p:cNvPr>
@@ -18761,7 +18759,7 @@
           <p:cNvPr id="26" name="">
             <a:extLst xmlns:a="http://schemas.openxmlformats.org/drawingml/2006/main">
               <a:ext uri="{FF2B5EF4-FFF2-40B4-BE49-F238E27FC236}">
-                <a16:creationId xmlns:a16="http://schemas.microsoft.com/office/drawing/2014/main" id="{39AF40C2-6C48-4FDD-9B7E-4990F7140F02}"/>
+                <a16:creationId xmlns:a16="http://schemas.microsoft.com/office/drawing/2014/main" id="{E22F2F24-4448-4B21-9083-2AEDCB9AD1BB}"/>
               </a:ext>
             </a:extLst>
           </p:cNvPr>
@@ -18794,7 +18792,7 @@
           <p:cNvPr id="27" name="">
             <a:extLst xmlns:a="http://schemas.openxmlformats.org/drawingml/2006/main">
               <a:ext uri="{FF2B5EF4-FFF2-40B4-BE49-F238E27FC236}">
-                <a16:creationId xmlns:a16="http://schemas.microsoft.com/office/drawing/2014/main" id="{E6FE3782-D7A6-4865-B91D-ACA3FCB306E0}"/>
+                <a16:creationId xmlns:a16="http://schemas.microsoft.com/office/drawing/2014/main" id="{397DF4A4-5421-48B5-A3EE-C5E116C540D4}"/>
               </a:ext>
             </a:extLst>
           </p:cNvPr>
@@ -18858,7 +18856,7 @@
           <p:cNvPr id="28" name="">
             <a:extLst xmlns:a="http://schemas.openxmlformats.org/drawingml/2006/main">
               <a:ext uri="{FF2B5EF4-FFF2-40B4-BE49-F238E27FC236}">
-                <a16:creationId xmlns:a16="http://schemas.microsoft.com/office/drawing/2014/main" id="{D7696212-B891-4D0A-8119-6990D79BF20C}"/>
+                <a16:creationId xmlns:a16="http://schemas.microsoft.com/office/drawing/2014/main" id="{C0333752-A89C-4D93-934C-2BF59559ACE7}"/>
               </a:ext>
             </a:extLst>
           </p:cNvPr>
@@ -18922,7 +18920,7 @@
           <p:cNvPr id="29" name="">
             <a:extLst xmlns:a="http://schemas.openxmlformats.org/drawingml/2006/main">
               <a:ext uri="{FF2B5EF4-FFF2-40B4-BE49-F238E27FC236}">
-                <a16:creationId xmlns:a16="http://schemas.microsoft.com/office/drawing/2014/main" id="{49D079DD-D54B-4C05-A248-43829BD27238}"/>
+                <a16:creationId xmlns:a16="http://schemas.microsoft.com/office/drawing/2014/main" id="{40D9F78E-5C1E-4040-BF61-70228C0EC16D}"/>
               </a:ext>
             </a:extLst>
           </p:cNvPr>
@@ -18955,7 +18953,7 @@
           <p:cNvPr id="30" name="">
             <a:extLst xmlns:a="http://schemas.openxmlformats.org/drawingml/2006/main">
               <a:ext uri="{FF2B5EF4-FFF2-40B4-BE49-F238E27FC236}">
-                <a16:creationId xmlns:a16="http://schemas.microsoft.com/office/drawing/2014/main" id="{0796A8AC-107F-4CDF-9E34-58DDD2E9346B}"/>
+                <a16:creationId xmlns:a16="http://schemas.microsoft.com/office/drawing/2014/main" id="{DA9826ED-9A5C-4C16-8E9A-87BD41F0517C}"/>
               </a:ext>
             </a:extLst>
           </p:cNvPr>
@@ -19019,7 +19017,7 @@
           <p:cNvPr id="31" name="">
             <a:extLst xmlns:a="http://schemas.openxmlformats.org/drawingml/2006/main">
               <a:ext uri="{FF2B5EF4-FFF2-40B4-BE49-F238E27FC236}">
-                <a16:creationId xmlns:a16="http://schemas.microsoft.com/office/drawing/2014/main" id="{67BEC42B-DA94-4755-BAB9-911505784EFE}"/>
+                <a16:creationId xmlns:a16="http://schemas.microsoft.com/office/drawing/2014/main" id="{72D55150-ECCF-4B35-8A14-D26C68AACA41}"/>
               </a:ext>
             </a:extLst>
           </p:cNvPr>
@@ -19083,7 +19081,7 @@
           <p:cNvPr id="32" name="">
             <a:extLst xmlns:a="http://schemas.openxmlformats.org/drawingml/2006/main">
               <a:ext uri="{FF2B5EF4-FFF2-40B4-BE49-F238E27FC236}">
-                <a16:creationId xmlns:a16="http://schemas.microsoft.com/office/drawing/2014/main" id="{7D9AF11B-5B5F-4A70-83F9-A393BE7302B5}"/>
+                <a16:creationId xmlns:a16="http://schemas.microsoft.com/office/drawing/2014/main" id="{D85B5626-4383-4421-A22C-C1B907586713}"/>
               </a:ext>
             </a:extLst>
           </p:cNvPr>
@@ -19116,7 +19114,7 @@
           <p:cNvPr id="33" name="">
             <a:extLst xmlns:a="http://schemas.openxmlformats.org/drawingml/2006/main">
               <a:ext uri="{FF2B5EF4-FFF2-40B4-BE49-F238E27FC236}">
-                <a16:creationId xmlns:a16="http://schemas.microsoft.com/office/drawing/2014/main" id="{346D619A-2029-448C-B447-EB5442986ACF}"/>
+                <a16:creationId xmlns:a16="http://schemas.microsoft.com/office/drawing/2014/main" id="{46934A23-6190-4C9A-8009-F035DBF100D7}"/>
               </a:ext>
             </a:extLst>
           </p:cNvPr>
@@ -19180,7 +19178,7 @@
           <p:cNvPr id="34" name="">
             <a:extLst xmlns:a="http://schemas.openxmlformats.org/drawingml/2006/main">
               <a:ext uri="{FF2B5EF4-FFF2-40B4-BE49-F238E27FC236}">
-                <a16:creationId xmlns:a16="http://schemas.microsoft.com/office/drawing/2014/main" id="{C7528C77-4E2B-4544-A058-E44D550416EA}"/>
+                <a16:creationId xmlns:a16="http://schemas.microsoft.com/office/drawing/2014/main" id="{44AC4AF6-D5DE-47B8-B92B-06EA967CCACC}"/>
               </a:ext>
             </a:extLst>
           </p:cNvPr>
@@ -19244,7 +19242,7 @@
           <p:cNvPr id="35" name="">
             <a:extLst xmlns:a="http://schemas.openxmlformats.org/drawingml/2006/main">
               <a:ext uri="{FF2B5EF4-FFF2-40B4-BE49-F238E27FC236}">
-                <a16:creationId xmlns:a16="http://schemas.microsoft.com/office/drawing/2014/main" id="{5B6D863A-C001-4B82-9159-A8B5239C57C1}"/>
+                <a16:creationId xmlns:a16="http://schemas.microsoft.com/office/drawing/2014/main" id="{7CBC9C9F-E266-4C22-A558-1B2A1E9A3884}"/>
               </a:ext>
             </a:extLst>
           </p:cNvPr>
@@ -19277,7 +19275,7 @@
           <p:cNvPr id="36" name="">
             <a:extLst xmlns:a="http://schemas.openxmlformats.org/drawingml/2006/main">
               <a:ext uri="{FF2B5EF4-FFF2-40B4-BE49-F238E27FC236}">
-                <a16:creationId xmlns:a16="http://schemas.microsoft.com/office/drawing/2014/main" id="{EF10D194-1FB0-419F-8806-CF47E1D41298}"/>
+                <a16:creationId xmlns:a16="http://schemas.microsoft.com/office/drawing/2014/main" id="{AFF20515-B86F-41B4-848D-83EB6DBB034E}"/>
               </a:ext>
             </a:extLst>
           </p:cNvPr>
@@ -19341,7 +19339,7 @@
           <p:cNvPr id="37" name="">
             <a:extLst xmlns:a="http://schemas.openxmlformats.org/drawingml/2006/main">
               <a:ext uri="{FF2B5EF4-FFF2-40B4-BE49-F238E27FC236}">
-                <a16:creationId xmlns:a16="http://schemas.microsoft.com/office/drawing/2014/main" id="{CF9D2EF8-F56D-4371-994C-F1A75A0557F6}"/>
+                <a16:creationId xmlns:a16="http://schemas.microsoft.com/office/drawing/2014/main" id="{D3E839C0-4E30-44FB-8875-E840B64A6921}"/>
               </a:ext>
             </a:extLst>
           </p:cNvPr>
@@ -19405,7 +19403,7 @@
           <p:cNvPr id="38" name="">
             <a:extLst xmlns:a="http://schemas.openxmlformats.org/drawingml/2006/main">
               <a:ext uri="{FF2B5EF4-FFF2-40B4-BE49-F238E27FC236}">
-                <a16:creationId xmlns:a16="http://schemas.microsoft.com/office/drawing/2014/main" id="{FCE50872-7975-46B4-88BB-18C7E90CB76F}"/>
+                <a16:creationId xmlns:a16="http://schemas.microsoft.com/office/drawing/2014/main" id="{99B7553E-68D0-4106-B163-0C4CBF1DF762}"/>
               </a:ext>
             </a:extLst>
           </p:cNvPr>
@@ -19438,7 +19436,7 @@
           <p:cNvPr id="39" name="">
             <a:extLst xmlns:a="http://schemas.openxmlformats.org/drawingml/2006/main">
               <a:ext uri="{FF2B5EF4-FFF2-40B4-BE49-F238E27FC236}">
-                <a16:creationId xmlns:a16="http://schemas.microsoft.com/office/drawing/2014/main" id="{BC726366-4792-4742-A372-C0754CE1F4B9}"/>
+                <a16:creationId xmlns:a16="http://schemas.microsoft.com/office/drawing/2014/main" id="{E3923F10-C00D-4BCB-A642-6F2FC4D48F25}"/>
               </a:ext>
             </a:extLst>
           </p:cNvPr>
@@ -19502,7 +19500,7 @@
           <p:cNvPr id="40" name="">
             <a:extLst xmlns:a="http://schemas.openxmlformats.org/drawingml/2006/main">
               <a:ext uri="{FF2B5EF4-FFF2-40B4-BE49-F238E27FC236}">
-                <a16:creationId xmlns:a16="http://schemas.microsoft.com/office/drawing/2014/main" id="{6598099D-736A-44AA-95A3-84A9D042459C}"/>
+                <a16:creationId xmlns:a16="http://schemas.microsoft.com/office/drawing/2014/main" id="{EE1B077D-E5BB-46D6-9ACD-E16A81630305}"/>
               </a:ext>
             </a:extLst>
           </p:cNvPr>
@@ -19566,7 +19564,7 @@
           <p:cNvPr id="41" name="">
             <a:extLst xmlns:a="http://schemas.openxmlformats.org/drawingml/2006/main">
               <a:ext uri="{FF2B5EF4-FFF2-40B4-BE49-F238E27FC236}">
-                <a16:creationId xmlns:a16="http://schemas.microsoft.com/office/drawing/2014/main" id="{B92481A5-7E67-4F40-A13D-68B7BB4C8685}"/>
+                <a16:creationId xmlns:a16="http://schemas.microsoft.com/office/drawing/2014/main" id="{54893E3C-F4DC-47FA-AF94-FFA75A9FE8E8}"/>
               </a:ext>
             </a:extLst>
           </p:cNvPr>
@@ -19601,7 +19599,7 @@
           <p:cNvPr id="42" name="">
             <a:extLst xmlns:a="http://schemas.openxmlformats.org/drawingml/2006/main">
               <a:ext uri="{FF2B5EF4-FFF2-40B4-BE49-F238E27FC236}">
-                <a16:creationId xmlns:a16="http://schemas.microsoft.com/office/drawing/2014/main" id="{40C70CED-708E-415C-B644-190636E1F3B3}"/>
+                <a16:creationId xmlns:a16="http://schemas.microsoft.com/office/drawing/2014/main" id="{BF23C05F-0926-46CF-B075-9CC8BA40711D}"/>
               </a:ext>
             </a:extLst>
           </p:cNvPr>
@@ -19665,7 +19663,7 @@
           <p:cNvPr id="43" name="">
             <a:extLst xmlns:a="http://schemas.openxmlformats.org/drawingml/2006/main">
               <a:ext uri="{FF2B5EF4-FFF2-40B4-BE49-F238E27FC236}">
-                <a16:creationId xmlns:a16="http://schemas.microsoft.com/office/drawing/2014/main" id="{619B0F3C-BC6E-4082-B4D2-4B3E2A7A2052}"/>
+                <a16:creationId xmlns:a16="http://schemas.microsoft.com/office/drawing/2014/main" id="{153FA454-A0BA-4F21-AD6B-548345A34882}"/>
               </a:ext>
             </a:extLst>
           </p:cNvPr>
@@ -19729,7 +19727,7 @@
           <p:cNvPr id="44" name="">
             <a:extLst xmlns:a="http://schemas.openxmlformats.org/drawingml/2006/main">
               <a:ext uri="{FF2B5EF4-FFF2-40B4-BE49-F238E27FC236}">
-                <a16:creationId xmlns:a16="http://schemas.microsoft.com/office/drawing/2014/main" id="{9774A040-C94E-4065-9D48-8623C0E2B1F8}"/>
+                <a16:creationId xmlns:a16="http://schemas.microsoft.com/office/drawing/2014/main" id="{8C00B607-F7DF-483C-9789-78A75DEB0781}"/>
               </a:ext>
             </a:extLst>
           </p:cNvPr>
@@ -19791,7 +19789,7 @@
     </p:spTree>
     <p:extLst>
       <p:ext uri="{BB962C8B-B14F-4D97-AF65-F5344CB8AC3E}">
-        <p14:creationId xmlns:p14="http://schemas.microsoft.com/office/powerpoint/2010/main" val="415270062"/>
+        <p14:creationId xmlns:p14="http://schemas.microsoft.com/office/powerpoint/2010/main" val="1385266886"/>
       </p:ext>
     </p:extLst>
   </p:cSld>
@@ -19815,7 +19813,7 @@
           <p:cNvPr id="1" name="">
             <a:extLst xmlns:a="http://schemas.openxmlformats.org/drawingml/2006/main">
               <a:ext uri="{FF2B5EF4-FFF2-40B4-BE49-F238E27FC236}">
-                <a16:creationId xmlns:a16="http://schemas.microsoft.com/office/drawing/2014/main" id="{F49E322F-FED5-4D68-9193-6452C081DE1E}"/>
+                <a16:creationId xmlns:a16="http://schemas.microsoft.com/office/drawing/2014/main" id="{163143FC-44A6-4B58-B83D-22373F7B5881}"/>
               </a:ext>
             </a:extLst>
           </p:cNvPr>
@@ -19850,7 +19848,7 @@
           <p:cNvPr id="2" name="">
             <a:extLst xmlns:a="http://schemas.openxmlformats.org/drawingml/2006/main">
               <a:ext uri="{FF2B5EF4-FFF2-40B4-BE49-F238E27FC236}">
-                <a16:creationId xmlns:a16="http://schemas.microsoft.com/office/drawing/2014/main" id="{40F8FC14-EFE5-48DA-B139-95EAD135EB77}"/>
+                <a16:creationId xmlns:a16="http://schemas.microsoft.com/office/drawing/2014/main" id="{49D20F12-7FA1-4E67-A42C-7B5C6835DAC6}"/>
               </a:ext>
             </a:extLst>
           </p:cNvPr>
@@ -19885,7 +19883,7 @@
           <p:cNvPr id="3" name="">
             <a:extLst xmlns:a="http://schemas.openxmlformats.org/drawingml/2006/main">
               <a:ext uri="{FF2B5EF4-FFF2-40B4-BE49-F238E27FC236}">
-                <a16:creationId xmlns:a16="http://schemas.microsoft.com/office/drawing/2014/main" id="{F195E0F8-4A43-42E4-A1F6-92177459E7A8}"/>
+                <a16:creationId xmlns:a16="http://schemas.microsoft.com/office/drawing/2014/main" id="{1DE1F244-D6C2-4D4B-8240-F11C79ED2478}"/>
               </a:ext>
             </a:extLst>
           </p:cNvPr>
@@ -19920,7 +19918,7 @@
           <p:cNvPr id="4" name="kicker-01-marker">
             <a:extLst xmlns:a="http://schemas.openxmlformats.org/drawingml/2006/main">
               <a:ext uri="{FF2B5EF4-FFF2-40B4-BE49-F238E27FC236}">
-                <a16:creationId xmlns:a16="http://schemas.microsoft.com/office/drawing/2014/main" id="{31ABA9D5-87DA-42A1-A87D-35F1FF28AF75}"/>
+                <a16:creationId xmlns:a16="http://schemas.microsoft.com/office/drawing/2014/main" id="{AEA4301A-5F69-4C9B-858D-FEE3BD949E83}"/>
               </a:ext>
             </a:extLst>
           </p:cNvPr>
@@ -19955,7 +19953,7 @@
           <p:cNvPr id="5" name="kicker-01-label">
             <a:extLst xmlns:a="http://schemas.openxmlformats.org/drawingml/2006/main">
               <a:ext uri="{FF2B5EF4-FFF2-40B4-BE49-F238E27FC236}">
-                <a16:creationId xmlns:a16="http://schemas.microsoft.com/office/drawing/2014/main" id="{637D81FE-7C4A-4F0F-A1F9-B6F24E432B9A}"/>
+                <a16:creationId xmlns:a16="http://schemas.microsoft.com/office/drawing/2014/main" id="{B5008DBD-D2FC-4D18-8358-3B1F65B7477C}"/>
               </a:ext>
             </a:extLst>
           </p:cNvPr>
@@ -20019,7 +20017,7 @@
           <p:cNvPr id="6" name="">
             <a:extLst xmlns:a="http://schemas.openxmlformats.org/drawingml/2006/main">
               <a:ext uri="{FF2B5EF4-FFF2-40B4-BE49-F238E27FC236}">
-                <a16:creationId xmlns:a16="http://schemas.microsoft.com/office/drawing/2014/main" id="{BF2E2C9F-7B6A-420C-8243-9EAFCF4A2677}"/>
+                <a16:creationId xmlns:a16="http://schemas.microsoft.com/office/drawing/2014/main" id="{E4214E0E-1EE7-41BD-8E57-361AF8C4CD5D}"/>
               </a:ext>
             </a:extLst>
           </p:cNvPr>
@@ -20083,7 +20081,7 @@
           <p:cNvPr id="7" name="">
             <a:extLst xmlns:a="http://schemas.openxmlformats.org/drawingml/2006/main">
               <a:ext uri="{FF2B5EF4-FFF2-40B4-BE49-F238E27FC236}">
-                <a16:creationId xmlns:a16="http://schemas.microsoft.com/office/drawing/2014/main" id="{17ECD08F-3121-40AC-8FB3-AA6D19FC2E53}"/>
+                <a16:creationId xmlns:a16="http://schemas.microsoft.com/office/drawing/2014/main" id="{79EEF81D-F141-4A55-8FA3-B4E1B571ABDB}"/>
               </a:ext>
             </a:extLst>
           </p:cNvPr>
@@ -20147,7 +20145,7 @@
           <p:cNvPr id="8" name="">
             <a:extLst xmlns:a="http://schemas.openxmlformats.org/drawingml/2006/main">
               <a:ext uri="{FF2B5EF4-FFF2-40B4-BE49-F238E27FC236}">
-                <a16:creationId xmlns:a16="http://schemas.microsoft.com/office/drawing/2014/main" id="{8B51BA14-D0ED-4B72-B986-9673A903F87C}"/>
+                <a16:creationId xmlns:a16="http://schemas.microsoft.com/office/drawing/2014/main" id="{161D0E65-1035-4EC3-AC61-245E38131546}"/>
               </a:ext>
             </a:extLst>
           </p:cNvPr>
@@ -20182,7 +20180,7 @@
           <p:cNvPr id="9" name="">
             <a:extLst xmlns:a="http://schemas.openxmlformats.org/drawingml/2006/main">
               <a:ext uri="{FF2B5EF4-FFF2-40B4-BE49-F238E27FC236}">
-                <a16:creationId xmlns:a16="http://schemas.microsoft.com/office/drawing/2014/main" id="{661C8EFB-3B10-4360-ABED-AF2AC4ACBE6C}"/>
+                <a16:creationId xmlns:a16="http://schemas.microsoft.com/office/drawing/2014/main" id="{A9B95D00-0FA0-404B-8A43-FE54F56E3440}"/>
               </a:ext>
             </a:extLst>
           </p:cNvPr>
@@ -20246,7 +20244,7 @@
           <p:cNvPr id="10" name="">
             <a:extLst xmlns:a="http://schemas.openxmlformats.org/drawingml/2006/main">
               <a:ext uri="{FF2B5EF4-FFF2-40B4-BE49-F238E27FC236}">
-                <a16:creationId xmlns:a16="http://schemas.microsoft.com/office/drawing/2014/main" id="{648E470C-106A-4B1B-BF2C-1A1A86009FC6}"/>
+                <a16:creationId xmlns:a16="http://schemas.microsoft.com/office/drawing/2014/main" id="{62C734E0-0921-40AA-A6D1-64341980BC40}"/>
               </a:ext>
             </a:extLst>
           </p:cNvPr>
@@ -20310,7 +20308,7 @@
           <p:cNvPr id="11" name="">
             <a:extLst xmlns:a="http://schemas.openxmlformats.org/drawingml/2006/main">
               <a:ext uri="{FF2B5EF4-FFF2-40B4-BE49-F238E27FC236}">
-                <a16:creationId xmlns:a16="http://schemas.microsoft.com/office/drawing/2014/main" id="{92AEB39C-8286-4330-B059-D56A7EC5072C}"/>
+                <a16:creationId xmlns:a16="http://schemas.microsoft.com/office/drawing/2014/main" id="{9358C0F7-088E-4507-8DA5-0ACED215DF3A}"/>
               </a:ext>
             </a:extLst>
           </p:cNvPr>
@@ -20374,7 +20372,7 @@
           <p:cNvPr id="12" name="">
             <a:extLst xmlns:a="http://schemas.openxmlformats.org/drawingml/2006/main">
               <a:ext uri="{FF2B5EF4-FFF2-40B4-BE49-F238E27FC236}">
-                <a16:creationId xmlns:a16="http://schemas.microsoft.com/office/drawing/2014/main" id="{19E13FFB-ED3B-4CE6-A84D-A19E9B0B1145}"/>
+                <a16:creationId xmlns:a16="http://schemas.microsoft.com/office/drawing/2014/main" id="{AF512257-B813-47DA-A205-ACE330D692AF}"/>
               </a:ext>
             </a:extLst>
           </p:cNvPr>
@@ -20409,7 +20407,7 @@
           <p:cNvPr id="13" name="">
             <a:extLst xmlns:a="http://schemas.openxmlformats.org/drawingml/2006/main">
               <a:ext uri="{FF2B5EF4-FFF2-40B4-BE49-F238E27FC236}">
-                <a16:creationId xmlns:a16="http://schemas.microsoft.com/office/drawing/2014/main" id="{263544A5-9A23-456A-85B3-B5C8F011E443}"/>
+                <a16:creationId xmlns:a16="http://schemas.microsoft.com/office/drawing/2014/main" id="{B0376637-5A3E-497F-85D1-E9E064C88B5B}"/>
               </a:ext>
             </a:extLst>
           </p:cNvPr>
@@ -20442,7 +20440,7 @@
           <p:cNvPr id="14" name="">
             <a:extLst xmlns:a="http://schemas.openxmlformats.org/drawingml/2006/main">
               <a:ext uri="{FF2B5EF4-FFF2-40B4-BE49-F238E27FC236}">
-                <a16:creationId xmlns:a16="http://schemas.microsoft.com/office/drawing/2014/main" id="{6717A1EF-D8B9-48D3-AC29-6814DC0B0AF7}"/>
+                <a16:creationId xmlns:a16="http://schemas.microsoft.com/office/drawing/2014/main" id="{7D9B11B1-C912-464A-A4A1-786FB10ED5C4}"/>
               </a:ext>
             </a:extLst>
           </p:cNvPr>
@@ -20477,7 +20475,7 @@
           <p:cNvPr id="15" name="">
             <a:extLst xmlns:a="http://schemas.openxmlformats.org/drawingml/2006/main">
               <a:ext uri="{FF2B5EF4-FFF2-40B4-BE49-F238E27FC236}">
-                <a16:creationId xmlns:a16="http://schemas.microsoft.com/office/drawing/2014/main" id="{FED101E6-E4A8-466C-963F-486DA89743E8}"/>
+                <a16:creationId xmlns:a16="http://schemas.microsoft.com/office/drawing/2014/main" id="{5837790F-3001-436B-8682-BC0E1BD1176E}"/>
               </a:ext>
             </a:extLst>
           </p:cNvPr>
@@ -20541,7 +20539,7 @@
           <p:cNvPr id="16" name="">
             <a:extLst xmlns:a="http://schemas.openxmlformats.org/drawingml/2006/main">
               <a:ext uri="{FF2B5EF4-FFF2-40B4-BE49-F238E27FC236}">
-                <a16:creationId xmlns:a16="http://schemas.microsoft.com/office/drawing/2014/main" id="{421D972F-5206-4BB4-B3CA-12C4AC54A024}"/>
+                <a16:creationId xmlns:a16="http://schemas.microsoft.com/office/drawing/2014/main" id="{339C2F2D-5C0B-404B-8539-336E3B91395F}"/>
               </a:ext>
             </a:extLst>
           </p:cNvPr>
@@ -20574,7 +20572,7 @@
           <p:cNvPr id="17" name="">
             <a:extLst xmlns:a="http://schemas.openxmlformats.org/drawingml/2006/main">
               <a:ext uri="{FF2B5EF4-FFF2-40B4-BE49-F238E27FC236}">
-                <a16:creationId xmlns:a16="http://schemas.microsoft.com/office/drawing/2014/main" id="{C17B6F1B-7A52-4D10-A32F-363CE2695D39}"/>
+                <a16:creationId xmlns:a16="http://schemas.microsoft.com/office/drawing/2014/main" id="{435A4552-C34D-418E-91A1-DAAEDFE3B04E}"/>
               </a:ext>
             </a:extLst>
           </p:cNvPr>
@@ -20609,7 +20607,7 @@
           <p:cNvPr id="18" name="">
             <a:extLst xmlns:a="http://schemas.openxmlformats.org/drawingml/2006/main">
               <a:ext uri="{FF2B5EF4-FFF2-40B4-BE49-F238E27FC236}">
-                <a16:creationId xmlns:a16="http://schemas.microsoft.com/office/drawing/2014/main" id="{650CF0AC-911B-48BF-A400-FBFCA8703785}"/>
+                <a16:creationId xmlns:a16="http://schemas.microsoft.com/office/drawing/2014/main" id="{7C4BCFAA-14DA-4080-8783-C1A8DC742165}"/>
               </a:ext>
             </a:extLst>
           </p:cNvPr>
@@ -20673,7 +20671,7 @@
           <p:cNvPr id="19" name="">
             <a:extLst xmlns:a="http://schemas.openxmlformats.org/drawingml/2006/main">
               <a:ext uri="{FF2B5EF4-FFF2-40B4-BE49-F238E27FC236}">
-                <a16:creationId xmlns:a16="http://schemas.microsoft.com/office/drawing/2014/main" id="{CB55E33E-08FB-400C-98C0-1D33148B74F9}"/>
+                <a16:creationId xmlns:a16="http://schemas.microsoft.com/office/drawing/2014/main" id="{A4FD3308-209B-4A7C-9351-269F789407C4}"/>
               </a:ext>
             </a:extLst>
           </p:cNvPr>
@@ -20737,7 +20735,7 @@
           <p:cNvPr id="20" name="">
             <a:extLst xmlns:a="http://schemas.openxmlformats.org/drawingml/2006/main">
               <a:ext uri="{FF2B5EF4-FFF2-40B4-BE49-F238E27FC236}">
-                <a16:creationId xmlns:a16="http://schemas.microsoft.com/office/drawing/2014/main" id="{B5E6B5D2-8B2B-468E-88DD-1449A0C19314}"/>
+                <a16:creationId xmlns:a16="http://schemas.microsoft.com/office/drawing/2014/main" id="{62C30583-2E80-4505-8AAC-582F7BC13B81}"/>
               </a:ext>
             </a:extLst>
           </p:cNvPr>
@@ -20772,7 +20770,7 @@
           <p:cNvPr id="21" name="">
             <a:extLst xmlns:a="http://schemas.openxmlformats.org/drawingml/2006/main">
               <a:ext uri="{FF2B5EF4-FFF2-40B4-BE49-F238E27FC236}">
-                <a16:creationId xmlns:a16="http://schemas.microsoft.com/office/drawing/2014/main" id="{44CDFFB3-93B6-4940-BB09-AFBDB2BC7B88}"/>
+                <a16:creationId xmlns:a16="http://schemas.microsoft.com/office/drawing/2014/main" id="{36994181-C3DF-4011-BB2D-D857CAE71270}"/>
               </a:ext>
             </a:extLst>
           </p:cNvPr>
@@ -20805,7 +20803,7 @@
           <p:cNvPr id="22" name="">
             <a:extLst xmlns:a="http://schemas.openxmlformats.org/drawingml/2006/main">
               <a:ext uri="{FF2B5EF4-FFF2-40B4-BE49-F238E27FC236}">
-                <a16:creationId xmlns:a16="http://schemas.microsoft.com/office/drawing/2014/main" id="{8D99945D-BB4E-4178-A51F-9EE1A59072CA}"/>
+                <a16:creationId xmlns:a16="http://schemas.microsoft.com/office/drawing/2014/main" id="{1A42588A-59F4-44FB-8D78-61B2DF67A4D3}"/>
               </a:ext>
             </a:extLst>
           </p:cNvPr>
@@ -20840,7 +20838,7 @@
           <p:cNvPr id="23" name="">
             <a:extLst xmlns:a="http://schemas.openxmlformats.org/drawingml/2006/main">
               <a:ext uri="{FF2B5EF4-FFF2-40B4-BE49-F238E27FC236}">
-                <a16:creationId xmlns:a16="http://schemas.microsoft.com/office/drawing/2014/main" id="{1D8C6597-FE97-4C36-AD08-D911E35C0303}"/>
+                <a16:creationId xmlns:a16="http://schemas.microsoft.com/office/drawing/2014/main" id="{60640E2F-A205-4C8C-A53C-718A6D2DA03C}"/>
               </a:ext>
             </a:extLst>
           </p:cNvPr>
@@ -20904,7 +20902,7 @@
           <p:cNvPr id="24" name="">
             <a:extLst xmlns:a="http://schemas.openxmlformats.org/drawingml/2006/main">
               <a:ext uri="{FF2B5EF4-FFF2-40B4-BE49-F238E27FC236}">
-                <a16:creationId xmlns:a16="http://schemas.microsoft.com/office/drawing/2014/main" id="{D858B593-F10A-4F16-96DA-0076F8A668F6}"/>
+                <a16:creationId xmlns:a16="http://schemas.microsoft.com/office/drawing/2014/main" id="{E35362C4-FB63-488B-8DF6-BD0837F8D4C3}"/>
               </a:ext>
             </a:extLst>
           </p:cNvPr>
@@ -20968,7 +20966,7 @@
           <p:cNvPr id="25" name="">
             <a:extLst xmlns:a="http://schemas.openxmlformats.org/drawingml/2006/main">
               <a:ext uri="{FF2B5EF4-FFF2-40B4-BE49-F238E27FC236}">
-                <a16:creationId xmlns:a16="http://schemas.microsoft.com/office/drawing/2014/main" id="{92F718DD-7DF1-434B-B0AF-3B80E5EBB735}"/>
+                <a16:creationId xmlns:a16="http://schemas.microsoft.com/office/drawing/2014/main" id="{761907EB-1097-4F54-A954-6C73A697E93E}"/>
               </a:ext>
             </a:extLst>
           </p:cNvPr>
@@ -21003,7 +21001,7 @@
           <p:cNvPr id="26" name="">
             <a:extLst xmlns:a="http://schemas.openxmlformats.org/drawingml/2006/main">
               <a:ext uri="{FF2B5EF4-FFF2-40B4-BE49-F238E27FC236}">
-                <a16:creationId xmlns:a16="http://schemas.microsoft.com/office/drawing/2014/main" id="{8F7F5ACD-7EEE-4EF0-83D4-87F4CE2DA44D}"/>
+                <a16:creationId xmlns:a16="http://schemas.microsoft.com/office/drawing/2014/main" id="{E65C935D-E592-45AC-8612-F8606F4D1520}"/>
               </a:ext>
             </a:extLst>
           </p:cNvPr>
@@ -21036,7 +21034,7 @@
           <p:cNvPr id="27" name="">
             <a:extLst xmlns:a="http://schemas.openxmlformats.org/drawingml/2006/main">
               <a:ext uri="{FF2B5EF4-FFF2-40B4-BE49-F238E27FC236}">
-                <a16:creationId xmlns:a16="http://schemas.microsoft.com/office/drawing/2014/main" id="{B1E38206-734D-42F4-8996-3CB820C5BCC0}"/>
+                <a16:creationId xmlns:a16="http://schemas.microsoft.com/office/drawing/2014/main" id="{32F41CC4-2FB3-45E1-BADB-8D5DA5CA978C}"/>
               </a:ext>
             </a:extLst>
           </p:cNvPr>
@@ -21071,7 +21069,7 @@
           <p:cNvPr id="28" name="">
             <a:extLst xmlns:a="http://schemas.openxmlformats.org/drawingml/2006/main">
               <a:ext uri="{FF2B5EF4-FFF2-40B4-BE49-F238E27FC236}">
-                <a16:creationId xmlns:a16="http://schemas.microsoft.com/office/drawing/2014/main" id="{E8949C70-CB86-4C96-A461-B0FBC7E132B7}"/>
+                <a16:creationId xmlns:a16="http://schemas.microsoft.com/office/drawing/2014/main" id="{C10D731D-F455-4D2D-B41F-1F830973EEEE}"/>
               </a:ext>
             </a:extLst>
           </p:cNvPr>
@@ -21135,7 +21133,7 @@
           <p:cNvPr id="29" name="">
             <a:extLst xmlns:a="http://schemas.openxmlformats.org/drawingml/2006/main">
               <a:ext uri="{FF2B5EF4-FFF2-40B4-BE49-F238E27FC236}">
-                <a16:creationId xmlns:a16="http://schemas.microsoft.com/office/drawing/2014/main" id="{02EA24ED-E238-4527-A15E-7FB5A784E41D}"/>
+                <a16:creationId xmlns:a16="http://schemas.microsoft.com/office/drawing/2014/main" id="{7B96B0AB-A982-49CD-A73F-AA44236E2AE2}"/>
               </a:ext>
             </a:extLst>
           </p:cNvPr>
@@ -21199,7 +21197,7 @@
           <p:cNvPr id="30" name="">
             <a:extLst xmlns:a="http://schemas.openxmlformats.org/drawingml/2006/main">
               <a:ext uri="{FF2B5EF4-FFF2-40B4-BE49-F238E27FC236}">
-                <a16:creationId xmlns:a16="http://schemas.microsoft.com/office/drawing/2014/main" id="{02D1C8D4-A1CE-4445-99FB-F7AFE6540212}"/>
+                <a16:creationId xmlns:a16="http://schemas.microsoft.com/office/drawing/2014/main" id="{E388F23B-B1F2-42F8-8E7C-E2D41C324DAF}"/>
               </a:ext>
             </a:extLst>
           </p:cNvPr>
@@ -21234,7 +21232,7 @@
           <p:cNvPr id="31" name="">
             <a:extLst xmlns:a="http://schemas.openxmlformats.org/drawingml/2006/main">
               <a:ext uri="{FF2B5EF4-FFF2-40B4-BE49-F238E27FC236}">
-                <a16:creationId xmlns:a16="http://schemas.microsoft.com/office/drawing/2014/main" id="{5965E3B0-59E3-46F5-ABAB-C0619316CBB9}"/>
+                <a16:creationId xmlns:a16="http://schemas.microsoft.com/office/drawing/2014/main" id="{7239D660-E647-416F-8474-F800919D4517}"/>
               </a:ext>
             </a:extLst>
           </p:cNvPr>
@@ -21267,7 +21265,7 @@
           <p:cNvPr id="32" name="">
             <a:extLst xmlns:a="http://schemas.openxmlformats.org/drawingml/2006/main">
               <a:ext uri="{FF2B5EF4-FFF2-40B4-BE49-F238E27FC236}">
-                <a16:creationId xmlns:a16="http://schemas.microsoft.com/office/drawing/2014/main" id="{E21826C3-4772-47CB-8DE6-41E436834074}"/>
+                <a16:creationId xmlns:a16="http://schemas.microsoft.com/office/drawing/2014/main" id="{BFA45430-0855-414E-8595-1433CBBA9C62}"/>
               </a:ext>
             </a:extLst>
           </p:cNvPr>
@@ -21302,7 +21300,7 @@
           <p:cNvPr id="33" name="">
             <a:extLst xmlns:a="http://schemas.openxmlformats.org/drawingml/2006/main">
               <a:ext uri="{FF2B5EF4-FFF2-40B4-BE49-F238E27FC236}">
-                <a16:creationId xmlns:a16="http://schemas.microsoft.com/office/drawing/2014/main" id="{F58F05D4-D221-44EB-9BE1-E210993BA9F9}"/>
+                <a16:creationId xmlns:a16="http://schemas.microsoft.com/office/drawing/2014/main" id="{4FB1C85E-95C6-4C29-9E6E-78D4E5BC3518}"/>
               </a:ext>
             </a:extLst>
           </p:cNvPr>
@@ -21366,7 +21364,7 @@
           <p:cNvPr id="34" name="">
             <a:extLst xmlns:a="http://schemas.openxmlformats.org/drawingml/2006/main">
               <a:ext uri="{FF2B5EF4-FFF2-40B4-BE49-F238E27FC236}">
-                <a16:creationId xmlns:a16="http://schemas.microsoft.com/office/drawing/2014/main" id="{6D693917-99FE-4FBC-934A-A7B8288B7890}"/>
+                <a16:creationId xmlns:a16="http://schemas.microsoft.com/office/drawing/2014/main" id="{0773B019-83CD-4E7B-ACA3-A40CBE41A21D}"/>
               </a:ext>
             </a:extLst>
           </p:cNvPr>
@@ -21430,7 +21428,7 @@
           <p:cNvPr id="35" name="">
             <a:extLst xmlns:a="http://schemas.openxmlformats.org/drawingml/2006/main">
               <a:ext uri="{FF2B5EF4-FFF2-40B4-BE49-F238E27FC236}">
-                <a16:creationId xmlns:a16="http://schemas.microsoft.com/office/drawing/2014/main" id="{A30053A3-51CD-47BB-818D-A2D4326D78F6}"/>
+                <a16:creationId xmlns:a16="http://schemas.microsoft.com/office/drawing/2014/main" id="{187E1BED-B669-45AF-A8F1-0DD4436F7350}"/>
               </a:ext>
             </a:extLst>
           </p:cNvPr>
@@ -21463,7 +21461,7 @@
           <p:cNvPr id="36" name="">
             <a:extLst xmlns:a="http://schemas.openxmlformats.org/drawingml/2006/main">
               <a:ext uri="{FF2B5EF4-FFF2-40B4-BE49-F238E27FC236}">
-                <a16:creationId xmlns:a16="http://schemas.microsoft.com/office/drawing/2014/main" id="{863558A4-8FC9-464D-B2C6-0551500F520B}"/>
+                <a16:creationId xmlns:a16="http://schemas.microsoft.com/office/drawing/2014/main" id="{39849B27-76A0-4302-A96F-D5425954B53B}"/>
               </a:ext>
             </a:extLst>
           </p:cNvPr>
@@ -21498,7 +21496,7 @@
           <p:cNvPr id="37" name="">
             <a:extLst xmlns:a="http://schemas.openxmlformats.org/drawingml/2006/main">
               <a:ext uri="{FF2B5EF4-FFF2-40B4-BE49-F238E27FC236}">
-                <a16:creationId xmlns:a16="http://schemas.microsoft.com/office/drawing/2014/main" id="{CF6D7410-6E81-4BF0-BDAD-B2CA28FC7B2D}"/>
+                <a16:creationId xmlns:a16="http://schemas.microsoft.com/office/drawing/2014/main" id="{417106C6-727D-49DA-B26A-EBF48112A855}"/>
               </a:ext>
             </a:extLst>
           </p:cNvPr>
@@ -21562,7 +21560,7 @@
           <p:cNvPr id="38" name="">
             <a:extLst xmlns:a="http://schemas.openxmlformats.org/drawingml/2006/main">
               <a:ext uri="{FF2B5EF4-FFF2-40B4-BE49-F238E27FC236}">
-                <a16:creationId xmlns:a16="http://schemas.microsoft.com/office/drawing/2014/main" id="{A7DEA360-D07E-48A4-8B14-594E71529648}"/>
+                <a16:creationId xmlns:a16="http://schemas.microsoft.com/office/drawing/2014/main" id="{85ECA5FB-207B-43DF-BDA9-79C0ADDEDB3A}"/>
               </a:ext>
             </a:extLst>
           </p:cNvPr>
@@ -21626,7 +21624,7 @@
           <p:cNvPr id="39" name="">
             <a:extLst xmlns:a="http://schemas.openxmlformats.org/drawingml/2006/main">
               <a:ext uri="{FF2B5EF4-FFF2-40B4-BE49-F238E27FC236}">
-                <a16:creationId xmlns:a16="http://schemas.microsoft.com/office/drawing/2014/main" id="{03CFB0E2-449B-4A8A-9F7A-6C762C203F52}"/>
+                <a16:creationId xmlns:a16="http://schemas.microsoft.com/office/drawing/2014/main" id="{0FFA1A79-152D-4600-9F56-627E8B0018F7}"/>
               </a:ext>
             </a:extLst>
           </p:cNvPr>
@@ -21661,7 +21659,7 @@
           <p:cNvPr id="40" name="">
             <a:extLst xmlns:a="http://schemas.openxmlformats.org/drawingml/2006/main">
               <a:ext uri="{FF2B5EF4-FFF2-40B4-BE49-F238E27FC236}">
-                <a16:creationId xmlns:a16="http://schemas.microsoft.com/office/drawing/2014/main" id="{4381EB78-0B98-42E4-B57D-ED0711BD2E0D}"/>
+                <a16:creationId xmlns:a16="http://schemas.microsoft.com/office/drawing/2014/main" id="{174A57F6-237A-4B10-8606-EE1E42550136}"/>
               </a:ext>
             </a:extLst>
           </p:cNvPr>
@@ -21694,7 +21692,7 @@
           <p:cNvPr id="41" name="">
             <a:extLst xmlns:a="http://schemas.openxmlformats.org/drawingml/2006/main">
               <a:ext uri="{FF2B5EF4-FFF2-40B4-BE49-F238E27FC236}">
-                <a16:creationId xmlns:a16="http://schemas.microsoft.com/office/drawing/2014/main" id="{8791B5A1-3A2B-4174-890A-B89EC8B6D04E}"/>
+                <a16:creationId xmlns:a16="http://schemas.microsoft.com/office/drawing/2014/main" id="{10499BE3-8047-4097-B767-1B4BBC738306}"/>
               </a:ext>
             </a:extLst>
           </p:cNvPr>
@@ -21729,7 +21727,7 @@
           <p:cNvPr id="42" name="">
             <a:extLst xmlns:a="http://schemas.openxmlformats.org/drawingml/2006/main">
               <a:ext uri="{FF2B5EF4-FFF2-40B4-BE49-F238E27FC236}">
-                <a16:creationId xmlns:a16="http://schemas.microsoft.com/office/drawing/2014/main" id="{09679ADE-D4EF-4651-B873-769CCF170EB1}"/>
+                <a16:creationId xmlns:a16="http://schemas.microsoft.com/office/drawing/2014/main" id="{5A14960C-9D20-4397-ABF5-2C904C49DC70}"/>
               </a:ext>
             </a:extLst>
           </p:cNvPr>
@@ -21793,7 +21791,7 @@
           <p:cNvPr id="43" name="">
             <a:extLst xmlns:a="http://schemas.openxmlformats.org/drawingml/2006/main">
               <a:ext uri="{FF2B5EF4-FFF2-40B4-BE49-F238E27FC236}">
-                <a16:creationId xmlns:a16="http://schemas.microsoft.com/office/drawing/2014/main" id="{0B435910-24BD-44C3-AF09-640BA6137DEA}"/>
+                <a16:creationId xmlns:a16="http://schemas.microsoft.com/office/drawing/2014/main" id="{2C177D42-53A1-4B0B-B28A-613F20892B26}"/>
               </a:ext>
             </a:extLst>
           </p:cNvPr>
@@ -21857,7 +21855,7 @@
           <p:cNvPr id="44" name="">
             <a:extLst xmlns:a="http://schemas.openxmlformats.org/drawingml/2006/main">
               <a:ext uri="{FF2B5EF4-FFF2-40B4-BE49-F238E27FC236}">
-                <a16:creationId xmlns:a16="http://schemas.microsoft.com/office/drawing/2014/main" id="{D08F1D6A-C8AB-476E-8BCF-B4A24AFF41CD}"/>
+                <a16:creationId xmlns:a16="http://schemas.microsoft.com/office/drawing/2014/main" id="{7F52A762-2B8D-41B1-879E-BE2B9CC2F2FC}"/>
               </a:ext>
             </a:extLst>
           </p:cNvPr>
@@ -21892,7 +21890,7 @@
           <p:cNvPr id="45" name="">
             <a:extLst xmlns:a="http://schemas.openxmlformats.org/drawingml/2006/main">
               <a:ext uri="{FF2B5EF4-FFF2-40B4-BE49-F238E27FC236}">
-                <a16:creationId xmlns:a16="http://schemas.microsoft.com/office/drawing/2014/main" id="{0DFABEB0-E942-46EB-BFB5-4C079761955D}"/>
+                <a16:creationId xmlns:a16="http://schemas.microsoft.com/office/drawing/2014/main" id="{3A08E001-9918-434B-A8A1-EAE8D274A646}"/>
               </a:ext>
             </a:extLst>
           </p:cNvPr>
@@ -21925,7 +21923,7 @@
           <p:cNvPr id="46" name="">
             <a:extLst xmlns:a="http://schemas.openxmlformats.org/drawingml/2006/main">
               <a:ext uri="{FF2B5EF4-FFF2-40B4-BE49-F238E27FC236}">
-                <a16:creationId xmlns:a16="http://schemas.microsoft.com/office/drawing/2014/main" id="{8405F667-CF64-4439-89D7-44569AD8C86E}"/>
+                <a16:creationId xmlns:a16="http://schemas.microsoft.com/office/drawing/2014/main" id="{1E708A1E-1626-4000-99F6-DC3142622A73}"/>
               </a:ext>
             </a:extLst>
           </p:cNvPr>
@@ -21960,7 +21958,7 @@
           <p:cNvPr id="47" name="">
             <a:extLst xmlns:a="http://schemas.openxmlformats.org/drawingml/2006/main">
               <a:ext uri="{FF2B5EF4-FFF2-40B4-BE49-F238E27FC236}">
-                <a16:creationId xmlns:a16="http://schemas.microsoft.com/office/drawing/2014/main" id="{1CD837DD-41FB-41E1-BE03-B05B061782A7}"/>
+                <a16:creationId xmlns:a16="http://schemas.microsoft.com/office/drawing/2014/main" id="{14B47C4B-948E-4ED0-94DE-3430035747EE}"/>
               </a:ext>
             </a:extLst>
           </p:cNvPr>
@@ -22024,7 +22022,7 @@
           <p:cNvPr id="48" name="">
             <a:extLst xmlns:a="http://schemas.openxmlformats.org/drawingml/2006/main">
               <a:ext uri="{FF2B5EF4-FFF2-40B4-BE49-F238E27FC236}">
-                <a16:creationId xmlns:a16="http://schemas.microsoft.com/office/drawing/2014/main" id="{6A67AF1E-6603-4DBB-ADAC-00488DE4C275}"/>
+                <a16:creationId xmlns:a16="http://schemas.microsoft.com/office/drawing/2014/main" id="{CEF5D7FA-AE6D-467D-B283-874976B60FFF}"/>
               </a:ext>
             </a:extLst>
           </p:cNvPr>
@@ -22088,7 +22086,7 @@
           <p:cNvPr id="49" name="">
             <a:extLst xmlns:a="http://schemas.openxmlformats.org/drawingml/2006/main">
               <a:ext uri="{FF2B5EF4-FFF2-40B4-BE49-F238E27FC236}">
-                <a16:creationId xmlns:a16="http://schemas.microsoft.com/office/drawing/2014/main" id="{C165F0A0-DB2F-4574-BEC6-B1BBCBEC1F69}"/>
+                <a16:creationId xmlns:a16="http://schemas.microsoft.com/office/drawing/2014/main" id="{11B49C62-37AC-46E5-82BF-98167AE574E0}"/>
               </a:ext>
             </a:extLst>
           </p:cNvPr>
@@ -22121,7 +22119,7 @@
           <p:cNvPr id="50" name="">
             <a:extLst xmlns:a="http://schemas.openxmlformats.org/drawingml/2006/main">
               <a:ext uri="{FF2B5EF4-FFF2-40B4-BE49-F238E27FC236}">
-                <a16:creationId xmlns:a16="http://schemas.microsoft.com/office/drawing/2014/main" id="{49A42436-E62C-425A-B9D9-3BF086584127}"/>
+                <a16:creationId xmlns:a16="http://schemas.microsoft.com/office/drawing/2014/main" id="{D1A241E2-CE3C-4A25-AFE4-1EFC7253A698}"/>
               </a:ext>
             </a:extLst>
           </p:cNvPr>
@@ -22185,7 +22183,7 @@
           <p:cNvPr id="51" name="">
             <a:extLst xmlns:a="http://schemas.openxmlformats.org/drawingml/2006/main">
               <a:ext uri="{FF2B5EF4-FFF2-40B4-BE49-F238E27FC236}">
-                <a16:creationId xmlns:a16="http://schemas.microsoft.com/office/drawing/2014/main" id="{C254524E-9521-4DBE-8B16-A70B5B82C375}"/>
+                <a16:creationId xmlns:a16="http://schemas.microsoft.com/office/drawing/2014/main" id="{BC3D8584-0DDA-4E1C-9EC6-E5AE6A4E569B}"/>
               </a:ext>
             </a:extLst>
           </p:cNvPr>
@@ -22220,7 +22218,7 @@
           <p:cNvPr id="52" name="">
             <a:extLst xmlns:a="http://schemas.openxmlformats.org/drawingml/2006/main">
               <a:ext uri="{FF2B5EF4-FFF2-40B4-BE49-F238E27FC236}">
-                <a16:creationId xmlns:a16="http://schemas.microsoft.com/office/drawing/2014/main" id="{F244C15F-2551-4689-B2F7-8DEACEDC54E4}"/>
+                <a16:creationId xmlns:a16="http://schemas.microsoft.com/office/drawing/2014/main" id="{17EE6448-4A38-4B21-AC6C-02667C3C48DC}"/>
               </a:ext>
             </a:extLst>
           </p:cNvPr>
@@ -22284,7 +22282,7 @@
           <p:cNvPr id="53" name="">
             <a:extLst xmlns:a="http://schemas.openxmlformats.org/drawingml/2006/main">
               <a:ext uri="{FF2B5EF4-FFF2-40B4-BE49-F238E27FC236}">
-                <a16:creationId xmlns:a16="http://schemas.microsoft.com/office/drawing/2014/main" id="{562E7E4B-B84A-4ADC-A755-DCFDC108152E}"/>
+                <a16:creationId xmlns:a16="http://schemas.microsoft.com/office/drawing/2014/main" id="{D993D42E-65A0-446F-A1A7-B2CCEDA1A96A}"/>
               </a:ext>
             </a:extLst>
           </p:cNvPr>
@@ -22348,7 +22346,7 @@
           <p:cNvPr id="54" name="">
             <a:extLst xmlns:a="http://schemas.openxmlformats.org/drawingml/2006/main">
               <a:ext uri="{FF2B5EF4-FFF2-40B4-BE49-F238E27FC236}">
-                <a16:creationId xmlns:a16="http://schemas.microsoft.com/office/drawing/2014/main" id="{2197071D-4492-47C4-B28E-3C4D2184AA14}"/>
+                <a16:creationId xmlns:a16="http://schemas.microsoft.com/office/drawing/2014/main" id="{CA49AC5C-E760-4DD8-8327-882BBD488CB4}"/>
               </a:ext>
             </a:extLst>
           </p:cNvPr>
@@ -22412,7 +22410,7 @@
           <p:cNvPr id="55" name="">
             <a:extLst xmlns:a="http://schemas.openxmlformats.org/drawingml/2006/main">
               <a:ext uri="{FF2B5EF4-FFF2-40B4-BE49-F238E27FC236}">
-                <a16:creationId xmlns:a16="http://schemas.microsoft.com/office/drawing/2014/main" id="{B21CC4D7-0544-404B-8B25-80518E2E3A14}"/>
+                <a16:creationId xmlns:a16="http://schemas.microsoft.com/office/drawing/2014/main" id="{E72BF8E9-CA7A-43B8-A590-732BE4B06125}"/>
               </a:ext>
             </a:extLst>
           </p:cNvPr>
@@ -22447,7 +22445,7 @@
           <p:cNvPr id="56" name="">
             <a:extLst xmlns:a="http://schemas.openxmlformats.org/drawingml/2006/main">
               <a:ext uri="{FF2B5EF4-FFF2-40B4-BE49-F238E27FC236}">
-                <a16:creationId xmlns:a16="http://schemas.microsoft.com/office/drawing/2014/main" id="{BAE0CC71-253B-4164-94B8-881D66286436}"/>
+                <a16:creationId xmlns:a16="http://schemas.microsoft.com/office/drawing/2014/main" id="{8CB0ED0D-39CB-4DC4-BF34-B1B0EBE98B6B}"/>
               </a:ext>
             </a:extLst>
           </p:cNvPr>
@@ -22482,7 +22480,7 @@
           <p:cNvPr id="57" name="">
             <a:extLst xmlns:a="http://schemas.openxmlformats.org/drawingml/2006/main">
               <a:ext uri="{FF2B5EF4-FFF2-40B4-BE49-F238E27FC236}">
-                <a16:creationId xmlns:a16="http://schemas.microsoft.com/office/drawing/2014/main" id="{88DDA4FD-7AA7-4849-AF3F-C5FC2CC4F987}"/>
+                <a16:creationId xmlns:a16="http://schemas.microsoft.com/office/drawing/2014/main" id="{8F366B6A-D961-4333-AD3F-E6745CBF0162}"/>
               </a:ext>
             </a:extLst>
           </p:cNvPr>
@@ -22517,7 +22515,7 @@
           <p:cNvPr id="58" name="kicker-01-marker">
             <a:extLst xmlns:a="http://schemas.openxmlformats.org/drawingml/2006/main">
               <a:ext uri="{FF2B5EF4-FFF2-40B4-BE49-F238E27FC236}">
-                <a16:creationId xmlns:a16="http://schemas.microsoft.com/office/drawing/2014/main" id="{D021346C-D309-414D-9CF9-94AB82F98DB9}"/>
+                <a16:creationId xmlns:a16="http://schemas.microsoft.com/office/drawing/2014/main" id="{FCBBC89F-CFDD-41E7-AD02-D8A6CFDEE0B1}"/>
               </a:ext>
             </a:extLst>
           </p:cNvPr>
@@ -22552,7 +22550,7 @@
           <p:cNvPr id="59" name="kicker-01-label">
             <a:extLst xmlns:a="http://schemas.openxmlformats.org/drawingml/2006/main">
               <a:ext uri="{FF2B5EF4-FFF2-40B4-BE49-F238E27FC236}">
-                <a16:creationId xmlns:a16="http://schemas.microsoft.com/office/drawing/2014/main" id="{F7B895BF-EA75-4F17-A2D3-C4C989FCE1F0}"/>
+                <a16:creationId xmlns:a16="http://schemas.microsoft.com/office/drawing/2014/main" id="{DEDFB6A5-128A-4C31-9906-51174F094ACB}"/>
               </a:ext>
             </a:extLst>
           </p:cNvPr>
@@ -22616,7 +22614,7 @@
           <p:cNvPr id="60" name="">
             <a:extLst xmlns:a="http://schemas.openxmlformats.org/drawingml/2006/main">
               <a:ext uri="{FF2B5EF4-FFF2-40B4-BE49-F238E27FC236}">
-                <a16:creationId xmlns:a16="http://schemas.microsoft.com/office/drawing/2014/main" id="{27F881CD-FAE8-4113-8C6C-D0D995B3682B}"/>
+                <a16:creationId xmlns:a16="http://schemas.microsoft.com/office/drawing/2014/main" id="{AB1D1692-F91D-49AD-B376-DF5E285BB8C9}"/>
               </a:ext>
             </a:extLst>
           </p:cNvPr>
@@ -22680,7 +22678,7 @@
           <p:cNvPr id="61" name="">
             <a:extLst xmlns:a="http://schemas.openxmlformats.org/drawingml/2006/main">
               <a:ext uri="{FF2B5EF4-FFF2-40B4-BE49-F238E27FC236}">
-                <a16:creationId xmlns:a16="http://schemas.microsoft.com/office/drawing/2014/main" id="{0BBD6947-723B-4691-81E1-D9C1642AEAC4}"/>
+                <a16:creationId xmlns:a16="http://schemas.microsoft.com/office/drawing/2014/main" id="{8C94FED3-97D1-405E-84DA-58DCB0C775F9}"/>
               </a:ext>
             </a:extLst>
           </p:cNvPr>
@@ -22744,7 +22742,7 @@
           <p:cNvPr id="62" name="">
             <a:extLst xmlns:a="http://schemas.openxmlformats.org/drawingml/2006/main">
               <a:ext uri="{FF2B5EF4-FFF2-40B4-BE49-F238E27FC236}">
-                <a16:creationId xmlns:a16="http://schemas.microsoft.com/office/drawing/2014/main" id="{D6C0972E-5ECC-4A8A-B05C-A09752E2A915}"/>
+                <a16:creationId xmlns:a16="http://schemas.microsoft.com/office/drawing/2014/main" id="{173C17AF-30D4-40B6-B8F6-6CC926D95A90}"/>
               </a:ext>
             </a:extLst>
           </p:cNvPr>
@@ -22779,7 +22777,7 @@
           <p:cNvPr id="63" name="">
             <a:extLst xmlns:a="http://schemas.openxmlformats.org/drawingml/2006/main">
               <a:ext uri="{FF2B5EF4-FFF2-40B4-BE49-F238E27FC236}">
-                <a16:creationId xmlns:a16="http://schemas.microsoft.com/office/drawing/2014/main" id="{D8310233-07B4-44F4-8316-86EBD8CE8EED}"/>
+                <a16:creationId xmlns:a16="http://schemas.microsoft.com/office/drawing/2014/main" id="{FE14B138-6DE8-41D0-96D1-432B88F06F9A}"/>
               </a:ext>
             </a:extLst>
           </p:cNvPr>
@@ -22814,7 +22812,7 @@
           <p:cNvPr id="64" name="">
             <a:extLst xmlns:a="http://schemas.openxmlformats.org/drawingml/2006/main">
               <a:ext uri="{FF2B5EF4-FFF2-40B4-BE49-F238E27FC236}">
-                <a16:creationId xmlns:a16="http://schemas.microsoft.com/office/drawing/2014/main" id="{F5E52856-28D1-4D57-A5F7-8104E8BA9C20}"/>
+                <a16:creationId xmlns:a16="http://schemas.microsoft.com/office/drawing/2014/main" id="{1E8E8765-5D2D-415A-8CE6-DEB0CF804605}"/>
               </a:ext>
             </a:extLst>
           </p:cNvPr>
@@ -22849,7 +22847,7 @@
           <p:cNvPr id="65" name="">
             <a:extLst xmlns:a="http://schemas.openxmlformats.org/drawingml/2006/main">
               <a:ext uri="{FF2B5EF4-FFF2-40B4-BE49-F238E27FC236}">
-                <a16:creationId xmlns:a16="http://schemas.microsoft.com/office/drawing/2014/main" id="{B253BCB0-DA29-4FF6-973B-C93E02AB53E9}"/>
+                <a16:creationId xmlns:a16="http://schemas.microsoft.com/office/drawing/2014/main" id="{C5443D32-ADAF-4242-BAFF-1A131F4B725C}"/>
               </a:ext>
             </a:extLst>
           </p:cNvPr>
@@ -22884,7 +22882,7 @@
           <p:cNvPr id="66" name="">
             <a:extLst xmlns:a="http://schemas.openxmlformats.org/drawingml/2006/main">
               <a:ext uri="{FF2B5EF4-FFF2-40B4-BE49-F238E27FC236}">
-                <a16:creationId xmlns:a16="http://schemas.microsoft.com/office/drawing/2014/main" id="{A4CCA46A-3293-4928-BC75-E641FCC289BB}"/>
+                <a16:creationId xmlns:a16="http://schemas.microsoft.com/office/drawing/2014/main" id="{52105EE6-45B4-4BF7-BD81-7B5DBD7B711A}"/>
               </a:ext>
             </a:extLst>
           </p:cNvPr>
@@ -22948,7 +22946,7 @@
           <p:cNvPr id="67" name="">
             <a:extLst xmlns:a="http://schemas.openxmlformats.org/drawingml/2006/main">
               <a:ext uri="{FF2B5EF4-FFF2-40B4-BE49-F238E27FC236}">
-                <a16:creationId xmlns:a16="http://schemas.microsoft.com/office/drawing/2014/main" id="{8EDC1FFD-E7B9-42E5-A314-84C13836BCCA}"/>
+                <a16:creationId xmlns:a16="http://schemas.microsoft.com/office/drawing/2014/main" id="{4BFE332D-4388-451C-B5E2-2132AF23D867}"/>
               </a:ext>
             </a:extLst>
           </p:cNvPr>
@@ -23012,7 +23010,7 @@
           <p:cNvPr id="68" name="">
             <a:extLst xmlns:a="http://schemas.openxmlformats.org/drawingml/2006/main">
               <a:ext uri="{FF2B5EF4-FFF2-40B4-BE49-F238E27FC236}">
-                <a16:creationId xmlns:a16="http://schemas.microsoft.com/office/drawing/2014/main" id="{B6BA0461-523F-4AE1-A21F-62FBDCCEC4DD}"/>
+                <a16:creationId xmlns:a16="http://schemas.microsoft.com/office/drawing/2014/main" id="{689C6588-1642-4EE4-91E1-E34709F5F787}"/>
               </a:ext>
             </a:extLst>
           </p:cNvPr>
@@ -23074,7 +23072,7 @@
     </p:spTree>
     <p:extLst>
       <p:ext uri="{BB962C8B-B14F-4D97-AF65-F5344CB8AC3E}">
-        <p14:creationId xmlns:p14="http://schemas.microsoft.com/office/powerpoint/2010/main" val="1521470044"/>
+        <p14:creationId xmlns:p14="http://schemas.microsoft.com/office/powerpoint/2010/main" val="1910875360"/>
       </p:ext>
     </p:extLst>
   </p:cSld>
@@ -23098,7 +23096,7 @@
           <p:cNvPr id="1" name="">
             <a:extLst xmlns:a="http://schemas.openxmlformats.org/drawingml/2006/main">
               <a:ext uri="{FF2B5EF4-FFF2-40B4-BE49-F238E27FC236}">
-                <a16:creationId xmlns:a16="http://schemas.microsoft.com/office/drawing/2014/main" id="{98DB98AA-9714-47EE-A17F-1BB8B8501268}"/>
+                <a16:creationId xmlns:a16="http://schemas.microsoft.com/office/drawing/2014/main" id="{BAEECA49-6454-4992-81D9-DEE0F79B3026}"/>
               </a:ext>
             </a:extLst>
           </p:cNvPr>
@@ -23133,7 +23131,7 @@
           <p:cNvPr id="2" name="">
             <a:extLst xmlns:a="http://schemas.openxmlformats.org/drawingml/2006/main">
               <a:ext uri="{FF2B5EF4-FFF2-40B4-BE49-F238E27FC236}">
-                <a16:creationId xmlns:a16="http://schemas.microsoft.com/office/drawing/2014/main" id="{C5E8E49D-E9E8-4F74-A3FB-B5776464D9E1}"/>
+                <a16:creationId xmlns:a16="http://schemas.microsoft.com/office/drawing/2014/main" id="{15530C40-923F-42B6-9538-34ACF6E234C0}"/>
               </a:ext>
             </a:extLst>
           </p:cNvPr>
@@ -23168,7 +23166,7 @@
           <p:cNvPr id="3" name="">
             <a:extLst xmlns:a="http://schemas.openxmlformats.org/drawingml/2006/main">
               <a:ext uri="{FF2B5EF4-FFF2-40B4-BE49-F238E27FC236}">
-                <a16:creationId xmlns:a16="http://schemas.microsoft.com/office/drawing/2014/main" id="{FE0E6A3F-32BD-4920-BFF1-E57C8F706185}"/>
+                <a16:creationId xmlns:a16="http://schemas.microsoft.com/office/drawing/2014/main" id="{FA39631A-75BC-4BE4-9B4B-EFC466BDC2D1}"/>
               </a:ext>
             </a:extLst>
           </p:cNvPr>
@@ -23203,7 +23201,7 @@
           <p:cNvPr id="4" name="kicker-01-marker">
             <a:extLst xmlns:a="http://schemas.openxmlformats.org/drawingml/2006/main">
               <a:ext uri="{FF2B5EF4-FFF2-40B4-BE49-F238E27FC236}">
-                <a16:creationId xmlns:a16="http://schemas.microsoft.com/office/drawing/2014/main" id="{374ADF7F-40D9-4EF8-892F-F5EFE9C5BB01}"/>
+                <a16:creationId xmlns:a16="http://schemas.microsoft.com/office/drawing/2014/main" id="{273298FB-D38D-4FFD-9967-0133FE19AEB7}"/>
               </a:ext>
             </a:extLst>
           </p:cNvPr>
@@ -23238,7 +23236,7 @@
           <p:cNvPr id="5" name="kicker-01-label">
             <a:extLst xmlns:a="http://schemas.openxmlformats.org/drawingml/2006/main">
               <a:ext uri="{FF2B5EF4-FFF2-40B4-BE49-F238E27FC236}">
-                <a16:creationId xmlns:a16="http://schemas.microsoft.com/office/drawing/2014/main" id="{E2416D8A-0533-4DCD-B0DF-FEE1827460ED}"/>
+                <a16:creationId xmlns:a16="http://schemas.microsoft.com/office/drawing/2014/main" id="{FA27A52F-FABD-4404-9B88-08B4B0973908}"/>
               </a:ext>
             </a:extLst>
           </p:cNvPr>
@@ -23302,7 +23300,7 @@
           <p:cNvPr id="6" name="">
             <a:extLst xmlns:a="http://schemas.openxmlformats.org/drawingml/2006/main">
               <a:ext uri="{FF2B5EF4-FFF2-40B4-BE49-F238E27FC236}">
-                <a16:creationId xmlns:a16="http://schemas.microsoft.com/office/drawing/2014/main" id="{BCADD882-831B-4F47-8557-0928F5B4C7CF}"/>
+                <a16:creationId xmlns:a16="http://schemas.microsoft.com/office/drawing/2014/main" id="{BBC80309-6ADC-4A79-8589-73D8B3AD1523}"/>
               </a:ext>
             </a:extLst>
           </p:cNvPr>
@@ -23366,7 +23364,7 @@
           <p:cNvPr id="7" name="">
             <a:extLst xmlns:a="http://schemas.openxmlformats.org/drawingml/2006/main">
               <a:ext uri="{FF2B5EF4-FFF2-40B4-BE49-F238E27FC236}">
-                <a16:creationId xmlns:a16="http://schemas.microsoft.com/office/drawing/2014/main" id="{2549FF5B-DCB0-4617-9A5F-5A1C11CD9B7E}"/>
+                <a16:creationId xmlns:a16="http://schemas.microsoft.com/office/drawing/2014/main" id="{D9EDF60C-159A-4A6F-B564-8702BD7775DD}"/>
               </a:ext>
             </a:extLst>
           </p:cNvPr>
@@ -23430,7 +23428,7 @@
           <p:cNvPr id="8" name="">
             <a:extLst xmlns:a="http://schemas.openxmlformats.org/drawingml/2006/main">
               <a:ext uri="{FF2B5EF4-FFF2-40B4-BE49-F238E27FC236}">
-                <a16:creationId xmlns:a16="http://schemas.microsoft.com/office/drawing/2014/main" id="{DE6E95FD-F811-4A10-83EC-719189580B6F}"/>
+                <a16:creationId xmlns:a16="http://schemas.microsoft.com/office/drawing/2014/main" id="{754A3CE8-CA83-4EE6-8E0B-5661CB383321}"/>
               </a:ext>
             </a:extLst>
           </p:cNvPr>
@@ -23465,7 +23463,7 @@
           <p:cNvPr id="9" name="">
             <a:extLst xmlns:a="http://schemas.openxmlformats.org/drawingml/2006/main">
               <a:ext uri="{FF2B5EF4-FFF2-40B4-BE49-F238E27FC236}">
-                <a16:creationId xmlns:a16="http://schemas.microsoft.com/office/drawing/2014/main" id="{CD3E4181-9526-4124-93D5-D1B9C60A545C}"/>
+                <a16:creationId xmlns:a16="http://schemas.microsoft.com/office/drawing/2014/main" id="{B1E6FA82-CDA0-4254-9331-F6ADAFA6B7C1}"/>
               </a:ext>
             </a:extLst>
           </p:cNvPr>
@@ -23529,7 +23527,7 @@
           <p:cNvPr id="10" name="">
             <a:extLst xmlns:a="http://schemas.openxmlformats.org/drawingml/2006/main">
               <a:ext uri="{FF2B5EF4-FFF2-40B4-BE49-F238E27FC236}">
-                <a16:creationId xmlns:a16="http://schemas.microsoft.com/office/drawing/2014/main" id="{745C5B91-0AF0-431C-BBD4-E8D374911384}"/>
+                <a16:creationId xmlns:a16="http://schemas.microsoft.com/office/drawing/2014/main" id="{5BFDB0B6-A4E2-4C8E-8123-44DB7D3B86FA}"/>
               </a:ext>
             </a:extLst>
           </p:cNvPr>
@@ -23593,7 +23591,7 @@
           <p:cNvPr id="11" name="">
             <a:extLst xmlns:a="http://schemas.openxmlformats.org/drawingml/2006/main">
               <a:ext uri="{FF2B5EF4-FFF2-40B4-BE49-F238E27FC236}">
-                <a16:creationId xmlns:a16="http://schemas.microsoft.com/office/drawing/2014/main" id="{35A0C837-DF02-4E4F-AC27-C827B30EEACF}"/>
+                <a16:creationId xmlns:a16="http://schemas.microsoft.com/office/drawing/2014/main" id="{BB84A072-3BCB-4789-848E-D03B9120BA25}"/>
               </a:ext>
             </a:extLst>
           </p:cNvPr>
@@ -23657,7 +23655,7 @@
           <p:cNvPr id="12" name="">
             <a:extLst xmlns:a="http://schemas.openxmlformats.org/drawingml/2006/main">
               <a:ext uri="{FF2B5EF4-FFF2-40B4-BE49-F238E27FC236}">
-                <a16:creationId xmlns:a16="http://schemas.microsoft.com/office/drawing/2014/main" id="{EBD96057-EF4A-45DC-9892-F7AC915D1266}"/>
+                <a16:creationId xmlns:a16="http://schemas.microsoft.com/office/drawing/2014/main" id="{A145D923-3C95-4BDD-8244-B3264B4D79B7}"/>
               </a:ext>
             </a:extLst>
           </p:cNvPr>
@@ -23690,7 +23688,7 @@
           <p:cNvPr id="13" name="">
             <a:extLst xmlns:a="http://schemas.openxmlformats.org/drawingml/2006/main">
               <a:ext uri="{FF2B5EF4-FFF2-40B4-BE49-F238E27FC236}">
-                <a16:creationId xmlns:a16="http://schemas.microsoft.com/office/drawing/2014/main" id="{3E1660B7-530C-44B6-8562-F614B525F7F4}"/>
+                <a16:creationId xmlns:a16="http://schemas.microsoft.com/office/drawing/2014/main" id="{7E71B9D2-D1FA-4630-AAAB-4BE4CB7ACF5B}"/>
               </a:ext>
             </a:extLst>
           </p:cNvPr>
@@ -23725,7 +23723,7 @@
           <p:cNvPr id="14" name="">
             <a:extLst xmlns:a="http://schemas.openxmlformats.org/drawingml/2006/main">
               <a:ext uri="{FF2B5EF4-FFF2-40B4-BE49-F238E27FC236}">
-                <a16:creationId xmlns:a16="http://schemas.microsoft.com/office/drawing/2014/main" id="{3ECA1D9C-DF95-460E-810E-652B0FFA3055}"/>
+                <a16:creationId xmlns:a16="http://schemas.microsoft.com/office/drawing/2014/main" id="{C864087B-3063-4667-B1F9-A02580536269}"/>
               </a:ext>
             </a:extLst>
           </p:cNvPr>
@@ -23789,7 +23787,7 @@
           <p:cNvPr id="15" name="">
             <a:extLst xmlns:a="http://schemas.openxmlformats.org/drawingml/2006/main">
               <a:ext uri="{FF2B5EF4-FFF2-40B4-BE49-F238E27FC236}">
-                <a16:creationId xmlns:a16="http://schemas.microsoft.com/office/drawing/2014/main" id="{6F6DDCF1-2DC5-47C0-AA67-7D746625F25C}"/>
+                <a16:creationId xmlns:a16="http://schemas.microsoft.com/office/drawing/2014/main" id="{E7C21173-1728-410D-8A0B-CC752CA0E03C}"/>
               </a:ext>
             </a:extLst>
           </p:cNvPr>
@@ -23853,7 +23851,7 @@
           <p:cNvPr id="16" name="">
             <a:extLst xmlns:a="http://schemas.openxmlformats.org/drawingml/2006/main">
               <a:ext uri="{FF2B5EF4-FFF2-40B4-BE49-F238E27FC236}">
-                <a16:creationId xmlns:a16="http://schemas.microsoft.com/office/drawing/2014/main" id="{56FDE160-E1C9-45AC-A83D-AD9A2870787B}"/>
+                <a16:creationId xmlns:a16="http://schemas.microsoft.com/office/drawing/2014/main" id="{87078B7F-B3F0-46B1-8047-4412D644B2B4}"/>
               </a:ext>
             </a:extLst>
           </p:cNvPr>
@@ -23886,7 +23884,7 @@
           <p:cNvPr id="17" name="">
             <a:extLst xmlns:a="http://schemas.openxmlformats.org/drawingml/2006/main">
               <a:ext uri="{FF2B5EF4-FFF2-40B4-BE49-F238E27FC236}">
-                <a16:creationId xmlns:a16="http://schemas.microsoft.com/office/drawing/2014/main" id="{C3504CFC-35FB-4782-8250-211CA1E9AA8D}"/>
+                <a16:creationId xmlns:a16="http://schemas.microsoft.com/office/drawing/2014/main" id="{20A25535-B560-4ADB-BDFF-30CBA9BE8C30}"/>
               </a:ext>
             </a:extLst>
           </p:cNvPr>
@@ -23921,7 +23919,7 @@
           <p:cNvPr id="18" name="">
             <a:extLst xmlns:a="http://schemas.openxmlformats.org/drawingml/2006/main">
               <a:ext uri="{FF2B5EF4-FFF2-40B4-BE49-F238E27FC236}">
-                <a16:creationId xmlns:a16="http://schemas.microsoft.com/office/drawing/2014/main" id="{7DCEA16C-9F22-4CEE-B188-CD9DF162B12E}"/>
+                <a16:creationId xmlns:a16="http://schemas.microsoft.com/office/drawing/2014/main" id="{0CA25CE8-79C6-4D0A-9F40-528F56CBEC71}"/>
               </a:ext>
             </a:extLst>
           </p:cNvPr>
@@ -23985,7 +23983,7 @@
           <p:cNvPr id="19" name="">
             <a:extLst xmlns:a="http://schemas.openxmlformats.org/drawingml/2006/main">
               <a:ext uri="{FF2B5EF4-FFF2-40B4-BE49-F238E27FC236}">
-                <a16:creationId xmlns:a16="http://schemas.microsoft.com/office/drawing/2014/main" id="{FA040A6D-86DC-48E9-9F53-8E90129BCFCF}"/>
+                <a16:creationId xmlns:a16="http://schemas.microsoft.com/office/drawing/2014/main" id="{982F74D8-52D7-4AF7-827C-54C5F0E37CBC}"/>
               </a:ext>
             </a:extLst>
           </p:cNvPr>
@@ -24049,7 +24047,7 @@
           <p:cNvPr id="20" name="">
             <a:extLst xmlns:a="http://schemas.openxmlformats.org/drawingml/2006/main">
               <a:ext uri="{FF2B5EF4-FFF2-40B4-BE49-F238E27FC236}">
-                <a16:creationId xmlns:a16="http://schemas.microsoft.com/office/drawing/2014/main" id="{9F97CE68-2AAB-4C60-AD93-A0E140ABE9E3}"/>
+                <a16:creationId xmlns:a16="http://schemas.microsoft.com/office/drawing/2014/main" id="{3B3443D8-7E06-43F3-A948-E494715BAC6A}"/>
               </a:ext>
             </a:extLst>
           </p:cNvPr>
@@ -24082,7 +24080,7 @@
           <p:cNvPr id="21" name="">
             <a:extLst xmlns:a="http://schemas.openxmlformats.org/drawingml/2006/main">
               <a:ext uri="{FF2B5EF4-FFF2-40B4-BE49-F238E27FC236}">
-                <a16:creationId xmlns:a16="http://schemas.microsoft.com/office/drawing/2014/main" id="{14619DD9-5002-44BB-9D7B-F73510BD01A6}"/>
+                <a16:creationId xmlns:a16="http://schemas.microsoft.com/office/drawing/2014/main" id="{FF5AA387-6C34-4661-BC37-34242F30D955}"/>
               </a:ext>
             </a:extLst>
           </p:cNvPr>
@@ -24117,7 +24115,7 @@
           <p:cNvPr id="22" name="">
             <a:extLst xmlns:a="http://schemas.openxmlformats.org/drawingml/2006/main">
               <a:ext uri="{FF2B5EF4-FFF2-40B4-BE49-F238E27FC236}">
-                <a16:creationId xmlns:a16="http://schemas.microsoft.com/office/drawing/2014/main" id="{29370EB4-BCF6-43F0-9515-C70BBBEB4968}"/>
+                <a16:creationId xmlns:a16="http://schemas.microsoft.com/office/drawing/2014/main" id="{F38C1F96-D1D6-4A5B-841A-B0E47376FD6C}"/>
               </a:ext>
             </a:extLst>
           </p:cNvPr>
@@ -24181,7 +24179,7 @@
           <p:cNvPr id="23" name="">
             <a:extLst xmlns:a="http://schemas.openxmlformats.org/drawingml/2006/main">
               <a:ext uri="{FF2B5EF4-FFF2-40B4-BE49-F238E27FC236}">
-                <a16:creationId xmlns:a16="http://schemas.microsoft.com/office/drawing/2014/main" id="{7495247B-7889-489B-88D3-23ACB84E8653}"/>
+                <a16:creationId xmlns:a16="http://schemas.microsoft.com/office/drawing/2014/main" id="{525DD3E6-275E-46E7-9B41-820573C63D38}"/>
               </a:ext>
             </a:extLst>
           </p:cNvPr>
@@ -24245,7 +24243,7 @@
           <p:cNvPr id="24" name="">
             <a:extLst xmlns:a="http://schemas.openxmlformats.org/drawingml/2006/main">
               <a:ext uri="{FF2B5EF4-FFF2-40B4-BE49-F238E27FC236}">
-                <a16:creationId xmlns:a16="http://schemas.microsoft.com/office/drawing/2014/main" id="{55D61CD7-AAFD-442D-8C90-9D8CD928805E}"/>
+                <a16:creationId xmlns:a16="http://schemas.microsoft.com/office/drawing/2014/main" id="{1B77F2C8-2E92-4572-8016-54773F7AF8C4}"/>
               </a:ext>
             </a:extLst>
           </p:cNvPr>
@@ -24278,7 +24276,7 @@
           <p:cNvPr id="25" name="">
             <a:extLst xmlns:a="http://schemas.openxmlformats.org/drawingml/2006/main">
               <a:ext uri="{FF2B5EF4-FFF2-40B4-BE49-F238E27FC236}">
-                <a16:creationId xmlns:a16="http://schemas.microsoft.com/office/drawing/2014/main" id="{7A07226A-5C6A-460C-8D61-FE0239616B2A}"/>
+                <a16:creationId xmlns:a16="http://schemas.microsoft.com/office/drawing/2014/main" id="{461BEE55-9930-469F-9AD9-9CEACD6B3948}"/>
               </a:ext>
             </a:extLst>
           </p:cNvPr>
@@ -24313,7 +24311,7 @@
           <p:cNvPr id="26" name="">
             <a:extLst xmlns:a="http://schemas.openxmlformats.org/drawingml/2006/main">
               <a:ext uri="{FF2B5EF4-FFF2-40B4-BE49-F238E27FC236}">
-                <a16:creationId xmlns:a16="http://schemas.microsoft.com/office/drawing/2014/main" id="{2889E499-88E3-41BB-9E6E-52E4352A67DD}"/>
+                <a16:creationId xmlns:a16="http://schemas.microsoft.com/office/drawing/2014/main" id="{EC9CBCD7-A30A-4CFE-B844-E8E345FCA454}"/>
               </a:ext>
             </a:extLst>
           </p:cNvPr>
@@ -24377,7 +24375,7 @@
           <p:cNvPr id="27" name="">
             <a:extLst xmlns:a="http://schemas.openxmlformats.org/drawingml/2006/main">
               <a:ext uri="{FF2B5EF4-FFF2-40B4-BE49-F238E27FC236}">
-                <a16:creationId xmlns:a16="http://schemas.microsoft.com/office/drawing/2014/main" id="{EA223C04-A6CA-40A7-8608-FF8D23EBABA8}"/>
+                <a16:creationId xmlns:a16="http://schemas.microsoft.com/office/drawing/2014/main" id="{E125159F-2FC2-4911-82DA-F453F0687F1F}"/>
               </a:ext>
             </a:extLst>
           </p:cNvPr>
@@ -24441,7 +24439,7 @@
           <p:cNvPr id="28" name="">
             <a:extLst xmlns:a="http://schemas.openxmlformats.org/drawingml/2006/main">
               <a:ext uri="{FF2B5EF4-FFF2-40B4-BE49-F238E27FC236}">
-                <a16:creationId xmlns:a16="http://schemas.microsoft.com/office/drawing/2014/main" id="{6D1C2EA3-6647-4216-B722-5ABBA8E56C6D}"/>
+                <a16:creationId xmlns:a16="http://schemas.microsoft.com/office/drawing/2014/main" id="{4137C5F7-FC09-45A5-9519-C1C9A86C5FEE}"/>
               </a:ext>
             </a:extLst>
           </p:cNvPr>
@@ -24474,7 +24472,7 @@
           <p:cNvPr id="29" name="">
             <a:extLst xmlns:a="http://schemas.openxmlformats.org/drawingml/2006/main">
               <a:ext uri="{FF2B5EF4-FFF2-40B4-BE49-F238E27FC236}">
-                <a16:creationId xmlns:a16="http://schemas.microsoft.com/office/drawing/2014/main" id="{B30AE68B-2355-4653-8C69-6CA77D884E7E}"/>
+                <a16:creationId xmlns:a16="http://schemas.microsoft.com/office/drawing/2014/main" id="{A3405605-6947-457D-9475-52520F3ED677}"/>
               </a:ext>
             </a:extLst>
           </p:cNvPr>
@@ -24538,7 +24536,7 @@
           <p:cNvPr id="30" name="">
             <a:extLst xmlns:a="http://schemas.openxmlformats.org/drawingml/2006/main">
               <a:ext uri="{FF2B5EF4-FFF2-40B4-BE49-F238E27FC236}">
-                <a16:creationId xmlns:a16="http://schemas.microsoft.com/office/drawing/2014/main" id="{7EFC5B70-4E0E-4322-B01C-11F98DA1E512}"/>
+                <a16:creationId xmlns:a16="http://schemas.microsoft.com/office/drawing/2014/main" id="{8E411D9E-77F5-4C1D-BE43-9DBD1B49B58F}"/>
               </a:ext>
             </a:extLst>
           </p:cNvPr>
@@ -24602,7 +24600,7 @@
           <p:cNvPr id="31" name="">
             <a:extLst xmlns:a="http://schemas.openxmlformats.org/drawingml/2006/main">
               <a:ext uri="{FF2B5EF4-FFF2-40B4-BE49-F238E27FC236}">
-                <a16:creationId xmlns:a16="http://schemas.microsoft.com/office/drawing/2014/main" id="{D749E270-F6BE-41BE-AC29-560FE46C7F9A}"/>
+                <a16:creationId xmlns:a16="http://schemas.microsoft.com/office/drawing/2014/main" id="{EF6AAEBD-79F0-4A7E-88EA-5E49C6E460C8}"/>
               </a:ext>
             </a:extLst>
           </p:cNvPr>
@@ -24637,7 +24635,7 @@
           <p:cNvPr id="32" name="">
             <a:extLst xmlns:a="http://schemas.openxmlformats.org/drawingml/2006/main">
               <a:ext uri="{FF2B5EF4-FFF2-40B4-BE49-F238E27FC236}">
-                <a16:creationId xmlns:a16="http://schemas.microsoft.com/office/drawing/2014/main" id="{F6CE11E0-E0F3-46BE-BB5E-F4DA03D53343}"/>
+                <a16:creationId xmlns:a16="http://schemas.microsoft.com/office/drawing/2014/main" id="{F31FD4DE-F6F3-439A-80A2-F43D0620CB07}"/>
               </a:ext>
             </a:extLst>
           </p:cNvPr>
@@ -24701,7 +24699,7 @@
           <p:cNvPr id="33" name="">
             <a:extLst xmlns:a="http://schemas.openxmlformats.org/drawingml/2006/main">
               <a:ext uri="{FF2B5EF4-FFF2-40B4-BE49-F238E27FC236}">
-                <a16:creationId xmlns:a16="http://schemas.microsoft.com/office/drawing/2014/main" id="{C8A4C8B6-8AE0-4AD9-8A7B-29FA72B77100}"/>
+                <a16:creationId xmlns:a16="http://schemas.microsoft.com/office/drawing/2014/main" id="{ED9D42A7-9625-4A54-B57C-0298D135FE9C}"/>
               </a:ext>
             </a:extLst>
           </p:cNvPr>
@@ -24765,7 +24763,7 @@
           <p:cNvPr id="34" name="">
             <a:extLst xmlns:a="http://schemas.openxmlformats.org/drawingml/2006/main">
               <a:ext uri="{FF2B5EF4-FFF2-40B4-BE49-F238E27FC236}">
-                <a16:creationId xmlns:a16="http://schemas.microsoft.com/office/drawing/2014/main" id="{C9EB0A4E-6678-44DA-8400-9F2A82622046}"/>
+                <a16:creationId xmlns:a16="http://schemas.microsoft.com/office/drawing/2014/main" id="{3F0B189F-C97A-45AE-B6C9-312DBBD8ED08}"/>
               </a:ext>
             </a:extLst>
           </p:cNvPr>
@@ -24827,7 +24825,7 @@
     </p:spTree>
     <p:extLst>
       <p:ext uri="{BB962C8B-B14F-4D97-AF65-F5344CB8AC3E}">
-        <p14:creationId xmlns:p14="http://schemas.microsoft.com/office/powerpoint/2010/main" val="429240759"/>
+        <p14:creationId xmlns:p14="http://schemas.microsoft.com/office/powerpoint/2010/main" val="965094453"/>
       </p:ext>
     </p:extLst>
   </p:cSld>
@@ -24851,7 +24849,7 @@
           <p:cNvPr id="1" name="">
             <a:extLst xmlns:a="http://schemas.openxmlformats.org/drawingml/2006/main">
               <a:ext uri="{FF2B5EF4-FFF2-40B4-BE49-F238E27FC236}">
-                <a16:creationId xmlns:a16="http://schemas.microsoft.com/office/drawing/2014/main" id="{5581AD9B-CC58-4426-8C43-CDEA6A84B97D}"/>
+                <a16:creationId xmlns:a16="http://schemas.microsoft.com/office/drawing/2014/main" id="{7969A0E9-3A3C-4E36-AD73-1CC92B6AA815}"/>
               </a:ext>
             </a:extLst>
           </p:cNvPr>
@@ -24886,7 +24884,7 @@
           <p:cNvPr id="2" name="">
             <a:extLst xmlns:a="http://schemas.openxmlformats.org/drawingml/2006/main">
               <a:ext uri="{FF2B5EF4-FFF2-40B4-BE49-F238E27FC236}">
-                <a16:creationId xmlns:a16="http://schemas.microsoft.com/office/drawing/2014/main" id="{8917A476-C75F-4BA0-8DC4-E439F86A81D6}"/>
+                <a16:creationId xmlns:a16="http://schemas.microsoft.com/office/drawing/2014/main" id="{176E5EA8-5A4F-45EF-8C84-CAE215E2578F}"/>
               </a:ext>
             </a:extLst>
           </p:cNvPr>
@@ -24921,7 +24919,7 @@
           <p:cNvPr id="3" name="">
             <a:extLst xmlns:a="http://schemas.openxmlformats.org/drawingml/2006/main">
               <a:ext uri="{FF2B5EF4-FFF2-40B4-BE49-F238E27FC236}">
-                <a16:creationId xmlns:a16="http://schemas.microsoft.com/office/drawing/2014/main" id="{3F80A601-DA71-418F-B9B5-ED02F22411A3}"/>
+                <a16:creationId xmlns:a16="http://schemas.microsoft.com/office/drawing/2014/main" id="{783219B9-F5DE-445D-B7CE-EE137129B39C}"/>
               </a:ext>
             </a:extLst>
           </p:cNvPr>
@@ -24956,7 +24954,7 @@
           <p:cNvPr id="4" name="kicker-01-marker">
             <a:extLst xmlns:a="http://schemas.openxmlformats.org/drawingml/2006/main">
               <a:ext uri="{FF2B5EF4-FFF2-40B4-BE49-F238E27FC236}">
-                <a16:creationId xmlns:a16="http://schemas.microsoft.com/office/drawing/2014/main" id="{1658D61F-F29E-4F61-AF89-031D09BD65AC}"/>
+                <a16:creationId xmlns:a16="http://schemas.microsoft.com/office/drawing/2014/main" id="{331AEDCA-F2F8-476C-A3AD-C614EBF9AE92}"/>
               </a:ext>
             </a:extLst>
           </p:cNvPr>
@@ -24991,7 +24989,7 @@
           <p:cNvPr id="5" name="kicker-01-label">
             <a:extLst xmlns:a="http://schemas.openxmlformats.org/drawingml/2006/main">
               <a:ext uri="{FF2B5EF4-FFF2-40B4-BE49-F238E27FC236}">
-                <a16:creationId xmlns:a16="http://schemas.microsoft.com/office/drawing/2014/main" id="{6C46269C-0C1D-4A16-92AF-6E38D89ABE72}"/>
+                <a16:creationId xmlns:a16="http://schemas.microsoft.com/office/drawing/2014/main" id="{E02B1491-1A1E-4D42-97FD-E699E4FB6BED}"/>
               </a:ext>
             </a:extLst>
           </p:cNvPr>
@@ -25055,7 +25053,7 @@
           <p:cNvPr id="6" name="">
             <a:extLst xmlns:a="http://schemas.openxmlformats.org/drawingml/2006/main">
               <a:ext uri="{FF2B5EF4-FFF2-40B4-BE49-F238E27FC236}">
-                <a16:creationId xmlns:a16="http://schemas.microsoft.com/office/drawing/2014/main" id="{77D9067C-1CAC-4A41-AD55-F0522E7C051C}"/>
+                <a16:creationId xmlns:a16="http://schemas.microsoft.com/office/drawing/2014/main" id="{09645848-6785-4423-A730-EE812EDA3196}"/>
               </a:ext>
             </a:extLst>
           </p:cNvPr>
@@ -25119,7 +25117,7 @@
           <p:cNvPr id="7" name="">
             <a:extLst xmlns:a="http://schemas.openxmlformats.org/drawingml/2006/main">
               <a:ext uri="{FF2B5EF4-FFF2-40B4-BE49-F238E27FC236}">
-                <a16:creationId xmlns:a16="http://schemas.microsoft.com/office/drawing/2014/main" id="{C3B50B59-30AE-47F7-A458-B4B7EE3581E7}"/>
+                <a16:creationId xmlns:a16="http://schemas.microsoft.com/office/drawing/2014/main" id="{74C7E0E3-5031-4789-8352-193D8B4288E0}"/>
               </a:ext>
             </a:extLst>
           </p:cNvPr>
@@ -25183,7 +25181,7 @@
           <p:cNvPr id="8" name="">
             <a:extLst xmlns:a="http://schemas.openxmlformats.org/drawingml/2006/main">
               <a:ext uri="{FF2B5EF4-FFF2-40B4-BE49-F238E27FC236}">
-                <a16:creationId xmlns:a16="http://schemas.microsoft.com/office/drawing/2014/main" id="{B1C6F38B-2AB6-47DF-8759-F78D9BF56BE1}"/>
+                <a16:creationId xmlns:a16="http://schemas.microsoft.com/office/drawing/2014/main" id="{64E390E5-5D39-407F-8BEA-743C4724670D}"/>
               </a:ext>
             </a:extLst>
           </p:cNvPr>
@@ -25218,7 +25216,7 @@
           <p:cNvPr id="9" name="">
             <a:extLst xmlns:a="http://schemas.openxmlformats.org/drawingml/2006/main">
               <a:ext uri="{FF2B5EF4-FFF2-40B4-BE49-F238E27FC236}">
-                <a16:creationId xmlns:a16="http://schemas.microsoft.com/office/drawing/2014/main" id="{85B0C2C0-4396-425F-9346-11EB05B5899A}"/>
+                <a16:creationId xmlns:a16="http://schemas.microsoft.com/office/drawing/2014/main" id="{B93AAAAB-F4AC-4B99-9C19-12B33025959E}"/>
               </a:ext>
             </a:extLst>
           </p:cNvPr>
@@ -25282,7 +25280,7 @@
           <p:cNvPr id="10" name="">
             <a:extLst xmlns:a="http://schemas.openxmlformats.org/drawingml/2006/main">
               <a:ext uri="{FF2B5EF4-FFF2-40B4-BE49-F238E27FC236}">
-                <a16:creationId xmlns:a16="http://schemas.microsoft.com/office/drawing/2014/main" id="{8022A3F3-6288-4167-BF56-4659FEB9075D}"/>
+                <a16:creationId xmlns:a16="http://schemas.microsoft.com/office/drawing/2014/main" id="{A7ED1712-709A-4208-A646-6205A5E17629}"/>
               </a:ext>
             </a:extLst>
           </p:cNvPr>
@@ -25346,7 +25344,7 @@
           <p:cNvPr id="11" name="">
             <a:extLst xmlns:a="http://schemas.openxmlformats.org/drawingml/2006/main">
               <a:ext uri="{FF2B5EF4-FFF2-40B4-BE49-F238E27FC236}">
-                <a16:creationId xmlns:a16="http://schemas.microsoft.com/office/drawing/2014/main" id="{0276674B-F807-47C0-8899-2950EC0B90BF}"/>
+                <a16:creationId xmlns:a16="http://schemas.microsoft.com/office/drawing/2014/main" id="{5AFAED31-AA9A-46F2-A658-6E4A7D35B572}"/>
               </a:ext>
             </a:extLst>
           </p:cNvPr>
@@ -25410,7 +25408,7 @@
           <p:cNvPr id="12" name="">
             <a:extLst xmlns:a="http://schemas.openxmlformats.org/drawingml/2006/main">
               <a:ext uri="{FF2B5EF4-FFF2-40B4-BE49-F238E27FC236}">
-                <a16:creationId xmlns:a16="http://schemas.microsoft.com/office/drawing/2014/main" id="{0C90F9D9-4C48-4A9D-A304-78C90F448207}"/>
+                <a16:creationId xmlns:a16="http://schemas.microsoft.com/office/drawing/2014/main" id="{8DC0F806-A499-4973-BD4E-463AAD4950FC}"/>
               </a:ext>
             </a:extLst>
           </p:cNvPr>
@@ -25445,7 +25443,7 @@
           <p:cNvPr id="13" name="">
             <a:extLst xmlns:a="http://schemas.openxmlformats.org/drawingml/2006/main">
               <a:ext uri="{FF2B5EF4-FFF2-40B4-BE49-F238E27FC236}">
-                <a16:creationId xmlns:a16="http://schemas.microsoft.com/office/drawing/2014/main" id="{544E7F4F-58D0-480E-8F63-EFBAC1BE298A}"/>
+                <a16:creationId xmlns:a16="http://schemas.microsoft.com/office/drawing/2014/main" id="{C6273806-3765-43B3-AA6E-8EECC01CDBB7}"/>
               </a:ext>
             </a:extLst>
           </p:cNvPr>
@@ -25478,7 +25476,7 @@
           <p:cNvPr id="14" name="">
             <a:extLst xmlns:a="http://schemas.openxmlformats.org/drawingml/2006/main">
               <a:ext uri="{FF2B5EF4-FFF2-40B4-BE49-F238E27FC236}">
-                <a16:creationId xmlns:a16="http://schemas.microsoft.com/office/drawing/2014/main" id="{0295F912-0F7E-4E7D-90E8-0A8887FADD32}"/>
+                <a16:creationId xmlns:a16="http://schemas.microsoft.com/office/drawing/2014/main" id="{8C032D8D-0BD8-456C-BC73-0A875F07F2BA}"/>
               </a:ext>
             </a:extLst>
           </p:cNvPr>
@@ -25513,7 +25511,7 @@
           <p:cNvPr id="15" name="">
             <a:extLst xmlns:a="http://schemas.openxmlformats.org/drawingml/2006/main">
               <a:ext uri="{FF2B5EF4-FFF2-40B4-BE49-F238E27FC236}">
-                <a16:creationId xmlns:a16="http://schemas.microsoft.com/office/drawing/2014/main" id="{39AE9415-FE30-466E-9B13-B7212F143B87}"/>
+                <a16:creationId xmlns:a16="http://schemas.microsoft.com/office/drawing/2014/main" id="{3135531D-8CC5-4D53-A562-781906A70099}"/>
               </a:ext>
             </a:extLst>
           </p:cNvPr>
@@ -25577,7 +25575,7 @@
           <p:cNvPr id="16" name="">
             <a:extLst xmlns:a="http://schemas.openxmlformats.org/drawingml/2006/main">
               <a:ext uri="{FF2B5EF4-FFF2-40B4-BE49-F238E27FC236}">
-                <a16:creationId xmlns:a16="http://schemas.microsoft.com/office/drawing/2014/main" id="{BA97AD9C-24F6-455A-95EA-221C1018EAE2}"/>
+                <a16:creationId xmlns:a16="http://schemas.microsoft.com/office/drawing/2014/main" id="{675B895C-1FD3-4306-BB5C-433ED1FC9172}"/>
               </a:ext>
             </a:extLst>
           </p:cNvPr>
@@ -25612,7 +25610,7 @@
           <p:cNvPr id="17" name="">
             <a:extLst xmlns:a="http://schemas.openxmlformats.org/drawingml/2006/main">
               <a:ext uri="{FF2B5EF4-FFF2-40B4-BE49-F238E27FC236}">
-                <a16:creationId xmlns:a16="http://schemas.microsoft.com/office/drawing/2014/main" id="{1A10E66B-A480-4330-88F2-29BF042C4F75}"/>
+                <a16:creationId xmlns:a16="http://schemas.microsoft.com/office/drawing/2014/main" id="{0C7B3937-3729-4FA4-A94B-3CD1F7949687}"/>
               </a:ext>
             </a:extLst>
           </p:cNvPr>
@@ -25676,7 +25674,7 @@
           <p:cNvPr id="18" name="">
             <a:extLst xmlns:a="http://schemas.openxmlformats.org/drawingml/2006/main">
               <a:ext uri="{FF2B5EF4-FFF2-40B4-BE49-F238E27FC236}">
-                <a16:creationId xmlns:a16="http://schemas.microsoft.com/office/drawing/2014/main" id="{9DEF3496-06F0-4F21-8F29-49AEB53D72C7}"/>
+                <a16:creationId xmlns:a16="http://schemas.microsoft.com/office/drawing/2014/main" id="{ABC2876E-765F-4B8C-8271-DBCFA5CADE05}"/>
               </a:ext>
             </a:extLst>
           </p:cNvPr>
@@ -25711,7 +25709,7 @@
           <p:cNvPr id="19" name="">
             <a:extLst xmlns:a="http://schemas.openxmlformats.org/drawingml/2006/main">
               <a:ext uri="{FF2B5EF4-FFF2-40B4-BE49-F238E27FC236}">
-                <a16:creationId xmlns:a16="http://schemas.microsoft.com/office/drawing/2014/main" id="{F38D8E52-2695-4262-9170-0F9CADFB6C8F}"/>
+                <a16:creationId xmlns:a16="http://schemas.microsoft.com/office/drawing/2014/main" id="{0B24B44F-18F5-47B7-B08D-4E359A76880A}"/>
               </a:ext>
             </a:extLst>
           </p:cNvPr>
@@ -25775,7 +25773,7 @@
           <p:cNvPr id="20" name="">
             <a:extLst xmlns:a="http://schemas.openxmlformats.org/drawingml/2006/main">
               <a:ext uri="{FF2B5EF4-FFF2-40B4-BE49-F238E27FC236}">
-                <a16:creationId xmlns:a16="http://schemas.microsoft.com/office/drawing/2014/main" id="{7B939E89-85E3-473B-97FA-3A7E1FAE2EDF}"/>
+                <a16:creationId xmlns:a16="http://schemas.microsoft.com/office/drawing/2014/main" id="{49B79606-5F75-486D-98C0-BF780F53DC53}"/>
               </a:ext>
             </a:extLst>
           </p:cNvPr>
@@ -25810,7 +25808,7 @@
           <p:cNvPr id="21" name="">
             <a:extLst xmlns:a="http://schemas.openxmlformats.org/drawingml/2006/main">
               <a:ext uri="{FF2B5EF4-FFF2-40B4-BE49-F238E27FC236}">
-                <a16:creationId xmlns:a16="http://schemas.microsoft.com/office/drawing/2014/main" id="{11736331-C92C-49CC-BA0F-6594FD0AB608}"/>
+                <a16:creationId xmlns:a16="http://schemas.microsoft.com/office/drawing/2014/main" id="{BA6DE67D-5A47-4FB7-A2BC-515C36A633C7}"/>
               </a:ext>
             </a:extLst>
           </p:cNvPr>
@@ -25874,7 +25872,7 @@
           <p:cNvPr id="22" name="">
             <a:extLst xmlns:a="http://schemas.openxmlformats.org/drawingml/2006/main">
               <a:ext uri="{FF2B5EF4-FFF2-40B4-BE49-F238E27FC236}">
-                <a16:creationId xmlns:a16="http://schemas.microsoft.com/office/drawing/2014/main" id="{8CB227B1-DF05-4878-90F3-861D3CC214F8}"/>
+                <a16:creationId xmlns:a16="http://schemas.microsoft.com/office/drawing/2014/main" id="{520D4A47-20AD-409B-AF86-BBAED504CC3E}"/>
               </a:ext>
             </a:extLst>
           </p:cNvPr>
@@ -25909,7 +25907,7 @@
           <p:cNvPr id="23" name="">
             <a:extLst xmlns:a="http://schemas.openxmlformats.org/drawingml/2006/main">
               <a:ext uri="{FF2B5EF4-FFF2-40B4-BE49-F238E27FC236}">
-                <a16:creationId xmlns:a16="http://schemas.microsoft.com/office/drawing/2014/main" id="{514D2432-BDB2-4A8C-903D-F923080BA3F0}"/>
+                <a16:creationId xmlns:a16="http://schemas.microsoft.com/office/drawing/2014/main" id="{1AAD1C6F-5D6C-4BDD-BA59-A49A082EA754}"/>
               </a:ext>
             </a:extLst>
           </p:cNvPr>
@@ -25973,7 +25971,7 @@
           <p:cNvPr id="24" name="">
             <a:extLst xmlns:a="http://schemas.openxmlformats.org/drawingml/2006/main">
               <a:ext uri="{FF2B5EF4-FFF2-40B4-BE49-F238E27FC236}">
-                <a16:creationId xmlns:a16="http://schemas.microsoft.com/office/drawing/2014/main" id="{8B109D01-3B23-408C-A2A7-7FEF68DAD8A3}"/>
+                <a16:creationId xmlns:a16="http://schemas.microsoft.com/office/drawing/2014/main" id="{C05EA108-570F-4093-8666-17FFCAC5BD0C}"/>
               </a:ext>
             </a:extLst>
           </p:cNvPr>
@@ -26008,7 +26006,7 @@
           <p:cNvPr id="25" name="">
             <a:extLst xmlns:a="http://schemas.openxmlformats.org/drawingml/2006/main">
               <a:ext uri="{FF2B5EF4-FFF2-40B4-BE49-F238E27FC236}">
-                <a16:creationId xmlns:a16="http://schemas.microsoft.com/office/drawing/2014/main" id="{0CFE7CE0-B26D-4219-A351-7BF8C2EA2DFC}"/>
+                <a16:creationId xmlns:a16="http://schemas.microsoft.com/office/drawing/2014/main" id="{D79F2363-F541-464D-87A7-9FCC63CC518A}"/>
               </a:ext>
             </a:extLst>
           </p:cNvPr>
@@ -26072,7 +26070,7 @@
           <p:cNvPr id="26" name="">
             <a:extLst xmlns:a="http://schemas.openxmlformats.org/drawingml/2006/main">
               <a:ext uri="{FF2B5EF4-FFF2-40B4-BE49-F238E27FC236}">
-                <a16:creationId xmlns:a16="http://schemas.microsoft.com/office/drawing/2014/main" id="{E5FFB6D5-2131-42A9-A554-D8E28FCC784E}"/>
+                <a16:creationId xmlns:a16="http://schemas.microsoft.com/office/drawing/2014/main" id="{A3604AC7-2F31-4E5D-9497-6FE14A1DF516}"/>
               </a:ext>
             </a:extLst>
           </p:cNvPr>
@@ -26136,7 +26134,7 @@
           <p:cNvPr id="27" name="">
             <a:extLst xmlns:a="http://schemas.openxmlformats.org/drawingml/2006/main">
               <a:ext uri="{FF2B5EF4-FFF2-40B4-BE49-F238E27FC236}">
-                <a16:creationId xmlns:a16="http://schemas.microsoft.com/office/drawing/2014/main" id="{8D23D9DF-A749-47C5-A17E-44E1D5AA116C}"/>
+                <a16:creationId xmlns:a16="http://schemas.microsoft.com/office/drawing/2014/main" id="{4F6E9601-4216-4AA3-9E74-59C94EBA74CC}"/>
               </a:ext>
             </a:extLst>
           </p:cNvPr>
@@ -26200,7 +26198,7 @@
           <p:cNvPr id="28" name="">
             <a:extLst xmlns:a="http://schemas.openxmlformats.org/drawingml/2006/main">
               <a:ext uri="{FF2B5EF4-FFF2-40B4-BE49-F238E27FC236}">
-                <a16:creationId xmlns:a16="http://schemas.microsoft.com/office/drawing/2014/main" id="{BF65C121-9154-4961-86E7-41DE6199CA18}"/>
+                <a16:creationId xmlns:a16="http://schemas.microsoft.com/office/drawing/2014/main" id="{5E6F9B45-9D7F-4049-8B99-94792E3FA23C}"/>
               </a:ext>
             </a:extLst>
           </p:cNvPr>
@@ -26235,7 +26233,7 @@
           <p:cNvPr id="29" name="">
             <a:extLst xmlns:a="http://schemas.openxmlformats.org/drawingml/2006/main">
               <a:ext uri="{FF2B5EF4-FFF2-40B4-BE49-F238E27FC236}">
-                <a16:creationId xmlns:a16="http://schemas.microsoft.com/office/drawing/2014/main" id="{11B5C786-E8F7-4F6F-BD6B-5A14FBC7DCDE}"/>
+                <a16:creationId xmlns:a16="http://schemas.microsoft.com/office/drawing/2014/main" id="{DF55FECD-2E31-4649-8284-D8A6AE6F39ED}"/>
               </a:ext>
             </a:extLst>
           </p:cNvPr>
@@ -26270,7 +26268,7 @@
           <p:cNvPr id="30" name="">
             <a:extLst xmlns:a="http://schemas.openxmlformats.org/drawingml/2006/main">
               <a:ext uri="{FF2B5EF4-FFF2-40B4-BE49-F238E27FC236}">
-                <a16:creationId xmlns:a16="http://schemas.microsoft.com/office/drawing/2014/main" id="{744CC0AA-84E4-4EA4-AA3B-82D125019B4C}"/>
+                <a16:creationId xmlns:a16="http://schemas.microsoft.com/office/drawing/2014/main" id="{5DE683C8-2BBE-4E2F-B4BF-D991526B137C}"/>
               </a:ext>
             </a:extLst>
           </p:cNvPr>
@@ -26305,7 +26303,7 @@
           <p:cNvPr id="31" name="kicker-01-marker">
             <a:extLst xmlns:a="http://schemas.openxmlformats.org/drawingml/2006/main">
               <a:ext uri="{FF2B5EF4-FFF2-40B4-BE49-F238E27FC236}">
-                <a16:creationId xmlns:a16="http://schemas.microsoft.com/office/drawing/2014/main" id="{54B4AFCC-B529-4C28-9270-F009DF2E0E30}"/>
+                <a16:creationId xmlns:a16="http://schemas.microsoft.com/office/drawing/2014/main" id="{BA3E6990-09F7-436D-9EC2-B09BBA62974D}"/>
               </a:ext>
             </a:extLst>
           </p:cNvPr>
@@ -26340,7 +26338,7 @@
           <p:cNvPr id="32" name="kicker-01-label">
             <a:extLst xmlns:a="http://schemas.openxmlformats.org/drawingml/2006/main">
               <a:ext uri="{FF2B5EF4-FFF2-40B4-BE49-F238E27FC236}">
-                <a16:creationId xmlns:a16="http://schemas.microsoft.com/office/drawing/2014/main" id="{9AFBB950-8990-47A7-9283-FF086F7A8883}"/>
+                <a16:creationId xmlns:a16="http://schemas.microsoft.com/office/drawing/2014/main" id="{D09D6D56-BDFF-4BB6-8422-0DBAEF553221}"/>
               </a:ext>
             </a:extLst>
           </p:cNvPr>
@@ -26404,7 +26402,7 @@
           <p:cNvPr id="33" name="">
             <a:extLst xmlns:a="http://schemas.openxmlformats.org/drawingml/2006/main">
               <a:ext uri="{FF2B5EF4-FFF2-40B4-BE49-F238E27FC236}">
-                <a16:creationId xmlns:a16="http://schemas.microsoft.com/office/drawing/2014/main" id="{3A7C46BE-1F37-4367-8FB5-9D47F6A2EEAB}"/>
+                <a16:creationId xmlns:a16="http://schemas.microsoft.com/office/drawing/2014/main" id="{2CD22ED4-5D4B-47A3-B543-61AD2C332530}"/>
               </a:ext>
             </a:extLst>
           </p:cNvPr>
@@ -26468,7 +26466,7 @@
           <p:cNvPr id="34" name="">
             <a:extLst xmlns:a="http://schemas.openxmlformats.org/drawingml/2006/main">
               <a:ext uri="{FF2B5EF4-FFF2-40B4-BE49-F238E27FC236}">
-                <a16:creationId xmlns:a16="http://schemas.microsoft.com/office/drawing/2014/main" id="{B6E01C09-6183-4441-BA93-294029FA217E}"/>
+                <a16:creationId xmlns:a16="http://schemas.microsoft.com/office/drawing/2014/main" id="{0551B71F-5E40-4A08-A732-88313C94F2ED}"/>
               </a:ext>
             </a:extLst>
           </p:cNvPr>
@@ -26532,7 +26530,7 @@
           <p:cNvPr id="35" name="">
             <a:extLst xmlns:a="http://schemas.openxmlformats.org/drawingml/2006/main">
               <a:ext uri="{FF2B5EF4-FFF2-40B4-BE49-F238E27FC236}">
-                <a16:creationId xmlns:a16="http://schemas.microsoft.com/office/drawing/2014/main" id="{915AD23C-CBE0-411E-B084-C8E162C7ECDE}"/>
+                <a16:creationId xmlns:a16="http://schemas.microsoft.com/office/drawing/2014/main" id="{18AF80F6-7654-4F50-888A-5FAA45A8A578}"/>
               </a:ext>
             </a:extLst>
           </p:cNvPr>
@@ -26567,7 +26565,7 @@
           <p:cNvPr id="36" name="">
             <a:extLst xmlns:a="http://schemas.openxmlformats.org/drawingml/2006/main">
               <a:ext uri="{FF2B5EF4-FFF2-40B4-BE49-F238E27FC236}">
-                <a16:creationId xmlns:a16="http://schemas.microsoft.com/office/drawing/2014/main" id="{43DD0986-B2BC-4D86-A748-3AD338ED8209}"/>
+                <a16:creationId xmlns:a16="http://schemas.microsoft.com/office/drawing/2014/main" id="{4E12C372-23F5-4CAD-B21F-3E5EB9AF1377}"/>
               </a:ext>
             </a:extLst>
           </p:cNvPr>
@@ -26602,7 +26600,7 @@
           <p:cNvPr id="37" name="">
             <a:extLst xmlns:a="http://schemas.openxmlformats.org/drawingml/2006/main">
               <a:ext uri="{FF2B5EF4-FFF2-40B4-BE49-F238E27FC236}">
-                <a16:creationId xmlns:a16="http://schemas.microsoft.com/office/drawing/2014/main" id="{E4AF243B-C51F-4058-92B5-AA948EE61830}"/>
+                <a16:creationId xmlns:a16="http://schemas.microsoft.com/office/drawing/2014/main" id="{0C16ADD7-F0E9-42D9-8CE6-4E1D8D28B4EA}"/>
               </a:ext>
             </a:extLst>
           </p:cNvPr>
@@ -26637,7 +26635,7 @@
           <p:cNvPr id="38" name="">
             <a:extLst xmlns:a="http://schemas.openxmlformats.org/drawingml/2006/main">
               <a:ext uri="{FF2B5EF4-FFF2-40B4-BE49-F238E27FC236}">
-                <a16:creationId xmlns:a16="http://schemas.microsoft.com/office/drawing/2014/main" id="{BAD610E5-5B20-43B7-898B-1A84E5802CC3}"/>
+                <a16:creationId xmlns:a16="http://schemas.microsoft.com/office/drawing/2014/main" id="{4DB1B201-4531-4EAF-847D-9334B0D47824}"/>
               </a:ext>
             </a:extLst>
           </p:cNvPr>
@@ -26672,7 +26670,7 @@
           <p:cNvPr id="39" name="">
             <a:extLst xmlns:a="http://schemas.openxmlformats.org/drawingml/2006/main">
               <a:ext uri="{FF2B5EF4-FFF2-40B4-BE49-F238E27FC236}">
-                <a16:creationId xmlns:a16="http://schemas.microsoft.com/office/drawing/2014/main" id="{30C2DA29-5686-49C1-A72C-CAD49A3848B4}"/>
+                <a16:creationId xmlns:a16="http://schemas.microsoft.com/office/drawing/2014/main" id="{3EF7BE70-5443-48C9-BA0F-39C03A731CC1}"/>
               </a:ext>
             </a:extLst>
           </p:cNvPr>
@@ -26736,7 +26734,7 @@
           <p:cNvPr id="40" name="">
             <a:extLst xmlns:a="http://schemas.openxmlformats.org/drawingml/2006/main">
               <a:ext uri="{FF2B5EF4-FFF2-40B4-BE49-F238E27FC236}">
-                <a16:creationId xmlns:a16="http://schemas.microsoft.com/office/drawing/2014/main" id="{CFFD2955-461F-4206-A587-EB5FE5FECF8E}"/>
+                <a16:creationId xmlns:a16="http://schemas.microsoft.com/office/drawing/2014/main" id="{F593C0D7-B26E-421F-9FD7-A58AA68EB593}"/>
               </a:ext>
             </a:extLst>
           </p:cNvPr>
@@ -26800,7 +26798,7 @@
           <p:cNvPr id="41" name="">
             <a:extLst xmlns:a="http://schemas.openxmlformats.org/drawingml/2006/main">
               <a:ext uri="{FF2B5EF4-FFF2-40B4-BE49-F238E27FC236}">
-                <a16:creationId xmlns:a16="http://schemas.microsoft.com/office/drawing/2014/main" id="{1C713923-F55F-4E6B-843B-3D93EA1E4FCC}"/>
+                <a16:creationId xmlns:a16="http://schemas.microsoft.com/office/drawing/2014/main" id="{93CC0DD3-488C-46CC-BADC-1F1A7A8888BD}"/>
               </a:ext>
             </a:extLst>
           </p:cNvPr>
@@ -26862,7 +26860,7 @@
     </p:spTree>
     <p:extLst>
       <p:ext uri="{BB962C8B-B14F-4D97-AF65-F5344CB8AC3E}">
-        <p14:creationId xmlns:p14="http://schemas.microsoft.com/office/powerpoint/2010/main" val="1982587497"/>
+        <p14:creationId xmlns:p14="http://schemas.microsoft.com/office/powerpoint/2010/main" val="1185662237"/>
       </p:ext>
     </p:extLst>
   </p:cSld>
@@ -26886,7 +26884,7 @@
           <p:cNvPr id="1" name="">
             <a:extLst xmlns:a="http://schemas.openxmlformats.org/drawingml/2006/main">
               <a:ext uri="{FF2B5EF4-FFF2-40B4-BE49-F238E27FC236}">
-                <a16:creationId xmlns:a16="http://schemas.microsoft.com/office/drawing/2014/main" id="{0523B913-FDC6-4CC9-B117-FD79B9B523F3}"/>
+                <a16:creationId xmlns:a16="http://schemas.microsoft.com/office/drawing/2014/main" id="{43A02084-E05D-43D8-8064-9A34BC0410DD}"/>
               </a:ext>
             </a:extLst>
           </p:cNvPr>
@@ -26921,7 +26919,7 @@
           <p:cNvPr id="2" name="">
             <a:extLst xmlns:a="http://schemas.openxmlformats.org/drawingml/2006/main">
               <a:ext uri="{FF2B5EF4-FFF2-40B4-BE49-F238E27FC236}">
-                <a16:creationId xmlns:a16="http://schemas.microsoft.com/office/drawing/2014/main" id="{B32AE949-0894-43D3-8BB5-690F67F7EF50}"/>
+                <a16:creationId xmlns:a16="http://schemas.microsoft.com/office/drawing/2014/main" id="{E4FE1E7C-04B8-467F-B177-E66F101DE16F}"/>
               </a:ext>
             </a:extLst>
           </p:cNvPr>
@@ -26956,7 +26954,7 @@
           <p:cNvPr id="3" name="">
             <a:extLst xmlns:a="http://schemas.openxmlformats.org/drawingml/2006/main">
               <a:ext uri="{FF2B5EF4-FFF2-40B4-BE49-F238E27FC236}">
-                <a16:creationId xmlns:a16="http://schemas.microsoft.com/office/drawing/2014/main" id="{73EDEF10-877A-4932-9FEC-662BD84C4FFC}"/>
+                <a16:creationId xmlns:a16="http://schemas.microsoft.com/office/drawing/2014/main" id="{8900CBDC-F5F2-476A-B0B4-01C2867BFBC0}"/>
               </a:ext>
             </a:extLst>
           </p:cNvPr>
@@ -26991,7 +26989,7 @@
           <p:cNvPr id="4" name="kicker-01-marker">
             <a:extLst xmlns:a="http://schemas.openxmlformats.org/drawingml/2006/main">
               <a:ext uri="{FF2B5EF4-FFF2-40B4-BE49-F238E27FC236}">
-                <a16:creationId xmlns:a16="http://schemas.microsoft.com/office/drawing/2014/main" id="{DA74D071-D192-4FA1-82F0-D42CC50FB547}"/>
+                <a16:creationId xmlns:a16="http://schemas.microsoft.com/office/drawing/2014/main" id="{A46FE549-D69F-414C-919E-38D27C1EAE93}"/>
               </a:ext>
             </a:extLst>
           </p:cNvPr>
@@ -27026,7 +27024,7 @@
           <p:cNvPr id="5" name="kicker-01-label">
             <a:extLst xmlns:a="http://schemas.openxmlformats.org/drawingml/2006/main">
               <a:ext uri="{FF2B5EF4-FFF2-40B4-BE49-F238E27FC236}">
-                <a16:creationId xmlns:a16="http://schemas.microsoft.com/office/drawing/2014/main" id="{75254938-B1A4-4542-82E4-4E7F0F2BB41E}"/>
+                <a16:creationId xmlns:a16="http://schemas.microsoft.com/office/drawing/2014/main" id="{50769BB3-2834-422C-9D04-A9B4BD4FD133}"/>
               </a:ext>
             </a:extLst>
           </p:cNvPr>
@@ -27090,7 +27088,7 @@
           <p:cNvPr id="6" name="">
             <a:extLst xmlns:a="http://schemas.openxmlformats.org/drawingml/2006/main">
               <a:ext uri="{FF2B5EF4-FFF2-40B4-BE49-F238E27FC236}">
-                <a16:creationId xmlns:a16="http://schemas.microsoft.com/office/drawing/2014/main" id="{51EC3C8D-5361-4ADF-956E-575D81883B0D}"/>
+                <a16:creationId xmlns:a16="http://schemas.microsoft.com/office/drawing/2014/main" id="{A384AD95-89E3-4B04-83C7-DC4AB5C99675}"/>
               </a:ext>
             </a:extLst>
           </p:cNvPr>
@@ -27154,7 +27152,7 @@
           <p:cNvPr id="7" name="">
             <a:extLst xmlns:a="http://schemas.openxmlformats.org/drawingml/2006/main">
               <a:ext uri="{FF2B5EF4-FFF2-40B4-BE49-F238E27FC236}">
-                <a16:creationId xmlns:a16="http://schemas.microsoft.com/office/drawing/2014/main" id="{6B068018-008F-4437-AF38-49B2AED79107}"/>
+                <a16:creationId xmlns:a16="http://schemas.microsoft.com/office/drawing/2014/main" id="{3F13C2DB-2A26-445D-A76C-0C22B0A7640E}"/>
               </a:ext>
             </a:extLst>
           </p:cNvPr>
@@ -27218,7 +27216,7 @@
           <p:cNvPr id="8" name="">
             <a:extLst xmlns:a="http://schemas.openxmlformats.org/drawingml/2006/main">
               <a:ext uri="{FF2B5EF4-FFF2-40B4-BE49-F238E27FC236}">
-                <a16:creationId xmlns:a16="http://schemas.microsoft.com/office/drawing/2014/main" id="{9B2031BA-5C5E-4E51-845F-086B814F09E9}"/>
+                <a16:creationId xmlns:a16="http://schemas.microsoft.com/office/drawing/2014/main" id="{CC84549D-FD90-4706-9142-B1953362D7A9}"/>
               </a:ext>
             </a:extLst>
           </p:cNvPr>
@@ -27253,7 +27251,7 @@
           <p:cNvPr id="9" name="">
             <a:extLst xmlns:a="http://schemas.openxmlformats.org/drawingml/2006/main">
               <a:ext uri="{FF2B5EF4-FFF2-40B4-BE49-F238E27FC236}">
-                <a16:creationId xmlns:a16="http://schemas.microsoft.com/office/drawing/2014/main" id="{5F13ECB4-F673-4895-A736-6FE715AB0ABA}"/>
+                <a16:creationId xmlns:a16="http://schemas.microsoft.com/office/drawing/2014/main" id="{A0E5A7D6-F783-442E-A9A6-2F18B7200605}"/>
               </a:ext>
             </a:extLst>
           </p:cNvPr>
@@ -27317,7 +27315,7 @@
           <p:cNvPr id="10" name="">
             <a:extLst xmlns:a="http://schemas.openxmlformats.org/drawingml/2006/main">
               <a:ext uri="{FF2B5EF4-FFF2-40B4-BE49-F238E27FC236}">
-                <a16:creationId xmlns:a16="http://schemas.microsoft.com/office/drawing/2014/main" id="{1C6E4ECD-E137-4AA7-BCC8-D1102DBECF64}"/>
+                <a16:creationId xmlns:a16="http://schemas.microsoft.com/office/drawing/2014/main" id="{04DB5AC3-1A8B-423C-94CB-C6FCEED445D1}"/>
               </a:ext>
             </a:extLst>
           </p:cNvPr>
@@ -27381,7 +27379,7 @@
           <p:cNvPr id="11" name="">
             <a:extLst xmlns:a="http://schemas.openxmlformats.org/drawingml/2006/main">
               <a:ext uri="{FF2B5EF4-FFF2-40B4-BE49-F238E27FC236}">
-                <a16:creationId xmlns:a16="http://schemas.microsoft.com/office/drawing/2014/main" id="{7ECEB616-6722-45D7-9728-2DBC91153A13}"/>
+                <a16:creationId xmlns:a16="http://schemas.microsoft.com/office/drawing/2014/main" id="{B073DBA6-B527-4DAC-81F9-48BB52BB638B}"/>
               </a:ext>
             </a:extLst>
           </p:cNvPr>
@@ -27445,7 +27443,7 @@
           <p:cNvPr id="12" name="">
             <a:extLst xmlns:a="http://schemas.openxmlformats.org/drawingml/2006/main">
               <a:ext uri="{FF2B5EF4-FFF2-40B4-BE49-F238E27FC236}">
-                <a16:creationId xmlns:a16="http://schemas.microsoft.com/office/drawing/2014/main" id="{F7D1460D-012B-4CAF-9587-9FF0F8F51ACA}"/>
+                <a16:creationId xmlns:a16="http://schemas.microsoft.com/office/drawing/2014/main" id="{B16EB55C-8EEF-4CBF-BFC4-C851BFD00838}"/>
               </a:ext>
             </a:extLst>
           </p:cNvPr>
@@ -27478,7 +27476,7 @@
           <p:cNvPr id="13" name="">
             <a:extLst xmlns:a="http://schemas.openxmlformats.org/drawingml/2006/main">
               <a:ext uri="{FF2B5EF4-FFF2-40B4-BE49-F238E27FC236}">
-                <a16:creationId xmlns:a16="http://schemas.microsoft.com/office/drawing/2014/main" id="{7A003856-6D31-49EF-8ED9-439F9DAF0C84}"/>
+                <a16:creationId xmlns:a16="http://schemas.microsoft.com/office/drawing/2014/main" id="{C7B9F02A-0E74-4705-8147-3E93196179DD}"/>
               </a:ext>
             </a:extLst>
           </p:cNvPr>
@@ -27542,7 +27540,7 @@
           <p:cNvPr id="14" name="">
             <a:extLst xmlns:a="http://schemas.openxmlformats.org/drawingml/2006/main">
               <a:ext uri="{FF2B5EF4-FFF2-40B4-BE49-F238E27FC236}">
-                <a16:creationId xmlns:a16="http://schemas.microsoft.com/office/drawing/2014/main" id="{C502516E-0290-43D4-8B6F-4BDCF7CD3F01}"/>
+                <a16:creationId xmlns:a16="http://schemas.microsoft.com/office/drawing/2014/main" id="{B033A838-20CC-48FA-93F8-3D55E75894D6}"/>
               </a:ext>
             </a:extLst>
           </p:cNvPr>
@@ -27577,7 +27575,7 @@
           <p:cNvPr id="15" name="">
             <a:extLst xmlns:a="http://schemas.openxmlformats.org/drawingml/2006/main">
               <a:ext uri="{FF2B5EF4-FFF2-40B4-BE49-F238E27FC236}">
-                <a16:creationId xmlns:a16="http://schemas.microsoft.com/office/drawing/2014/main" id="{74B36CB7-E7E3-476C-9360-044B0483D60D}"/>
+                <a16:creationId xmlns:a16="http://schemas.microsoft.com/office/drawing/2014/main" id="{CA8A776A-B5B2-4125-BAF1-CE6AFEB064AB}"/>
               </a:ext>
             </a:extLst>
           </p:cNvPr>
@@ -27631,7 +27629,7 @@
                 <a:ea typeface="Aptos"/>
                 <a:cs typeface="Aptos"/>
               </a:rPr>
-              <a:t>PROMPT STACK</a:t>
+              <a:t>QUESTION STACK</a:t>
             </a:r>
           </a:p>
         </p:txBody>
@@ -27641,7 +27639,7 @@
           <p:cNvPr id="16" name="">
             <a:extLst xmlns:a="http://schemas.openxmlformats.org/drawingml/2006/main">
               <a:ext uri="{FF2B5EF4-FFF2-40B4-BE49-F238E27FC236}">
-                <a16:creationId xmlns:a16="http://schemas.microsoft.com/office/drawing/2014/main" id="{C96C5C52-78A6-476D-B0BF-252AA6B86BE2}"/>
+                <a16:creationId xmlns:a16="http://schemas.microsoft.com/office/drawing/2014/main" id="{246C7943-C464-4FD2-84E9-9C780327FBCC}"/>
               </a:ext>
             </a:extLst>
           </p:cNvPr>
@@ -27676,7 +27674,7 @@
           <p:cNvPr id="17" name="">
             <a:extLst xmlns:a="http://schemas.openxmlformats.org/drawingml/2006/main">
               <a:ext uri="{FF2B5EF4-FFF2-40B4-BE49-F238E27FC236}">
-                <a16:creationId xmlns:a16="http://schemas.microsoft.com/office/drawing/2014/main" id="{EECEE9FB-D63B-4E1D-A1AF-DE8820DB2B58}"/>
+                <a16:creationId xmlns:a16="http://schemas.microsoft.com/office/drawing/2014/main" id="{9B4875CA-2578-46CF-B01A-DE6E7B461B60}"/>
               </a:ext>
             </a:extLst>
           </p:cNvPr>
@@ -27740,7 +27738,7 @@
           <p:cNvPr id="18" name="">
             <a:extLst xmlns:a="http://schemas.openxmlformats.org/drawingml/2006/main">
               <a:ext uri="{FF2B5EF4-FFF2-40B4-BE49-F238E27FC236}">
-                <a16:creationId xmlns:a16="http://schemas.microsoft.com/office/drawing/2014/main" id="{E73057C0-807C-4DA7-847C-D2ED6F4AC19B}"/>
+                <a16:creationId xmlns:a16="http://schemas.microsoft.com/office/drawing/2014/main" id="{69E75511-D7FC-4996-86CD-6FEFAD7A9C0D}"/>
               </a:ext>
             </a:extLst>
           </p:cNvPr>
@@ -27775,7 +27773,7 @@
           <p:cNvPr id="19" name="">
             <a:extLst xmlns:a="http://schemas.openxmlformats.org/drawingml/2006/main">
               <a:ext uri="{FF2B5EF4-FFF2-40B4-BE49-F238E27FC236}">
-                <a16:creationId xmlns:a16="http://schemas.microsoft.com/office/drawing/2014/main" id="{C0D0E3D6-9C22-48B8-9970-9A60D778B50C}"/>
+                <a16:creationId xmlns:a16="http://schemas.microsoft.com/office/drawing/2014/main" id="{36A120C1-660E-41E0-B062-8AF3930A25F9}"/>
               </a:ext>
             </a:extLst>
           </p:cNvPr>
@@ -27839,7 +27837,7 @@
           <p:cNvPr id="20" name="">
             <a:extLst xmlns:a="http://schemas.openxmlformats.org/drawingml/2006/main">
               <a:ext uri="{FF2B5EF4-FFF2-40B4-BE49-F238E27FC236}">
-                <a16:creationId xmlns:a16="http://schemas.microsoft.com/office/drawing/2014/main" id="{AF305CE0-480F-4E93-8FA7-D191D1806536}"/>
+                <a16:creationId xmlns:a16="http://schemas.microsoft.com/office/drawing/2014/main" id="{26354139-C3B8-414F-8E02-2CF8C47F796C}"/>
               </a:ext>
             </a:extLst>
           </p:cNvPr>
@@ -27874,7 +27872,7 @@
           <p:cNvPr id="21" name="">
             <a:extLst xmlns:a="http://schemas.openxmlformats.org/drawingml/2006/main">
               <a:ext uri="{FF2B5EF4-FFF2-40B4-BE49-F238E27FC236}">
-                <a16:creationId xmlns:a16="http://schemas.microsoft.com/office/drawing/2014/main" id="{14CA204C-E63F-44B8-B188-FAAB2194AA31}"/>
+                <a16:creationId xmlns:a16="http://schemas.microsoft.com/office/drawing/2014/main" id="{E3DE17D2-FBFA-454B-A3C5-B2DF037903F9}"/>
               </a:ext>
             </a:extLst>
           </p:cNvPr>
@@ -27938,7 +27936,7 @@
           <p:cNvPr id="22" name="">
             <a:extLst xmlns:a="http://schemas.openxmlformats.org/drawingml/2006/main">
               <a:ext uri="{FF2B5EF4-FFF2-40B4-BE49-F238E27FC236}">
-                <a16:creationId xmlns:a16="http://schemas.microsoft.com/office/drawing/2014/main" id="{80679901-0487-4F08-AA3F-BAB3139C2E94}"/>
+                <a16:creationId xmlns:a16="http://schemas.microsoft.com/office/drawing/2014/main" id="{FC80BC1D-D536-4231-9449-C4906E5D707C}"/>
               </a:ext>
             </a:extLst>
           </p:cNvPr>
@@ -27973,7 +27971,7 @@
           <p:cNvPr id="23" name="">
             <a:extLst xmlns:a="http://schemas.openxmlformats.org/drawingml/2006/main">
               <a:ext uri="{FF2B5EF4-FFF2-40B4-BE49-F238E27FC236}">
-                <a16:creationId xmlns:a16="http://schemas.microsoft.com/office/drawing/2014/main" id="{5F7F83C4-51C5-43D2-BD61-B3DA5F0E2835}"/>
+                <a16:creationId xmlns:a16="http://schemas.microsoft.com/office/drawing/2014/main" id="{9FB45BB3-EA76-4893-82C1-970E9FA655F7}"/>
               </a:ext>
             </a:extLst>
           </p:cNvPr>
@@ -28037,7 +28035,7 @@
           <p:cNvPr id="24" name="">
             <a:extLst xmlns:a="http://schemas.openxmlformats.org/drawingml/2006/main">
               <a:ext uri="{FF2B5EF4-FFF2-40B4-BE49-F238E27FC236}">
-                <a16:creationId xmlns:a16="http://schemas.microsoft.com/office/drawing/2014/main" id="{562FA5BB-3F77-45AE-8F12-4E35E382B7DE}"/>
+                <a16:creationId xmlns:a16="http://schemas.microsoft.com/office/drawing/2014/main" id="{3C1A63DE-ACE4-4B2E-99A5-336DE4161588}"/>
               </a:ext>
             </a:extLst>
           </p:cNvPr>
@@ -28072,7 +28070,7 @@
           <p:cNvPr id="25" name="">
             <a:extLst xmlns:a="http://schemas.openxmlformats.org/drawingml/2006/main">
               <a:ext uri="{FF2B5EF4-FFF2-40B4-BE49-F238E27FC236}">
-                <a16:creationId xmlns:a16="http://schemas.microsoft.com/office/drawing/2014/main" id="{B7D314AC-6AEF-40E0-B34F-6011DF539B62}"/>
+                <a16:creationId xmlns:a16="http://schemas.microsoft.com/office/drawing/2014/main" id="{F9EE8C47-A88D-4EED-9063-9D7682997353}"/>
               </a:ext>
             </a:extLst>
           </p:cNvPr>
@@ -28136,7 +28134,7 @@
           <p:cNvPr id="26" name="">
             <a:extLst xmlns:a="http://schemas.openxmlformats.org/drawingml/2006/main">
               <a:ext uri="{FF2B5EF4-FFF2-40B4-BE49-F238E27FC236}">
-                <a16:creationId xmlns:a16="http://schemas.microsoft.com/office/drawing/2014/main" id="{91370BD6-A471-4B21-ABE3-ADCDD006E05D}"/>
+                <a16:creationId xmlns:a16="http://schemas.microsoft.com/office/drawing/2014/main" id="{CB691CAE-CDE4-406E-B7AC-41D2346CCCD3}"/>
               </a:ext>
             </a:extLst>
           </p:cNvPr>
@@ -28171,7 +28169,7 @@
           <p:cNvPr id="27" name="">
             <a:extLst xmlns:a="http://schemas.openxmlformats.org/drawingml/2006/main">
               <a:ext uri="{FF2B5EF4-FFF2-40B4-BE49-F238E27FC236}">
-                <a16:creationId xmlns:a16="http://schemas.microsoft.com/office/drawing/2014/main" id="{6A07E9D9-7F70-4BB6-866A-836943D57416}"/>
+                <a16:creationId xmlns:a16="http://schemas.microsoft.com/office/drawing/2014/main" id="{C8047A33-F332-42AD-B3C8-6BC0D1BAAE19}"/>
               </a:ext>
             </a:extLst>
           </p:cNvPr>
@@ -28235,7 +28233,7 @@
           <p:cNvPr id="28" name="">
             <a:extLst xmlns:a="http://schemas.openxmlformats.org/drawingml/2006/main">
               <a:ext uri="{FF2B5EF4-FFF2-40B4-BE49-F238E27FC236}">
-                <a16:creationId xmlns:a16="http://schemas.microsoft.com/office/drawing/2014/main" id="{D605D508-4BA0-4A20-B210-F276ED6ED478}"/>
+                <a16:creationId xmlns:a16="http://schemas.microsoft.com/office/drawing/2014/main" id="{E65C3E3F-5F47-4785-BF41-288063C32BF4}"/>
               </a:ext>
             </a:extLst>
           </p:cNvPr>
@@ -28299,7 +28297,7 @@
           <p:cNvPr id="29" name="">
             <a:extLst xmlns:a="http://schemas.openxmlformats.org/drawingml/2006/main">
               <a:ext uri="{FF2B5EF4-FFF2-40B4-BE49-F238E27FC236}">
-                <a16:creationId xmlns:a16="http://schemas.microsoft.com/office/drawing/2014/main" id="{55CD356D-A4AD-4096-B37A-9C0C6B6876B8}"/>
+                <a16:creationId xmlns:a16="http://schemas.microsoft.com/office/drawing/2014/main" id="{D480AED1-8E66-4154-8731-13DBE71998DD}"/>
               </a:ext>
             </a:extLst>
           </p:cNvPr>
@@ -28361,7 +28359,7 @@
     </p:spTree>
     <p:extLst>
       <p:ext uri="{BB962C8B-B14F-4D97-AF65-F5344CB8AC3E}">
-        <p14:creationId xmlns:p14="http://schemas.microsoft.com/office/powerpoint/2010/main" val="338754038"/>
+        <p14:creationId xmlns:p14="http://schemas.microsoft.com/office/powerpoint/2010/main" val="1050504066"/>
       </p:ext>
     </p:extLst>
   </p:cSld>
@@ -28385,7 +28383,7 @@
           <p:cNvPr id="1" name="">
             <a:extLst xmlns:a="http://schemas.openxmlformats.org/drawingml/2006/main">
               <a:ext uri="{FF2B5EF4-FFF2-40B4-BE49-F238E27FC236}">
-                <a16:creationId xmlns:a16="http://schemas.microsoft.com/office/drawing/2014/main" id="{52C58B40-C8E0-450F-B59D-D3FF98F4A7BE}"/>
+                <a16:creationId xmlns:a16="http://schemas.microsoft.com/office/drawing/2014/main" id="{003BA35C-B81E-4A9C-8321-2A495FE81EEB}"/>
               </a:ext>
             </a:extLst>
           </p:cNvPr>
@@ -28420,7 +28418,7 @@
           <p:cNvPr id="2" name="">
             <a:extLst xmlns:a="http://schemas.openxmlformats.org/drawingml/2006/main">
               <a:ext uri="{FF2B5EF4-FFF2-40B4-BE49-F238E27FC236}">
-                <a16:creationId xmlns:a16="http://schemas.microsoft.com/office/drawing/2014/main" id="{2AD03CA2-DF27-4F0F-86B4-106A1E32B338}"/>
+                <a16:creationId xmlns:a16="http://schemas.microsoft.com/office/drawing/2014/main" id="{B95FF0C5-DD13-4950-AFEA-C9915ADFEF5A}"/>
               </a:ext>
             </a:extLst>
           </p:cNvPr>
@@ -28455,7 +28453,7 @@
           <p:cNvPr id="3" name="">
             <a:extLst xmlns:a="http://schemas.openxmlformats.org/drawingml/2006/main">
               <a:ext uri="{FF2B5EF4-FFF2-40B4-BE49-F238E27FC236}">
-                <a16:creationId xmlns:a16="http://schemas.microsoft.com/office/drawing/2014/main" id="{8C002700-3D10-4F45-9F75-196CE16780BB}"/>
+                <a16:creationId xmlns:a16="http://schemas.microsoft.com/office/drawing/2014/main" id="{961A31DA-64E1-4A1E-9B4F-BDDCDDFAD2EE}"/>
               </a:ext>
             </a:extLst>
           </p:cNvPr>
@@ -28490,7 +28488,7 @@
           <p:cNvPr id="4" name="kicker-01-marker">
             <a:extLst xmlns:a="http://schemas.openxmlformats.org/drawingml/2006/main">
               <a:ext uri="{FF2B5EF4-FFF2-40B4-BE49-F238E27FC236}">
-                <a16:creationId xmlns:a16="http://schemas.microsoft.com/office/drawing/2014/main" id="{AB8EE0DF-0D67-4476-8208-87FF2E712358}"/>
+                <a16:creationId xmlns:a16="http://schemas.microsoft.com/office/drawing/2014/main" id="{2672723C-5E56-4B61-A525-4D7F949EA9C6}"/>
               </a:ext>
             </a:extLst>
           </p:cNvPr>
@@ -28525,7 +28523,7 @@
           <p:cNvPr id="5" name="kicker-01-label">
             <a:extLst xmlns:a="http://schemas.openxmlformats.org/drawingml/2006/main">
               <a:ext uri="{FF2B5EF4-FFF2-40B4-BE49-F238E27FC236}">
-                <a16:creationId xmlns:a16="http://schemas.microsoft.com/office/drawing/2014/main" id="{031F5A02-AFCE-4335-84DC-A0881B229094}"/>
+                <a16:creationId xmlns:a16="http://schemas.microsoft.com/office/drawing/2014/main" id="{CD68EFFD-8621-4718-BD4D-852E4034AE39}"/>
               </a:ext>
             </a:extLst>
           </p:cNvPr>
@@ -28589,7 +28587,7 @@
           <p:cNvPr id="6" name="">
             <a:extLst xmlns:a="http://schemas.openxmlformats.org/drawingml/2006/main">
               <a:ext uri="{FF2B5EF4-FFF2-40B4-BE49-F238E27FC236}">
-                <a16:creationId xmlns:a16="http://schemas.microsoft.com/office/drawing/2014/main" id="{E90E654B-7FF8-41B2-8213-3E4EB0E0A23A}"/>
+                <a16:creationId xmlns:a16="http://schemas.microsoft.com/office/drawing/2014/main" id="{B748D7EE-B713-4959-877B-851E89BAB67A}"/>
               </a:ext>
             </a:extLst>
           </p:cNvPr>
@@ -28653,7 +28651,7 @@
           <p:cNvPr id="7" name="">
             <a:extLst xmlns:a="http://schemas.openxmlformats.org/drawingml/2006/main">
               <a:ext uri="{FF2B5EF4-FFF2-40B4-BE49-F238E27FC236}">
-                <a16:creationId xmlns:a16="http://schemas.microsoft.com/office/drawing/2014/main" id="{7A32EA2E-4E7A-40EA-AA30-A999887D04D2}"/>
+                <a16:creationId xmlns:a16="http://schemas.microsoft.com/office/drawing/2014/main" id="{ACA2B60B-EE96-4DBC-99AA-80D495C081F2}"/>
               </a:ext>
             </a:extLst>
           </p:cNvPr>
@@ -28717,7 +28715,7 @@
           <p:cNvPr id="8" name="">
             <a:extLst xmlns:a="http://schemas.openxmlformats.org/drawingml/2006/main">
               <a:ext uri="{FF2B5EF4-FFF2-40B4-BE49-F238E27FC236}">
-                <a16:creationId xmlns:a16="http://schemas.microsoft.com/office/drawing/2014/main" id="{0BC48773-E609-4F55-B869-67E56EC6F001}"/>
+                <a16:creationId xmlns:a16="http://schemas.microsoft.com/office/drawing/2014/main" id="{1E319912-57F1-4E58-9C03-FABB515814CF}"/>
               </a:ext>
             </a:extLst>
           </p:cNvPr>
@@ -28752,7 +28750,7 @@
           <p:cNvPr id="9" name="">
             <a:extLst xmlns:a="http://schemas.openxmlformats.org/drawingml/2006/main">
               <a:ext uri="{FF2B5EF4-FFF2-40B4-BE49-F238E27FC236}">
-                <a16:creationId xmlns:a16="http://schemas.microsoft.com/office/drawing/2014/main" id="{A08E452E-A1CC-46A4-BE55-8EFAA07260BE}"/>
+                <a16:creationId xmlns:a16="http://schemas.microsoft.com/office/drawing/2014/main" id="{E23F9D9B-19B9-498A-A4F8-14038D51591E}"/>
               </a:ext>
             </a:extLst>
           </p:cNvPr>
@@ -28816,7 +28814,7 @@
           <p:cNvPr id="10" name="">
             <a:extLst xmlns:a="http://schemas.openxmlformats.org/drawingml/2006/main">
               <a:ext uri="{FF2B5EF4-FFF2-40B4-BE49-F238E27FC236}">
-                <a16:creationId xmlns:a16="http://schemas.microsoft.com/office/drawing/2014/main" id="{EC959079-A8B4-4E03-8321-FC82FD674CA0}"/>
+                <a16:creationId xmlns:a16="http://schemas.microsoft.com/office/drawing/2014/main" id="{AC941D60-1990-4A90-9359-E90791D4B390}"/>
               </a:ext>
             </a:extLst>
           </p:cNvPr>
@@ -28880,7 +28878,7 @@
           <p:cNvPr id="11" name="">
             <a:extLst xmlns:a="http://schemas.openxmlformats.org/drawingml/2006/main">
               <a:ext uri="{FF2B5EF4-FFF2-40B4-BE49-F238E27FC236}">
-                <a16:creationId xmlns:a16="http://schemas.microsoft.com/office/drawing/2014/main" id="{F8E82A8B-CF87-49A9-828C-02CEBC4E5653}"/>
+                <a16:creationId xmlns:a16="http://schemas.microsoft.com/office/drawing/2014/main" id="{0D7051FF-C025-4C36-883A-7FF748C4CA0D}"/>
               </a:ext>
             </a:extLst>
           </p:cNvPr>
@@ -28944,7 +28942,7 @@
           <p:cNvPr id="12" name="">
             <a:extLst xmlns:a="http://schemas.openxmlformats.org/drawingml/2006/main">
               <a:ext uri="{FF2B5EF4-FFF2-40B4-BE49-F238E27FC236}">
-                <a16:creationId xmlns:a16="http://schemas.microsoft.com/office/drawing/2014/main" id="{11D9316B-7CB5-4D63-AC12-CB4D4C179644}"/>
+                <a16:creationId xmlns:a16="http://schemas.microsoft.com/office/drawing/2014/main" id="{7A0C8BF1-A631-4167-B50A-8DEABE3D2E25}"/>
               </a:ext>
             </a:extLst>
           </p:cNvPr>
@@ -28977,7 +28975,7 @@
           <p:cNvPr id="13" name="">
             <a:extLst xmlns:a="http://schemas.openxmlformats.org/drawingml/2006/main">
               <a:ext uri="{FF2B5EF4-FFF2-40B4-BE49-F238E27FC236}">
-                <a16:creationId xmlns:a16="http://schemas.microsoft.com/office/drawing/2014/main" id="{E4A726C3-9009-4976-83CD-AEFC2121E222}"/>
+                <a16:creationId xmlns:a16="http://schemas.microsoft.com/office/drawing/2014/main" id="{B7AEE596-F26E-423D-8C2B-CEB8BEB8986A}"/>
               </a:ext>
             </a:extLst>
           </p:cNvPr>
@@ -29012,7 +29010,7 @@
           <p:cNvPr id="14" name="">
             <a:extLst xmlns:a="http://schemas.openxmlformats.org/drawingml/2006/main">
               <a:ext uri="{FF2B5EF4-FFF2-40B4-BE49-F238E27FC236}">
-                <a16:creationId xmlns:a16="http://schemas.microsoft.com/office/drawing/2014/main" id="{69AF26AB-C56E-4BD7-8D8A-F730D4775AFC}"/>
+                <a16:creationId xmlns:a16="http://schemas.microsoft.com/office/drawing/2014/main" id="{98917729-10E2-4E9F-BDD7-8F201F0450E5}"/>
               </a:ext>
             </a:extLst>
           </p:cNvPr>
@@ -29076,7 +29074,7 @@
           <p:cNvPr id="15" name="">
             <a:extLst xmlns:a="http://schemas.openxmlformats.org/drawingml/2006/main">
               <a:ext uri="{FF2B5EF4-FFF2-40B4-BE49-F238E27FC236}">
-                <a16:creationId xmlns:a16="http://schemas.microsoft.com/office/drawing/2014/main" id="{3CBDB3E7-3E96-46C9-98C2-7A234D6C7EDD}"/>
+                <a16:creationId xmlns:a16="http://schemas.microsoft.com/office/drawing/2014/main" id="{6F27BEDD-BEF0-4F47-B545-5138C484C242}"/>
               </a:ext>
             </a:extLst>
           </p:cNvPr>
@@ -29140,7 +29138,7 @@
           <p:cNvPr id="16" name="">
             <a:extLst xmlns:a="http://schemas.openxmlformats.org/drawingml/2006/main">
               <a:ext uri="{FF2B5EF4-FFF2-40B4-BE49-F238E27FC236}">
-                <a16:creationId xmlns:a16="http://schemas.microsoft.com/office/drawing/2014/main" id="{48D8431B-C0E0-4F3B-8BDD-F21591FC3BC3}"/>
+                <a16:creationId xmlns:a16="http://schemas.microsoft.com/office/drawing/2014/main" id="{29C39850-02B7-48D2-843E-65BCD7104DDA}"/>
               </a:ext>
             </a:extLst>
           </p:cNvPr>
@@ -29175,7 +29173,7 @@
           <p:cNvPr id="17" name="">
             <a:extLst xmlns:a="http://schemas.openxmlformats.org/drawingml/2006/main">
               <a:ext uri="{FF2B5EF4-FFF2-40B4-BE49-F238E27FC236}">
-                <a16:creationId xmlns:a16="http://schemas.microsoft.com/office/drawing/2014/main" id="{EAF199EF-F3E6-421B-AE9B-9531D6680A3F}"/>
+                <a16:creationId xmlns:a16="http://schemas.microsoft.com/office/drawing/2014/main" id="{E2D5B47F-4B87-4352-B4A6-E49C2AC4A4B7}"/>
               </a:ext>
             </a:extLst>
           </p:cNvPr>
@@ -29239,7 +29237,7 @@
           <p:cNvPr id="18" name="">
             <a:extLst xmlns:a="http://schemas.openxmlformats.org/drawingml/2006/main">
               <a:ext uri="{FF2B5EF4-FFF2-40B4-BE49-F238E27FC236}">
-                <a16:creationId xmlns:a16="http://schemas.microsoft.com/office/drawing/2014/main" id="{EFF1A0E9-A1B8-4009-A9E4-8F023DBB725F}"/>
+                <a16:creationId xmlns:a16="http://schemas.microsoft.com/office/drawing/2014/main" id="{BC5D9CC6-5CF3-435F-BCD5-0E25E6F715EE}"/>
               </a:ext>
             </a:extLst>
           </p:cNvPr>
@@ -29303,7 +29301,7 @@
           <p:cNvPr id="19" name="">
             <a:extLst xmlns:a="http://schemas.openxmlformats.org/drawingml/2006/main">
               <a:ext uri="{FF2B5EF4-FFF2-40B4-BE49-F238E27FC236}">
-                <a16:creationId xmlns:a16="http://schemas.microsoft.com/office/drawing/2014/main" id="{47088DCE-047B-467D-8086-8903A93CF6EB}"/>
+                <a16:creationId xmlns:a16="http://schemas.microsoft.com/office/drawing/2014/main" id="{21BD4988-987D-4C7A-84FB-A0FD44518A5A}"/>
               </a:ext>
             </a:extLst>
           </p:cNvPr>
@@ -29336,7 +29334,7 @@
           <p:cNvPr id="20" name="">
             <a:extLst xmlns:a="http://schemas.openxmlformats.org/drawingml/2006/main">
               <a:ext uri="{FF2B5EF4-FFF2-40B4-BE49-F238E27FC236}">
-                <a16:creationId xmlns:a16="http://schemas.microsoft.com/office/drawing/2014/main" id="{F7E45328-E300-4A6C-A7BA-C55529035BCF}"/>
+                <a16:creationId xmlns:a16="http://schemas.microsoft.com/office/drawing/2014/main" id="{81825D46-500B-4640-A225-A4F3B996B098}"/>
               </a:ext>
             </a:extLst>
           </p:cNvPr>
@@ -29371,7 +29369,7 @@
           <p:cNvPr id="21" name="">
             <a:extLst xmlns:a="http://schemas.openxmlformats.org/drawingml/2006/main">
               <a:ext uri="{FF2B5EF4-FFF2-40B4-BE49-F238E27FC236}">
-                <a16:creationId xmlns:a16="http://schemas.microsoft.com/office/drawing/2014/main" id="{62352720-10E7-49AD-AC2F-B9550DEB3AAE}"/>
+                <a16:creationId xmlns:a16="http://schemas.microsoft.com/office/drawing/2014/main" id="{228055DF-2F8E-4A7E-8478-134FD4371489}"/>
               </a:ext>
             </a:extLst>
           </p:cNvPr>
@@ -29435,7 +29433,7 @@
           <p:cNvPr id="22" name="">
             <a:extLst xmlns:a="http://schemas.openxmlformats.org/drawingml/2006/main">
               <a:ext uri="{FF2B5EF4-FFF2-40B4-BE49-F238E27FC236}">
-                <a16:creationId xmlns:a16="http://schemas.microsoft.com/office/drawing/2014/main" id="{8AC4337F-14A2-4E51-9A72-771028FC8C99}"/>
+                <a16:creationId xmlns:a16="http://schemas.microsoft.com/office/drawing/2014/main" id="{17DECD14-457F-4F4E-97FA-F91839F8DE5A}"/>
               </a:ext>
             </a:extLst>
           </p:cNvPr>
@@ -29468,7 +29466,7 @@
           <p:cNvPr id="23" name="">
             <a:extLst xmlns:a="http://schemas.openxmlformats.org/drawingml/2006/main">
               <a:ext uri="{FF2B5EF4-FFF2-40B4-BE49-F238E27FC236}">
-                <a16:creationId xmlns:a16="http://schemas.microsoft.com/office/drawing/2014/main" id="{9D320AEB-3C3B-414F-A68B-09B5459D9A7A}"/>
+                <a16:creationId xmlns:a16="http://schemas.microsoft.com/office/drawing/2014/main" id="{FE434485-207B-45FE-A1CB-E6F684BB0A68}"/>
               </a:ext>
             </a:extLst>
           </p:cNvPr>
@@ -29532,7 +29530,7 @@
           <p:cNvPr id="24" name="">
             <a:extLst xmlns:a="http://schemas.openxmlformats.org/drawingml/2006/main">
               <a:ext uri="{FF2B5EF4-FFF2-40B4-BE49-F238E27FC236}">
-                <a16:creationId xmlns:a16="http://schemas.microsoft.com/office/drawing/2014/main" id="{A9F7A0FB-BC89-4F7D-8338-297341C13732}"/>
+                <a16:creationId xmlns:a16="http://schemas.microsoft.com/office/drawing/2014/main" id="{D5F9805F-FEE5-4B0D-BD73-F5867ADE61E8}"/>
               </a:ext>
             </a:extLst>
           </p:cNvPr>
@@ -29596,7 +29594,7 @@
           <p:cNvPr id="25" name="">
             <a:extLst xmlns:a="http://schemas.openxmlformats.org/drawingml/2006/main">
               <a:ext uri="{FF2B5EF4-FFF2-40B4-BE49-F238E27FC236}">
-                <a16:creationId xmlns:a16="http://schemas.microsoft.com/office/drawing/2014/main" id="{926601B5-A2BC-41D8-949F-BDC5444BE374}"/>
+                <a16:creationId xmlns:a16="http://schemas.microsoft.com/office/drawing/2014/main" id="{D2CA5D70-8D8C-4F0A-A92D-BA8F52C86F9C}"/>
               </a:ext>
             </a:extLst>
           </p:cNvPr>
@@ -29629,7 +29627,7 @@
           <p:cNvPr id="26" name="">
             <a:extLst xmlns:a="http://schemas.openxmlformats.org/drawingml/2006/main">
               <a:ext uri="{FF2B5EF4-FFF2-40B4-BE49-F238E27FC236}">
-                <a16:creationId xmlns:a16="http://schemas.microsoft.com/office/drawing/2014/main" id="{18A56B4F-2BBE-48C1-A6F5-38E9729110B9}"/>
+                <a16:creationId xmlns:a16="http://schemas.microsoft.com/office/drawing/2014/main" id="{F91598B2-D112-4671-8B8F-289C7BF6F9C6}"/>
               </a:ext>
             </a:extLst>
           </p:cNvPr>
@@ -29693,7 +29691,7 @@
           <p:cNvPr id="27" name="">
             <a:extLst xmlns:a="http://schemas.openxmlformats.org/drawingml/2006/main">
               <a:ext uri="{FF2B5EF4-FFF2-40B4-BE49-F238E27FC236}">
-                <a16:creationId xmlns:a16="http://schemas.microsoft.com/office/drawing/2014/main" id="{485562AC-D805-4C43-848F-965CD00AE916}"/>
+                <a16:creationId xmlns:a16="http://schemas.microsoft.com/office/drawing/2014/main" id="{43A59BE7-100E-4D84-9D46-9AA4FE6AD36C}"/>
               </a:ext>
             </a:extLst>
           </p:cNvPr>
@@ -29757,7 +29755,7 @@
           <p:cNvPr id="28" name="">
             <a:extLst xmlns:a="http://schemas.openxmlformats.org/drawingml/2006/main">
               <a:ext uri="{FF2B5EF4-FFF2-40B4-BE49-F238E27FC236}">
-                <a16:creationId xmlns:a16="http://schemas.microsoft.com/office/drawing/2014/main" id="{FA812837-59B5-4702-B53D-8C5C079D20A4}"/>
+                <a16:creationId xmlns:a16="http://schemas.microsoft.com/office/drawing/2014/main" id="{5DA3BB22-8315-4A65-BDEC-69747DAA9137}"/>
               </a:ext>
             </a:extLst>
           </p:cNvPr>
@@ -29790,7 +29788,7 @@
           <p:cNvPr id="29" name="">
             <a:extLst xmlns:a="http://schemas.openxmlformats.org/drawingml/2006/main">
               <a:ext uri="{FF2B5EF4-FFF2-40B4-BE49-F238E27FC236}">
-                <a16:creationId xmlns:a16="http://schemas.microsoft.com/office/drawing/2014/main" id="{446E73B7-6E19-4651-8A47-78AE24188E5E}"/>
+                <a16:creationId xmlns:a16="http://schemas.microsoft.com/office/drawing/2014/main" id="{9A5E83A0-7446-4427-9308-27A54701C0C8}"/>
               </a:ext>
             </a:extLst>
           </p:cNvPr>
@@ -29854,7 +29852,7 @@
           <p:cNvPr id="30" name="">
             <a:extLst xmlns:a="http://schemas.openxmlformats.org/drawingml/2006/main">
               <a:ext uri="{FF2B5EF4-FFF2-40B4-BE49-F238E27FC236}">
-                <a16:creationId xmlns:a16="http://schemas.microsoft.com/office/drawing/2014/main" id="{9DC02ECA-5A58-4D93-8596-0A428374CD19}"/>
+                <a16:creationId xmlns:a16="http://schemas.microsoft.com/office/drawing/2014/main" id="{64315BD1-98F8-4EF5-B665-6AC93DAA6738}"/>
               </a:ext>
             </a:extLst>
           </p:cNvPr>
@@ -29918,7 +29916,7 @@
           <p:cNvPr id="31" name="">
             <a:extLst xmlns:a="http://schemas.openxmlformats.org/drawingml/2006/main">
               <a:ext uri="{FF2B5EF4-FFF2-40B4-BE49-F238E27FC236}">
-                <a16:creationId xmlns:a16="http://schemas.microsoft.com/office/drawing/2014/main" id="{D000C63C-F007-4E3C-9538-245DD380A9DA}"/>
+                <a16:creationId xmlns:a16="http://schemas.microsoft.com/office/drawing/2014/main" id="{250C25BD-6D85-4A5E-8228-B8BFBCC7BB17}"/>
               </a:ext>
             </a:extLst>
           </p:cNvPr>
@@ -29953,7 +29951,7 @@
           <p:cNvPr id="32" name="">
             <a:extLst xmlns:a="http://schemas.openxmlformats.org/drawingml/2006/main">
               <a:ext uri="{FF2B5EF4-FFF2-40B4-BE49-F238E27FC236}">
-                <a16:creationId xmlns:a16="http://schemas.microsoft.com/office/drawing/2014/main" id="{A5825635-492A-4462-973B-DFC47882827A}"/>
+                <a16:creationId xmlns:a16="http://schemas.microsoft.com/office/drawing/2014/main" id="{561F741C-7959-48E9-B72D-71557D20FC83}"/>
               </a:ext>
             </a:extLst>
           </p:cNvPr>
@@ -30017,7 +30015,7 @@
           <p:cNvPr id="33" name="">
             <a:extLst xmlns:a="http://schemas.openxmlformats.org/drawingml/2006/main">
               <a:ext uri="{FF2B5EF4-FFF2-40B4-BE49-F238E27FC236}">
-                <a16:creationId xmlns:a16="http://schemas.microsoft.com/office/drawing/2014/main" id="{2C1256A5-2EAB-46FE-B127-E5AC0D0A585A}"/>
+                <a16:creationId xmlns:a16="http://schemas.microsoft.com/office/drawing/2014/main" id="{9451421B-2699-4035-A426-9EB046E04FCE}"/>
               </a:ext>
             </a:extLst>
           </p:cNvPr>
@@ -30081,7 +30079,7 @@
           <p:cNvPr id="34" name="">
             <a:extLst xmlns:a="http://schemas.openxmlformats.org/drawingml/2006/main">
               <a:ext uri="{FF2B5EF4-FFF2-40B4-BE49-F238E27FC236}">
-                <a16:creationId xmlns:a16="http://schemas.microsoft.com/office/drawing/2014/main" id="{D7DC0531-BEBE-4913-A762-3EAF944DE8E6}"/>
+                <a16:creationId xmlns:a16="http://schemas.microsoft.com/office/drawing/2014/main" id="{15076FA1-A2E9-47BA-8BAF-B9E9FA95A791}"/>
               </a:ext>
             </a:extLst>
           </p:cNvPr>
@@ -30143,7 +30141,7 @@
     </p:spTree>
     <p:extLst>
       <p:ext uri="{BB962C8B-B14F-4D97-AF65-F5344CB8AC3E}">
-        <p14:creationId xmlns:p14="http://schemas.microsoft.com/office/powerpoint/2010/main" val="2057925936"/>
+        <p14:creationId xmlns:p14="http://schemas.microsoft.com/office/powerpoint/2010/main" val="733866406"/>
       </p:ext>
     </p:extLst>
   </p:cSld>
@@ -30167,7 +30165,7 @@
           <p:cNvPr id="1" name="">
             <a:extLst xmlns:a="http://schemas.openxmlformats.org/drawingml/2006/main">
               <a:ext uri="{FF2B5EF4-FFF2-40B4-BE49-F238E27FC236}">
-                <a16:creationId xmlns:a16="http://schemas.microsoft.com/office/drawing/2014/main" id="{34276DE0-D1FB-4137-A2E7-0F9D7B9F01E1}"/>
+                <a16:creationId xmlns:a16="http://schemas.microsoft.com/office/drawing/2014/main" id="{6606D099-489B-4ECC-BB81-6FD20CE45F6F}"/>
               </a:ext>
             </a:extLst>
           </p:cNvPr>
@@ -30202,7 +30200,7 @@
           <p:cNvPr id="2" name="">
             <a:extLst xmlns:a="http://schemas.openxmlformats.org/drawingml/2006/main">
               <a:ext uri="{FF2B5EF4-FFF2-40B4-BE49-F238E27FC236}">
-                <a16:creationId xmlns:a16="http://schemas.microsoft.com/office/drawing/2014/main" id="{AD3128C1-72CE-4E24-A263-1B9C79E5455F}"/>
+                <a16:creationId xmlns:a16="http://schemas.microsoft.com/office/drawing/2014/main" id="{696665BD-FA72-4769-85C6-6D6C7DF2AFEF}"/>
               </a:ext>
             </a:extLst>
           </p:cNvPr>
@@ -30237,7 +30235,7 @@
           <p:cNvPr id="3" name="">
             <a:extLst xmlns:a="http://schemas.openxmlformats.org/drawingml/2006/main">
               <a:ext uri="{FF2B5EF4-FFF2-40B4-BE49-F238E27FC236}">
-                <a16:creationId xmlns:a16="http://schemas.microsoft.com/office/drawing/2014/main" id="{5805C30A-3C80-4E02-83AE-8B2839B5ECE3}"/>
+                <a16:creationId xmlns:a16="http://schemas.microsoft.com/office/drawing/2014/main" id="{E4C85141-A482-4F6B-9696-44848F027B0F}"/>
               </a:ext>
             </a:extLst>
           </p:cNvPr>
@@ -30272,7 +30270,7 @@
           <p:cNvPr id="4" name="kicker-01-marker">
             <a:extLst xmlns:a="http://schemas.openxmlformats.org/drawingml/2006/main">
               <a:ext uri="{FF2B5EF4-FFF2-40B4-BE49-F238E27FC236}">
-                <a16:creationId xmlns:a16="http://schemas.microsoft.com/office/drawing/2014/main" id="{74309450-71F4-4EF9-B0E5-A79F2FF52F33}"/>
+                <a16:creationId xmlns:a16="http://schemas.microsoft.com/office/drawing/2014/main" id="{25F951AA-9E32-4223-B3BD-905F04D9931E}"/>
               </a:ext>
             </a:extLst>
           </p:cNvPr>
@@ -30307,7 +30305,7 @@
           <p:cNvPr id="5" name="kicker-01-label">
             <a:extLst xmlns:a="http://schemas.openxmlformats.org/drawingml/2006/main">
               <a:ext uri="{FF2B5EF4-FFF2-40B4-BE49-F238E27FC236}">
-                <a16:creationId xmlns:a16="http://schemas.microsoft.com/office/drawing/2014/main" id="{1A4B8FD3-DB13-47A8-A4ED-75A5690937CD}"/>
+                <a16:creationId xmlns:a16="http://schemas.microsoft.com/office/drawing/2014/main" id="{57182971-DB77-4C6D-A575-45E114F6EAE2}"/>
               </a:ext>
             </a:extLst>
           </p:cNvPr>
@@ -30371,7 +30369,7 @@
           <p:cNvPr id="6" name="">
             <a:extLst xmlns:a="http://schemas.openxmlformats.org/drawingml/2006/main">
               <a:ext uri="{FF2B5EF4-FFF2-40B4-BE49-F238E27FC236}">
-                <a16:creationId xmlns:a16="http://schemas.microsoft.com/office/drawing/2014/main" id="{BD9B971A-7E0A-413F-8836-7D91F72C9686}"/>
+                <a16:creationId xmlns:a16="http://schemas.microsoft.com/office/drawing/2014/main" id="{46ABDF28-7172-41EE-8763-E1CFF0D2B53E}"/>
               </a:ext>
             </a:extLst>
           </p:cNvPr>
@@ -30435,7 +30433,7 @@
           <p:cNvPr id="7" name="">
             <a:extLst xmlns:a="http://schemas.openxmlformats.org/drawingml/2006/main">
               <a:ext uri="{FF2B5EF4-FFF2-40B4-BE49-F238E27FC236}">
-                <a16:creationId xmlns:a16="http://schemas.microsoft.com/office/drawing/2014/main" id="{7F0EC301-0E9F-4303-A2D4-AC9018B45CB7}"/>
+                <a16:creationId xmlns:a16="http://schemas.microsoft.com/office/drawing/2014/main" id="{6C32FDC9-7DCF-4C44-A739-C9E287CF973E}"/>
               </a:ext>
             </a:extLst>
           </p:cNvPr>
@@ -30499,7 +30497,7 @@
           <p:cNvPr id="8" name="">
             <a:extLst xmlns:a="http://schemas.openxmlformats.org/drawingml/2006/main">
               <a:ext uri="{FF2B5EF4-FFF2-40B4-BE49-F238E27FC236}">
-                <a16:creationId xmlns:a16="http://schemas.microsoft.com/office/drawing/2014/main" id="{CD1F6216-C6DD-48B4-A643-09D128F0CE88}"/>
+                <a16:creationId xmlns:a16="http://schemas.microsoft.com/office/drawing/2014/main" id="{BD6DEA4B-9AE6-4FB8-8F39-998DE031DF7F}"/>
               </a:ext>
             </a:extLst>
           </p:cNvPr>
@@ -30534,7 +30532,7 @@
           <p:cNvPr id="9" name="">
             <a:extLst xmlns:a="http://schemas.openxmlformats.org/drawingml/2006/main">
               <a:ext uri="{FF2B5EF4-FFF2-40B4-BE49-F238E27FC236}">
-                <a16:creationId xmlns:a16="http://schemas.microsoft.com/office/drawing/2014/main" id="{255A246D-9A45-41D5-8CDB-3B58584EE0C3}"/>
+                <a16:creationId xmlns:a16="http://schemas.microsoft.com/office/drawing/2014/main" id="{828D24F7-2320-41DB-A827-84B6D1248A5A}"/>
               </a:ext>
             </a:extLst>
           </p:cNvPr>
@@ -30598,7 +30596,7 @@
           <p:cNvPr id="10" name="">
             <a:extLst xmlns:a="http://schemas.openxmlformats.org/drawingml/2006/main">
               <a:ext uri="{FF2B5EF4-FFF2-40B4-BE49-F238E27FC236}">
-                <a16:creationId xmlns:a16="http://schemas.microsoft.com/office/drawing/2014/main" id="{B50610CA-110B-4F79-B29E-F7D17F8C974A}"/>
+                <a16:creationId xmlns:a16="http://schemas.microsoft.com/office/drawing/2014/main" id="{3720C14A-3B4B-46A1-944A-E2F1ED891CEB}"/>
               </a:ext>
             </a:extLst>
           </p:cNvPr>
@@ -30662,7 +30660,7 @@
           <p:cNvPr id="11" name="">
             <a:extLst xmlns:a="http://schemas.openxmlformats.org/drawingml/2006/main">
               <a:ext uri="{FF2B5EF4-FFF2-40B4-BE49-F238E27FC236}">
-                <a16:creationId xmlns:a16="http://schemas.microsoft.com/office/drawing/2014/main" id="{870EB172-B848-41F9-83A6-DA801D3AC706}"/>
+                <a16:creationId xmlns:a16="http://schemas.microsoft.com/office/drawing/2014/main" id="{2D03F6DD-9850-4DD5-A627-20D73B37109A}"/>
               </a:ext>
             </a:extLst>
           </p:cNvPr>
@@ -30726,7 +30724,7 @@
           <p:cNvPr id="12" name="">
             <a:extLst xmlns:a="http://schemas.openxmlformats.org/drawingml/2006/main">
               <a:ext uri="{FF2B5EF4-FFF2-40B4-BE49-F238E27FC236}">
-                <a16:creationId xmlns:a16="http://schemas.microsoft.com/office/drawing/2014/main" id="{BB5343B0-3693-4815-B22C-5EC4E31AE82E}"/>
+                <a16:creationId xmlns:a16="http://schemas.microsoft.com/office/drawing/2014/main" id="{7909B511-880D-4AA2-B8EE-49BE4AEB8B7E}"/>
               </a:ext>
             </a:extLst>
           </p:cNvPr>
@@ -30761,7 +30759,7 @@
           <p:cNvPr id="13" name="">
             <a:extLst xmlns:a="http://schemas.openxmlformats.org/drawingml/2006/main">
               <a:ext uri="{FF2B5EF4-FFF2-40B4-BE49-F238E27FC236}">
-                <a16:creationId xmlns:a16="http://schemas.microsoft.com/office/drawing/2014/main" id="{270624AB-E7BE-4B70-8CAB-954B3BAF6BFB}"/>
+                <a16:creationId xmlns:a16="http://schemas.microsoft.com/office/drawing/2014/main" id="{877324E2-E290-4B35-BC13-DC5404AC0744}"/>
               </a:ext>
             </a:extLst>
           </p:cNvPr>
@@ -30794,7 +30792,7 @@
           <p:cNvPr id="14" name="">
             <a:extLst xmlns:a="http://schemas.openxmlformats.org/drawingml/2006/main">
               <a:ext uri="{FF2B5EF4-FFF2-40B4-BE49-F238E27FC236}">
-                <a16:creationId xmlns:a16="http://schemas.microsoft.com/office/drawing/2014/main" id="{0005C3CC-E5EB-4C72-A3AB-B2BFAEF775AF}"/>
+                <a16:creationId xmlns:a16="http://schemas.microsoft.com/office/drawing/2014/main" id="{65D1DDB4-89F0-467D-9E25-64D341BD9C72}"/>
               </a:ext>
             </a:extLst>
           </p:cNvPr>
@@ -30829,7 +30827,7 @@
           <p:cNvPr id="15" name="">
             <a:extLst xmlns:a="http://schemas.openxmlformats.org/drawingml/2006/main">
               <a:ext uri="{FF2B5EF4-FFF2-40B4-BE49-F238E27FC236}">
-                <a16:creationId xmlns:a16="http://schemas.microsoft.com/office/drawing/2014/main" id="{BA6127B8-966B-4E69-9766-9711E9969C0F}"/>
+                <a16:creationId xmlns:a16="http://schemas.microsoft.com/office/drawing/2014/main" id="{9415284E-4567-47E4-B230-E9D515580DDE}"/>
               </a:ext>
             </a:extLst>
           </p:cNvPr>
@@ -30893,7 +30891,7 @@
           <p:cNvPr id="16" name="">
             <a:extLst xmlns:a="http://schemas.openxmlformats.org/drawingml/2006/main">
               <a:ext uri="{FF2B5EF4-FFF2-40B4-BE49-F238E27FC236}">
-                <a16:creationId xmlns:a16="http://schemas.microsoft.com/office/drawing/2014/main" id="{E6876C7F-A59D-474E-AEB3-DE8A3EBE57A2}"/>
+                <a16:creationId xmlns:a16="http://schemas.microsoft.com/office/drawing/2014/main" id="{4C09256D-AB11-4CF7-8BC2-EACF2F9DF0C1}"/>
               </a:ext>
             </a:extLst>
           </p:cNvPr>
@@ -30926,7 +30924,7 @@
           <p:cNvPr id="17" name="">
             <a:extLst xmlns:a="http://schemas.openxmlformats.org/drawingml/2006/main">
               <a:ext uri="{FF2B5EF4-FFF2-40B4-BE49-F238E27FC236}">
-                <a16:creationId xmlns:a16="http://schemas.microsoft.com/office/drawing/2014/main" id="{9EB88F49-AFDE-43F4-B864-650B7B8D8CAA}"/>
+                <a16:creationId xmlns:a16="http://schemas.microsoft.com/office/drawing/2014/main" id="{1AF6ACC0-270A-4EFA-A9A0-0992E4AD8F1F}"/>
               </a:ext>
             </a:extLst>
           </p:cNvPr>
@@ -30990,7 +30988,7 @@
           <p:cNvPr id="18" name="">
             <a:extLst xmlns:a="http://schemas.openxmlformats.org/drawingml/2006/main">
               <a:ext uri="{FF2B5EF4-FFF2-40B4-BE49-F238E27FC236}">
-                <a16:creationId xmlns:a16="http://schemas.microsoft.com/office/drawing/2014/main" id="{85B49849-F319-43A1-BF80-626EB98905B2}"/>
+                <a16:creationId xmlns:a16="http://schemas.microsoft.com/office/drawing/2014/main" id="{BEFC8C2E-0481-43A8-9219-4E7C5314142D}"/>
               </a:ext>
             </a:extLst>
           </p:cNvPr>
@@ -31054,7 +31052,7 @@
           <p:cNvPr id="19" name="">
             <a:extLst xmlns:a="http://schemas.openxmlformats.org/drawingml/2006/main">
               <a:ext uri="{FF2B5EF4-FFF2-40B4-BE49-F238E27FC236}">
-                <a16:creationId xmlns:a16="http://schemas.microsoft.com/office/drawing/2014/main" id="{58ED591C-2422-47CC-B41F-930A8C5399AF}"/>
+                <a16:creationId xmlns:a16="http://schemas.microsoft.com/office/drawing/2014/main" id="{9F8552FE-AFBA-4A5E-94DD-E459B680063F}"/>
               </a:ext>
             </a:extLst>
           </p:cNvPr>
@@ -31087,7 +31085,7 @@
           <p:cNvPr id="20" name="">
             <a:extLst xmlns:a="http://schemas.openxmlformats.org/drawingml/2006/main">
               <a:ext uri="{FF2B5EF4-FFF2-40B4-BE49-F238E27FC236}">
-                <a16:creationId xmlns:a16="http://schemas.microsoft.com/office/drawing/2014/main" id="{90D7237F-A524-4976-8D87-B3C737DCDC6A}"/>
+                <a16:creationId xmlns:a16="http://schemas.microsoft.com/office/drawing/2014/main" id="{4BBB04E2-60D7-435C-A8A5-0862C17EA209}"/>
               </a:ext>
             </a:extLst>
           </p:cNvPr>
@@ -31151,7 +31149,7 @@
           <p:cNvPr id="21" name="">
             <a:extLst xmlns:a="http://schemas.openxmlformats.org/drawingml/2006/main">
               <a:ext uri="{FF2B5EF4-FFF2-40B4-BE49-F238E27FC236}">
-                <a16:creationId xmlns:a16="http://schemas.microsoft.com/office/drawing/2014/main" id="{19E776D4-9127-4A45-B32E-EEAB8E37BAA5}"/>
+                <a16:creationId xmlns:a16="http://schemas.microsoft.com/office/drawing/2014/main" id="{507C6E1F-AD3C-456F-A691-3B09AF012EFE}"/>
               </a:ext>
             </a:extLst>
           </p:cNvPr>
@@ -31215,7 +31213,7 @@
           <p:cNvPr id="22" name="">
             <a:extLst xmlns:a="http://schemas.openxmlformats.org/drawingml/2006/main">
               <a:ext uri="{FF2B5EF4-FFF2-40B4-BE49-F238E27FC236}">
-                <a16:creationId xmlns:a16="http://schemas.microsoft.com/office/drawing/2014/main" id="{8C3766EA-534E-4CAB-BDDE-510A530C9C0D}"/>
+                <a16:creationId xmlns:a16="http://schemas.microsoft.com/office/drawing/2014/main" id="{E56472AF-097A-48F3-9DD4-03C502DB9161}"/>
               </a:ext>
             </a:extLst>
           </p:cNvPr>
@@ -31248,7 +31246,7 @@
           <p:cNvPr id="23" name="">
             <a:extLst xmlns:a="http://schemas.openxmlformats.org/drawingml/2006/main">
               <a:ext uri="{FF2B5EF4-FFF2-40B4-BE49-F238E27FC236}">
-                <a16:creationId xmlns:a16="http://schemas.microsoft.com/office/drawing/2014/main" id="{C9CADFCD-D192-4165-9169-3F13B1F93BDB}"/>
+                <a16:creationId xmlns:a16="http://schemas.microsoft.com/office/drawing/2014/main" id="{96CA80EF-893E-4598-9D0C-725E587FECDB}"/>
               </a:ext>
             </a:extLst>
           </p:cNvPr>
@@ -31312,7 +31310,7 @@
           <p:cNvPr id="24" name="">
             <a:extLst xmlns:a="http://schemas.openxmlformats.org/drawingml/2006/main">
               <a:ext uri="{FF2B5EF4-FFF2-40B4-BE49-F238E27FC236}">
-                <a16:creationId xmlns:a16="http://schemas.microsoft.com/office/drawing/2014/main" id="{BB5974EE-27F1-4F27-8F2A-B3C8EB926CC1}"/>
+                <a16:creationId xmlns:a16="http://schemas.microsoft.com/office/drawing/2014/main" id="{7B5CC95D-1367-4D40-A2D9-0202D5B1CD8B}"/>
               </a:ext>
             </a:extLst>
           </p:cNvPr>
@@ -31376,7 +31374,7 @@
           <p:cNvPr id="25" name="">
             <a:extLst xmlns:a="http://schemas.openxmlformats.org/drawingml/2006/main">
               <a:ext uri="{FF2B5EF4-FFF2-40B4-BE49-F238E27FC236}">
-                <a16:creationId xmlns:a16="http://schemas.microsoft.com/office/drawing/2014/main" id="{39B9D765-CBFE-418D-9761-0E85219DEDDA}"/>
+                <a16:creationId xmlns:a16="http://schemas.microsoft.com/office/drawing/2014/main" id="{9469309B-39C4-435E-9BF5-94C4A4B4A877}"/>
               </a:ext>
             </a:extLst>
           </p:cNvPr>
@@ -31411,7 +31409,7 @@
           <p:cNvPr id="26" name="">
             <a:extLst xmlns:a="http://schemas.openxmlformats.org/drawingml/2006/main">
               <a:ext uri="{FF2B5EF4-FFF2-40B4-BE49-F238E27FC236}">
-                <a16:creationId xmlns:a16="http://schemas.microsoft.com/office/drawing/2014/main" id="{5E31C8F8-1EB6-40BE-B43C-9BE1ACD054CF}"/>
+                <a16:creationId xmlns:a16="http://schemas.microsoft.com/office/drawing/2014/main" id="{C455A09B-02A4-40B6-8DEA-C8D2D3FB51B1}"/>
               </a:ext>
             </a:extLst>
           </p:cNvPr>
@@ -31475,7 +31473,7 @@
           <p:cNvPr id="27" name="">
             <a:extLst xmlns:a="http://schemas.openxmlformats.org/drawingml/2006/main">
               <a:ext uri="{FF2B5EF4-FFF2-40B4-BE49-F238E27FC236}">
-                <a16:creationId xmlns:a16="http://schemas.microsoft.com/office/drawing/2014/main" id="{376DFDAB-FD76-463B-A834-3A3025131120}"/>
+                <a16:creationId xmlns:a16="http://schemas.microsoft.com/office/drawing/2014/main" id="{42CD7C7C-E3CA-48B4-9908-FE9920036503}"/>
               </a:ext>
             </a:extLst>
           </p:cNvPr>
@@ -31508,7 +31506,7 @@
           <p:cNvPr id="28" name="">
             <a:extLst xmlns:a="http://schemas.openxmlformats.org/drawingml/2006/main">
               <a:ext uri="{FF2B5EF4-FFF2-40B4-BE49-F238E27FC236}">
-                <a16:creationId xmlns:a16="http://schemas.microsoft.com/office/drawing/2014/main" id="{DCFDE0E9-B405-460E-8B44-B8C976B00623}"/>
+                <a16:creationId xmlns:a16="http://schemas.microsoft.com/office/drawing/2014/main" id="{D377E449-B5A6-4FC0-94C9-546D6580F5F4}"/>
               </a:ext>
             </a:extLst>
           </p:cNvPr>
@@ -31572,7 +31570,7 @@
           <p:cNvPr id="29" name="">
             <a:extLst xmlns:a="http://schemas.openxmlformats.org/drawingml/2006/main">
               <a:ext uri="{FF2B5EF4-FFF2-40B4-BE49-F238E27FC236}">
-                <a16:creationId xmlns:a16="http://schemas.microsoft.com/office/drawing/2014/main" id="{5C22F633-9DE6-489C-9CD7-A245B73BCE62}"/>
+                <a16:creationId xmlns:a16="http://schemas.microsoft.com/office/drawing/2014/main" id="{48022512-1911-4FF4-9A08-6B2BC408FA1C}"/>
               </a:ext>
             </a:extLst>
           </p:cNvPr>
@@ -31636,7 +31634,7 @@
           <p:cNvPr id="30" name="">
             <a:extLst xmlns:a="http://schemas.openxmlformats.org/drawingml/2006/main">
               <a:ext uri="{FF2B5EF4-FFF2-40B4-BE49-F238E27FC236}">
-                <a16:creationId xmlns:a16="http://schemas.microsoft.com/office/drawing/2014/main" id="{9A3FC741-2BAA-405D-8697-E88E551838E1}"/>
+                <a16:creationId xmlns:a16="http://schemas.microsoft.com/office/drawing/2014/main" id="{A74720CF-0894-45CB-B6CE-43401F258A85}"/>
               </a:ext>
             </a:extLst>
           </p:cNvPr>
@@ -31669,7 +31667,7 @@
           <p:cNvPr id="31" name="">
             <a:extLst xmlns:a="http://schemas.openxmlformats.org/drawingml/2006/main">
               <a:ext uri="{FF2B5EF4-FFF2-40B4-BE49-F238E27FC236}">
-                <a16:creationId xmlns:a16="http://schemas.microsoft.com/office/drawing/2014/main" id="{6B39ECEF-6352-47E1-B8B3-9A9F64003F7F}"/>
+                <a16:creationId xmlns:a16="http://schemas.microsoft.com/office/drawing/2014/main" id="{4803F52A-F45E-44A7-8ED2-06C0D2A0528C}"/>
               </a:ext>
             </a:extLst>
           </p:cNvPr>
@@ -31733,7 +31731,7 @@
           <p:cNvPr id="32" name="">
             <a:extLst xmlns:a="http://schemas.openxmlformats.org/drawingml/2006/main">
               <a:ext uri="{FF2B5EF4-FFF2-40B4-BE49-F238E27FC236}">
-                <a16:creationId xmlns:a16="http://schemas.microsoft.com/office/drawing/2014/main" id="{BD1C4B78-2E74-4613-B1F7-3AFC1D9E6D7A}"/>
+                <a16:creationId xmlns:a16="http://schemas.microsoft.com/office/drawing/2014/main" id="{06AC6C79-69A2-43A2-9F1C-4FEDE1C19919}"/>
               </a:ext>
             </a:extLst>
           </p:cNvPr>
@@ -31797,7 +31795,7 @@
           <p:cNvPr id="33" name="">
             <a:extLst xmlns:a="http://schemas.openxmlformats.org/drawingml/2006/main">
               <a:ext uri="{FF2B5EF4-FFF2-40B4-BE49-F238E27FC236}">
-                <a16:creationId xmlns:a16="http://schemas.microsoft.com/office/drawing/2014/main" id="{DD6BBF64-CD83-4826-862A-5C87105D7256}"/>
+                <a16:creationId xmlns:a16="http://schemas.microsoft.com/office/drawing/2014/main" id="{BBBB3697-29BA-4DC4-B511-4625BA6EFA5A}"/>
               </a:ext>
             </a:extLst>
           </p:cNvPr>
@@ -31832,7 +31830,7 @@
           <p:cNvPr id="34" name="">
             <a:extLst xmlns:a="http://schemas.openxmlformats.org/drawingml/2006/main">
               <a:ext uri="{FF2B5EF4-FFF2-40B4-BE49-F238E27FC236}">
-                <a16:creationId xmlns:a16="http://schemas.microsoft.com/office/drawing/2014/main" id="{D729F33B-2006-4C22-A25B-C6DFB71E56F6}"/>
+                <a16:creationId xmlns:a16="http://schemas.microsoft.com/office/drawing/2014/main" id="{BAE31A1F-BCE9-48B2-8085-6A819A8F3DD6}"/>
               </a:ext>
             </a:extLst>
           </p:cNvPr>
@@ -31896,7 +31894,7 @@
           <p:cNvPr id="35" name="">
             <a:extLst xmlns:a="http://schemas.openxmlformats.org/drawingml/2006/main">
               <a:ext uri="{FF2B5EF4-FFF2-40B4-BE49-F238E27FC236}">
-                <a16:creationId xmlns:a16="http://schemas.microsoft.com/office/drawing/2014/main" id="{67C24C63-12AB-4D70-80DF-4A1A20D71311}"/>
+                <a16:creationId xmlns:a16="http://schemas.microsoft.com/office/drawing/2014/main" id="{B3B9FB0C-CADE-4101-8D6F-1509DFF457ED}"/>
               </a:ext>
             </a:extLst>
           </p:cNvPr>
@@ -31960,7 +31958,7 @@
           <p:cNvPr id="36" name="">
             <a:extLst xmlns:a="http://schemas.openxmlformats.org/drawingml/2006/main">
               <a:ext uri="{FF2B5EF4-FFF2-40B4-BE49-F238E27FC236}">
-                <a16:creationId xmlns:a16="http://schemas.microsoft.com/office/drawing/2014/main" id="{037D7C0E-9DFE-4558-BEDE-465EE0DE9FB7}"/>
+                <a16:creationId xmlns:a16="http://schemas.microsoft.com/office/drawing/2014/main" id="{DC872104-C4C9-425F-B1A4-16C6F424D3E1}"/>
               </a:ext>
             </a:extLst>
           </p:cNvPr>
@@ -32024,7 +32022,7 @@
           <p:cNvPr id="37" name="">
             <a:extLst xmlns:a="http://schemas.openxmlformats.org/drawingml/2006/main">
               <a:ext uri="{FF2B5EF4-FFF2-40B4-BE49-F238E27FC236}">
-                <a16:creationId xmlns:a16="http://schemas.microsoft.com/office/drawing/2014/main" id="{FC5374C1-FA27-4D5E-B395-0C9D82D5EC4D}"/>
+                <a16:creationId xmlns:a16="http://schemas.microsoft.com/office/drawing/2014/main" id="{DEE632BA-7FD0-497C-959A-F55CAE8A737B}"/>
               </a:ext>
             </a:extLst>
           </p:cNvPr>
@@ -32059,7 +32057,7 @@
           <p:cNvPr id="38" name="">
             <a:extLst xmlns:a="http://schemas.openxmlformats.org/drawingml/2006/main">
               <a:ext uri="{FF2B5EF4-FFF2-40B4-BE49-F238E27FC236}">
-                <a16:creationId xmlns:a16="http://schemas.microsoft.com/office/drawing/2014/main" id="{DD0AC8A7-1B75-485E-B436-B5554C86420B}"/>
+                <a16:creationId xmlns:a16="http://schemas.microsoft.com/office/drawing/2014/main" id="{FB60A064-A4BB-43D4-9983-BE13C13558F0}"/>
               </a:ext>
             </a:extLst>
           </p:cNvPr>
@@ -32094,7 +32092,7 @@
           <p:cNvPr id="39" name="">
             <a:extLst xmlns:a="http://schemas.openxmlformats.org/drawingml/2006/main">
               <a:ext uri="{FF2B5EF4-FFF2-40B4-BE49-F238E27FC236}">
-                <a16:creationId xmlns:a16="http://schemas.microsoft.com/office/drawing/2014/main" id="{904662B1-D15E-4074-B1E6-5540AEC605C7}"/>
+                <a16:creationId xmlns:a16="http://schemas.microsoft.com/office/drawing/2014/main" id="{CBBA4F3F-61BF-4AD2-BE9E-AD7446F48FEC}"/>
               </a:ext>
             </a:extLst>
           </p:cNvPr>
@@ -32129,7 +32127,7 @@
           <p:cNvPr id="40" name="kicker-01-marker">
             <a:extLst xmlns:a="http://schemas.openxmlformats.org/drawingml/2006/main">
               <a:ext uri="{FF2B5EF4-FFF2-40B4-BE49-F238E27FC236}">
-                <a16:creationId xmlns:a16="http://schemas.microsoft.com/office/drawing/2014/main" id="{65D0052D-3E26-44FD-8D40-B3223E20C254}"/>
+                <a16:creationId xmlns:a16="http://schemas.microsoft.com/office/drawing/2014/main" id="{E6A05870-3710-4E2A-8E67-F34241C5641E}"/>
               </a:ext>
             </a:extLst>
           </p:cNvPr>
@@ -32164,7 +32162,7 @@
           <p:cNvPr id="41" name="kicker-01-label">
             <a:extLst xmlns:a="http://schemas.openxmlformats.org/drawingml/2006/main">
               <a:ext uri="{FF2B5EF4-FFF2-40B4-BE49-F238E27FC236}">
-                <a16:creationId xmlns:a16="http://schemas.microsoft.com/office/drawing/2014/main" id="{C680107C-6A25-4960-ADC0-2E637A669F81}"/>
+                <a16:creationId xmlns:a16="http://schemas.microsoft.com/office/drawing/2014/main" id="{0544FD13-92FC-4FBC-9475-3C90B2C04112}"/>
               </a:ext>
             </a:extLst>
           </p:cNvPr>
@@ -32228,7 +32226,7 @@
           <p:cNvPr id="42" name="">
             <a:extLst xmlns:a="http://schemas.openxmlformats.org/drawingml/2006/main">
               <a:ext uri="{FF2B5EF4-FFF2-40B4-BE49-F238E27FC236}">
-                <a16:creationId xmlns:a16="http://schemas.microsoft.com/office/drawing/2014/main" id="{648A297A-3A71-4359-9785-4A03CD564404}"/>
+                <a16:creationId xmlns:a16="http://schemas.microsoft.com/office/drawing/2014/main" id="{415CAA29-87E2-4786-AFBA-10F502254230}"/>
               </a:ext>
             </a:extLst>
           </p:cNvPr>
@@ -32292,7 +32290,7 @@
           <p:cNvPr id="43" name="">
             <a:extLst xmlns:a="http://schemas.openxmlformats.org/drawingml/2006/main">
               <a:ext uri="{FF2B5EF4-FFF2-40B4-BE49-F238E27FC236}">
-                <a16:creationId xmlns:a16="http://schemas.microsoft.com/office/drawing/2014/main" id="{8AB7F291-1AB6-47AC-85FB-007A121917EA}"/>
+                <a16:creationId xmlns:a16="http://schemas.microsoft.com/office/drawing/2014/main" id="{12D3B5EE-2AD3-4113-8AEF-3DD9187BC509}"/>
               </a:ext>
             </a:extLst>
           </p:cNvPr>
@@ -32356,7 +32354,7 @@
           <p:cNvPr id="44" name="">
             <a:extLst xmlns:a="http://schemas.openxmlformats.org/drawingml/2006/main">
               <a:ext uri="{FF2B5EF4-FFF2-40B4-BE49-F238E27FC236}">
-                <a16:creationId xmlns:a16="http://schemas.microsoft.com/office/drawing/2014/main" id="{B83F999B-AC7D-4957-8C21-EE14DF1CAFF3}"/>
+                <a16:creationId xmlns:a16="http://schemas.microsoft.com/office/drawing/2014/main" id="{ECB7E4C7-A2AA-45BE-9CC6-9AE13163C716}"/>
               </a:ext>
             </a:extLst>
           </p:cNvPr>
@@ -32391,7 +32389,7 @@
           <p:cNvPr id="45" name="">
             <a:extLst xmlns:a="http://schemas.openxmlformats.org/drawingml/2006/main">
               <a:ext uri="{FF2B5EF4-FFF2-40B4-BE49-F238E27FC236}">
-                <a16:creationId xmlns:a16="http://schemas.microsoft.com/office/drawing/2014/main" id="{6EFB6E88-3F84-4E17-8721-FF0C0172E726}"/>
+                <a16:creationId xmlns:a16="http://schemas.microsoft.com/office/drawing/2014/main" id="{39EEF289-02BB-4E15-9885-229728C391DF}"/>
               </a:ext>
             </a:extLst>
           </p:cNvPr>
@@ -32426,7 +32424,7 @@
           <p:cNvPr id="46" name="">
             <a:extLst xmlns:a="http://schemas.openxmlformats.org/drawingml/2006/main">
               <a:ext uri="{FF2B5EF4-FFF2-40B4-BE49-F238E27FC236}">
-                <a16:creationId xmlns:a16="http://schemas.microsoft.com/office/drawing/2014/main" id="{014500BB-0D86-4F8C-BCC7-3B0CDC883304}"/>
+                <a16:creationId xmlns:a16="http://schemas.microsoft.com/office/drawing/2014/main" id="{FF00BC5F-6FDB-431E-8A5C-CC5B96DAD0BC}"/>
               </a:ext>
             </a:extLst>
           </p:cNvPr>
@@ -32461,7 +32459,7 @@
           <p:cNvPr id="47" name="">
             <a:extLst xmlns:a="http://schemas.openxmlformats.org/drawingml/2006/main">
               <a:ext uri="{FF2B5EF4-FFF2-40B4-BE49-F238E27FC236}">
-                <a16:creationId xmlns:a16="http://schemas.microsoft.com/office/drawing/2014/main" id="{7F449017-6F9A-40AE-8535-8C2C7A331741}"/>
+                <a16:creationId xmlns:a16="http://schemas.microsoft.com/office/drawing/2014/main" id="{B7DA8DF3-119E-4AE3-A7FE-0FB5C12E5580}"/>
               </a:ext>
             </a:extLst>
           </p:cNvPr>
@@ -32496,7 +32494,7 @@
           <p:cNvPr id="48" name="">
             <a:extLst xmlns:a="http://schemas.openxmlformats.org/drawingml/2006/main">
               <a:ext uri="{FF2B5EF4-FFF2-40B4-BE49-F238E27FC236}">
-                <a16:creationId xmlns:a16="http://schemas.microsoft.com/office/drawing/2014/main" id="{A15BFC27-514E-4F87-800E-DE01AFA839AD}"/>
+                <a16:creationId xmlns:a16="http://schemas.microsoft.com/office/drawing/2014/main" id="{6BA71C7C-C791-4F5C-B67E-0C2BAAC4032D}"/>
               </a:ext>
             </a:extLst>
           </p:cNvPr>
@@ -32560,7 +32558,7 @@
           <p:cNvPr id="49" name="">
             <a:extLst xmlns:a="http://schemas.openxmlformats.org/drawingml/2006/main">
               <a:ext uri="{FF2B5EF4-FFF2-40B4-BE49-F238E27FC236}">
-                <a16:creationId xmlns:a16="http://schemas.microsoft.com/office/drawing/2014/main" id="{F9DF96E5-0337-45C4-9132-B86B7CAE32FD}"/>
+                <a16:creationId xmlns:a16="http://schemas.microsoft.com/office/drawing/2014/main" id="{F13DFB32-062F-401C-967A-00124998CDEE}"/>
               </a:ext>
             </a:extLst>
           </p:cNvPr>
@@ -32624,7 +32622,7 @@
           <p:cNvPr id="50" name="">
             <a:extLst xmlns:a="http://schemas.openxmlformats.org/drawingml/2006/main">
               <a:ext uri="{FF2B5EF4-FFF2-40B4-BE49-F238E27FC236}">
-                <a16:creationId xmlns:a16="http://schemas.microsoft.com/office/drawing/2014/main" id="{775DD9C4-D060-4D87-931A-DA979185F030}"/>
+                <a16:creationId xmlns:a16="http://schemas.microsoft.com/office/drawing/2014/main" id="{5225805B-5571-4D2B-94DB-13E1F84F11B4}"/>
               </a:ext>
             </a:extLst>
           </p:cNvPr>
@@ -32686,7 +32684,7 @@
     </p:spTree>
     <p:extLst>
       <p:ext uri="{BB962C8B-B14F-4D97-AF65-F5344CB8AC3E}">
-        <p14:creationId xmlns:p14="http://schemas.microsoft.com/office/powerpoint/2010/main" val="1343410812"/>
+        <p14:creationId xmlns:p14="http://schemas.microsoft.com/office/powerpoint/2010/main" val="184867900"/>
       </p:ext>
     </p:extLst>
   </p:cSld>
